--- a/W5/3. W5S3 final/W5S3.pptx
+++ b/W5/3. W5S3 final/W5S3.pptx
@@ -5,7 +5,7 @@
     <p:sldMasterId id="2147483648" r:id="rId1"/>
   </p:sldMasterIdLst>
   <p:notesMasterIdLst>
-    <p:notesMasterId r:id="rId52"/>
+    <p:notesMasterId r:id="rId54"/>
   </p:notesMasterIdLst>
   <p:sldIdLst>
     <p:sldId id="591" r:id="rId2"/>
@@ -33,31 +33,33 @@
     <p:sldId id="658" r:id="rId24"/>
     <p:sldId id="659" r:id="rId25"/>
     <p:sldId id="660" r:id="rId26"/>
-    <p:sldId id="661" r:id="rId27"/>
-    <p:sldId id="668" r:id="rId28"/>
-    <p:sldId id="663" r:id="rId29"/>
-    <p:sldId id="670" r:id="rId30"/>
-    <p:sldId id="671" r:id="rId31"/>
-    <p:sldId id="672" r:id="rId32"/>
-    <p:sldId id="673" r:id="rId33"/>
-    <p:sldId id="674" r:id="rId34"/>
-    <p:sldId id="675" r:id="rId35"/>
-    <p:sldId id="677" r:id="rId36"/>
-    <p:sldId id="678" r:id="rId37"/>
-    <p:sldId id="679" r:id="rId38"/>
-    <p:sldId id="680" r:id="rId39"/>
-    <p:sldId id="681" r:id="rId40"/>
-    <p:sldId id="682" r:id="rId41"/>
-    <p:sldId id="683" r:id="rId42"/>
-    <p:sldId id="684" r:id="rId43"/>
-    <p:sldId id="685" r:id="rId44"/>
-    <p:sldId id="687" r:id="rId45"/>
-    <p:sldId id="686" r:id="rId46"/>
-    <p:sldId id="346" r:id="rId47"/>
-    <p:sldId id="267" r:id="rId48"/>
-    <p:sldId id="571" r:id="rId49"/>
-    <p:sldId id="620" r:id="rId50"/>
-    <p:sldId id="266" r:id="rId51"/>
+    <p:sldId id="759" r:id="rId27"/>
+    <p:sldId id="760" r:id="rId28"/>
+    <p:sldId id="661" r:id="rId29"/>
+    <p:sldId id="668" r:id="rId30"/>
+    <p:sldId id="663" r:id="rId31"/>
+    <p:sldId id="670" r:id="rId32"/>
+    <p:sldId id="671" r:id="rId33"/>
+    <p:sldId id="672" r:id="rId34"/>
+    <p:sldId id="673" r:id="rId35"/>
+    <p:sldId id="674" r:id="rId36"/>
+    <p:sldId id="675" r:id="rId37"/>
+    <p:sldId id="677" r:id="rId38"/>
+    <p:sldId id="678" r:id="rId39"/>
+    <p:sldId id="679" r:id="rId40"/>
+    <p:sldId id="680" r:id="rId41"/>
+    <p:sldId id="681" r:id="rId42"/>
+    <p:sldId id="682" r:id="rId43"/>
+    <p:sldId id="683" r:id="rId44"/>
+    <p:sldId id="684" r:id="rId45"/>
+    <p:sldId id="685" r:id="rId46"/>
+    <p:sldId id="687" r:id="rId47"/>
+    <p:sldId id="686" r:id="rId48"/>
+    <p:sldId id="346" r:id="rId49"/>
+    <p:sldId id="267" r:id="rId50"/>
+    <p:sldId id="571" r:id="rId51"/>
+    <p:sldId id="620" r:id="rId52"/>
+    <p:sldId id="266" r:id="rId53"/>
   </p:sldIdLst>
   <p:sldSz cx="12192000" cy="6858000"/>
   <p:notesSz cx="6858000" cy="9144000"/>
@@ -202,6 +204,8 @@
             <p14:sldId id="658"/>
             <p14:sldId id="659"/>
             <p14:sldId id="660"/>
+            <p14:sldId id="759"/>
+            <p14:sldId id="760"/>
             <p14:sldId id="661"/>
             <p14:sldId id="668"/>
             <p14:sldId id="663"/>
@@ -253,7 +257,7 @@
 <file path=ppt/revisionInfo.xml><?xml version="1.0" encoding="utf-8"?>
 <p1510:revInfo xmlns:a="http://schemas.openxmlformats.org/drawingml/2006/main" xmlns:r="http://schemas.openxmlformats.org/officeDocument/2006/relationships" xmlns:p1510="http://schemas.microsoft.com/office/powerpoint/2015/10/main">
   <p1510:revLst>
-    <p1510:client id="{5197ED3C-DCC8-4AB0-997C-E9CE750DC8BB}" v="118" dt="2025-02-24T06:27:46.621"/>
+    <p1510:client id="{19C4EA2F-6A6A-458C-B5A5-6E7E01AE3821}" v="3" dt="2025-12-18T22:50:51.562"/>
   </p1510:revLst>
 </p1510:revInfo>
 </file>
@@ -261,832 +265,65 @@
 <file path=ppt/changesInfos/changesInfo1.xml><?xml version="1.0" encoding="utf-8"?>
 <pc:chgInfo xmlns:a="http://schemas.openxmlformats.org/drawingml/2006/main" xmlns:r="http://schemas.openxmlformats.org/officeDocument/2006/relationships" xmlns:ac="http://schemas.microsoft.com/office/drawing/2013/main/command" xmlns:pc="http://schemas.microsoft.com/office/powerpoint/2013/main/command">
   <pc:docChgLst>
-    <pc:chgData name="Matthieu De Mari" userId="dfb708c9-d8dc-439f-9a3b-c772bf4a311c" providerId="ADAL" clId="{23B9794A-8B54-47C4-827C-820833DFB1C7}"/>
-    <pc:docChg chg="undo custSel addSld delSld modSld modSection">
-      <pc:chgData name="Matthieu De Mari" userId="dfb708c9-d8dc-439f-9a3b-c772bf4a311c" providerId="ADAL" clId="{23B9794A-8B54-47C4-827C-820833DFB1C7}" dt="2023-07-06T07:50:52.378" v="526" actId="20577"/>
-      <pc:docMkLst>
-        <pc:docMk/>
-      </pc:docMkLst>
-      <pc:sldChg chg="add del">
-        <pc:chgData name="Matthieu De Mari" userId="dfb708c9-d8dc-439f-9a3b-c772bf4a311c" providerId="ADAL" clId="{23B9794A-8B54-47C4-827C-820833DFB1C7}" dt="2023-07-06T07:37:48.191" v="1"/>
-        <pc:sldMkLst>
-          <pc:docMk/>
-          <pc:sldMk cId="3425780644" sldId="407"/>
-        </pc:sldMkLst>
-      </pc:sldChg>
-      <pc:sldChg chg="modSp mod">
-        <pc:chgData name="Matthieu De Mari" userId="dfb708c9-d8dc-439f-9a3b-c772bf4a311c" providerId="ADAL" clId="{23B9794A-8B54-47C4-827C-820833DFB1C7}" dt="2023-07-06T07:39:00.733" v="3" actId="113"/>
-        <pc:sldMkLst>
-          <pc:docMk/>
-          <pc:sldMk cId="4011461575" sldId="602"/>
-        </pc:sldMkLst>
-      </pc:sldChg>
-      <pc:sldChg chg="modSp mod">
-        <pc:chgData name="Matthieu De Mari" userId="dfb708c9-d8dc-439f-9a3b-c772bf4a311c" providerId="ADAL" clId="{23B9794A-8B54-47C4-827C-820833DFB1C7}" dt="2023-07-06T07:38:54.219" v="2" actId="20577"/>
-        <pc:sldMkLst>
-          <pc:docMk/>
-          <pc:sldMk cId="1888637577" sldId="604"/>
-        </pc:sldMkLst>
-      </pc:sldChg>
-      <pc:sldChg chg="modSp mod">
-        <pc:chgData name="Matthieu De Mari" userId="dfb708c9-d8dc-439f-9a3b-c772bf4a311c" providerId="ADAL" clId="{23B9794A-8B54-47C4-827C-820833DFB1C7}" dt="2023-07-06T07:40:04.273" v="8" actId="20577"/>
-        <pc:sldMkLst>
-          <pc:docMk/>
-          <pc:sldMk cId="1726322392" sldId="614"/>
-        </pc:sldMkLst>
-      </pc:sldChg>
-      <pc:sldChg chg="modSp mod">
-        <pc:chgData name="Matthieu De Mari" userId="dfb708c9-d8dc-439f-9a3b-c772bf4a311c" providerId="ADAL" clId="{23B9794A-8B54-47C4-827C-820833DFB1C7}" dt="2023-07-06T07:39:39.074" v="7" actId="20577"/>
-        <pc:sldMkLst>
-          <pc:docMk/>
-          <pc:sldMk cId="3403244392" sldId="630"/>
-        </pc:sldMkLst>
-      </pc:sldChg>
-      <pc:sldChg chg="modSp">
-        <pc:chgData name="Matthieu De Mari" userId="dfb708c9-d8dc-439f-9a3b-c772bf4a311c" providerId="ADAL" clId="{23B9794A-8B54-47C4-827C-820833DFB1C7}" dt="2023-07-06T07:39:21.759" v="6" actId="20577"/>
-        <pc:sldMkLst>
-          <pc:docMk/>
-          <pc:sldMk cId="956888542" sldId="635"/>
-        </pc:sldMkLst>
-      </pc:sldChg>
-      <pc:sldChg chg="modSp mod">
-        <pc:chgData name="Matthieu De Mari" userId="dfb708c9-d8dc-439f-9a3b-c772bf4a311c" providerId="ADAL" clId="{23B9794A-8B54-47C4-827C-820833DFB1C7}" dt="2023-07-06T07:47:41.037" v="412" actId="1076"/>
-        <pc:sldMkLst>
-          <pc:docMk/>
-          <pc:sldMk cId="1731878414" sldId="637"/>
-        </pc:sldMkLst>
-      </pc:sldChg>
-      <pc:sldChg chg="modSp mod">
-        <pc:chgData name="Matthieu De Mari" userId="dfb708c9-d8dc-439f-9a3b-c772bf4a311c" providerId="ADAL" clId="{23B9794A-8B54-47C4-827C-820833DFB1C7}" dt="2023-07-06T07:43:21.117" v="73" actId="20577"/>
-        <pc:sldMkLst>
-          <pc:docMk/>
-          <pc:sldMk cId="3527748531" sldId="640"/>
-        </pc:sldMkLst>
-      </pc:sldChg>
-      <pc:sldChg chg="modSp mod">
-        <pc:chgData name="Matthieu De Mari" userId="dfb708c9-d8dc-439f-9a3b-c772bf4a311c" providerId="ADAL" clId="{23B9794A-8B54-47C4-827C-820833DFB1C7}" dt="2023-07-06T07:43:26.735" v="74"/>
-        <pc:sldMkLst>
-          <pc:docMk/>
-          <pc:sldMk cId="3298110552" sldId="641"/>
-        </pc:sldMkLst>
-      </pc:sldChg>
-      <pc:sldChg chg="modSp mod">
-        <pc:chgData name="Matthieu De Mari" userId="dfb708c9-d8dc-439f-9a3b-c772bf4a311c" providerId="ADAL" clId="{23B9794A-8B54-47C4-827C-820833DFB1C7}" dt="2023-07-06T07:43:34.977" v="76"/>
-        <pc:sldMkLst>
-          <pc:docMk/>
-          <pc:sldMk cId="4241197121" sldId="642"/>
-        </pc:sldMkLst>
-      </pc:sldChg>
-      <pc:sldChg chg="modSp mod">
-        <pc:chgData name="Matthieu De Mari" userId="dfb708c9-d8dc-439f-9a3b-c772bf4a311c" providerId="ADAL" clId="{23B9794A-8B54-47C4-827C-820833DFB1C7}" dt="2023-07-06T07:43:44.055" v="86" actId="20577"/>
-        <pc:sldMkLst>
-          <pc:docMk/>
-          <pc:sldMk cId="715032396" sldId="644"/>
-        </pc:sldMkLst>
-      </pc:sldChg>
-      <pc:sldChg chg="modSp mod">
-        <pc:chgData name="Matthieu De Mari" userId="dfb708c9-d8dc-439f-9a3b-c772bf4a311c" providerId="ADAL" clId="{23B9794A-8B54-47C4-827C-820833DFB1C7}" dt="2023-07-06T07:43:47.391" v="89" actId="27636"/>
-        <pc:sldMkLst>
-          <pc:docMk/>
-          <pc:sldMk cId="1850403076" sldId="645"/>
-        </pc:sldMkLst>
-      </pc:sldChg>
-      <pc:sldChg chg="modSp mod">
-        <pc:chgData name="Matthieu De Mari" userId="dfb708c9-d8dc-439f-9a3b-c772bf4a311c" providerId="ADAL" clId="{23B9794A-8B54-47C4-827C-820833DFB1C7}" dt="2023-07-06T07:45:08.301" v="238" actId="20577"/>
-        <pc:sldMkLst>
-          <pc:docMk/>
-          <pc:sldMk cId="2404237809" sldId="648"/>
-        </pc:sldMkLst>
-      </pc:sldChg>
-      <pc:sldChg chg="addSp delSp modSp mod">
-        <pc:chgData name="Matthieu De Mari" userId="dfb708c9-d8dc-439f-9a3b-c772bf4a311c" providerId="ADAL" clId="{23B9794A-8B54-47C4-827C-820833DFB1C7}" dt="2023-07-06T07:46:33.431" v="363" actId="20577"/>
-        <pc:sldMkLst>
-          <pc:docMk/>
-          <pc:sldMk cId="1952442680" sldId="649"/>
-        </pc:sldMkLst>
-      </pc:sldChg>
-      <pc:sldChg chg="modSp mod">
-        <pc:chgData name="Matthieu De Mari" userId="dfb708c9-d8dc-439f-9a3b-c772bf4a311c" providerId="ADAL" clId="{23B9794A-8B54-47C4-827C-820833DFB1C7}" dt="2023-07-06T07:46:06.177" v="315" actId="1036"/>
-        <pc:sldMkLst>
-          <pc:docMk/>
-          <pc:sldMk cId="3215884619" sldId="650"/>
-        </pc:sldMkLst>
-      </pc:sldChg>
-      <pc:sldChg chg="modSp mod">
-        <pc:chgData name="Matthieu De Mari" userId="dfb708c9-d8dc-439f-9a3b-c772bf4a311c" providerId="ADAL" clId="{23B9794A-8B54-47C4-827C-820833DFB1C7}" dt="2023-07-06T07:43:30.731" v="75"/>
-        <pc:sldMkLst>
-          <pc:docMk/>
-          <pc:sldMk cId="2595195584" sldId="651"/>
-        </pc:sldMkLst>
-      </pc:sldChg>
-      <pc:sldChg chg="modSp mod">
-        <pc:chgData name="Matthieu De Mari" userId="dfb708c9-d8dc-439f-9a3b-c772bf4a311c" providerId="ADAL" clId="{23B9794A-8B54-47C4-827C-820833DFB1C7}" dt="2023-07-06T07:43:49.967" v="91" actId="27636"/>
-        <pc:sldMkLst>
-          <pc:docMk/>
-          <pc:sldMk cId="773672680" sldId="652"/>
-        </pc:sldMkLst>
-      </pc:sldChg>
-      <pc:sldChg chg="modSp mod">
-        <pc:chgData name="Matthieu De Mari" userId="dfb708c9-d8dc-439f-9a3b-c772bf4a311c" providerId="ADAL" clId="{23B9794A-8B54-47C4-827C-820833DFB1C7}" dt="2023-07-06T07:47:09.385" v="402" actId="20577"/>
-        <pc:sldMkLst>
-          <pc:docMk/>
-          <pc:sldMk cId="855321949" sldId="653"/>
-        </pc:sldMkLst>
-      </pc:sldChg>
-      <pc:sldChg chg="modSp mod">
-        <pc:chgData name="Matthieu De Mari" userId="dfb708c9-d8dc-439f-9a3b-c772bf4a311c" providerId="ADAL" clId="{23B9794A-8B54-47C4-827C-820833DFB1C7}" dt="2023-07-06T07:47:20.277" v="408" actId="20577"/>
-        <pc:sldMkLst>
-          <pc:docMk/>
-          <pc:sldMk cId="2099660639" sldId="654"/>
-        </pc:sldMkLst>
-      </pc:sldChg>
-      <pc:sldChg chg="modSp">
-        <pc:chgData name="Matthieu De Mari" userId="dfb708c9-d8dc-439f-9a3b-c772bf4a311c" providerId="ADAL" clId="{23B9794A-8B54-47C4-827C-820833DFB1C7}" dt="2023-07-06T07:48:47.006" v="460" actId="20577"/>
-        <pc:sldMkLst>
-          <pc:docMk/>
-          <pc:sldMk cId="2451971174" sldId="655"/>
-        </pc:sldMkLst>
-      </pc:sldChg>
-      <pc:sldChg chg="addSp delSp modSp mod">
-        <pc:chgData name="Matthieu De Mari" userId="dfb708c9-d8dc-439f-9a3b-c772bf4a311c" providerId="ADAL" clId="{23B9794A-8B54-47C4-827C-820833DFB1C7}" dt="2023-07-06T07:47:58.249" v="433" actId="1035"/>
-        <pc:sldMkLst>
-          <pc:docMk/>
-          <pc:sldMk cId="148017835" sldId="656"/>
-        </pc:sldMkLst>
-      </pc:sldChg>
-      <pc:sldChg chg="addSp delSp modSp mod">
-        <pc:chgData name="Matthieu De Mari" userId="dfb708c9-d8dc-439f-9a3b-c772bf4a311c" providerId="ADAL" clId="{23B9794A-8B54-47C4-827C-820833DFB1C7}" dt="2023-07-06T07:48:35.326" v="457" actId="1076"/>
-        <pc:sldMkLst>
-          <pc:docMk/>
-          <pc:sldMk cId="1922511899" sldId="657"/>
-        </pc:sldMkLst>
-      </pc:sldChg>
-      <pc:sldChg chg="modSp mod">
-        <pc:chgData name="Matthieu De Mari" userId="dfb708c9-d8dc-439f-9a3b-c772bf4a311c" providerId="ADAL" clId="{23B9794A-8B54-47C4-827C-820833DFB1C7}" dt="2023-07-06T07:49:33.233" v="484" actId="207"/>
-        <pc:sldMkLst>
-          <pc:docMk/>
-          <pc:sldMk cId="2096824087" sldId="659"/>
-        </pc:sldMkLst>
-      </pc:sldChg>
-      <pc:sldChg chg="modSp">
-        <pc:chgData name="Matthieu De Mari" userId="dfb708c9-d8dc-439f-9a3b-c772bf4a311c" providerId="ADAL" clId="{23B9794A-8B54-47C4-827C-820833DFB1C7}" dt="2023-07-06T07:49:54.460" v="494" actId="20577"/>
-        <pc:sldMkLst>
-          <pc:docMk/>
-          <pc:sldMk cId="3023865042" sldId="660"/>
-        </pc:sldMkLst>
-      </pc:sldChg>
-      <pc:sldChg chg="modSp mod">
-        <pc:chgData name="Matthieu De Mari" userId="dfb708c9-d8dc-439f-9a3b-c772bf4a311c" providerId="ADAL" clId="{23B9794A-8B54-47C4-827C-820833DFB1C7}" dt="2023-07-06T07:50:25.358" v="514" actId="207"/>
-        <pc:sldMkLst>
-          <pc:docMk/>
-          <pc:sldMk cId="2303339168" sldId="661"/>
-        </pc:sldMkLst>
-      </pc:sldChg>
-      <pc:sldChg chg="modSp mod">
-        <pc:chgData name="Matthieu De Mari" userId="dfb708c9-d8dc-439f-9a3b-c772bf4a311c" providerId="ADAL" clId="{23B9794A-8B54-47C4-827C-820833DFB1C7}" dt="2023-07-06T07:50:52.378" v="526" actId="20577"/>
-        <pc:sldMkLst>
-          <pc:docMk/>
-          <pc:sldMk cId="365986058" sldId="663"/>
-        </pc:sldMkLst>
-      </pc:sldChg>
-      <pc:sldChg chg="add">
-        <pc:chgData name="Matthieu De Mari" userId="dfb708c9-d8dc-439f-9a3b-c772bf4a311c" providerId="ADAL" clId="{23B9794A-8B54-47C4-827C-820833DFB1C7}" dt="2023-07-06T07:37:48.191" v="1"/>
-        <pc:sldMkLst>
-          <pc:docMk/>
-          <pc:sldMk cId="2828164903" sldId="668"/>
-        </pc:sldMkLst>
-      </pc:sldChg>
-      <pc:sldChg chg="add">
-        <pc:chgData name="Matthieu De Mari" userId="dfb708c9-d8dc-439f-9a3b-c772bf4a311c" providerId="ADAL" clId="{23B9794A-8B54-47C4-827C-820833DFB1C7}" dt="2023-07-06T07:37:48.191" v="1"/>
-        <pc:sldMkLst>
-          <pc:docMk/>
-          <pc:sldMk cId="3980169169" sldId="669"/>
-        </pc:sldMkLst>
-      </pc:sldChg>
-      <pc:sldChg chg="add">
-        <pc:chgData name="Matthieu De Mari" userId="dfb708c9-d8dc-439f-9a3b-c772bf4a311c" providerId="ADAL" clId="{23B9794A-8B54-47C4-827C-820833DFB1C7}" dt="2023-07-06T07:37:48.191" v="1"/>
-        <pc:sldMkLst>
-          <pc:docMk/>
-          <pc:sldMk cId="4122990920" sldId="670"/>
-        </pc:sldMkLst>
-      </pc:sldChg>
-    </pc:docChg>
-  </pc:docChgLst>
-  <pc:docChgLst>
-    <pc:chgData name="Matthieu De Mari" userId="dfb708c9-d8dc-439f-9a3b-c772bf4a311c" providerId="ADAL" clId="{5197ED3C-DCC8-4AB0-997C-E9CE750DC8BB}"/>
-    <pc:docChg chg="undo custSel addSld delSld modSld addSection modSection">
-      <pc:chgData name="Matthieu De Mari" userId="dfb708c9-d8dc-439f-9a3b-c772bf4a311c" providerId="ADAL" clId="{5197ED3C-DCC8-4AB0-997C-E9CE750DC8BB}" dt="2025-03-05T05:07:00.309" v="2152" actId="20577"/>
+    <pc:chgData name="Matthieu De Mari" userId="dfb708c9-d8dc-439f-9a3b-c772bf4a311c" providerId="ADAL" clId="{81E9B007-0C2C-493E-9B93-55A62C9C1F12}"/>
+    <pc:docChg chg="custSel addSld delSld modSld modSection">
+      <pc:chgData name="Matthieu De Mari" userId="dfb708c9-d8dc-439f-9a3b-c772bf4a311c" providerId="ADAL" clId="{81E9B007-0C2C-493E-9B93-55A62C9C1F12}" dt="2025-12-18T22:50:51.562" v="75"/>
       <pc:docMkLst>
         <pc:docMk/>
       </pc:docMkLst>
       <pc:sldChg chg="modSp mod">
-        <pc:chgData name="Matthieu De Mari" userId="dfb708c9-d8dc-439f-9a3b-c772bf4a311c" providerId="ADAL" clId="{5197ED3C-DCC8-4AB0-997C-E9CE750DC8BB}" dt="2025-03-05T05:06:57.745" v="2150" actId="20577"/>
-        <pc:sldMkLst>
-          <pc:docMk/>
-          <pc:sldMk cId="3442501962" sldId="257"/>
-        </pc:sldMkLst>
-        <pc:spChg chg="mod">
-          <ac:chgData name="Matthieu De Mari" userId="dfb708c9-d8dc-439f-9a3b-c772bf4a311c" providerId="ADAL" clId="{5197ED3C-DCC8-4AB0-997C-E9CE750DC8BB}" dt="2025-03-05T05:06:57.745" v="2150" actId="20577"/>
-          <ac:spMkLst>
-            <pc:docMk/>
-            <pc:sldMk cId="3442501962" sldId="257"/>
-            <ac:spMk id="2" creationId="{49D40417-A4D3-4CE8-96E7-708E2439AE7B}"/>
-          </ac:spMkLst>
-        </pc:spChg>
-      </pc:sldChg>
-      <pc:sldChg chg="modSp mod">
-        <pc:chgData name="Matthieu De Mari" userId="dfb708c9-d8dc-439f-9a3b-c772bf4a311c" providerId="ADAL" clId="{5197ED3C-DCC8-4AB0-997C-E9CE750DC8BB}" dt="2025-02-24T06:30:46.243" v="2019" actId="20577"/>
-        <pc:sldMkLst>
-          <pc:docMk/>
-          <pc:sldMk cId="1036081419" sldId="346"/>
-        </pc:sldMkLst>
-        <pc:spChg chg="mod">
-          <ac:chgData name="Matthieu De Mari" userId="dfb708c9-d8dc-439f-9a3b-c772bf4a311c" providerId="ADAL" clId="{5197ED3C-DCC8-4AB0-997C-E9CE750DC8BB}" dt="2025-02-24T06:30:46.243" v="2019" actId="20577"/>
-          <ac:spMkLst>
-            <pc:docMk/>
-            <pc:sldMk cId="1036081419" sldId="346"/>
-            <ac:spMk id="2" creationId="{11A08BA8-9DEC-4471-8590-434E8D8BB4A0}"/>
-          </ac:spMkLst>
-        </pc:spChg>
-        <pc:spChg chg="mod">
-          <ac:chgData name="Matthieu De Mari" userId="dfb708c9-d8dc-439f-9a3b-c772bf4a311c" providerId="ADAL" clId="{5197ED3C-DCC8-4AB0-997C-E9CE750DC8BB}" dt="2025-02-24T06:30:42.852" v="2017" actId="20577"/>
-          <ac:spMkLst>
-            <pc:docMk/>
-            <pc:sldMk cId="1036081419" sldId="346"/>
-            <ac:spMk id="4" creationId="{7E420A50-DCDA-4FEF-986F-775F53063E3A}"/>
-          </ac:spMkLst>
-        </pc:spChg>
-      </pc:sldChg>
-      <pc:sldChg chg="modSp mod">
-        <pc:chgData name="Matthieu De Mari" userId="dfb708c9-d8dc-439f-9a3b-c772bf4a311c" providerId="ADAL" clId="{5197ED3C-DCC8-4AB0-997C-E9CE750DC8BB}" dt="2025-03-05T05:06:54.616" v="2148" actId="20577"/>
-        <pc:sldMkLst>
-          <pc:docMk/>
-          <pc:sldMk cId="37425589" sldId="591"/>
-        </pc:sldMkLst>
-        <pc:spChg chg="mod">
-          <ac:chgData name="Matthieu De Mari" userId="dfb708c9-d8dc-439f-9a3b-c772bf4a311c" providerId="ADAL" clId="{5197ED3C-DCC8-4AB0-997C-E9CE750DC8BB}" dt="2025-03-05T05:06:54.616" v="2148" actId="20577"/>
-          <ac:spMkLst>
-            <pc:docMk/>
-            <pc:sldMk cId="37425589" sldId="591"/>
-            <ac:spMk id="2" creationId="{080CEB46-CC16-4D19-8C2C-AEE9471D8168}"/>
-          </ac:spMkLst>
-        </pc:spChg>
-      </pc:sldChg>
-      <pc:sldChg chg="modSp mod">
-        <pc:chgData name="Matthieu De Mari" userId="dfb708c9-d8dc-439f-9a3b-c772bf4a311c" providerId="ADAL" clId="{5197ED3C-DCC8-4AB0-997C-E9CE750DC8BB}" dt="2025-02-24T05:28:28.417" v="87" actId="20577"/>
-        <pc:sldMkLst>
-          <pc:docMk/>
-          <pc:sldMk cId="1487822837" sldId="643"/>
-        </pc:sldMkLst>
-        <pc:spChg chg="mod">
-          <ac:chgData name="Matthieu De Mari" userId="dfb708c9-d8dc-439f-9a3b-c772bf4a311c" providerId="ADAL" clId="{5197ED3C-DCC8-4AB0-997C-E9CE750DC8BB}" dt="2025-02-24T05:28:28.417" v="87" actId="20577"/>
-          <ac:spMkLst>
-            <pc:docMk/>
-            <pc:sldMk cId="1487822837" sldId="643"/>
-            <ac:spMk id="3" creationId="{888778C6-A734-C28B-5DEA-DC9DD854857F}"/>
-          </ac:spMkLst>
-        </pc:spChg>
-      </pc:sldChg>
-      <pc:sldChg chg="modSp mod">
-        <pc:chgData name="Matthieu De Mari" userId="dfb708c9-d8dc-439f-9a3b-c772bf4a311c" providerId="ADAL" clId="{5197ED3C-DCC8-4AB0-997C-E9CE750DC8BB}" dt="2025-02-24T05:28:36.609" v="88" actId="20577"/>
-        <pc:sldMkLst>
-          <pc:docMk/>
-          <pc:sldMk cId="715032396" sldId="644"/>
-        </pc:sldMkLst>
-        <pc:spChg chg="mod">
-          <ac:chgData name="Matthieu De Mari" userId="dfb708c9-d8dc-439f-9a3b-c772bf4a311c" providerId="ADAL" clId="{5197ED3C-DCC8-4AB0-997C-E9CE750DC8BB}" dt="2025-02-24T05:28:36.609" v="88" actId="20577"/>
-          <ac:spMkLst>
-            <pc:docMk/>
-            <pc:sldMk cId="715032396" sldId="644"/>
-            <ac:spMk id="3" creationId="{888778C6-A734-C28B-5DEA-DC9DD854857F}"/>
-          </ac:spMkLst>
-        </pc:spChg>
-      </pc:sldChg>
-      <pc:sldChg chg="modSp mod">
-        <pc:chgData name="Matthieu De Mari" userId="dfb708c9-d8dc-439f-9a3b-c772bf4a311c" providerId="ADAL" clId="{5197ED3C-DCC8-4AB0-997C-E9CE750DC8BB}" dt="2025-02-24T05:28:47.745" v="90" actId="20577"/>
-        <pc:sldMkLst>
-          <pc:docMk/>
-          <pc:sldMk cId="1850403076" sldId="645"/>
-        </pc:sldMkLst>
-        <pc:spChg chg="mod">
-          <ac:chgData name="Matthieu De Mari" userId="dfb708c9-d8dc-439f-9a3b-c772bf4a311c" providerId="ADAL" clId="{5197ED3C-DCC8-4AB0-997C-E9CE750DC8BB}" dt="2025-02-24T05:28:47.745" v="90" actId="20577"/>
-          <ac:spMkLst>
-            <pc:docMk/>
-            <pc:sldMk cId="1850403076" sldId="645"/>
-            <ac:spMk id="8" creationId="{C8043E35-81CF-0BE0-D05A-8D49BC91AEE2}"/>
-          </ac:spMkLst>
-        </pc:spChg>
-      </pc:sldChg>
-      <pc:sldChg chg="modSp mod">
-        <pc:chgData name="Matthieu De Mari" userId="dfb708c9-d8dc-439f-9a3b-c772bf4a311c" providerId="ADAL" clId="{5197ED3C-DCC8-4AB0-997C-E9CE750DC8BB}" dt="2025-02-24T05:29:37.060" v="110"/>
-        <pc:sldMkLst>
-          <pc:docMk/>
-          <pc:sldMk cId="1952442680" sldId="649"/>
-        </pc:sldMkLst>
-        <pc:spChg chg="mod">
-          <ac:chgData name="Matthieu De Mari" userId="dfb708c9-d8dc-439f-9a3b-c772bf4a311c" providerId="ADAL" clId="{5197ED3C-DCC8-4AB0-997C-E9CE750DC8BB}" dt="2025-02-24T05:29:37.060" v="110"/>
-          <ac:spMkLst>
-            <pc:docMk/>
-            <pc:sldMk cId="1952442680" sldId="649"/>
-            <ac:spMk id="3" creationId="{888778C6-A734-C28B-5DEA-DC9DD854857F}"/>
-          </ac:spMkLst>
-        </pc:spChg>
-      </pc:sldChg>
-      <pc:sldChg chg="addSp delSp modSp mod">
-        <pc:chgData name="Matthieu De Mari" userId="dfb708c9-d8dc-439f-9a3b-c772bf4a311c" providerId="ADAL" clId="{5197ED3C-DCC8-4AB0-997C-E9CE750DC8BB}" dt="2025-02-24T05:31:28.017" v="379"/>
-        <pc:sldMkLst>
-          <pc:docMk/>
-          <pc:sldMk cId="3215884619" sldId="650"/>
-        </pc:sldMkLst>
-        <pc:spChg chg="mod">
-          <ac:chgData name="Matthieu De Mari" userId="dfb708c9-d8dc-439f-9a3b-c772bf4a311c" providerId="ADAL" clId="{5197ED3C-DCC8-4AB0-997C-E9CE750DC8BB}" dt="2025-02-24T05:31:23.524" v="378" actId="207"/>
-          <ac:spMkLst>
-            <pc:docMk/>
-            <pc:sldMk cId="3215884619" sldId="650"/>
-            <ac:spMk id="3" creationId="{888778C6-A734-C28B-5DEA-DC9DD854857F}"/>
-          </ac:spMkLst>
-        </pc:spChg>
-        <pc:picChg chg="add mod">
-          <ac:chgData name="Matthieu De Mari" userId="dfb708c9-d8dc-439f-9a3b-c772bf4a311c" providerId="ADAL" clId="{5197ED3C-DCC8-4AB0-997C-E9CE750DC8BB}" dt="2025-02-24T05:31:28.017" v="379"/>
-          <ac:picMkLst>
-            <pc:docMk/>
-            <pc:sldMk cId="3215884619" sldId="650"/>
-            <ac:picMk id="10" creationId="{477A314B-3B5E-BC9E-EAF6-7C03D596883E}"/>
-          </ac:picMkLst>
-        </pc:picChg>
-        <pc:picChg chg="add mod">
-          <ac:chgData name="Matthieu De Mari" userId="dfb708c9-d8dc-439f-9a3b-c772bf4a311c" providerId="ADAL" clId="{5197ED3C-DCC8-4AB0-997C-E9CE750DC8BB}" dt="2025-02-24T05:31:28.017" v="379"/>
-          <ac:picMkLst>
-            <pc:docMk/>
-            <pc:sldMk cId="3215884619" sldId="650"/>
-            <ac:picMk id="11" creationId="{9BC5268A-74A2-7528-FE9C-55113D6E0BEC}"/>
-          </ac:picMkLst>
-        </pc:picChg>
-      </pc:sldChg>
-      <pc:sldChg chg="addSp delSp modSp mod">
-        <pc:chgData name="Matthieu De Mari" userId="dfb708c9-d8dc-439f-9a3b-c772bf4a311c" providerId="ADAL" clId="{5197ED3C-DCC8-4AB0-997C-E9CE750DC8BB}" dt="2025-02-24T05:27:40.050" v="13" actId="1076"/>
-        <pc:sldMkLst>
-          <pc:docMk/>
-          <pc:sldMk cId="2595195584" sldId="651"/>
-        </pc:sldMkLst>
-        <pc:picChg chg="add mod modCrop">
-          <ac:chgData name="Matthieu De Mari" userId="dfb708c9-d8dc-439f-9a3b-c772bf4a311c" providerId="ADAL" clId="{5197ED3C-DCC8-4AB0-997C-E9CE750DC8BB}" dt="2025-02-24T05:27:40.050" v="13" actId="1076"/>
-          <ac:picMkLst>
-            <pc:docMk/>
-            <pc:sldMk cId="2595195584" sldId="651"/>
-            <ac:picMk id="7" creationId="{44BCBBCB-15FF-D5D5-C2CA-C6257D29557A}"/>
-          </ac:picMkLst>
-        </pc:picChg>
-      </pc:sldChg>
-      <pc:sldChg chg="modSp mod">
-        <pc:chgData name="Matthieu De Mari" userId="dfb708c9-d8dc-439f-9a3b-c772bf4a311c" providerId="ADAL" clId="{5197ED3C-DCC8-4AB0-997C-E9CE750DC8BB}" dt="2025-02-24T05:28:59.155" v="91" actId="20577"/>
-        <pc:sldMkLst>
-          <pc:docMk/>
-          <pc:sldMk cId="773672680" sldId="652"/>
-        </pc:sldMkLst>
-        <pc:spChg chg="mod">
-          <ac:chgData name="Matthieu De Mari" userId="dfb708c9-d8dc-439f-9a3b-c772bf4a311c" providerId="ADAL" clId="{5197ED3C-DCC8-4AB0-997C-E9CE750DC8BB}" dt="2025-02-24T05:28:59.155" v="91" actId="20577"/>
-          <ac:spMkLst>
-            <pc:docMk/>
-            <pc:sldMk cId="773672680" sldId="652"/>
-            <ac:spMk id="6" creationId="{A36CCB85-C859-E807-3137-D5CE4B60C077}"/>
-          </ac:spMkLst>
-        </pc:spChg>
-      </pc:sldChg>
-      <pc:sldChg chg="modSp mod">
-        <pc:chgData name="Matthieu De Mari" userId="dfb708c9-d8dc-439f-9a3b-c772bf4a311c" providerId="ADAL" clId="{5197ED3C-DCC8-4AB0-997C-E9CE750DC8BB}" dt="2025-02-24T05:32:02.511" v="387" actId="20577"/>
-        <pc:sldMkLst>
-          <pc:docMk/>
-          <pc:sldMk cId="855321949" sldId="653"/>
-        </pc:sldMkLst>
-        <pc:spChg chg="mod">
-          <ac:chgData name="Matthieu De Mari" userId="dfb708c9-d8dc-439f-9a3b-c772bf4a311c" providerId="ADAL" clId="{5197ED3C-DCC8-4AB0-997C-E9CE750DC8BB}" dt="2025-02-24T05:32:02.511" v="387" actId="20577"/>
-          <ac:spMkLst>
-            <pc:docMk/>
-            <pc:sldMk cId="855321949" sldId="653"/>
-            <ac:spMk id="10" creationId="{DF43DEC1-2394-FFBD-0B62-7A8838760AD4}"/>
-          </ac:spMkLst>
-        </pc:spChg>
-      </pc:sldChg>
-      <pc:sldChg chg="modSp">
-        <pc:chgData name="Matthieu De Mari" userId="dfb708c9-d8dc-439f-9a3b-c772bf4a311c" providerId="ADAL" clId="{5197ED3C-DCC8-4AB0-997C-E9CE750DC8BB}" dt="2025-02-24T05:32:23.553" v="397" actId="20577"/>
-        <pc:sldMkLst>
-          <pc:docMk/>
-          <pc:sldMk cId="2451971174" sldId="655"/>
-        </pc:sldMkLst>
-        <pc:spChg chg="mod">
-          <ac:chgData name="Matthieu De Mari" userId="dfb708c9-d8dc-439f-9a3b-c772bf4a311c" providerId="ADAL" clId="{5197ED3C-DCC8-4AB0-997C-E9CE750DC8BB}" dt="2025-02-24T05:32:23.553" v="397" actId="20577"/>
-          <ac:spMkLst>
-            <pc:docMk/>
-            <pc:sldMk cId="2451971174" sldId="655"/>
-            <ac:spMk id="3" creationId="{A01BD820-1F4B-CA48-6D02-F8A6442E8629}"/>
-          </ac:spMkLst>
-        </pc:spChg>
-      </pc:sldChg>
-      <pc:sldChg chg="modSp mod">
-        <pc:chgData name="Matthieu De Mari" userId="dfb708c9-d8dc-439f-9a3b-c772bf4a311c" providerId="ADAL" clId="{5197ED3C-DCC8-4AB0-997C-E9CE750DC8BB}" dt="2025-02-24T05:32:35.701" v="400" actId="113"/>
+        <pc:chgData name="Matthieu De Mari" userId="dfb708c9-d8dc-439f-9a3b-c772bf4a311c" providerId="ADAL" clId="{81E9B007-0C2C-493E-9B93-55A62C9C1F12}" dt="2025-12-18T22:50:42.705" v="73" actId="20577"/>
         <pc:sldMkLst>
           <pc:docMk/>
           <pc:sldMk cId="2303339168" sldId="661"/>
         </pc:sldMkLst>
         <pc:spChg chg="mod">
-          <ac:chgData name="Matthieu De Mari" userId="dfb708c9-d8dc-439f-9a3b-c772bf4a311c" providerId="ADAL" clId="{5197ED3C-DCC8-4AB0-997C-E9CE750DC8BB}" dt="2025-02-24T05:32:35.701" v="400" actId="113"/>
+          <ac:chgData name="Matthieu De Mari" userId="dfb708c9-d8dc-439f-9a3b-c772bf4a311c" providerId="ADAL" clId="{81E9B007-0C2C-493E-9B93-55A62C9C1F12}" dt="2025-12-18T22:50:42.705" v="73" actId="20577"/>
           <ac:spMkLst>
             <pc:docMk/>
             <pc:sldMk cId="2303339168" sldId="661"/>
-            <ac:spMk id="3" creationId="{A01BD820-1F4B-CA48-6D02-F8A6442E8629}"/>
+            <ac:spMk id="2" creationId="{D4795DED-4F6A-4420-1474-79C41D9C7151}"/>
           </ac:spMkLst>
         </pc:spChg>
       </pc:sldChg>
-      <pc:sldChg chg="modSp mod">
-        <pc:chgData name="Matthieu De Mari" userId="dfb708c9-d8dc-439f-9a3b-c772bf4a311c" providerId="ADAL" clId="{5197ED3C-DCC8-4AB0-997C-E9CE750DC8BB}" dt="2025-03-05T05:07:00.309" v="2152" actId="20577"/>
-        <pc:sldMkLst>
-          <pc:docMk/>
-          <pc:sldMk cId="444206811" sldId="662"/>
-        </pc:sldMkLst>
-        <pc:spChg chg="mod">
-          <ac:chgData name="Matthieu De Mari" userId="dfb708c9-d8dc-439f-9a3b-c772bf4a311c" providerId="ADAL" clId="{5197ED3C-DCC8-4AB0-997C-E9CE750DC8BB}" dt="2025-03-05T05:07:00.309" v="2152" actId="20577"/>
-          <ac:spMkLst>
-            <pc:docMk/>
-            <pc:sldMk cId="444206811" sldId="662"/>
-            <ac:spMk id="2" creationId="{49D40417-A4D3-4CE8-96E7-708E2439AE7B}"/>
-          </ac:spMkLst>
-        </pc:spChg>
-      </pc:sldChg>
-      <pc:sldChg chg="modSp mod">
-        <pc:chgData name="Matthieu De Mari" userId="dfb708c9-d8dc-439f-9a3b-c772bf4a311c" providerId="ADAL" clId="{5197ED3C-DCC8-4AB0-997C-E9CE750DC8BB}" dt="2025-02-24T05:33:26.893" v="462" actId="20577"/>
+      <pc:sldChg chg="modSp">
+        <pc:chgData name="Matthieu De Mari" userId="dfb708c9-d8dc-439f-9a3b-c772bf4a311c" providerId="ADAL" clId="{81E9B007-0C2C-493E-9B93-55A62C9C1F12}" dt="2025-12-18T22:50:51.562" v="75"/>
         <pc:sldMkLst>
           <pc:docMk/>
           <pc:sldMk cId="365986058" sldId="663"/>
         </pc:sldMkLst>
         <pc:spChg chg="mod">
-          <ac:chgData name="Matthieu De Mari" userId="dfb708c9-d8dc-439f-9a3b-c772bf4a311c" providerId="ADAL" clId="{5197ED3C-DCC8-4AB0-997C-E9CE750DC8BB}" dt="2025-02-24T05:33:26.893" v="462" actId="20577"/>
+          <ac:chgData name="Matthieu De Mari" userId="dfb708c9-d8dc-439f-9a3b-c772bf4a311c" providerId="ADAL" clId="{81E9B007-0C2C-493E-9B93-55A62C9C1F12}" dt="2025-12-18T22:50:51.562" v="75"/>
           <ac:spMkLst>
             <pc:docMk/>
             <pc:sldMk cId="365986058" sldId="663"/>
-            <ac:spMk id="3" creationId="{A01BD820-1F4B-CA48-6D02-F8A6442E8629}"/>
+            <ac:spMk id="2" creationId="{D4795DED-4F6A-4420-1474-79C41D9C7151}"/>
+          </ac:spMkLst>
+        </pc:spChg>
+      </pc:sldChg>
+      <pc:sldChg chg="modSp">
+        <pc:chgData name="Matthieu De Mari" userId="dfb708c9-d8dc-439f-9a3b-c772bf4a311c" providerId="ADAL" clId="{81E9B007-0C2C-493E-9B93-55A62C9C1F12}" dt="2025-12-18T22:50:48.395" v="74"/>
+        <pc:sldMkLst>
+          <pc:docMk/>
+          <pc:sldMk cId="2917180269" sldId="668"/>
+        </pc:sldMkLst>
+        <pc:spChg chg="mod">
+          <ac:chgData name="Matthieu De Mari" userId="dfb708c9-d8dc-439f-9a3b-c772bf4a311c" providerId="ADAL" clId="{81E9B007-0C2C-493E-9B93-55A62C9C1F12}" dt="2025-12-18T22:50:48.395" v="74"/>
+          <ac:spMkLst>
+            <pc:docMk/>
+            <pc:sldMk cId="2917180269" sldId="668"/>
+            <ac:spMk id="2" creationId="{0A2DF297-CFA9-D6EC-0A96-19187F5C5F01}"/>
           </ac:spMkLst>
         </pc:spChg>
       </pc:sldChg>
       <pc:sldChg chg="modSp mod">
-        <pc:chgData name="Matthieu De Mari" userId="dfb708c9-d8dc-439f-9a3b-c772bf4a311c" providerId="ADAL" clId="{5197ED3C-DCC8-4AB0-997C-E9CE750DC8BB}" dt="2025-02-24T05:32:52.426" v="404" actId="1076"/>
-        <pc:sldMkLst>
-          <pc:docMk/>
-          <pc:sldMk cId="2917180269" sldId="668"/>
-        </pc:sldMkLst>
-        <pc:picChg chg="mod">
-          <ac:chgData name="Matthieu De Mari" userId="dfb708c9-d8dc-439f-9a3b-c772bf4a311c" providerId="ADAL" clId="{5197ED3C-DCC8-4AB0-997C-E9CE750DC8BB}" dt="2025-02-24T05:32:52.426" v="404" actId="1076"/>
-          <ac:picMkLst>
-            <pc:docMk/>
-            <pc:sldMk cId="2917180269" sldId="668"/>
-            <ac:picMk id="11" creationId="{D9D0A523-70C9-0F50-DEBA-6DB69D7F3F5A}"/>
-          </ac:picMkLst>
-        </pc:picChg>
-      </pc:sldChg>
-      <pc:sldChg chg="add">
-        <pc:chgData name="Matthieu De Mari" userId="dfb708c9-d8dc-439f-9a3b-c772bf4a311c" providerId="ADAL" clId="{5197ED3C-DCC8-4AB0-997C-E9CE750DC8BB}" dt="2025-02-24T05:29:41.309" v="111" actId="2890"/>
-        <pc:sldMkLst>
-          <pc:docMk/>
-          <pc:sldMk cId="1721995084" sldId="669"/>
-        </pc:sldMkLst>
-      </pc:sldChg>
-      <pc:sldChg chg="addSp delSp modSp new mod modClrScheme chgLayout">
-        <pc:chgData name="Matthieu De Mari" userId="dfb708c9-d8dc-439f-9a3b-c772bf4a311c" providerId="ADAL" clId="{5197ED3C-DCC8-4AB0-997C-E9CE750DC8BB}" dt="2025-02-24T06:12:30.347" v="780" actId="1076"/>
-        <pc:sldMkLst>
-          <pc:docMk/>
-          <pc:sldMk cId="4215618712" sldId="670"/>
-        </pc:sldMkLst>
-        <pc:spChg chg="mod ord">
-          <ac:chgData name="Matthieu De Mari" userId="dfb708c9-d8dc-439f-9a3b-c772bf4a311c" providerId="ADAL" clId="{5197ED3C-DCC8-4AB0-997C-E9CE750DC8BB}" dt="2025-02-24T06:11:31.079" v="762" actId="700"/>
-          <ac:spMkLst>
-            <pc:docMk/>
-            <pc:sldMk cId="4215618712" sldId="670"/>
-            <ac:spMk id="2" creationId="{35EBD1B2-756A-71B3-66BD-2E5AF54BD54A}"/>
-          </ac:spMkLst>
-        </pc:spChg>
-        <pc:spChg chg="add mod ord">
-          <ac:chgData name="Matthieu De Mari" userId="dfb708c9-d8dc-439f-9a3b-c772bf4a311c" providerId="ADAL" clId="{5197ED3C-DCC8-4AB0-997C-E9CE750DC8BB}" dt="2025-02-24T06:11:46.561" v="768" actId="5793"/>
-          <ac:spMkLst>
-            <pc:docMk/>
-            <pc:sldMk cId="4215618712" sldId="670"/>
-            <ac:spMk id="4" creationId="{E2005C3F-A24D-AFF7-E5B6-A348329CEB11}"/>
-          </ac:spMkLst>
-        </pc:spChg>
-        <pc:picChg chg="add mod modCrop">
-          <ac:chgData name="Matthieu De Mari" userId="dfb708c9-d8dc-439f-9a3b-c772bf4a311c" providerId="ADAL" clId="{5197ED3C-DCC8-4AB0-997C-E9CE750DC8BB}" dt="2025-02-24T06:12:30.347" v="780" actId="1076"/>
-          <ac:picMkLst>
-            <pc:docMk/>
-            <pc:sldMk cId="4215618712" sldId="670"/>
-            <ac:picMk id="7" creationId="{E79FA425-0068-E256-C4A4-A3231FF9081C}"/>
-          </ac:picMkLst>
-        </pc:picChg>
-        <pc:picChg chg="add mod modCrop">
-          <ac:chgData name="Matthieu De Mari" userId="dfb708c9-d8dc-439f-9a3b-c772bf4a311c" providerId="ADAL" clId="{5197ED3C-DCC8-4AB0-997C-E9CE750DC8BB}" dt="2025-02-24T06:12:28.974" v="779" actId="1076"/>
-          <ac:picMkLst>
-            <pc:docMk/>
-            <pc:sldMk cId="4215618712" sldId="670"/>
-            <ac:picMk id="8" creationId="{908B1465-0FAA-5322-AF6D-BC84E5567B74}"/>
-          </ac:picMkLst>
-        </pc:picChg>
-      </pc:sldChg>
-      <pc:sldChg chg="add">
-        <pc:chgData name="Matthieu De Mari" userId="dfb708c9-d8dc-439f-9a3b-c772bf4a311c" providerId="ADAL" clId="{5197ED3C-DCC8-4AB0-997C-E9CE750DC8BB}" dt="2025-02-24T06:12:34.714" v="781" actId="2890"/>
-        <pc:sldMkLst>
-          <pc:docMk/>
-          <pc:sldMk cId="3655254145" sldId="671"/>
-        </pc:sldMkLst>
-      </pc:sldChg>
-      <pc:sldChg chg="addSp delSp modSp new mod modClrScheme chgLayout">
-        <pc:chgData name="Matthieu De Mari" userId="dfb708c9-d8dc-439f-9a3b-c772bf4a311c" providerId="ADAL" clId="{5197ED3C-DCC8-4AB0-997C-E9CE750DC8BB}" dt="2025-02-27T07:07:36.559" v="2020" actId="20577"/>
-        <pc:sldMkLst>
-          <pc:docMk/>
-          <pc:sldMk cId="1549406145" sldId="672"/>
-        </pc:sldMkLst>
-        <pc:spChg chg="mod ord">
-          <ac:chgData name="Matthieu De Mari" userId="dfb708c9-d8dc-439f-9a3b-c772bf4a311c" providerId="ADAL" clId="{5197ED3C-DCC8-4AB0-997C-E9CE750DC8BB}" dt="2025-02-24T06:13:27.288" v="798" actId="700"/>
-          <ac:spMkLst>
-            <pc:docMk/>
-            <pc:sldMk cId="1549406145" sldId="672"/>
-            <ac:spMk id="2" creationId="{ED7466D4-6E95-5318-DDAF-ED2933090FBA}"/>
-          </ac:spMkLst>
-        </pc:spChg>
-        <pc:spChg chg="add mod ord">
-          <ac:chgData name="Matthieu De Mari" userId="dfb708c9-d8dc-439f-9a3b-c772bf4a311c" providerId="ADAL" clId="{5197ED3C-DCC8-4AB0-997C-E9CE750DC8BB}" dt="2025-02-27T07:07:36.559" v="2020" actId="20577"/>
-          <ac:spMkLst>
-            <pc:docMk/>
-            <pc:sldMk cId="1549406145" sldId="672"/>
-            <ac:spMk id="4" creationId="{8AB7F685-44FF-EBDE-1F93-A12F9369C0FC}"/>
-          </ac:spMkLst>
-        </pc:spChg>
-        <pc:picChg chg="add mod">
-          <ac:chgData name="Matthieu De Mari" userId="dfb708c9-d8dc-439f-9a3b-c772bf4a311c" providerId="ADAL" clId="{5197ED3C-DCC8-4AB0-997C-E9CE750DC8BB}" dt="2025-02-24T06:13:33.768" v="801" actId="1076"/>
-          <ac:picMkLst>
-            <pc:docMk/>
-            <pc:sldMk cId="1549406145" sldId="672"/>
-            <ac:picMk id="7" creationId="{A1E1895F-F49D-CD97-012D-2ADBAA2D581F}"/>
-          </ac:picMkLst>
-        </pc:picChg>
-      </pc:sldChg>
-      <pc:sldChg chg="modSp add mod">
-        <pc:chgData name="Matthieu De Mari" userId="dfb708c9-d8dc-439f-9a3b-c772bf4a311c" providerId="ADAL" clId="{5197ED3C-DCC8-4AB0-997C-E9CE750DC8BB}" dt="2025-02-24T06:15:01.952" v="886" actId="20577"/>
-        <pc:sldMkLst>
-          <pc:docMk/>
-          <pc:sldMk cId="3093812458" sldId="673"/>
-        </pc:sldMkLst>
-        <pc:spChg chg="mod">
-          <ac:chgData name="Matthieu De Mari" userId="dfb708c9-d8dc-439f-9a3b-c772bf4a311c" providerId="ADAL" clId="{5197ED3C-DCC8-4AB0-997C-E9CE750DC8BB}" dt="2025-02-24T06:15:01.952" v="886" actId="20577"/>
-          <ac:spMkLst>
-            <pc:docMk/>
-            <pc:sldMk cId="3093812458" sldId="673"/>
-            <ac:spMk id="4" creationId="{46DBCC5D-B556-9ABA-8C52-06396D3A7B71}"/>
-          </ac:spMkLst>
-        </pc:spChg>
-      </pc:sldChg>
-      <pc:sldChg chg="addSp delSp modSp add mod">
-        <pc:chgData name="Matthieu De Mari" userId="dfb708c9-d8dc-439f-9a3b-c772bf4a311c" providerId="ADAL" clId="{5197ED3C-DCC8-4AB0-997C-E9CE750DC8BB}" dt="2025-02-24T06:17:54.705" v="1052" actId="20577"/>
-        <pc:sldMkLst>
-          <pc:docMk/>
-          <pc:sldMk cId="3597148306" sldId="674"/>
-        </pc:sldMkLst>
-        <pc:spChg chg="mod">
-          <ac:chgData name="Matthieu De Mari" userId="dfb708c9-d8dc-439f-9a3b-c772bf4a311c" providerId="ADAL" clId="{5197ED3C-DCC8-4AB0-997C-E9CE750DC8BB}" dt="2025-02-24T06:17:54.705" v="1052" actId="20577"/>
-          <ac:spMkLst>
-            <pc:docMk/>
-            <pc:sldMk cId="3597148306" sldId="674"/>
-            <ac:spMk id="2" creationId="{2EEF7A1E-0AEA-2DE9-8CD4-C140B0D9F8FE}"/>
-          </ac:spMkLst>
-        </pc:spChg>
-        <pc:spChg chg="mod">
-          <ac:chgData name="Matthieu De Mari" userId="dfb708c9-d8dc-439f-9a3b-c772bf4a311c" providerId="ADAL" clId="{5197ED3C-DCC8-4AB0-997C-E9CE750DC8BB}" dt="2025-02-24T06:17:34.792" v="1045" actId="20577"/>
-          <ac:spMkLst>
-            <pc:docMk/>
-            <pc:sldMk cId="3597148306" sldId="674"/>
-            <ac:spMk id="4" creationId="{90929952-4D51-DA6A-05BC-49414C2F6E33}"/>
-          </ac:spMkLst>
-        </pc:spChg>
-        <pc:picChg chg="add mod">
-          <ac:chgData name="Matthieu De Mari" userId="dfb708c9-d8dc-439f-9a3b-c772bf4a311c" providerId="ADAL" clId="{5197ED3C-DCC8-4AB0-997C-E9CE750DC8BB}" dt="2025-02-24T06:17:15.613" v="1028" actId="1076"/>
-          <ac:picMkLst>
-            <pc:docMk/>
-            <pc:sldMk cId="3597148306" sldId="674"/>
-            <ac:picMk id="5" creationId="{F21A39C2-FFD8-CE55-1538-D0637A62DE1A}"/>
-          </ac:picMkLst>
-        </pc:picChg>
-      </pc:sldChg>
-      <pc:sldChg chg="addSp delSp modSp add mod modClrScheme chgLayout">
-        <pc:chgData name="Matthieu De Mari" userId="dfb708c9-d8dc-439f-9a3b-c772bf4a311c" providerId="ADAL" clId="{5197ED3C-DCC8-4AB0-997C-E9CE750DC8BB}" dt="2025-02-24T06:18:54.588" v="1120" actId="20577"/>
-        <pc:sldMkLst>
-          <pc:docMk/>
-          <pc:sldMk cId="2082294507" sldId="675"/>
-        </pc:sldMkLst>
-        <pc:spChg chg="mod ord">
-          <ac:chgData name="Matthieu De Mari" userId="dfb708c9-d8dc-439f-9a3b-c772bf4a311c" providerId="ADAL" clId="{5197ED3C-DCC8-4AB0-997C-E9CE750DC8BB}" dt="2025-02-24T06:18:37.388" v="1111" actId="700"/>
-          <ac:spMkLst>
-            <pc:docMk/>
-            <pc:sldMk cId="2082294507" sldId="675"/>
-            <ac:spMk id="2" creationId="{A3876512-4FF3-B2BA-36DF-D3DBE28C6323}"/>
-          </ac:spMkLst>
-        </pc:spChg>
-        <pc:spChg chg="add mod ord">
-          <ac:chgData name="Matthieu De Mari" userId="dfb708c9-d8dc-439f-9a3b-c772bf4a311c" providerId="ADAL" clId="{5197ED3C-DCC8-4AB0-997C-E9CE750DC8BB}" dt="2025-02-24T06:18:54.588" v="1120" actId="20577"/>
-          <ac:spMkLst>
-            <pc:docMk/>
-            <pc:sldMk cId="2082294507" sldId="675"/>
-            <ac:spMk id="9" creationId="{C4511816-DF24-BF78-1892-2AC49F5B16AF}"/>
-          </ac:spMkLst>
-        </pc:spChg>
-      </pc:sldChg>
-      <pc:sldChg chg="delSp add del mod">
-        <pc:chgData name="Matthieu De Mari" userId="dfb708c9-d8dc-439f-9a3b-c772bf4a311c" providerId="ADAL" clId="{5197ED3C-DCC8-4AB0-997C-E9CE750DC8BB}" dt="2025-02-24T06:19:13.282" v="1127" actId="47"/>
-        <pc:sldMkLst>
-          <pc:docMk/>
-          <pc:sldMk cId="1388572697" sldId="676"/>
-        </pc:sldMkLst>
-      </pc:sldChg>
-      <pc:sldChg chg="addSp modSp add mod">
-        <pc:chgData name="Matthieu De Mari" userId="dfb708c9-d8dc-439f-9a3b-c772bf4a311c" providerId="ADAL" clId="{5197ED3C-DCC8-4AB0-997C-E9CE750DC8BB}" dt="2025-02-24T06:19:10.823" v="1126" actId="1076"/>
-        <pc:sldMkLst>
-          <pc:docMk/>
-          <pc:sldMk cId="1816410796" sldId="677"/>
-        </pc:sldMkLst>
-        <pc:picChg chg="add mod">
-          <ac:chgData name="Matthieu De Mari" userId="dfb708c9-d8dc-439f-9a3b-c772bf4a311c" providerId="ADAL" clId="{5197ED3C-DCC8-4AB0-997C-E9CE750DC8BB}" dt="2025-02-24T06:19:10.823" v="1126" actId="1076"/>
-          <ac:picMkLst>
-            <pc:docMk/>
-            <pc:sldMk cId="1816410796" sldId="677"/>
-            <ac:picMk id="6" creationId="{F524C180-CC64-8E09-2180-660ACF18B953}"/>
-          </ac:picMkLst>
-        </pc:picChg>
-      </pc:sldChg>
-      <pc:sldChg chg="addSp delSp modSp add mod chgLayout">
-        <pc:chgData name="Matthieu De Mari" userId="dfb708c9-d8dc-439f-9a3b-c772bf4a311c" providerId="ADAL" clId="{5197ED3C-DCC8-4AB0-997C-E9CE750DC8BB}" dt="2025-02-24T06:20:35.806" v="1192" actId="20577"/>
-        <pc:sldMkLst>
-          <pc:docMk/>
-          <pc:sldMk cId="2436149446" sldId="678"/>
-        </pc:sldMkLst>
-        <pc:spChg chg="mod ord">
-          <ac:chgData name="Matthieu De Mari" userId="dfb708c9-d8dc-439f-9a3b-c772bf4a311c" providerId="ADAL" clId="{5197ED3C-DCC8-4AB0-997C-E9CE750DC8BB}" dt="2025-02-24T06:20:18.053" v="1164" actId="700"/>
-          <ac:spMkLst>
-            <pc:docMk/>
-            <pc:sldMk cId="2436149446" sldId="678"/>
-            <ac:spMk id="2" creationId="{39CD91C6-686B-305F-3554-D65791C0C1D7}"/>
-          </ac:spMkLst>
-        </pc:spChg>
-        <pc:spChg chg="add mod ord">
-          <ac:chgData name="Matthieu De Mari" userId="dfb708c9-d8dc-439f-9a3b-c772bf4a311c" providerId="ADAL" clId="{5197ED3C-DCC8-4AB0-997C-E9CE750DC8BB}" dt="2025-02-24T06:20:35.806" v="1192" actId="20577"/>
-          <ac:spMkLst>
-            <pc:docMk/>
-            <pc:sldMk cId="2436149446" sldId="678"/>
-            <ac:spMk id="11" creationId="{6CC37131-372C-9378-F4D1-F5D0DE77D446}"/>
-          </ac:spMkLst>
-        </pc:spChg>
-        <pc:picChg chg="add mod">
-          <ac:chgData name="Matthieu De Mari" userId="dfb708c9-d8dc-439f-9a3b-c772bf4a311c" providerId="ADAL" clId="{5197ED3C-DCC8-4AB0-997C-E9CE750DC8BB}" dt="2025-02-24T06:20:14.899" v="1163" actId="1076"/>
-          <ac:picMkLst>
-            <pc:docMk/>
-            <pc:sldMk cId="2436149446" sldId="678"/>
-            <ac:picMk id="7" creationId="{19F203EA-A254-B14C-3987-885281D04B1B}"/>
-          </ac:picMkLst>
-        </pc:picChg>
-        <pc:picChg chg="add mod">
-          <ac:chgData name="Matthieu De Mari" userId="dfb708c9-d8dc-439f-9a3b-c772bf4a311c" providerId="ADAL" clId="{5197ED3C-DCC8-4AB0-997C-E9CE750DC8BB}" dt="2025-02-24T06:20:08.696" v="1160" actId="1076"/>
-          <ac:picMkLst>
-            <pc:docMk/>
-            <pc:sldMk cId="2436149446" sldId="678"/>
-            <ac:picMk id="10" creationId="{72A9B51D-6B97-1B44-BB0C-6FC6F5BC1A22}"/>
-          </ac:picMkLst>
-        </pc:picChg>
-      </pc:sldChg>
-      <pc:sldChg chg="addSp delSp modSp add mod">
-        <pc:chgData name="Matthieu De Mari" userId="dfb708c9-d8dc-439f-9a3b-c772bf4a311c" providerId="ADAL" clId="{5197ED3C-DCC8-4AB0-997C-E9CE750DC8BB}" dt="2025-02-24T06:21:23.685" v="1263" actId="1076"/>
-        <pc:sldMkLst>
-          <pc:docMk/>
-          <pc:sldMk cId="2301186879" sldId="679"/>
-        </pc:sldMkLst>
-        <pc:spChg chg="mod">
-          <ac:chgData name="Matthieu De Mari" userId="dfb708c9-d8dc-439f-9a3b-c772bf4a311c" providerId="ADAL" clId="{5197ED3C-DCC8-4AB0-997C-E9CE750DC8BB}" dt="2025-02-24T06:21:09.362" v="1256" actId="27636"/>
-          <ac:spMkLst>
-            <pc:docMk/>
-            <pc:sldMk cId="2301186879" sldId="679"/>
-            <ac:spMk id="11" creationId="{0C8300E0-E2AF-BFC8-06C6-A152F1B1C7CD}"/>
-          </ac:spMkLst>
-        </pc:spChg>
-        <pc:picChg chg="add mod">
-          <ac:chgData name="Matthieu De Mari" userId="dfb708c9-d8dc-439f-9a3b-c772bf4a311c" providerId="ADAL" clId="{5197ED3C-DCC8-4AB0-997C-E9CE750DC8BB}" dt="2025-02-24T06:21:23.685" v="1263" actId="1076"/>
-          <ac:picMkLst>
-            <pc:docMk/>
-            <pc:sldMk cId="2301186879" sldId="679"/>
-            <ac:picMk id="4" creationId="{5683BD5A-5A13-AFFB-9C4E-E3732E2D08EE}"/>
-          </ac:picMkLst>
-        </pc:picChg>
-      </pc:sldChg>
-      <pc:sldChg chg="addSp delSp modSp add mod modClrScheme chgLayout">
-        <pc:chgData name="Matthieu De Mari" userId="dfb708c9-d8dc-439f-9a3b-c772bf4a311c" providerId="ADAL" clId="{5197ED3C-DCC8-4AB0-997C-E9CE750DC8BB}" dt="2025-02-24T06:22:56.676" v="1396" actId="20577"/>
-        <pc:sldMkLst>
-          <pc:docMk/>
-          <pc:sldMk cId="1073034095" sldId="680"/>
-        </pc:sldMkLst>
-        <pc:spChg chg="mod ord">
-          <ac:chgData name="Matthieu De Mari" userId="dfb708c9-d8dc-439f-9a3b-c772bf4a311c" providerId="ADAL" clId="{5197ED3C-DCC8-4AB0-997C-E9CE750DC8BB}" dt="2025-02-24T06:22:44.778" v="1388" actId="700"/>
-          <ac:spMkLst>
-            <pc:docMk/>
-            <pc:sldMk cId="1073034095" sldId="680"/>
-            <ac:spMk id="2" creationId="{FB4A56BC-BCB7-E644-B413-15D4534D20B0}"/>
-          </ac:spMkLst>
-        </pc:spChg>
-        <pc:spChg chg="mod ord">
-          <ac:chgData name="Matthieu De Mari" userId="dfb708c9-d8dc-439f-9a3b-c772bf4a311c" providerId="ADAL" clId="{5197ED3C-DCC8-4AB0-997C-E9CE750DC8BB}" dt="2025-02-24T06:22:56.676" v="1396" actId="20577"/>
-          <ac:spMkLst>
-            <pc:docMk/>
-            <pc:sldMk cId="1073034095" sldId="680"/>
-            <ac:spMk id="11" creationId="{9DD280C9-975E-5A19-BD0E-82BCD70408D7}"/>
-          </ac:spMkLst>
-        </pc:spChg>
-      </pc:sldChg>
-      <pc:sldChg chg="modSp add mod">
-        <pc:chgData name="Matthieu De Mari" userId="dfb708c9-d8dc-439f-9a3b-c772bf4a311c" providerId="ADAL" clId="{5197ED3C-DCC8-4AB0-997C-E9CE750DC8BB}" dt="2025-02-24T06:24:51.123" v="1634" actId="14100"/>
-        <pc:sldMkLst>
-          <pc:docMk/>
-          <pc:sldMk cId="3631118124" sldId="681"/>
-        </pc:sldMkLst>
-        <pc:spChg chg="mod">
-          <ac:chgData name="Matthieu De Mari" userId="dfb708c9-d8dc-439f-9a3b-c772bf4a311c" providerId="ADAL" clId="{5197ED3C-DCC8-4AB0-997C-E9CE750DC8BB}" dt="2025-02-24T06:24:51.123" v="1634" actId="14100"/>
-          <ac:spMkLst>
-            <pc:docMk/>
-            <pc:sldMk cId="3631118124" sldId="681"/>
-            <ac:spMk id="11" creationId="{22FD8C2A-4D9E-19C6-3A45-C5F6CE906B7F}"/>
-          </ac:spMkLst>
-        </pc:spChg>
-      </pc:sldChg>
-      <pc:sldChg chg="add">
-        <pc:chgData name="Matthieu De Mari" userId="dfb708c9-d8dc-439f-9a3b-c772bf4a311c" providerId="ADAL" clId="{5197ED3C-DCC8-4AB0-997C-E9CE750DC8BB}" dt="2025-02-24T06:24:56.184" v="1635" actId="2890"/>
-        <pc:sldMkLst>
-          <pc:docMk/>
-          <pc:sldMk cId="3667012225" sldId="682"/>
-        </pc:sldMkLst>
-      </pc:sldChg>
-      <pc:sldChg chg="addSp modSp add mod">
-        <pc:chgData name="Matthieu De Mari" userId="dfb708c9-d8dc-439f-9a3b-c772bf4a311c" providerId="ADAL" clId="{5197ED3C-DCC8-4AB0-997C-E9CE750DC8BB}" dt="2025-02-24T06:26:15.108" v="1765" actId="20577"/>
-        <pc:sldMkLst>
-          <pc:docMk/>
-          <pc:sldMk cId="1472158619" sldId="683"/>
-        </pc:sldMkLst>
-        <pc:spChg chg="add mod">
-          <ac:chgData name="Matthieu De Mari" userId="dfb708c9-d8dc-439f-9a3b-c772bf4a311c" providerId="ADAL" clId="{5197ED3C-DCC8-4AB0-997C-E9CE750DC8BB}" dt="2025-02-24T06:26:01.387" v="1732" actId="693"/>
-          <ac:spMkLst>
-            <pc:docMk/>
-            <pc:sldMk cId="1472158619" sldId="683"/>
-            <ac:spMk id="5" creationId="{866897D9-76C3-B7C5-691C-EFB1F2E8CFF3}"/>
-          </ac:spMkLst>
-        </pc:spChg>
-        <pc:spChg chg="mod">
-          <ac:chgData name="Matthieu De Mari" userId="dfb708c9-d8dc-439f-9a3b-c772bf4a311c" providerId="ADAL" clId="{5197ED3C-DCC8-4AB0-997C-E9CE750DC8BB}" dt="2025-02-24T06:26:15.108" v="1765" actId="20577"/>
-          <ac:spMkLst>
-            <pc:docMk/>
-            <pc:sldMk cId="1472158619" sldId="683"/>
-            <ac:spMk id="11" creationId="{B039561D-5EB5-646C-17B6-1110D336BF42}"/>
-          </ac:spMkLst>
-        </pc:spChg>
-        <pc:picChg chg="add mod">
-          <ac:chgData name="Matthieu De Mari" userId="dfb708c9-d8dc-439f-9a3b-c772bf4a311c" providerId="ADAL" clId="{5197ED3C-DCC8-4AB0-997C-E9CE750DC8BB}" dt="2025-02-24T06:25:40.757" v="1727" actId="1076"/>
-          <ac:picMkLst>
-            <pc:docMk/>
-            <pc:sldMk cId="1472158619" sldId="683"/>
-            <ac:picMk id="4" creationId="{66A61D80-8389-CA0F-0EAB-53E963AD461F}"/>
-          </ac:picMkLst>
-        </pc:picChg>
-      </pc:sldChg>
-      <pc:sldChg chg="addSp delSp modSp new mod modClrScheme chgLayout">
-        <pc:chgData name="Matthieu De Mari" userId="dfb708c9-d8dc-439f-9a3b-c772bf4a311c" providerId="ADAL" clId="{5197ED3C-DCC8-4AB0-997C-E9CE750DC8BB}" dt="2025-02-24T06:27:27.462" v="1820" actId="27636"/>
-        <pc:sldMkLst>
-          <pc:docMk/>
-          <pc:sldMk cId="2825895480" sldId="684"/>
-        </pc:sldMkLst>
-        <pc:spChg chg="mod ord">
-          <ac:chgData name="Matthieu De Mari" userId="dfb708c9-d8dc-439f-9a3b-c772bf4a311c" providerId="ADAL" clId="{5197ED3C-DCC8-4AB0-997C-E9CE750DC8BB}" dt="2025-02-24T06:27:03.720" v="1794" actId="700"/>
-          <ac:spMkLst>
-            <pc:docMk/>
-            <pc:sldMk cId="2825895480" sldId="684"/>
-            <ac:spMk id="2" creationId="{AB1F027B-E667-F81F-438F-722D0EC0FCAB}"/>
-          </ac:spMkLst>
-        </pc:spChg>
-        <pc:spChg chg="add mod ord">
-          <ac:chgData name="Matthieu De Mari" userId="dfb708c9-d8dc-439f-9a3b-c772bf4a311c" providerId="ADAL" clId="{5197ED3C-DCC8-4AB0-997C-E9CE750DC8BB}" dt="2025-02-24T06:27:27.462" v="1820" actId="27636"/>
-          <ac:spMkLst>
-            <pc:docMk/>
-            <pc:sldMk cId="2825895480" sldId="684"/>
-            <ac:spMk id="5" creationId="{79254503-79C6-3FA5-2689-1942E9670572}"/>
-          </ac:spMkLst>
-        </pc:spChg>
-      </pc:sldChg>
-      <pc:sldChg chg="addSp modSp add mod">
-        <pc:chgData name="Matthieu De Mari" userId="dfb708c9-d8dc-439f-9a3b-c772bf4a311c" providerId="ADAL" clId="{5197ED3C-DCC8-4AB0-997C-E9CE750DC8BB}" dt="2025-03-05T05:05:27.499" v="2027" actId="27636"/>
+        <pc:chgData name="Matthieu De Mari" userId="dfb708c9-d8dc-439f-9a3b-c772bf4a311c" providerId="ADAL" clId="{81E9B007-0C2C-493E-9B93-55A62C9C1F12}" dt="2025-12-18T22:47:35.494" v="3" actId="20577"/>
         <pc:sldMkLst>
           <pc:docMk/>
           <pc:sldMk cId="1870844389" sldId="685"/>
         </pc:sldMkLst>
         <pc:spChg chg="mod">
-          <ac:chgData name="Matthieu De Mari" userId="dfb708c9-d8dc-439f-9a3b-c772bf4a311c" providerId="ADAL" clId="{5197ED3C-DCC8-4AB0-997C-E9CE750DC8BB}" dt="2025-03-05T05:05:27.499" v="2027" actId="27636"/>
+          <ac:chgData name="Matthieu De Mari" userId="dfb708c9-d8dc-439f-9a3b-c772bf4a311c" providerId="ADAL" clId="{81E9B007-0C2C-493E-9B93-55A62C9C1F12}" dt="2025-12-18T22:47:35.494" v="3" actId="20577"/>
           <ac:spMkLst>
             <pc:docMk/>
             <pc:sldMk cId="1870844389" sldId="685"/>
@@ -1094,2881 +331,57 @@
           </ac:spMkLst>
         </pc:spChg>
       </pc:sldChg>
-      <pc:sldChg chg="modSp add mod">
-        <pc:chgData name="Matthieu De Mari" userId="dfb708c9-d8dc-439f-9a3b-c772bf4a311c" providerId="ADAL" clId="{5197ED3C-DCC8-4AB0-997C-E9CE750DC8BB}" dt="2025-03-05T05:06:21.092" v="2146" actId="20577"/>
+      <pc:sldChg chg="new del">
+        <pc:chgData name="Matthieu De Mari" userId="dfb708c9-d8dc-439f-9a3b-c772bf4a311c" providerId="ADAL" clId="{81E9B007-0C2C-493E-9B93-55A62C9C1F12}" dt="2025-12-18T22:49:34.859" v="6" actId="47"/>
         <pc:sldMkLst>
           <pc:docMk/>
-          <pc:sldMk cId="3443179150" sldId="686"/>
+          <pc:sldMk cId="2958871225" sldId="688"/>
+        </pc:sldMkLst>
+      </pc:sldChg>
+      <pc:sldChg chg="delSp modSp add mod">
+        <pc:chgData name="Matthieu De Mari" userId="dfb708c9-d8dc-439f-9a3b-c772bf4a311c" providerId="ADAL" clId="{81E9B007-0C2C-493E-9B93-55A62C9C1F12}" dt="2025-12-18T22:49:59.394" v="49" actId="20577"/>
+        <pc:sldMkLst>
+          <pc:docMk/>
+          <pc:sldMk cId="1940866884" sldId="759"/>
         </pc:sldMkLst>
         <pc:spChg chg="mod">
-          <ac:chgData name="Matthieu De Mari" userId="dfb708c9-d8dc-439f-9a3b-c772bf4a311c" providerId="ADAL" clId="{5197ED3C-DCC8-4AB0-997C-E9CE750DC8BB}" dt="2025-03-05T05:06:21.092" v="2146" actId="20577"/>
+          <ac:chgData name="Matthieu De Mari" userId="dfb708c9-d8dc-439f-9a3b-c772bf4a311c" providerId="ADAL" clId="{81E9B007-0C2C-493E-9B93-55A62C9C1F12}" dt="2025-12-18T22:49:59.394" v="49" actId="20577"/>
           <ac:spMkLst>
             <pc:docMk/>
-            <pc:sldMk cId="3443179150" sldId="686"/>
-            <ac:spMk id="5" creationId="{617E1A87-8AFC-8F60-1CE6-4D43AF6DB8F6}"/>
+            <pc:sldMk cId="1940866884" sldId="759"/>
+            <ac:spMk id="2" creationId="{DF43E1B4-C323-B73D-1BA2-A75F6B822FC5}"/>
           </ac:spMkLst>
         </pc:spChg>
+        <pc:spChg chg="del mod">
+          <ac:chgData name="Matthieu De Mari" userId="dfb708c9-d8dc-439f-9a3b-c772bf4a311c" providerId="ADAL" clId="{81E9B007-0C2C-493E-9B93-55A62C9C1F12}" dt="2025-12-18T22:49:44.897" v="8" actId="478"/>
+          <ac:spMkLst>
+            <pc:docMk/>
+            <pc:sldMk cId="1940866884" sldId="759"/>
+            <ac:spMk id="5" creationId="{766F9784-432A-65D7-F960-AA7B79BD2265}"/>
+          </ac:spMkLst>
+        </pc:spChg>
+        <pc:picChg chg="mod">
+          <ac:chgData name="Matthieu De Mari" userId="dfb708c9-d8dc-439f-9a3b-c772bf4a311c" providerId="ADAL" clId="{81E9B007-0C2C-493E-9B93-55A62C9C1F12}" dt="2025-12-18T22:49:50.149" v="10" actId="1076"/>
+          <ac:picMkLst>
+            <pc:docMk/>
+            <pc:sldMk cId="1940866884" sldId="759"/>
+            <ac:picMk id="8" creationId="{EA9FEC9B-B3BB-0334-DD84-ADD7B3433685}"/>
+          </ac:picMkLst>
+        </pc:picChg>
+        <pc:picChg chg="mod">
+          <ac:chgData name="Matthieu De Mari" userId="dfb708c9-d8dc-439f-9a3b-c772bf4a311c" providerId="ADAL" clId="{81E9B007-0C2C-493E-9B93-55A62C9C1F12}" dt="2025-12-18T22:49:47.470" v="9" actId="1076"/>
+          <ac:picMkLst>
+            <pc:docMk/>
+            <pc:sldMk cId="1940866884" sldId="759"/>
+            <ac:picMk id="10" creationId="{1BA9865F-4034-26E7-9E6E-4DDB9312337C}"/>
+          </ac:picMkLst>
+        </pc:picChg>
       </pc:sldChg>
-      <pc:sldChg chg="modSp add mod">
-        <pc:chgData name="Matthieu De Mari" userId="dfb708c9-d8dc-439f-9a3b-c772bf4a311c" providerId="ADAL" clId="{5197ED3C-DCC8-4AB0-997C-E9CE750DC8BB}" dt="2025-03-05T05:05:47.945" v="2068" actId="20577"/>
+      <pc:sldChg chg="add">
+        <pc:chgData name="Matthieu De Mari" userId="dfb708c9-d8dc-439f-9a3b-c772bf4a311c" providerId="ADAL" clId="{81E9B007-0C2C-493E-9B93-55A62C9C1F12}" dt="2025-12-18T22:49:28.624" v="5"/>
         <pc:sldMkLst>
           <pc:docMk/>
-          <pc:sldMk cId="2883133594" sldId="687"/>
-        </pc:sldMkLst>
-        <pc:spChg chg="mod">
-          <ac:chgData name="Matthieu De Mari" userId="dfb708c9-d8dc-439f-9a3b-c772bf4a311c" providerId="ADAL" clId="{5197ED3C-DCC8-4AB0-997C-E9CE750DC8BB}" dt="2025-03-05T05:05:47.945" v="2068" actId="20577"/>
-          <ac:spMkLst>
-            <pc:docMk/>
-            <pc:sldMk cId="2883133594" sldId="687"/>
-            <ac:spMk id="5" creationId="{723BFE67-CCC1-DCD3-7046-266554E31EFD}"/>
-          </ac:spMkLst>
-        </pc:spChg>
-      </pc:sldChg>
-    </pc:docChg>
-  </pc:docChgLst>
-  <pc:docChgLst>
-    <pc:chgData name="Matthieu De Mari" userId="dfb708c9-d8dc-439f-9a3b-c772bf4a311c" providerId="ADAL" clId="{D45F76D7-EA17-40C1-8E70-073C7285C046}"/>
-    <pc:docChg chg="delSld modSld delSection modSection">
-      <pc:chgData name="Matthieu De Mari" userId="dfb708c9-d8dc-439f-9a3b-c772bf4a311c" providerId="ADAL" clId="{D45F76D7-EA17-40C1-8E70-073C7285C046}" dt="2024-03-05T09:27:19.949" v="6" actId="47"/>
-      <pc:docMkLst>
-        <pc:docMk/>
-      </pc:docMkLst>
-      <pc:sldChg chg="del">
-        <pc:chgData name="Matthieu De Mari" userId="dfb708c9-d8dc-439f-9a3b-c772bf4a311c" providerId="ADAL" clId="{D45F76D7-EA17-40C1-8E70-073C7285C046}" dt="2024-03-05T09:27:09.066" v="4" actId="47"/>
-        <pc:sldMkLst>
-          <pc:docMk/>
-          <pc:sldMk cId="1300324164" sldId="408"/>
-        </pc:sldMkLst>
-      </pc:sldChg>
-      <pc:sldChg chg="del">
-        <pc:chgData name="Matthieu De Mari" userId="dfb708c9-d8dc-439f-9a3b-c772bf4a311c" providerId="ADAL" clId="{D45F76D7-EA17-40C1-8E70-073C7285C046}" dt="2024-03-05T09:27:07.476" v="3" actId="47"/>
-        <pc:sldMkLst>
-          <pc:docMk/>
-          <pc:sldMk cId="3793163593" sldId="410"/>
-        </pc:sldMkLst>
-      </pc:sldChg>
-      <pc:sldChg chg="del">
-        <pc:chgData name="Matthieu De Mari" userId="dfb708c9-d8dc-439f-9a3b-c772bf4a311c" providerId="ADAL" clId="{D45F76D7-EA17-40C1-8E70-073C7285C046}" dt="2024-03-05T09:27:03.228" v="1" actId="47"/>
-        <pc:sldMkLst>
-          <pc:docMk/>
-          <pc:sldMk cId="1038252774" sldId="590"/>
-        </pc:sldMkLst>
-      </pc:sldChg>
-      <pc:sldChg chg="del">
-        <pc:chgData name="Matthieu De Mari" userId="dfb708c9-d8dc-439f-9a3b-c772bf4a311c" providerId="ADAL" clId="{D45F76D7-EA17-40C1-8E70-073C7285C046}" dt="2024-03-05T09:27:03.228" v="1" actId="47"/>
-        <pc:sldMkLst>
-          <pc:docMk/>
-          <pc:sldMk cId="3688488777" sldId="592"/>
-        </pc:sldMkLst>
-      </pc:sldChg>
-      <pc:sldChg chg="del">
-        <pc:chgData name="Matthieu De Mari" userId="dfb708c9-d8dc-439f-9a3b-c772bf4a311c" providerId="ADAL" clId="{D45F76D7-EA17-40C1-8E70-073C7285C046}" dt="2024-03-05T09:27:03.228" v="1" actId="47"/>
-        <pc:sldMkLst>
-          <pc:docMk/>
-          <pc:sldMk cId="3362761059" sldId="593"/>
-        </pc:sldMkLst>
-      </pc:sldChg>
-      <pc:sldChg chg="del">
-        <pc:chgData name="Matthieu De Mari" userId="dfb708c9-d8dc-439f-9a3b-c772bf4a311c" providerId="ADAL" clId="{D45F76D7-EA17-40C1-8E70-073C7285C046}" dt="2024-03-05T09:27:03.228" v="1" actId="47"/>
-        <pc:sldMkLst>
-          <pc:docMk/>
-          <pc:sldMk cId="239607028" sldId="594"/>
-        </pc:sldMkLst>
-      </pc:sldChg>
-      <pc:sldChg chg="del">
-        <pc:chgData name="Matthieu De Mari" userId="dfb708c9-d8dc-439f-9a3b-c772bf4a311c" providerId="ADAL" clId="{D45F76D7-EA17-40C1-8E70-073C7285C046}" dt="2024-03-05T09:27:03.228" v="1" actId="47"/>
-        <pc:sldMkLst>
-          <pc:docMk/>
-          <pc:sldMk cId="3681758499" sldId="595"/>
-        </pc:sldMkLst>
-      </pc:sldChg>
-      <pc:sldChg chg="del">
-        <pc:chgData name="Matthieu De Mari" userId="dfb708c9-d8dc-439f-9a3b-c772bf4a311c" providerId="ADAL" clId="{D45F76D7-EA17-40C1-8E70-073C7285C046}" dt="2024-03-05T09:27:03.228" v="1" actId="47"/>
-        <pc:sldMkLst>
-          <pc:docMk/>
-          <pc:sldMk cId="2646292586" sldId="598"/>
-        </pc:sldMkLst>
-      </pc:sldChg>
-      <pc:sldChg chg="del">
-        <pc:chgData name="Matthieu De Mari" userId="dfb708c9-d8dc-439f-9a3b-c772bf4a311c" providerId="ADAL" clId="{D45F76D7-EA17-40C1-8E70-073C7285C046}" dt="2024-03-05T09:27:03.228" v="1" actId="47"/>
-        <pc:sldMkLst>
-          <pc:docMk/>
-          <pc:sldMk cId="1390758074" sldId="599"/>
-        </pc:sldMkLst>
-      </pc:sldChg>
-      <pc:sldChg chg="del">
-        <pc:chgData name="Matthieu De Mari" userId="dfb708c9-d8dc-439f-9a3b-c772bf4a311c" providerId="ADAL" clId="{D45F76D7-EA17-40C1-8E70-073C7285C046}" dt="2024-03-05T09:27:04.609" v="2" actId="47"/>
-        <pc:sldMkLst>
-          <pc:docMk/>
-          <pc:sldMk cId="3499753351" sldId="600"/>
-        </pc:sldMkLst>
-      </pc:sldChg>
-      <pc:sldChg chg="del">
-        <pc:chgData name="Matthieu De Mari" userId="dfb708c9-d8dc-439f-9a3b-c772bf4a311c" providerId="ADAL" clId="{D45F76D7-EA17-40C1-8E70-073C7285C046}" dt="2024-03-05T09:27:04.609" v="2" actId="47"/>
-        <pc:sldMkLst>
-          <pc:docMk/>
-          <pc:sldMk cId="1913740079" sldId="601"/>
-        </pc:sldMkLst>
-      </pc:sldChg>
-      <pc:sldChg chg="del">
-        <pc:chgData name="Matthieu De Mari" userId="dfb708c9-d8dc-439f-9a3b-c772bf4a311c" providerId="ADAL" clId="{D45F76D7-EA17-40C1-8E70-073C7285C046}" dt="2024-03-05T09:27:04.609" v="2" actId="47"/>
-        <pc:sldMkLst>
-          <pc:docMk/>
-          <pc:sldMk cId="4011461575" sldId="602"/>
-        </pc:sldMkLst>
-      </pc:sldChg>
-      <pc:sldChg chg="del">
-        <pc:chgData name="Matthieu De Mari" userId="dfb708c9-d8dc-439f-9a3b-c772bf4a311c" providerId="ADAL" clId="{D45F76D7-EA17-40C1-8E70-073C7285C046}" dt="2024-03-05T09:27:04.609" v="2" actId="47"/>
-        <pc:sldMkLst>
-          <pc:docMk/>
-          <pc:sldMk cId="2445909842" sldId="603"/>
-        </pc:sldMkLst>
-      </pc:sldChg>
-      <pc:sldChg chg="del">
-        <pc:chgData name="Matthieu De Mari" userId="dfb708c9-d8dc-439f-9a3b-c772bf4a311c" providerId="ADAL" clId="{D45F76D7-EA17-40C1-8E70-073C7285C046}" dt="2024-03-05T09:27:04.609" v="2" actId="47"/>
-        <pc:sldMkLst>
-          <pc:docMk/>
-          <pc:sldMk cId="1888637577" sldId="604"/>
-        </pc:sldMkLst>
-      </pc:sldChg>
-      <pc:sldChg chg="del">
-        <pc:chgData name="Matthieu De Mari" userId="dfb708c9-d8dc-439f-9a3b-c772bf4a311c" providerId="ADAL" clId="{D45F76D7-EA17-40C1-8E70-073C7285C046}" dt="2024-03-05T09:27:09.066" v="4" actId="47"/>
-        <pc:sldMkLst>
-          <pc:docMk/>
-          <pc:sldMk cId="3313007867" sldId="605"/>
-        </pc:sldMkLst>
-      </pc:sldChg>
-      <pc:sldChg chg="del">
-        <pc:chgData name="Matthieu De Mari" userId="dfb708c9-d8dc-439f-9a3b-c772bf4a311c" providerId="ADAL" clId="{D45F76D7-EA17-40C1-8E70-073C7285C046}" dt="2024-03-05T09:27:09.066" v="4" actId="47"/>
-        <pc:sldMkLst>
-          <pc:docMk/>
-          <pc:sldMk cId="544744450" sldId="606"/>
-        </pc:sldMkLst>
-      </pc:sldChg>
-      <pc:sldChg chg="del">
-        <pc:chgData name="Matthieu De Mari" userId="dfb708c9-d8dc-439f-9a3b-c772bf4a311c" providerId="ADAL" clId="{D45F76D7-EA17-40C1-8E70-073C7285C046}" dt="2024-03-05T09:27:09.066" v="4" actId="47"/>
-        <pc:sldMkLst>
-          <pc:docMk/>
-          <pc:sldMk cId="2835508014" sldId="607"/>
-        </pc:sldMkLst>
-      </pc:sldChg>
-      <pc:sldChg chg="del">
-        <pc:chgData name="Matthieu De Mari" userId="dfb708c9-d8dc-439f-9a3b-c772bf4a311c" providerId="ADAL" clId="{D45F76D7-EA17-40C1-8E70-073C7285C046}" dt="2024-03-05T09:27:09.066" v="4" actId="47"/>
-        <pc:sldMkLst>
-          <pc:docMk/>
-          <pc:sldMk cId="3494463352" sldId="608"/>
-        </pc:sldMkLst>
-      </pc:sldChg>
-      <pc:sldChg chg="del">
-        <pc:chgData name="Matthieu De Mari" userId="dfb708c9-d8dc-439f-9a3b-c772bf4a311c" providerId="ADAL" clId="{D45F76D7-EA17-40C1-8E70-073C7285C046}" dt="2024-03-05T09:27:09.066" v="4" actId="47"/>
-        <pc:sldMkLst>
-          <pc:docMk/>
-          <pc:sldMk cId="1274089717" sldId="609"/>
-        </pc:sldMkLst>
-      </pc:sldChg>
-      <pc:sldChg chg="del">
-        <pc:chgData name="Matthieu De Mari" userId="dfb708c9-d8dc-439f-9a3b-c772bf4a311c" providerId="ADAL" clId="{D45F76D7-EA17-40C1-8E70-073C7285C046}" dt="2024-03-05T09:27:09.066" v="4" actId="47"/>
-        <pc:sldMkLst>
-          <pc:docMk/>
-          <pc:sldMk cId="1149178855" sldId="610"/>
-        </pc:sldMkLst>
-      </pc:sldChg>
-      <pc:sldChg chg="del">
-        <pc:chgData name="Matthieu De Mari" userId="dfb708c9-d8dc-439f-9a3b-c772bf4a311c" providerId="ADAL" clId="{D45F76D7-EA17-40C1-8E70-073C7285C046}" dt="2024-03-05T09:27:09.066" v="4" actId="47"/>
-        <pc:sldMkLst>
-          <pc:docMk/>
-          <pc:sldMk cId="1655947162" sldId="611"/>
-        </pc:sldMkLst>
-      </pc:sldChg>
-      <pc:sldChg chg="del">
-        <pc:chgData name="Matthieu De Mari" userId="dfb708c9-d8dc-439f-9a3b-c772bf4a311c" providerId="ADAL" clId="{D45F76D7-EA17-40C1-8E70-073C7285C046}" dt="2024-03-05T09:27:09.066" v="4" actId="47"/>
-        <pc:sldMkLst>
-          <pc:docMk/>
-          <pc:sldMk cId="1079237185" sldId="612"/>
-        </pc:sldMkLst>
-      </pc:sldChg>
-      <pc:sldChg chg="del">
-        <pc:chgData name="Matthieu De Mari" userId="dfb708c9-d8dc-439f-9a3b-c772bf4a311c" providerId="ADAL" clId="{D45F76D7-EA17-40C1-8E70-073C7285C046}" dt="2024-03-05T09:27:09.066" v="4" actId="47"/>
-        <pc:sldMkLst>
-          <pc:docMk/>
-          <pc:sldMk cId="3584089474" sldId="613"/>
-        </pc:sldMkLst>
-      </pc:sldChg>
-      <pc:sldChg chg="del">
-        <pc:chgData name="Matthieu De Mari" userId="dfb708c9-d8dc-439f-9a3b-c772bf4a311c" providerId="ADAL" clId="{D45F76D7-EA17-40C1-8E70-073C7285C046}" dt="2024-03-05T09:27:09.066" v="4" actId="47"/>
-        <pc:sldMkLst>
-          <pc:docMk/>
-          <pc:sldMk cId="1726322392" sldId="614"/>
-        </pc:sldMkLst>
-      </pc:sldChg>
-      <pc:sldChg chg="del">
-        <pc:chgData name="Matthieu De Mari" userId="dfb708c9-d8dc-439f-9a3b-c772bf4a311c" providerId="ADAL" clId="{D45F76D7-EA17-40C1-8E70-073C7285C046}" dt="2024-03-05T09:27:09.066" v="4" actId="47"/>
-        <pc:sldMkLst>
-          <pc:docMk/>
-          <pc:sldMk cId="1478687394" sldId="615"/>
-        </pc:sldMkLst>
-      </pc:sldChg>
-      <pc:sldChg chg="del">
-        <pc:chgData name="Matthieu De Mari" userId="dfb708c9-d8dc-439f-9a3b-c772bf4a311c" providerId="ADAL" clId="{D45F76D7-EA17-40C1-8E70-073C7285C046}" dt="2024-03-05T09:27:10.188" v="5" actId="47"/>
-        <pc:sldMkLst>
-          <pc:docMk/>
-          <pc:sldMk cId="2697134679" sldId="616"/>
-        </pc:sldMkLst>
-      </pc:sldChg>
-      <pc:sldChg chg="del">
-        <pc:chgData name="Matthieu De Mari" userId="dfb708c9-d8dc-439f-9a3b-c772bf4a311c" providerId="ADAL" clId="{D45F76D7-EA17-40C1-8E70-073C7285C046}" dt="2024-03-05T09:27:07.476" v="3" actId="47"/>
-        <pc:sldMkLst>
-          <pc:docMk/>
-          <pc:sldMk cId="1087818113" sldId="617"/>
-        </pc:sldMkLst>
-      </pc:sldChg>
-      <pc:sldChg chg="del">
-        <pc:chgData name="Matthieu De Mari" userId="dfb708c9-d8dc-439f-9a3b-c772bf4a311c" providerId="ADAL" clId="{D45F76D7-EA17-40C1-8E70-073C7285C046}" dt="2024-03-05T09:27:10.188" v="5" actId="47"/>
-        <pc:sldMkLst>
-          <pc:docMk/>
-          <pc:sldMk cId="2052607657" sldId="619"/>
-        </pc:sldMkLst>
-      </pc:sldChg>
-      <pc:sldChg chg="del">
-        <pc:chgData name="Matthieu De Mari" userId="dfb708c9-d8dc-439f-9a3b-c772bf4a311c" providerId="ADAL" clId="{D45F76D7-EA17-40C1-8E70-073C7285C046}" dt="2024-03-05T09:27:07.476" v="3" actId="47"/>
-        <pc:sldMkLst>
-          <pc:docMk/>
-          <pc:sldMk cId="204647563" sldId="622"/>
-        </pc:sldMkLst>
-      </pc:sldChg>
-      <pc:sldChg chg="del">
-        <pc:chgData name="Matthieu De Mari" userId="dfb708c9-d8dc-439f-9a3b-c772bf4a311c" providerId="ADAL" clId="{D45F76D7-EA17-40C1-8E70-073C7285C046}" dt="2024-03-05T09:27:07.476" v="3" actId="47"/>
-        <pc:sldMkLst>
-          <pc:docMk/>
-          <pc:sldMk cId="3109980527" sldId="624"/>
-        </pc:sldMkLst>
-      </pc:sldChg>
-      <pc:sldChg chg="del">
-        <pc:chgData name="Matthieu De Mari" userId="dfb708c9-d8dc-439f-9a3b-c772bf4a311c" providerId="ADAL" clId="{D45F76D7-EA17-40C1-8E70-073C7285C046}" dt="2024-03-05T09:27:07.476" v="3" actId="47"/>
-        <pc:sldMkLst>
-          <pc:docMk/>
-          <pc:sldMk cId="491578291" sldId="627"/>
-        </pc:sldMkLst>
-      </pc:sldChg>
-      <pc:sldChg chg="del">
-        <pc:chgData name="Matthieu De Mari" userId="dfb708c9-d8dc-439f-9a3b-c772bf4a311c" providerId="ADAL" clId="{D45F76D7-EA17-40C1-8E70-073C7285C046}" dt="2024-03-05T09:27:07.476" v="3" actId="47"/>
-        <pc:sldMkLst>
-          <pc:docMk/>
-          <pc:sldMk cId="4059265678" sldId="628"/>
-        </pc:sldMkLst>
-      </pc:sldChg>
-      <pc:sldChg chg="del">
-        <pc:chgData name="Matthieu De Mari" userId="dfb708c9-d8dc-439f-9a3b-c772bf4a311c" providerId="ADAL" clId="{D45F76D7-EA17-40C1-8E70-073C7285C046}" dt="2024-03-05T09:27:07.476" v="3" actId="47"/>
-        <pc:sldMkLst>
-          <pc:docMk/>
-          <pc:sldMk cId="2696285505" sldId="629"/>
-        </pc:sldMkLst>
-      </pc:sldChg>
-      <pc:sldChg chg="del">
-        <pc:chgData name="Matthieu De Mari" userId="dfb708c9-d8dc-439f-9a3b-c772bf4a311c" providerId="ADAL" clId="{D45F76D7-EA17-40C1-8E70-073C7285C046}" dt="2024-03-05T09:27:07.476" v="3" actId="47"/>
-        <pc:sldMkLst>
-          <pc:docMk/>
-          <pc:sldMk cId="3403244392" sldId="630"/>
-        </pc:sldMkLst>
-      </pc:sldChg>
-      <pc:sldChg chg="del">
-        <pc:chgData name="Matthieu De Mari" userId="dfb708c9-d8dc-439f-9a3b-c772bf4a311c" providerId="ADAL" clId="{D45F76D7-EA17-40C1-8E70-073C7285C046}" dt="2024-03-05T09:27:07.476" v="3" actId="47"/>
-        <pc:sldMkLst>
-          <pc:docMk/>
-          <pc:sldMk cId="3378674748" sldId="631"/>
-        </pc:sldMkLst>
-      </pc:sldChg>
-      <pc:sldChg chg="del">
-        <pc:chgData name="Matthieu De Mari" userId="dfb708c9-d8dc-439f-9a3b-c772bf4a311c" providerId="ADAL" clId="{D45F76D7-EA17-40C1-8E70-073C7285C046}" dt="2024-03-05T09:27:07.476" v="3" actId="47"/>
-        <pc:sldMkLst>
-          <pc:docMk/>
-          <pc:sldMk cId="3237577112" sldId="632"/>
-        </pc:sldMkLst>
-      </pc:sldChg>
-      <pc:sldChg chg="del">
-        <pc:chgData name="Matthieu De Mari" userId="dfb708c9-d8dc-439f-9a3b-c772bf4a311c" providerId="ADAL" clId="{D45F76D7-EA17-40C1-8E70-073C7285C046}" dt="2024-03-05T09:27:07.476" v="3" actId="47"/>
-        <pc:sldMkLst>
-          <pc:docMk/>
-          <pc:sldMk cId="3821484596" sldId="633"/>
-        </pc:sldMkLst>
-      </pc:sldChg>
-      <pc:sldChg chg="del">
-        <pc:chgData name="Matthieu De Mari" userId="dfb708c9-d8dc-439f-9a3b-c772bf4a311c" providerId="ADAL" clId="{D45F76D7-EA17-40C1-8E70-073C7285C046}" dt="2024-03-05T09:27:07.476" v="3" actId="47"/>
-        <pc:sldMkLst>
-          <pc:docMk/>
-          <pc:sldMk cId="875945898" sldId="634"/>
-        </pc:sldMkLst>
-      </pc:sldChg>
-      <pc:sldChg chg="del">
-        <pc:chgData name="Matthieu De Mari" userId="dfb708c9-d8dc-439f-9a3b-c772bf4a311c" providerId="ADAL" clId="{D45F76D7-EA17-40C1-8E70-073C7285C046}" dt="2024-03-05T09:27:07.476" v="3" actId="47"/>
-        <pc:sldMkLst>
-          <pc:docMk/>
-          <pc:sldMk cId="956888542" sldId="635"/>
-        </pc:sldMkLst>
-      </pc:sldChg>
-      <pc:sldChg chg="del">
-        <pc:chgData name="Matthieu De Mari" userId="dfb708c9-d8dc-439f-9a3b-c772bf4a311c" providerId="ADAL" clId="{D45F76D7-EA17-40C1-8E70-073C7285C046}" dt="2024-03-05T09:27:07.476" v="3" actId="47"/>
-        <pc:sldMkLst>
-          <pc:docMk/>
-          <pc:sldMk cId="9821103" sldId="636"/>
-        </pc:sldMkLst>
-      </pc:sldChg>
-      <pc:sldChg chg="modSp mod">
-        <pc:chgData name="Matthieu De Mari" userId="dfb708c9-d8dc-439f-9a3b-c772bf4a311c" providerId="ADAL" clId="{D45F76D7-EA17-40C1-8E70-073C7285C046}" dt="2024-03-05T09:26:57.549" v="0" actId="207"/>
-        <pc:sldMkLst>
-          <pc:docMk/>
-          <pc:sldMk cId="444206811" sldId="662"/>
-        </pc:sldMkLst>
-      </pc:sldChg>
-      <pc:sldChg chg="del">
-        <pc:chgData name="Matthieu De Mari" userId="dfb708c9-d8dc-439f-9a3b-c772bf4a311c" providerId="ADAL" clId="{D45F76D7-EA17-40C1-8E70-073C7285C046}" dt="2024-03-05T09:27:19.949" v="6" actId="47"/>
-        <pc:sldMkLst>
-          <pc:docMk/>
-          <pc:sldMk cId="2175023596" sldId="664"/>
-        </pc:sldMkLst>
-      </pc:sldChg>
-      <pc:sldChg chg="del">
-        <pc:chgData name="Matthieu De Mari" userId="dfb708c9-d8dc-439f-9a3b-c772bf4a311c" providerId="ADAL" clId="{D45F76D7-EA17-40C1-8E70-073C7285C046}" dt="2024-03-05T09:27:07.476" v="3" actId="47"/>
-        <pc:sldMkLst>
-          <pc:docMk/>
-          <pc:sldMk cId="3985714035" sldId="665"/>
-        </pc:sldMkLst>
-      </pc:sldChg>
-      <pc:sldChg chg="del">
-        <pc:chgData name="Matthieu De Mari" userId="dfb708c9-d8dc-439f-9a3b-c772bf4a311c" providerId="ADAL" clId="{D45F76D7-EA17-40C1-8E70-073C7285C046}" dt="2024-03-05T09:27:10.188" v="5" actId="47"/>
-        <pc:sldMkLst>
-          <pc:docMk/>
-          <pc:sldMk cId="328652294" sldId="666"/>
-        </pc:sldMkLst>
-      </pc:sldChg>
-      <pc:sldChg chg="del">
-        <pc:chgData name="Matthieu De Mari" userId="dfb708c9-d8dc-439f-9a3b-c772bf4a311c" providerId="ADAL" clId="{D45F76D7-EA17-40C1-8E70-073C7285C046}" dt="2024-03-05T09:27:10.188" v="5" actId="47"/>
-        <pc:sldMkLst>
-          <pc:docMk/>
-          <pc:sldMk cId="4024913740" sldId="667"/>
-        </pc:sldMkLst>
-      </pc:sldChg>
-      <pc:sldChg chg="del">
-        <pc:chgData name="Matthieu De Mari" userId="dfb708c9-d8dc-439f-9a3b-c772bf4a311c" providerId="ADAL" clId="{D45F76D7-EA17-40C1-8E70-073C7285C046}" dt="2024-03-05T09:27:04.609" v="2" actId="47"/>
-        <pc:sldMkLst>
-          <pc:docMk/>
-          <pc:sldMk cId="2636755818" sldId="669"/>
-        </pc:sldMkLst>
-      </pc:sldChg>
-      <pc:sldChg chg="del">
-        <pc:chgData name="Matthieu De Mari" userId="dfb708c9-d8dc-439f-9a3b-c772bf4a311c" providerId="ADAL" clId="{D45F76D7-EA17-40C1-8E70-073C7285C046}" dt="2024-03-05T09:27:07.476" v="3" actId="47"/>
-        <pc:sldMkLst>
-          <pc:docMk/>
-          <pc:sldMk cId="370734377" sldId="670"/>
-        </pc:sldMkLst>
-      </pc:sldChg>
-    </pc:docChg>
-  </pc:docChgLst>
-  <pc:docChgLst>
-    <pc:chgData name="Matthieu De Mari" userId="dfb708c9-d8dc-439f-9a3b-c772bf4a311c" providerId="ADAL" clId="{8EE40018-26BD-4A7B-8D17-70AC8417C2D0}"/>
-    <pc:docChg chg="undo custSel addSld delSld modSld addSection delSection modSection">
-      <pc:chgData name="Matthieu De Mari" userId="dfb708c9-d8dc-439f-9a3b-c772bf4a311c" providerId="ADAL" clId="{8EE40018-26BD-4A7B-8D17-70AC8417C2D0}" dt="2022-11-16T06:55:05.435" v="67" actId="47"/>
-      <pc:docMkLst>
-        <pc:docMk/>
-      </pc:docMkLst>
-      <pc:sldChg chg="modSp mod">
-        <pc:chgData name="Matthieu De Mari" userId="dfb708c9-d8dc-439f-9a3b-c772bf4a311c" providerId="ADAL" clId="{8EE40018-26BD-4A7B-8D17-70AC8417C2D0}" dt="2022-11-16T06:55:04.205" v="66" actId="20577"/>
-        <pc:sldMkLst>
-          <pc:docMk/>
-          <pc:sldMk cId="3442501962" sldId="257"/>
-        </pc:sldMkLst>
-      </pc:sldChg>
-      <pc:sldChg chg="del">
-        <pc:chgData name="Matthieu De Mari" userId="dfb708c9-d8dc-439f-9a3b-c772bf4a311c" providerId="ADAL" clId="{8EE40018-26BD-4A7B-8D17-70AC8417C2D0}" dt="2022-11-16T06:54:01.441" v="17" actId="47"/>
-        <pc:sldMkLst>
-          <pc:docMk/>
-          <pc:sldMk cId="3556835968" sldId="261"/>
-        </pc:sldMkLst>
-      </pc:sldChg>
-      <pc:sldChg chg="modSp mod">
-        <pc:chgData name="Matthieu De Mari" userId="dfb708c9-d8dc-439f-9a3b-c772bf4a311c" providerId="ADAL" clId="{8EE40018-26BD-4A7B-8D17-70AC8417C2D0}" dt="2022-11-16T06:54:47.612" v="47" actId="20577"/>
-        <pc:sldMkLst>
-          <pc:docMk/>
-          <pc:sldMk cId="1893873068" sldId="266"/>
-        </pc:sldMkLst>
-      </pc:sldChg>
-      <pc:sldChg chg="modSp mod">
-        <pc:chgData name="Matthieu De Mari" userId="dfb708c9-d8dc-439f-9a3b-c772bf4a311c" providerId="ADAL" clId="{8EE40018-26BD-4A7B-8D17-70AC8417C2D0}" dt="2022-11-16T06:54:56.797" v="60" actId="20577"/>
-        <pc:sldMkLst>
-          <pc:docMk/>
-          <pc:sldMk cId="3880949074" sldId="267"/>
-        </pc:sldMkLst>
-      </pc:sldChg>
-      <pc:sldChg chg="del">
-        <pc:chgData name="Matthieu De Mari" userId="dfb708c9-d8dc-439f-9a3b-c772bf4a311c" providerId="ADAL" clId="{8EE40018-26BD-4A7B-8D17-70AC8417C2D0}" dt="2022-11-16T06:54:02.421" v="18" actId="47"/>
-        <pc:sldMkLst>
-          <pc:docMk/>
-          <pc:sldMk cId="969289828" sldId="271"/>
-        </pc:sldMkLst>
-      </pc:sldChg>
-      <pc:sldChg chg="del">
-        <pc:chgData name="Matthieu De Mari" userId="dfb708c9-d8dc-439f-9a3b-c772bf4a311c" providerId="ADAL" clId="{8EE40018-26BD-4A7B-8D17-70AC8417C2D0}" dt="2022-11-16T06:54:02.421" v="18" actId="47"/>
-        <pc:sldMkLst>
-          <pc:docMk/>
-          <pc:sldMk cId="543657650" sldId="273"/>
-        </pc:sldMkLst>
-      </pc:sldChg>
-      <pc:sldChg chg="del">
-        <pc:chgData name="Matthieu De Mari" userId="dfb708c9-d8dc-439f-9a3b-c772bf4a311c" providerId="ADAL" clId="{8EE40018-26BD-4A7B-8D17-70AC8417C2D0}" dt="2022-11-16T06:54:01.441" v="17" actId="47"/>
-        <pc:sldMkLst>
-          <pc:docMk/>
-          <pc:sldMk cId="3687792543" sldId="275"/>
-        </pc:sldMkLst>
-      </pc:sldChg>
-      <pc:sldChg chg="del">
-        <pc:chgData name="Matthieu De Mari" userId="dfb708c9-d8dc-439f-9a3b-c772bf4a311c" providerId="ADAL" clId="{8EE40018-26BD-4A7B-8D17-70AC8417C2D0}" dt="2022-11-16T06:54:03.510" v="19" actId="47"/>
-        <pc:sldMkLst>
-          <pc:docMk/>
-          <pc:sldMk cId="1852878019" sldId="276"/>
-        </pc:sldMkLst>
-      </pc:sldChg>
-      <pc:sldChg chg="del">
-        <pc:chgData name="Matthieu De Mari" userId="dfb708c9-d8dc-439f-9a3b-c772bf4a311c" providerId="ADAL" clId="{8EE40018-26BD-4A7B-8D17-70AC8417C2D0}" dt="2022-11-16T06:54:02.421" v="18" actId="47"/>
-        <pc:sldMkLst>
-          <pc:docMk/>
-          <pc:sldMk cId="355509003" sldId="278"/>
-        </pc:sldMkLst>
-      </pc:sldChg>
-      <pc:sldChg chg="del">
-        <pc:chgData name="Matthieu De Mari" userId="dfb708c9-d8dc-439f-9a3b-c772bf4a311c" providerId="ADAL" clId="{8EE40018-26BD-4A7B-8D17-70AC8417C2D0}" dt="2022-11-16T06:54:02.421" v="18" actId="47"/>
-        <pc:sldMkLst>
-          <pc:docMk/>
-          <pc:sldMk cId="3873470932" sldId="280"/>
-        </pc:sldMkLst>
-      </pc:sldChg>
-      <pc:sldChg chg="del">
-        <pc:chgData name="Matthieu De Mari" userId="dfb708c9-d8dc-439f-9a3b-c772bf4a311c" providerId="ADAL" clId="{8EE40018-26BD-4A7B-8D17-70AC8417C2D0}" dt="2022-11-16T06:54:02.421" v="18" actId="47"/>
-        <pc:sldMkLst>
-          <pc:docMk/>
-          <pc:sldMk cId="3477464442" sldId="281"/>
-        </pc:sldMkLst>
-      </pc:sldChg>
-      <pc:sldChg chg="del">
-        <pc:chgData name="Matthieu De Mari" userId="dfb708c9-d8dc-439f-9a3b-c772bf4a311c" providerId="ADAL" clId="{8EE40018-26BD-4A7B-8D17-70AC8417C2D0}" dt="2022-11-16T06:54:02.421" v="18" actId="47"/>
-        <pc:sldMkLst>
-          <pc:docMk/>
-          <pc:sldMk cId="4219540979" sldId="282"/>
-        </pc:sldMkLst>
-      </pc:sldChg>
-      <pc:sldChg chg="modSp del mod">
-        <pc:chgData name="Matthieu De Mari" userId="dfb708c9-d8dc-439f-9a3b-c772bf4a311c" providerId="ADAL" clId="{8EE40018-26BD-4A7B-8D17-70AC8417C2D0}" dt="2022-11-16T06:55:05.435" v="67" actId="47"/>
-        <pc:sldMkLst>
-          <pc:docMk/>
-          <pc:sldMk cId="2071167148" sldId="284"/>
-        </pc:sldMkLst>
-      </pc:sldChg>
-      <pc:sldChg chg="del">
-        <pc:chgData name="Matthieu De Mari" userId="dfb708c9-d8dc-439f-9a3b-c772bf4a311c" providerId="ADAL" clId="{8EE40018-26BD-4A7B-8D17-70AC8417C2D0}" dt="2022-11-16T06:54:14.637" v="28" actId="47"/>
-        <pc:sldMkLst>
-          <pc:docMk/>
-          <pc:sldMk cId="3743280645" sldId="285"/>
-        </pc:sldMkLst>
-      </pc:sldChg>
-      <pc:sldChg chg="del">
-        <pc:chgData name="Matthieu De Mari" userId="dfb708c9-d8dc-439f-9a3b-c772bf4a311c" providerId="ADAL" clId="{8EE40018-26BD-4A7B-8D17-70AC8417C2D0}" dt="2022-11-16T06:54:02.421" v="18" actId="47"/>
-        <pc:sldMkLst>
-          <pc:docMk/>
-          <pc:sldMk cId="2640130553" sldId="286"/>
-        </pc:sldMkLst>
-      </pc:sldChg>
-      <pc:sldChg chg="del">
-        <pc:chgData name="Matthieu De Mari" userId="dfb708c9-d8dc-439f-9a3b-c772bf4a311c" providerId="ADAL" clId="{8EE40018-26BD-4A7B-8D17-70AC8417C2D0}" dt="2022-11-16T06:54:03.510" v="19" actId="47"/>
-        <pc:sldMkLst>
-          <pc:docMk/>
-          <pc:sldMk cId="3356285317" sldId="289"/>
-        </pc:sldMkLst>
-      </pc:sldChg>
-      <pc:sldChg chg="del">
-        <pc:chgData name="Matthieu De Mari" userId="dfb708c9-d8dc-439f-9a3b-c772bf4a311c" providerId="ADAL" clId="{8EE40018-26BD-4A7B-8D17-70AC8417C2D0}" dt="2022-11-16T06:54:03.510" v="19" actId="47"/>
-        <pc:sldMkLst>
-          <pc:docMk/>
-          <pc:sldMk cId="473860244" sldId="290"/>
-        </pc:sldMkLst>
-      </pc:sldChg>
-      <pc:sldChg chg="del">
-        <pc:chgData name="Matthieu De Mari" userId="dfb708c9-d8dc-439f-9a3b-c772bf4a311c" providerId="ADAL" clId="{8EE40018-26BD-4A7B-8D17-70AC8417C2D0}" dt="2022-11-16T06:54:03.510" v="19" actId="47"/>
-        <pc:sldMkLst>
-          <pc:docMk/>
-          <pc:sldMk cId="290213158" sldId="291"/>
-        </pc:sldMkLst>
-      </pc:sldChg>
-      <pc:sldChg chg="del">
-        <pc:chgData name="Matthieu De Mari" userId="dfb708c9-d8dc-439f-9a3b-c772bf4a311c" providerId="ADAL" clId="{8EE40018-26BD-4A7B-8D17-70AC8417C2D0}" dt="2022-11-16T06:54:03.510" v="19" actId="47"/>
-        <pc:sldMkLst>
-          <pc:docMk/>
-          <pc:sldMk cId="3717810270" sldId="292"/>
-        </pc:sldMkLst>
-      </pc:sldChg>
-      <pc:sldChg chg="del">
-        <pc:chgData name="Matthieu De Mari" userId="dfb708c9-d8dc-439f-9a3b-c772bf4a311c" providerId="ADAL" clId="{8EE40018-26BD-4A7B-8D17-70AC8417C2D0}" dt="2022-11-16T06:54:03.510" v="19" actId="47"/>
-        <pc:sldMkLst>
-          <pc:docMk/>
-          <pc:sldMk cId="2783948156" sldId="293"/>
-        </pc:sldMkLst>
-      </pc:sldChg>
-      <pc:sldChg chg="del">
-        <pc:chgData name="Matthieu De Mari" userId="dfb708c9-d8dc-439f-9a3b-c772bf4a311c" providerId="ADAL" clId="{8EE40018-26BD-4A7B-8D17-70AC8417C2D0}" dt="2022-11-16T06:54:04.458" v="20" actId="47"/>
-        <pc:sldMkLst>
-          <pc:docMk/>
-          <pc:sldMk cId="4179829315" sldId="294"/>
-        </pc:sldMkLst>
-      </pc:sldChg>
-      <pc:sldChg chg="del">
-        <pc:chgData name="Matthieu De Mari" userId="dfb708c9-d8dc-439f-9a3b-c772bf4a311c" providerId="ADAL" clId="{8EE40018-26BD-4A7B-8D17-70AC8417C2D0}" dt="2022-11-16T06:54:12.971" v="26" actId="47"/>
-        <pc:sldMkLst>
-          <pc:docMk/>
-          <pc:sldMk cId="709624762" sldId="295"/>
-        </pc:sldMkLst>
-      </pc:sldChg>
-      <pc:sldChg chg="del">
-        <pc:chgData name="Matthieu De Mari" userId="dfb708c9-d8dc-439f-9a3b-c772bf4a311c" providerId="ADAL" clId="{8EE40018-26BD-4A7B-8D17-70AC8417C2D0}" dt="2022-11-16T06:54:11.293" v="25" actId="47"/>
-        <pc:sldMkLst>
-          <pc:docMk/>
-          <pc:sldMk cId="2576857052" sldId="297"/>
-        </pc:sldMkLst>
-      </pc:sldChg>
-      <pc:sldChg chg="del">
-        <pc:chgData name="Matthieu De Mari" userId="dfb708c9-d8dc-439f-9a3b-c772bf4a311c" providerId="ADAL" clId="{8EE40018-26BD-4A7B-8D17-70AC8417C2D0}" dt="2022-11-16T06:54:04.458" v="20" actId="47"/>
-        <pc:sldMkLst>
-          <pc:docMk/>
-          <pc:sldMk cId="1885656403" sldId="298"/>
-        </pc:sldMkLst>
-      </pc:sldChg>
-      <pc:sldChg chg="del">
-        <pc:chgData name="Matthieu De Mari" userId="dfb708c9-d8dc-439f-9a3b-c772bf4a311c" providerId="ADAL" clId="{8EE40018-26BD-4A7B-8D17-70AC8417C2D0}" dt="2022-11-16T06:54:04.458" v="20" actId="47"/>
-        <pc:sldMkLst>
-          <pc:docMk/>
-          <pc:sldMk cId="3768793426" sldId="299"/>
-        </pc:sldMkLst>
-      </pc:sldChg>
-      <pc:sldChg chg="del">
-        <pc:chgData name="Matthieu De Mari" userId="dfb708c9-d8dc-439f-9a3b-c772bf4a311c" providerId="ADAL" clId="{8EE40018-26BD-4A7B-8D17-70AC8417C2D0}" dt="2022-11-16T06:54:07.519" v="22" actId="47"/>
-        <pc:sldMkLst>
-          <pc:docMk/>
-          <pc:sldMk cId="902380433" sldId="300"/>
-        </pc:sldMkLst>
-      </pc:sldChg>
-      <pc:sldChg chg="del">
-        <pc:chgData name="Matthieu De Mari" userId="dfb708c9-d8dc-439f-9a3b-c772bf4a311c" providerId="ADAL" clId="{8EE40018-26BD-4A7B-8D17-70AC8417C2D0}" dt="2022-11-16T06:54:08.404" v="23" actId="47"/>
-        <pc:sldMkLst>
-          <pc:docMk/>
-          <pc:sldMk cId="2202284175" sldId="301"/>
-        </pc:sldMkLst>
-      </pc:sldChg>
-      <pc:sldChg chg="del">
-        <pc:chgData name="Matthieu De Mari" userId="dfb708c9-d8dc-439f-9a3b-c772bf4a311c" providerId="ADAL" clId="{8EE40018-26BD-4A7B-8D17-70AC8417C2D0}" dt="2022-11-16T06:54:09.190" v="24" actId="47"/>
-        <pc:sldMkLst>
-          <pc:docMk/>
-          <pc:sldMk cId="1547433389" sldId="302"/>
-        </pc:sldMkLst>
-      </pc:sldChg>
-      <pc:sldChg chg="del">
-        <pc:chgData name="Matthieu De Mari" userId="dfb708c9-d8dc-439f-9a3b-c772bf4a311c" providerId="ADAL" clId="{8EE40018-26BD-4A7B-8D17-70AC8417C2D0}" dt="2022-11-16T06:54:04.458" v="20" actId="47"/>
-        <pc:sldMkLst>
-          <pc:docMk/>
-          <pc:sldMk cId="3335250243" sldId="303"/>
-        </pc:sldMkLst>
-      </pc:sldChg>
-      <pc:sldChg chg="del">
-        <pc:chgData name="Matthieu De Mari" userId="dfb708c9-d8dc-439f-9a3b-c772bf4a311c" providerId="ADAL" clId="{8EE40018-26BD-4A7B-8D17-70AC8417C2D0}" dt="2022-11-16T06:54:03.510" v="19" actId="47"/>
-        <pc:sldMkLst>
-          <pc:docMk/>
-          <pc:sldMk cId="349456406" sldId="305"/>
-        </pc:sldMkLst>
-      </pc:sldChg>
-      <pc:sldChg chg="del">
-        <pc:chgData name="Matthieu De Mari" userId="dfb708c9-d8dc-439f-9a3b-c772bf4a311c" providerId="ADAL" clId="{8EE40018-26BD-4A7B-8D17-70AC8417C2D0}" dt="2022-11-16T06:54:06.554" v="21" actId="47"/>
-        <pc:sldMkLst>
-          <pc:docMk/>
-          <pc:sldMk cId="1917974936" sldId="307"/>
-        </pc:sldMkLst>
-      </pc:sldChg>
-      <pc:sldChg chg="del">
-        <pc:chgData name="Matthieu De Mari" userId="dfb708c9-d8dc-439f-9a3b-c772bf4a311c" providerId="ADAL" clId="{8EE40018-26BD-4A7B-8D17-70AC8417C2D0}" dt="2022-11-16T06:54:06.554" v="21" actId="47"/>
-        <pc:sldMkLst>
-          <pc:docMk/>
-          <pc:sldMk cId="2278752964" sldId="309"/>
-        </pc:sldMkLst>
-      </pc:sldChg>
-      <pc:sldChg chg="del">
-        <pc:chgData name="Matthieu De Mari" userId="dfb708c9-d8dc-439f-9a3b-c772bf4a311c" providerId="ADAL" clId="{8EE40018-26BD-4A7B-8D17-70AC8417C2D0}" dt="2022-11-16T06:54:06.554" v="21" actId="47"/>
-        <pc:sldMkLst>
-          <pc:docMk/>
-          <pc:sldMk cId="3317882412" sldId="310"/>
-        </pc:sldMkLst>
-      </pc:sldChg>
-      <pc:sldChg chg="del">
-        <pc:chgData name="Matthieu De Mari" userId="dfb708c9-d8dc-439f-9a3b-c772bf4a311c" providerId="ADAL" clId="{8EE40018-26BD-4A7B-8D17-70AC8417C2D0}" dt="2022-11-16T06:54:06.554" v="21" actId="47"/>
-        <pc:sldMkLst>
-          <pc:docMk/>
-          <pc:sldMk cId="3051144984" sldId="311"/>
-        </pc:sldMkLst>
-      </pc:sldChg>
-      <pc:sldChg chg="del">
-        <pc:chgData name="Matthieu De Mari" userId="dfb708c9-d8dc-439f-9a3b-c772bf4a311c" providerId="ADAL" clId="{8EE40018-26BD-4A7B-8D17-70AC8417C2D0}" dt="2022-11-16T06:54:06.554" v="21" actId="47"/>
-        <pc:sldMkLst>
-          <pc:docMk/>
-          <pc:sldMk cId="666448182" sldId="313"/>
-        </pc:sldMkLst>
-      </pc:sldChg>
-      <pc:sldChg chg="del">
-        <pc:chgData name="Matthieu De Mari" userId="dfb708c9-d8dc-439f-9a3b-c772bf4a311c" providerId="ADAL" clId="{8EE40018-26BD-4A7B-8D17-70AC8417C2D0}" dt="2022-11-16T06:54:06.554" v="21" actId="47"/>
-        <pc:sldMkLst>
-          <pc:docMk/>
-          <pc:sldMk cId="1701431758" sldId="314"/>
-        </pc:sldMkLst>
-      </pc:sldChg>
-      <pc:sldChg chg="del">
-        <pc:chgData name="Matthieu De Mari" userId="dfb708c9-d8dc-439f-9a3b-c772bf4a311c" providerId="ADAL" clId="{8EE40018-26BD-4A7B-8D17-70AC8417C2D0}" dt="2022-11-16T06:54:06.554" v="21" actId="47"/>
-        <pc:sldMkLst>
-          <pc:docMk/>
-          <pc:sldMk cId="1813469429" sldId="315"/>
-        </pc:sldMkLst>
-      </pc:sldChg>
-      <pc:sldChg chg="del">
-        <pc:chgData name="Matthieu De Mari" userId="dfb708c9-d8dc-439f-9a3b-c772bf4a311c" providerId="ADAL" clId="{8EE40018-26BD-4A7B-8D17-70AC8417C2D0}" dt="2022-11-16T06:54:07.519" v="22" actId="47"/>
-        <pc:sldMkLst>
-          <pc:docMk/>
-          <pc:sldMk cId="3619476332" sldId="316"/>
-        </pc:sldMkLst>
-      </pc:sldChg>
-      <pc:sldChg chg="del">
-        <pc:chgData name="Matthieu De Mari" userId="dfb708c9-d8dc-439f-9a3b-c772bf4a311c" providerId="ADAL" clId="{8EE40018-26BD-4A7B-8D17-70AC8417C2D0}" dt="2022-11-16T06:54:07.519" v="22" actId="47"/>
-        <pc:sldMkLst>
-          <pc:docMk/>
-          <pc:sldMk cId="3133188960" sldId="317"/>
-        </pc:sldMkLst>
-      </pc:sldChg>
-      <pc:sldChg chg="del">
-        <pc:chgData name="Matthieu De Mari" userId="dfb708c9-d8dc-439f-9a3b-c772bf4a311c" providerId="ADAL" clId="{8EE40018-26BD-4A7B-8D17-70AC8417C2D0}" dt="2022-11-16T06:54:07.519" v="22" actId="47"/>
-        <pc:sldMkLst>
-          <pc:docMk/>
-          <pc:sldMk cId="913491245" sldId="318"/>
-        </pc:sldMkLst>
-      </pc:sldChg>
-      <pc:sldChg chg="del">
-        <pc:chgData name="Matthieu De Mari" userId="dfb708c9-d8dc-439f-9a3b-c772bf4a311c" providerId="ADAL" clId="{8EE40018-26BD-4A7B-8D17-70AC8417C2D0}" dt="2022-11-16T06:54:07.519" v="22" actId="47"/>
-        <pc:sldMkLst>
-          <pc:docMk/>
-          <pc:sldMk cId="369927457" sldId="319"/>
-        </pc:sldMkLst>
-      </pc:sldChg>
-      <pc:sldChg chg="del">
-        <pc:chgData name="Matthieu De Mari" userId="dfb708c9-d8dc-439f-9a3b-c772bf4a311c" providerId="ADAL" clId="{8EE40018-26BD-4A7B-8D17-70AC8417C2D0}" dt="2022-11-16T06:54:07.519" v="22" actId="47"/>
-        <pc:sldMkLst>
-          <pc:docMk/>
-          <pc:sldMk cId="868347224" sldId="320"/>
-        </pc:sldMkLst>
-      </pc:sldChg>
-      <pc:sldChg chg="del">
-        <pc:chgData name="Matthieu De Mari" userId="dfb708c9-d8dc-439f-9a3b-c772bf4a311c" providerId="ADAL" clId="{8EE40018-26BD-4A7B-8D17-70AC8417C2D0}" dt="2022-11-16T06:54:07.519" v="22" actId="47"/>
-        <pc:sldMkLst>
-          <pc:docMk/>
-          <pc:sldMk cId="2901421326" sldId="321"/>
-        </pc:sldMkLst>
-      </pc:sldChg>
-      <pc:sldChg chg="del">
-        <pc:chgData name="Matthieu De Mari" userId="dfb708c9-d8dc-439f-9a3b-c772bf4a311c" providerId="ADAL" clId="{8EE40018-26BD-4A7B-8D17-70AC8417C2D0}" dt="2022-11-16T06:54:07.519" v="22" actId="47"/>
-        <pc:sldMkLst>
-          <pc:docMk/>
-          <pc:sldMk cId="386318379" sldId="322"/>
-        </pc:sldMkLst>
-      </pc:sldChg>
-      <pc:sldChg chg="del">
-        <pc:chgData name="Matthieu De Mari" userId="dfb708c9-d8dc-439f-9a3b-c772bf4a311c" providerId="ADAL" clId="{8EE40018-26BD-4A7B-8D17-70AC8417C2D0}" dt="2022-11-16T06:54:07.519" v="22" actId="47"/>
-        <pc:sldMkLst>
-          <pc:docMk/>
-          <pc:sldMk cId="535785749" sldId="323"/>
-        </pc:sldMkLst>
-      </pc:sldChg>
-      <pc:sldChg chg="del">
-        <pc:chgData name="Matthieu De Mari" userId="dfb708c9-d8dc-439f-9a3b-c772bf4a311c" providerId="ADAL" clId="{8EE40018-26BD-4A7B-8D17-70AC8417C2D0}" dt="2022-11-16T06:54:07.519" v="22" actId="47"/>
-        <pc:sldMkLst>
-          <pc:docMk/>
-          <pc:sldMk cId="573807039" sldId="324"/>
-        </pc:sldMkLst>
-      </pc:sldChg>
-      <pc:sldChg chg="del">
-        <pc:chgData name="Matthieu De Mari" userId="dfb708c9-d8dc-439f-9a3b-c772bf4a311c" providerId="ADAL" clId="{8EE40018-26BD-4A7B-8D17-70AC8417C2D0}" dt="2022-11-16T06:54:07.519" v="22" actId="47"/>
-        <pc:sldMkLst>
-          <pc:docMk/>
-          <pc:sldMk cId="3026304390" sldId="325"/>
-        </pc:sldMkLst>
-      </pc:sldChg>
-      <pc:sldChg chg="del">
-        <pc:chgData name="Matthieu De Mari" userId="dfb708c9-d8dc-439f-9a3b-c772bf4a311c" providerId="ADAL" clId="{8EE40018-26BD-4A7B-8D17-70AC8417C2D0}" dt="2022-11-16T06:54:07.519" v="22" actId="47"/>
-        <pc:sldMkLst>
-          <pc:docMk/>
-          <pc:sldMk cId="4144845603" sldId="326"/>
-        </pc:sldMkLst>
-      </pc:sldChg>
-      <pc:sldChg chg="del">
-        <pc:chgData name="Matthieu De Mari" userId="dfb708c9-d8dc-439f-9a3b-c772bf4a311c" providerId="ADAL" clId="{8EE40018-26BD-4A7B-8D17-70AC8417C2D0}" dt="2022-11-16T06:54:07.519" v="22" actId="47"/>
-        <pc:sldMkLst>
-          <pc:docMk/>
-          <pc:sldMk cId="2128704617" sldId="328"/>
-        </pc:sldMkLst>
-      </pc:sldChg>
-      <pc:sldChg chg="del">
-        <pc:chgData name="Matthieu De Mari" userId="dfb708c9-d8dc-439f-9a3b-c772bf4a311c" providerId="ADAL" clId="{8EE40018-26BD-4A7B-8D17-70AC8417C2D0}" dt="2022-11-16T06:54:07.519" v="22" actId="47"/>
-        <pc:sldMkLst>
-          <pc:docMk/>
-          <pc:sldMk cId="1228181526" sldId="329"/>
-        </pc:sldMkLst>
-      </pc:sldChg>
-      <pc:sldChg chg="del">
-        <pc:chgData name="Matthieu De Mari" userId="dfb708c9-d8dc-439f-9a3b-c772bf4a311c" providerId="ADAL" clId="{8EE40018-26BD-4A7B-8D17-70AC8417C2D0}" dt="2022-11-16T06:54:07.519" v="22" actId="47"/>
-        <pc:sldMkLst>
-          <pc:docMk/>
-          <pc:sldMk cId="1086607777" sldId="331"/>
-        </pc:sldMkLst>
-      </pc:sldChg>
-      <pc:sldChg chg="del">
-        <pc:chgData name="Matthieu De Mari" userId="dfb708c9-d8dc-439f-9a3b-c772bf4a311c" providerId="ADAL" clId="{8EE40018-26BD-4A7B-8D17-70AC8417C2D0}" dt="2022-11-16T06:54:08.404" v="23" actId="47"/>
-        <pc:sldMkLst>
-          <pc:docMk/>
-          <pc:sldMk cId="3744088925" sldId="332"/>
-        </pc:sldMkLst>
-      </pc:sldChg>
-      <pc:sldChg chg="del">
-        <pc:chgData name="Matthieu De Mari" userId="dfb708c9-d8dc-439f-9a3b-c772bf4a311c" providerId="ADAL" clId="{8EE40018-26BD-4A7B-8D17-70AC8417C2D0}" dt="2022-11-16T06:54:08.404" v="23" actId="47"/>
-        <pc:sldMkLst>
-          <pc:docMk/>
-          <pc:sldMk cId="1824898086" sldId="334"/>
-        </pc:sldMkLst>
-      </pc:sldChg>
-      <pc:sldChg chg="del">
-        <pc:chgData name="Matthieu De Mari" userId="dfb708c9-d8dc-439f-9a3b-c772bf4a311c" providerId="ADAL" clId="{8EE40018-26BD-4A7B-8D17-70AC8417C2D0}" dt="2022-11-16T06:54:13.895" v="27" actId="47"/>
-        <pc:sldMkLst>
-          <pc:docMk/>
-          <pc:sldMk cId="3704706604" sldId="335"/>
-        </pc:sldMkLst>
-      </pc:sldChg>
-      <pc:sldChg chg="del">
-        <pc:chgData name="Matthieu De Mari" userId="dfb708c9-d8dc-439f-9a3b-c772bf4a311c" providerId="ADAL" clId="{8EE40018-26BD-4A7B-8D17-70AC8417C2D0}" dt="2022-11-16T06:54:11.293" v="25" actId="47"/>
-        <pc:sldMkLst>
-          <pc:docMk/>
-          <pc:sldMk cId="503014896" sldId="336"/>
-        </pc:sldMkLst>
-      </pc:sldChg>
-      <pc:sldChg chg="del">
-        <pc:chgData name="Matthieu De Mari" userId="dfb708c9-d8dc-439f-9a3b-c772bf4a311c" providerId="ADAL" clId="{8EE40018-26BD-4A7B-8D17-70AC8417C2D0}" dt="2022-11-16T06:54:11.293" v="25" actId="47"/>
-        <pc:sldMkLst>
-          <pc:docMk/>
-          <pc:sldMk cId="1757180629" sldId="338"/>
-        </pc:sldMkLst>
-      </pc:sldChg>
-      <pc:sldChg chg="del">
-        <pc:chgData name="Matthieu De Mari" userId="dfb708c9-d8dc-439f-9a3b-c772bf4a311c" providerId="ADAL" clId="{8EE40018-26BD-4A7B-8D17-70AC8417C2D0}" dt="2022-11-16T06:54:11.293" v="25" actId="47"/>
-        <pc:sldMkLst>
-          <pc:docMk/>
-          <pc:sldMk cId="3251712844" sldId="339"/>
-        </pc:sldMkLst>
-      </pc:sldChg>
-      <pc:sldChg chg="del">
-        <pc:chgData name="Matthieu De Mari" userId="dfb708c9-d8dc-439f-9a3b-c772bf4a311c" providerId="ADAL" clId="{8EE40018-26BD-4A7B-8D17-70AC8417C2D0}" dt="2022-11-16T06:54:11.293" v="25" actId="47"/>
-        <pc:sldMkLst>
-          <pc:docMk/>
-          <pc:sldMk cId="3000047863" sldId="341"/>
-        </pc:sldMkLst>
-      </pc:sldChg>
-      <pc:sldChg chg="del">
-        <pc:chgData name="Matthieu De Mari" userId="dfb708c9-d8dc-439f-9a3b-c772bf4a311c" providerId="ADAL" clId="{8EE40018-26BD-4A7B-8D17-70AC8417C2D0}" dt="2022-11-16T06:54:11.293" v="25" actId="47"/>
-        <pc:sldMkLst>
-          <pc:docMk/>
-          <pc:sldMk cId="3607475250" sldId="342"/>
-        </pc:sldMkLst>
-      </pc:sldChg>
-      <pc:sldChg chg="del">
-        <pc:chgData name="Matthieu De Mari" userId="dfb708c9-d8dc-439f-9a3b-c772bf4a311c" providerId="ADAL" clId="{8EE40018-26BD-4A7B-8D17-70AC8417C2D0}" dt="2022-11-16T06:54:11.293" v="25" actId="47"/>
-        <pc:sldMkLst>
-          <pc:docMk/>
-          <pc:sldMk cId="2202386436" sldId="343"/>
-        </pc:sldMkLst>
-      </pc:sldChg>
-      <pc:sldChg chg="del">
-        <pc:chgData name="Matthieu De Mari" userId="dfb708c9-d8dc-439f-9a3b-c772bf4a311c" providerId="ADAL" clId="{8EE40018-26BD-4A7B-8D17-70AC8417C2D0}" dt="2022-11-16T06:54:14.637" v="28" actId="47"/>
-        <pc:sldMkLst>
-          <pc:docMk/>
-          <pc:sldMk cId="4222503966" sldId="345"/>
-        </pc:sldMkLst>
-      </pc:sldChg>
-      <pc:sldChg chg="modSp add del mod">
-        <pc:chgData name="Matthieu De Mari" userId="dfb708c9-d8dc-439f-9a3b-c772bf4a311c" providerId="ADAL" clId="{8EE40018-26BD-4A7B-8D17-70AC8417C2D0}" dt="2022-11-16T06:54:26.067" v="39" actId="20577"/>
-        <pc:sldMkLst>
-          <pc:docMk/>
-          <pc:sldMk cId="1036081419" sldId="346"/>
-        </pc:sldMkLst>
-      </pc:sldChg>
-      <pc:sldChg chg="del">
-        <pc:chgData name="Matthieu De Mari" userId="dfb708c9-d8dc-439f-9a3b-c772bf4a311c" providerId="ADAL" clId="{8EE40018-26BD-4A7B-8D17-70AC8417C2D0}" dt="2022-11-16T06:54:11.293" v="25" actId="47"/>
-        <pc:sldMkLst>
-          <pc:docMk/>
-          <pc:sldMk cId="2902606749" sldId="350"/>
-        </pc:sldMkLst>
-      </pc:sldChg>
-      <pc:sldChg chg="del">
-        <pc:chgData name="Matthieu De Mari" userId="dfb708c9-d8dc-439f-9a3b-c772bf4a311c" providerId="ADAL" clId="{8EE40018-26BD-4A7B-8D17-70AC8417C2D0}" dt="2022-11-16T06:54:11.293" v="25" actId="47"/>
-        <pc:sldMkLst>
-          <pc:docMk/>
-          <pc:sldMk cId="1008855396" sldId="352"/>
-        </pc:sldMkLst>
-      </pc:sldChg>
-      <pc:sldChg chg="del">
-        <pc:chgData name="Matthieu De Mari" userId="dfb708c9-d8dc-439f-9a3b-c772bf4a311c" providerId="ADAL" clId="{8EE40018-26BD-4A7B-8D17-70AC8417C2D0}" dt="2022-11-16T06:54:11.293" v="25" actId="47"/>
-        <pc:sldMkLst>
-          <pc:docMk/>
-          <pc:sldMk cId="1005123530" sldId="353"/>
-        </pc:sldMkLst>
-      </pc:sldChg>
-      <pc:sldChg chg="del">
-        <pc:chgData name="Matthieu De Mari" userId="dfb708c9-d8dc-439f-9a3b-c772bf4a311c" providerId="ADAL" clId="{8EE40018-26BD-4A7B-8D17-70AC8417C2D0}" dt="2022-11-16T06:54:11.293" v="25" actId="47"/>
-        <pc:sldMkLst>
-          <pc:docMk/>
-          <pc:sldMk cId="304430080" sldId="354"/>
-        </pc:sldMkLst>
-      </pc:sldChg>
-      <pc:sldChg chg="del">
-        <pc:chgData name="Matthieu De Mari" userId="dfb708c9-d8dc-439f-9a3b-c772bf4a311c" providerId="ADAL" clId="{8EE40018-26BD-4A7B-8D17-70AC8417C2D0}" dt="2022-11-16T06:54:11.293" v="25" actId="47"/>
-        <pc:sldMkLst>
-          <pc:docMk/>
-          <pc:sldMk cId="2530765258" sldId="355"/>
-        </pc:sldMkLst>
-      </pc:sldChg>
-      <pc:sldChg chg="del">
-        <pc:chgData name="Matthieu De Mari" userId="dfb708c9-d8dc-439f-9a3b-c772bf4a311c" providerId="ADAL" clId="{8EE40018-26BD-4A7B-8D17-70AC8417C2D0}" dt="2022-11-16T06:54:11.293" v="25" actId="47"/>
-        <pc:sldMkLst>
-          <pc:docMk/>
-          <pc:sldMk cId="2900566505" sldId="356"/>
-        </pc:sldMkLst>
-      </pc:sldChg>
-      <pc:sldChg chg="del">
-        <pc:chgData name="Matthieu De Mari" userId="dfb708c9-d8dc-439f-9a3b-c772bf4a311c" providerId="ADAL" clId="{8EE40018-26BD-4A7B-8D17-70AC8417C2D0}" dt="2022-11-16T06:54:11.293" v="25" actId="47"/>
-        <pc:sldMkLst>
-          <pc:docMk/>
-          <pc:sldMk cId="151041797" sldId="357"/>
-        </pc:sldMkLst>
-      </pc:sldChg>
-      <pc:sldChg chg="del">
-        <pc:chgData name="Matthieu De Mari" userId="dfb708c9-d8dc-439f-9a3b-c772bf4a311c" providerId="ADAL" clId="{8EE40018-26BD-4A7B-8D17-70AC8417C2D0}" dt="2022-11-16T06:54:11.293" v="25" actId="47"/>
-        <pc:sldMkLst>
-          <pc:docMk/>
-          <pc:sldMk cId="2341017383" sldId="358"/>
-        </pc:sldMkLst>
-      </pc:sldChg>
-      <pc:sldChg chg="del">
-        <pc:chgData name="Matthieu De Mari" userId="dfb708c9-d8dc-439f-9a3b-c772bf4a311c" providerId="ADAL" clId="{8EE40018-26BD-4A7B-8D17-70AC8417C2D0}" dt="2022-11-16T06:54:12.971" v="26" actId="47"/>
-        <pc:sldMkLst>
-          <pc:docMk/>
-          <pc:sldMk cId="843036564" sldId="360"/>
-        </pc:sldMkLst>
-      </pc:sldChg>
-      <pc:sldChg chg="del">
-        <pc:chgData name="Matthieu De Mari" userId="dfb708c9-d8dc-439f-9a3b-c772bf4a311c" providerId="ADAL" clId="{8EE40018-26BD-4A7B-8D17-70AC8417C2D0}" dt="2022-11-16T06:54:12.971" v="26" actId="47"/>
-        <pc:sldMkLst>
-          <pc:docMk/>
-          <pc:sldMk cId="1543635220" sldId="363"/>
-        </pc:sldMkLst>
-      </pc:sldChg>
-      <pc:sldChg chg="del">
-        <pc:chgData name="Matthieu De Mari" userId="dfb708c9-d8dc-439f-9a3b-c772bf4a311c" providerId="ADAL" clId="{8EE40018-26BD-4A7B-8D17-70AC8417C2D0}" dt="2022-11-16T06:54:12.971" v="26" actId="47"/>
-        <pc:sldMkLst>
-          <pc:docMk/>
-          <pc:sldMk cId="467323081" sldId="364"/>
-        </pc:sldMkLst>
-      </pc:sldChg>
-      <pc:sldChg chg="del">
-        <pc:chgData name="Matthieu De Mari" userId="dfb708c9-d8dc-439f-9a3b-c772bf4a311c" providerId="ADAL" clId="{8EE40018-26BD-4A7B-8D17-70AC8417C2D0}" dt="2022-11-16T06:54:12.971" v="26" actId="47"/>
-        <pc:sldMkLst>
-          <pc:docMk/>
-          <pc:sldMk cId="2557491043" sldId="365"/>
-        </pc:sldMkLst>
-      </pc:sldChg>
-      <pc:sldChg chg="del">
-        <pc:chgData name="Matthieu De Mari" userId="dfb708c9-d8dc-439f-9a3b-c772bf4a311c" providerId="ADAL" clId="{8EE40018-26BD-4A7B-8D17-70AC8417C2D0}" dt="2022-11-16T06:54:12.971" v="26" actId="47"/>
-        <pc:sldMkLst>
-          <pc:docMk/>
-          <pc:sldMk cId="30137941" sldId="366"/>
-        </pc:sldMkLst>
-      </pc:sldChg>
-      <pc:sldChg chg="del">
-        <pc:chgData name="Matthieu De Mari" userId="dfb708c9-d8dc-439f-9a3b-c772bf4a311c" providerId="ADAL" clId="{8EE40018-26BD-4A7B-8D17-70AC8417C2D0}" dt="2022-11-16T06:54:12.971" v="26" actId="47"/>
-        <pc:sldMkLst>
-          <pc:docMk/>
-          <pc:sldMk cId="2759705435" sldId="367"/>
-        </pc:sldMkLst>
-      </pc:sldChg>
-      <pc:sldChg chg="del">
-        <pc:chgData name="Matthieu De Mari" userId="dfb708c9-d8dc-439f-9a3b-c772bf4a311c" providerId="ADAL" clId="{8EE40018-26BD-4A7B-8D17-70AC8417C2D0}" dt="2022-11-16T06:54:12.971" v="26" actId="47"/>
-        <pc:sldMkLst>
-          <pc:docMk/>
-          <pc:sldMk cId="3578341878" sldId="368"/>
-        </pc:sldMkLst>
-      </pc:sldChg>
-      <pc:sldChg chg="del">
-        <pc:chgData name="Matthieu De Mari" userId="dfb708c9-d8dc-439f-9a3b-c772bf4a311c" providerId="ADAL" clId="{8EE40018-26BD-4A7B-8D17-70AC8417C2D0}" dt="2022-11-16T06:54:12.971" v="26" actId="47"/>
-        <pc:sldMkLst>
-          <pc:docMk/>
-          <pc:sldMk cId="2979488587" sldId="369"/>
-        </pc:sldMkLst>
-      </pc:sldChg>
-      <pc:sldChg chg="del">
-        <pc:chgData name="Matthieu De Mari" userId="dfb708c9-d8dc-439f-9a3b-c772bf4a311c" providerId="ADAL" clId="{8EE40018-26BD-4A7B-8D17-70AC8417C2D0}" dt="2022-11-16T06:54:12.971" v="26" actId="47"/>
-        <pc:sldMkLst>
-          <pc:docMk/>
-          <pc:sldMk cId="954723006" sldId="371"/>
-        </pc:sldMkLst>
-      </pc:sldChg>
-      <pc:sldChg chg="del">
-        <pc:chgData name="Matthieu De Mari" userId="dfb708c9-d8dc-439f-9a3b-c772bf4a311c" providerId="ADAL" clId="{8EE40018-26BD-4A7B-8D17-70AC8417C2D0}" dt="2022-11-16T06:54:12.971" v="26" actId="47"/>
-        <pc:sldMkLst>
-          <pc:docMk/>
-          <pc:sldMk cId="1007393074" sldId="372"/>
-        </pc:sldMkLst>
-      </pc:sldChg>
-      <pc:sldChg chg="del">
-        <pc:chgData name="Matthieu De Mari" userId="dfb708c9-d8dc-439f-9a3b-c772bf4a311c" providerId="ADAL" clId="{8EE40018-26BD-4A7B-8D17-70AC8417C2D0}" dt="2022-11-16T06:54:12.971" v="26" actId="47"/>
-        <pc:sldMkLst>
-          <pc:docMk/>
-          <pc:sldMk cId="4039951211" sldId="373"/>
-        </pc:sldMkLst>
-      </pc:sldChg>
-      <pc:sldChg chg="del">
-        <pc:chgData name="Matthieu De Mari" userId="dfb708c9-d8dc-439f-9a3b-c772bf4a311c" providerId="ADAL" clId="{8EE40018-26BD-4A7B-8D17-70AC8417C2D0}" dt="2022-11-16T06:54:12.971" v="26" actId="47"/>
-        <pc:sldMkLst>
-          <pc:docMk/>
-          <pc:sldMk cId="3074715825" sldId="374"/>
-        </pc:sldMkLst>
-      </pc:sldChg>
-      <pc:sldChg chg="del">
-        <pc:chgData name="Matthieu De Mari" userId="dfb708c9-d8dc-439f-9a3b-c772bf4a311c" providerId="ADAL" clId="{8EE40018-26BD-4A7B-8D17-70AC8417C2D0}" dt="2022-11-16T06:54:13.895" v="27" actId="47"/>
-        <pc:sldMkLst>
-          <pc:docMk/>
-          <pc:sldMk cId="1113800729" sldId="376"/>
-        </pc:sldMkLst>
-      </pc:sldChg>
-      <pc:sldChg chg="modSp mod">
-        <pc:chgData name="Matthieu De Mari" userId="dfb708c9-d8dc-439f-9a3b-c772bf4a311c" providerId="ADAL" clId="{8EE40018-26BD-4A7B-8D17-70AC8417C2D0}" dt="2022-11-16T06:53:49.572" v="12" actId="20577"/>
-        <pc:sldMkLst>
-          <pc:docMk/>
-          <pc:sldMk cId="1040156172" sldId="377"/>
-        </pc:sldMkLst>
-      </pc:sldChg>
-      <pc:sldChg chg="del">
-        <pc:chgData name="Matthieu De Mari" userId="dfb708c9-d8dc-439f-9a3b-c772bf4a311c" providerId="ADAL" clId="{8EE40018-26BD-4A7B-8D17-70AC8417C2D0}" dt="2022-11-16T06:54:08.404" v="23" actId="47"/>
-        <pc:sldMkLst>
-          <pc:docMk/>
-          <pc:sldMk cId="2236780210" sldId="378"/>
-        </pc:sldMkLst>
-      </pc:sldChg>
-      <pc:sldChg chg="del">
-        <pc:chgData name="Matthieu De Mari" userId="dfb708c9-d8dc-439f-9a3b-c772bf4a311c" providerId="ADAL" clId="{8EE40018-26BD-4A7B-8D17-70AC8417C2D0}" dt="2022-11-16T06:54:09.190" v="24" actId="47"/>
-        <pc:sldMkLst>
-          <pc:docMk/>
-          <pc:sldMk cId="3686470996" sldId="379"/>
-        </pc:sldMkLst>
-      </pc:sldChg>
-      <pc:sldChg chg="del">
-        <pc:chgData name="Matthieu De Mari" userId="dfb708c9-d8dc-439f-9a3b-c772bf4a311c" providerId="ADAL" clId="{8EE40018-26BD-4A7B-8D17-70AC8417C2D0}" dt="2022-11-16T06:54:13.895" v="27" actId="47"/>
-        <pc:sldMkLst>
-          <pc:docMk/>
-          <pc:sldMk cId="2665897880" sldId="380"/>
-        </pc:sldMkLst>
-      </pc:sldChg>
-      <pc:sldChg chg="del">
-        <pc:chgData name="Matthieu De Mari" userId="dfb708c9-d8dc-439f-9a3b-c772bf4a311c" providerId="ADAL" clId="{8EE40018-26BD-4A7B-8D17-70AC8417C2D0}" dt="2022-11-16T06:54:42.327" v="41" actId="47"/>
-        <pc:sldMkLst>
-          <pc:docMk/>
-          <pc:sldMk cId="1174542860" sldId="381"/>
-        </pc:sldMkLst>
-      </pc:sldChg>
-      <pc:sldChg chg="del">
-        <pc:chgData name="Matthieu De Mari" userId="dfb708c9-d8dc-439f-9a3b-c772bf4a311c" providerId="ADAL" clId="{8EE40018-26BD-4A7B-8D17-70AC8417C2D0}" dt="2022-11-16T06:54:07.519" v="22" actId="47"/>
-        <pc:sldMkLst>
-          <pc:docMk/>
-          <pc:sldMk cId="370210852" sldId="382"/>
-        </pc:sldMkLst>
-      </pc:sldChg>
-      <pc:sldChg chg="del">
-        <pc:chgData name="Matthieu De Mari" userId="dfb708c9-d8dc-439f-9a3b-c772bf4a311c" providerId="ADAL" clId="{8EE40018-26BD-4A7B-8D17-70AC8417C2D0}" dt="2022-11-16T06:54:06.554" v="21" actId="47"/>
-        <pc:sldMkLst>
-          <pc:docMk/>
-          <pc:sldMk cId="3654187078" sldId="383"/>
-        </pc:sldMkLst>
-      </pc:sldChg>
-      <pc:sldChg chg="del">
-        <pc:chgData name="Matthieu De Mari" userId="dfb708c9-d8dc-439f-9a3b-c772bf4a311c" providerId="ADAL" clId="{8EE40018-26BD-4A7B-8D17-70AC8417C2D0}" dt="2022-11-16T06:54:11.293" v="25" actId="47"/>
-        <pc:sldMkLst>
-          <pc:docMk/>
-          <pc:sldMk cId="1145882535" sldId="384"/>
-        </pc:sldMkLst>
-      </pc:sldChg>
-      <pc:sldChg chg="del">
-        <pc:chgData name="Matthieu De Mari" userId="dfb708c9-d8dc-439f-9a3b-c772bf4a311c" providerId="ADAL" clId="{8EE40018-26BD-4A7B-8D17-70AC8417C2D0}" dt="2022-11-16T06:54:12.971" v="26" actId="47"/>
-        <pc:sldMkLst>
-          <pc:docMk/>
-          <pc:sldMk cId="2609241577" sldId="385"/>
-        </pc:sldMkLst>
-      </pc:sldChg>
-      <pc:sldChg chg="del">
-        <pc:chgData name="Matthieu De Mari" userId="dfb708c9-d8dc-439f-9a3b-c772bf4a311c" providerId="ADAL" clId="{8EE40018-26BD-4A7B-8D17-70AC8417C2D0}" dt="2022-11-16T06:54:13.895" v="27" actId="47"/>
-        <pc:sldMkLst>
-          <pc:docMk/>
-          <pc:sldMk cId="2448415676" sldId="387"/>
-        </pc:sldMkLst>
-      </pc:sldChg>
-      <pc:sldChg chg="del">
-        <pc:chgData name="Matthieu De Mari" userId="dfb708c9-d8dc-439f-9a3b-c772bf4a311c" providerId="ADAL" clId="{8EE40018-26BD-4A7B-8D17-70AC8417C2D0}" dt="2022-11-16T06:54:13.895" v="27" actId="47"/>
-        <pc:sldMkLst>
-          <pc:docMk/>
-          <pc:sldMk cId="993695443" sldId="388"/>
-        </pc:sldMkLst>
-      </pc:sldChg>
-      <pc:sldChg chg="del">
-        <pc:chgData name="Matthieu De Mari" userId="dfb708c9-d8dc-439f-9a3b-c772bf4a311c" providerId="ADAL" clId="{8EE40018-26BD-4A7B-8D17-70AC8417C2D0}" dt="2022-11-16T06:54:13.895" v="27" actId="47"/>
-        <pc:sldMkLst>
-          <pc:docMk/>
-          <pc:sldMk cId="3051477034" sldId="389"/>
-        </pc:sldMkLst>
-      </pc:sldChg>
-      <pc:sldChg chg="del">
-        <pc:chgData name="Matthieu De Mari" userId="dfb708c9-d8dc-439f-9a3b-c772bf4a311c" providerId="ADAL" clId="{8EE40018-26BD-4A7B-8D17-70AC8417C2D0}" dt="2022-11-16T06:54:13.895" v="27" actId="47"/>
-        <pc:sldMkLst>
-          <pc:docMk/>
-          <pc:sldMk cId="2663658166" sldId="390"/>
-        </pc:sldMkLst>
-      </pc:sldChg>
-      <pc:sldChg chg="del">
-        <pc:chgData name="Matthieu De Mari" userId="dfb708c9-d8dc-439f-9a3b-c772bf4a311c" providerId="ADAL" clId="{8EE40018-26BD-4A7B-8D17-70AC8417C2D0}" dt="2022-11-16T06:54:39.791" v="40" actId="47"/>
-        <pc:sldMkLst>
-          <pc:docMk/>
-          <pc:sldMk cId="1682911312" sldId="391"/>
-        </pc:sldMkLst>
-      </pc:sldChg>
-    </pc:docChg>
-  </pc:docChgLst>
-  <pc:docChgLst>
-    <pc:chgData name="Matthieu De Mari" userId="dfb708c9-d8dc-439f-9a3b-c772bf4a311c" providerId="ADAL" clId="{1002CE28-12E1-453F-8E06-90F32FAF9697}"/>
-    <pc:docChg chg="mod delSld modSld sldOrd modMainMaster delSection modSection">
-      <pc:chgData name="Matthieu De Mari" userId="dfb708c9-d8dc-439f-9a3b-c772bf4a311c" providerId="ADAL" clId="{1002CE28-12E1-453F-8E06-90F32FAF9697}" dt="2022-10-19T06:32:13.307" v="17" actId="20577"/>
-      <pc:docMkLst>
-        <pc:docMk/>
-      </pc:docMkLst>
-      <pc:sldChg chg="modSp del mod">
-        <pc:chgData name="Matthieu De Mari" userId="dfb708c9-d8dc-439f-9a3b-c772bf4a311c" providerId="ADAL" clId="{1002CE28-12E1-453F-8E06-90F32FAF9697}" dt="2022-10-19T06:32:10.067" v="8" actId="47"/>
-        <pc:sldMkLst>
-          <pc:docMk/>
-          <pc:sldMk cId="4221035150" sldId="256"/>
-        </pc:sldMkLst>
-      </pc:sldChg>
-      <pc:sldChg chg="del">
-        <pc:chgData name="Matthieu De Mari" userId="dfb708c9-d8dc-439f-9a3b-c772bf4a311c" providerId="ADAL" clId="{1002CE28-12E1-453F-8E06-90F32FAF9697}" dt="2022-10-19T06:32:06.571" v="5" actId="47"/>
-        <pc:sldMkLst>
-          <pc:docMk/>
-          <pc:sldMk cId="2169851104" sldId="258"/>
-        </pc:sldMkLst>
-      </pc:sldChg>
-      <pc:sldChg chg="del">
-        <pc:chgData name="Matthieu De Mari" userId="dfb708c9-d8dc-439f-9a3b-c772bf4a311c" providerId="ADAL" clId="{1002CE28-12E1-453F-8E06-90F32FAF9697}" dt="2022-10-19T06:32:06.571" v="5" actId="47"/>
-        <pc:sldMkLst>
-          <pc:docMk/>
-          <pc:sldMk cId="1814682152" sldId="259"/>
-        </pc:sldMkLst>
-      </pc:sldChg>
-      <pc:sldChg chg="del">
-        <pc:chgData name="Matthieu De Mari" userId="dfb708c9-d8dc-439f-9a3b-c772bf4a311c" providerId="ADAL" clId="{1002CE28-12E1-453F-8E06-90F32FAF9697}" dt="2022-10-19T06:32:06.571" v="5" actId="47"/>
-        <pc:sldMkLst>
-          <pc:docMk/>
-          <pc:sldMk cId="753975277" sldId="260"/>
-        </pc:sldMkLst>
-      </pc:sldChg>
-      <pc:sldChg chg="del">
-        <pc:chgData name="Matthieu De Mari" userId="dfb708c9-d8dc-439f-9a3b-c772bf4a311c" providerId="ADAL" clId="{1002CE28-12E1-453F-8E06-90F32FAF9697}" dt="2022-10-19T06:32:06.571" v="5" actId="47"/>
-        <pc:sldMkLst>
-          <pc:docMk/>
-          <pc:sldMk cId="968033501" sldId="268"/>
-        </pc:sldMkLst>
-      </pc:sldChg>
-      <pc:sldChg chg="modSp mod ord">
-        <pc:chgData name="Matthieu De Mari" userId="dfb708c9-d8dc-439f-9a3b-c772bf4a311c" providerId="ADAL" clId="{1002CE28-12E1-453F-8E06-90F32FAF9697}" dt="2022-10-19T06:32:13.307" v="17" actId="20577"/>
-        <pc:sldMkLst>
-          <pc:docMk/>
-          <pc:sldMk cId="1040156172" sldId="377"/>
-        </pc:sldMkLst>
-      </pc:sldChg>
-      <pc:sldMasterChg chg="addSp mod">
-        <pc:chgData name="Matthieu De Mari" userId="dfb708c9-d8dc-439f-9a3b-c772bf4a311c" providerId="ADAL" clId="{1002CE28-12E1-453F-8E06-90F32FAF9697}" dt="2022-10-19T06:30:58.618" v="0" actId="33475"/>
-        <pc:sldMasterMkLst>
-          <pc:docMk/>
-          <pc:sldMasterMk cId="2168708284" sldId="2147483648"/>
-        </pc:sldMasterMkLst>
-      </pc:sldMasterChg>
-    </pc:docChg>
-  </pc:docChgLst>
-  <pc:docChgLst>
-    <pc:chgData name="Matthieu De Mari" userId="dfb708c9-d8dc-439f-9a3b-c772bf4a311c" providerId="ADAL" clId="{403567CB-61B7-4D72-87CB-85A35F135302}"/>
-    <pc:docChg chg="undo custSel addSld delSld modSld sldOrd addSection delSection modSection">
-      <pc:chgData name="Matthieu De Mari" userId="dfb708c9-d8dc-439f-9a3b-c772bf4a311c" providerId="ADAL" clId="{403567CB-61B7-4D72-87CB-85A35F135302}" dt="2023-02-28T06:18:00.125" v="363" actId="207"/>
-      <pc:docMkLst>
-        <pc:docMk/>
-      </pc:docMkLst>
-      <pc:sldChg chg="modSp mod">
-        <pc:chgData name="Matthieu De Mari" userId="dfb708c9-d8dc-439f-9a3b-c772bf4a311c" providerId="ADAL" clId="{403567CB-61B7-4D72-87CB-85A35F135302}" dt="2023-02-28T06:14:17.791" v="215" actId="20577"/>
-        <pc:sldMkLst>
-          <pc:docMk/>
-          <pc:sldMk cId="1036081419" sldId="346"/>
-        </pc:sldMkLst>
-      </pc:sldChg>
-      <pc:sldChg chg="del">
-        <pc:chgData name="Matthieu De Mari" userId="dfb708c9-d8dc-439f-9a3b-c772bf4a311c" providerId="ADAL" clId="{403567CB-61B7-4D72-87CB-85A35F135302}" dt="2023-02-26T09:44:35.919" v="52" actId="47"/>
-        <pc:sldMkLst>
-          <pc:docMk/>
-          <pc:sldMk cId="1040156172" sldId="377"/>
-        </pc:sldMkLst>
-      </pc:sldChg>
-      <pc:sldChg chg="del">
-        <pc:chgData name="Matthieu De Mari" userId="dfb708c9-d8dc-439f-9a3b-c772bf4a311c" providerId="ADAL" clId="{403567CB-61B7-4D72-87CB-85A35F135302}" dt="2023-02-26T09:43:40.755" v="1" actId="47"/>
-        <pc:sldMkLst>
-          <pc:docMk/>
-          <pc:sldMk cId="1119657896" sldId="378"/>
-        </pc:sldMkLst>
-      </pc:sldChg>
-      <pc:sldChg chg="del">
-        <pc:chgData name="Matthieu De Mari" userId="dfb708c9-d8dc-439f-9a3b-c772bf4a311c" providerId="ADAL" clId="{403567CB-61B7-4D72-87CB-85A35F135302}" dt="2023-02-26T09:43:39.694" v="0" actId="47"/>
-        <pc:sldMkLst>
-          <pc:docMk/>
-          <pc:sldMk cId="3946144614" sldId="379"/>
-        </pc:sldMkLst>
-      </pc:sldChg>
-      <pc:sldChg chg="del">
-        <pc:chgData name="Matthieu De Mari" userId="dfb708c9-d8dc-439f-9a3b-c772bf4a311c" providerId="ADAL" clId="{403567CB-61B7-4D72-87CB-85A35F135302}" dt="2023-02-26T09:43:40.755" v="1" actId="47"/>
-        <pc:sldMkLst>
-          <pc:docMk/>
-          <pc:sldMk cId="2141271085" sldId="380"/>
-        </pc:sldMkLst>
-      </pc:sldChg>
-      <pc:sldChg chg="del">
-        <pc:chgData name="Matthieu De Mari" userId="dfb708c9-d8dc-439f-9a3b-c772bf4a311c" providerId="ADAL" clId="{403567CB-61B7-4D72-87CB-85A35F135302}" dt="2023-02-26T09:43:40.755" v="1" actId="47"/>
-        <pc:sldMkLst>
-          <pc:docMk/>
-          <pc:sldMk cId="1990152231" sldId="381"/>
-        </pc:sldMkLst>
-      </pc:sldChg>
-      <pc:sldChg chg="del">
-        <pc:chgData name="Matthieu De Mari" userId="dfb708c9-d8dc-439f-9a3b-c772bf4a311c" providerId="ADAL" clId="{403567CB-61B7-4D72-87CB-85A35F135302}" dt="2023-02-26T09:43:40.755" v="1" actId="47"/>
-        <pc:sldMkLst>
-          <pc:docMk/>
-          <pc:sldMk cId="356330123" sldId="382"/>
-        </pc:sldMkLst>
-      </pc:sldChg>
-      <pc:sldChg chg="del">
-        <pc:chgData name="Matthieu De Mari" userId="dfb708c9-d8dc-439f-9a3b-c772bf4a311c" providerId="ADAL" clId="{403567CB-61B7-4D72-87CB-85A35F135302}" dt="2023-02-26T09:43:40.755" v="1" actId="47"/>
-        <pc:sldMkLst>
-          <pc:docMk/>
-          <pc:sldMk cId="3535228966" sldId="384"/>
-        </pc:sldMkLst>
-      </pc:sldChg>
-      <pc:sldChg chg="del">
-        <pc:chgData name="Matthieu De Mari" userId="dfb708c9-d8dc-439f-9a3b-c772bf4a311c" providerId="ADAL" clId="{403567CB-61B7-4D72-87CB-85A35F135302}" dt="2023-02-26T09:43:40.755" v="1" actId="47"/>
-        <pc:sldMkLst>
-          <pc:docMk/>
-          <pc:sldMk cId="3334002964" sldId="386"/>
-        </pc:sldMkLst>
-      </pc:sldChg>
-      <pc:sldChg chg="del">
-        <pc:chgData name="Matthieu De Mari" userId="dfb708c9-d8dc-439f-9a3b-c772bf4a311c" providerId="ADAL" clId="{403567CB-61B7-4D72-87CB-85A35F135302}" dt="2023-02-26T09:43:39.694" v="0" actId="47"/>
-        <pc:sldMkLst>
-          <pc:docMk/>
-          <pc:sldMk cId="3292999532" sldId="387"/>
-        </pc:sldMkLst>
-      </pc:sldChg>
-      <pc:sldChg chg="del">
-        <pc:chgData name="Matthieu De Mari" userId="dfb708c9-d8dc-439f-9a3b-c772bf4a311c" providerId="ADAL" clId="{403567CB-61B7-4D72-87CB-85A35F135302}" dt="2023-02-26T09:43:39.694" v="0" actId="47"/>
-        <pc:sldMkLst>
-          <pc:docMk/>
-          <pc:sldMk cId="2586666001" sldId="388"/>
-        </pc:sldMkLst>
-      </pc:sldChg>
-      <pc:sldChg chg="del">
-        <pc:chgData name="Matthieu De Mari" userId="dfb708c9-d8dc-439f-9a3b-c772bf4a311c" providerId="ADAL" clId="{403567CB-61B7-4D72-87CB-85A35F135302}" dt="2023-02-26T09:43:41.767" v="2" actId="47"/>
-        <pc:sldMkLst>
-          <pc:docMk/>
-          <pc:sldMk cId="699795487" sldId="390"/>
-        </pc:sldMkLst>
-      </pc:sldChg>
-      <pc:sldChg chg="del">
-        <pc:chgData name="Matthieu De Mari" userId="dfb708c9-d8dc-439f-9a3b-c772bf4a311c" providerId="ADAL" clId="{403567CB-61B7-4D72-87CB-85A35F135302}" dt="2023-02-26T09:43:42.904" v="3" actId="47"/>
-        <pc:sldMkLst>
-          <pc:docMk/>
-          <pc:sldMk cId="3438165640" sldId="391"/>
-        </pc:sldMkLst>
-      </pc:sldChg>
-      <pc:sldChg chg="del">
-        <pc:chgData name="Matthieu De Mari" userId="dfb708c9-d8dc-439f-9a3b-c772bf4a311c" providerId="ADAL" clId="{403567CB-61B7-4D72-87CB-85A35F135302}" dt="2023-02-26T09:43:42.904" v="3" actId="47"/>
-        <pc:sldMkLst>
-          <pc:docMk/>
-          <pc:sldMk cId="2064353129" sldId="392"/>
-        </pc:sldMkLst>
-      </pc:sldChg>
-      <pc:sldChg chg="del">
-        <pc:chgData name="Matthieu De Mari" userId="dfb708c9-d8dc-439f-9a3b-c772bf4a311c" providerId="ADAL" clId="{403567CB-61B7-4D72-87CB-85A35F135302}" dt="2023-02-26T09:43:41.767" v="2" actId="47"/>
-        <pc:sldMkLst>
-          <pc:docMk/>
-          <pc:sldMk cId="3842187934" sldId="393"/>
-        </pc:sldMkLst>
-      </pc:sldChg>
-      <pc:sldChg chg="del">
-        <pc:chgData name="Matthieu De Mari" userId="dfb708c9-d8dc-439f-9a3b-c772bf4a311c" providerId="ADAL" clId="{403567CB-61B7-4D72-87CB-85A35F135302}" dt="2023-02-26T09:43:41.767" v="2" actId="47"/>
-        <pc:sldMkLst>
-          <pc:docMk/>
-          <pc:sldMk cId="781649533" sldId="394"/>
-        </pc:sldMkLst>
-      </pc:sldChg>
-      <pc:sldChg chg="del">
-        <pc:chgData name="Matthieu De Mari" userId="dfb708c9-d8dc-439f-9a3b-c772bf4a311c" providerId="ADAL" clId="{403567CB-61B7-4D72-87CB-85A35F135302}" dt="2023-02-26T09:43:41.767" v="2" actId="47"/>
-        <pc:sldMkLst>
-          <pc:docMk/>
-          <pc:sldMk cId="2316878562" sldId="395"/>
-        </pc:sldMkLst>
-      </pc:sldChg>
-      <pc:sldChg chg="del">
-        <pc:chgData name="Matthieu De Mari" userId="dfb708c9-d8dc-439f-9a3b-c772bf4a311c" providerId="ADAL" clId="{403567CB-61B7-4D72-87CB-85A35F135302}" dt="2023-02-26T09:43:42.904" v="3" actId="47"/>
-        <pc:sldMkLst>
-          <pc:docMk/>
-          <pc:sldMk cId="1870305378" sldId="396"/>
-        </pc:sldMkLst>
-      </pc:sldChg>
-      <pc:sldChg chg="del">
-        <pc:chgData name="Matthieu De Mari" userId="dfb708c9-d8dc-439f-9a3b-c772bf4a311c" providerId="ADAL" clId="{403567CB-61B7-4D72-87CB-85A35F135302}" dt="2023-02-26T09:43:42.904" v="3" actId="47"/>
-        <pc:sldMkLst>
-          <pc:docMk/>
-          <pc:sldMk cId="1413966137" sldId="397"/>
-        </pc:sldMkLst>
-      </pc:sldChg>
-      <pc:sldChg chg="del">
-        <pc:chgData name="Matthieu De Mari" userId="dfb708c9-d8dc-439f-9a3b-c772bf4a311c" providerId="ADAL" clId="{403567CB-61B7-4D72-87CB-85A35F135302}" dt="2023-02-26T09:43:44.047" v="4" actId="47"/>
-        <pc:sldMkLst>
-          <pc:docMk/>
-          <pc:sldMk cId="2506346402" sldId="398"/>
-        </pc:sldMkLst>
-      </pc:sldChg>
-      <pc:sldChg chg="del">
-        <pc:chgData name="Matthieu De Mari" userId="dfb708c9-d8dc-439f-9a3b-c772bf4a311c" providerId="ADAL" clId="{403567CB-61B7-4D72-87CB-85A35F135302}" dt="2023-02-26T09:43:44.047" v="4" actId="47"/>
-        <pc:sldMkLst>
-          <pc:docMk/>
-          <pc:sldMk cId="1835834167" sldId="399"/>
-        </pc:sldMkLst>
-      </pc:sldChg>
-      <pc:sldChg chg="del">
-        <pc:chgData name="Matthieu De Mari" userId="dfb708c9-d8dc-439f-9a3b-c772bf4a311c" providerId="ADAL" clId="{403567CB-61B7-4D72-87CB-85A35F135302}" dt="2023-02-26T09:43:42.904" v="3" actId="47"/>
-        <pc:sldMkLst>
-          <pc:docMk/>
-          <pc:sldMk cId="4048808033" sldId="400"/>
-        </pc:sldMkLst>
-      </pc:sldChg>
-      <pc:sldChg chg="del">
-        <pc:chgData name="Matthieu De Mari" userId="dfb708c9-d8dc-439f-9a3b-c772bf4a311c" providerId="ADAL" clId="{403567CB-61B7-4D72-87CB-85A35F135302}" dt="2023-02-26T09:43:44.047" v="4" actId="47"/>
-        <pc:sldMkLst>
-          <pc:docMk/>
-          <pc:sldMk cId="736987387" sldId="402"/>
-        </pc:sldMkLst>
-      </pc:sldChg>
-      <pc:sldChg chg="del">
-        <pc:chgData name="Matthieu De Mari" userId="dfb708c9-d8dc-439f-9a3b-c772bf4a311c" providerId="ADAL" clId="{403567CB-61B7-4D72-87CB-85A35F135302}" dt="2023-02-26T09:43:44.047" v="4" actId="47"/>
-        <pc:sldMkLst>
-          <pc:docMk/>
-          <pc:sldMk cId="105113267" sldId="403"/>
-        </pc:sldMkLst>
-      </pc:sldChg>
-      <pc:sldChg chg="del">
-        <pc:chgData name="Matthieu De Mari" userId="dfb708c9-d8dc-439f-9a3b-c772bf4a311c" providerId="ADAL" clId="{403567CB-61B7-4D72-87CB-85A35F135302}" dt="2023-02-26T09:44:31.317" v="49" actId="47"/>
-        <pc:sldMkLst>
-          <pc:docMk/>
-          <pc:sldMk cId="1663617131" sldId="404"/>
-        </pc:sldMkLst>
-      </pc:sldChg>
-      <pc:sldChg chg="del">
-        <pc:chgData name="Matthieu De Mari" userId="dfb708c9-d8dc-439f-9a3b-c772bf4a311c" providerId="ADAL" clId="{403567CB-61B7-4D72-87CB-85A35F135302}" dt="2023-02-26T09:43:45.724" v="5" actId="47"/>
-        <pc:sldMkLst>
-          <pc:docMk/>
-          <pc:sldMk cId="2755235485" sldId="405"/>
-        </pc:sldMkLst>
-      </pc:sldChg>
-      <pc:sldChg chg="del">
-        <pc:chgData name="Matthieu De Mari" userId="dfb708c9-d8dc-439f-9a3b-c772bf4a311c" providerId="ADAL" clId="{403567CB-61B7-4D72-87CB-85A35F135302}" dt="2023-02-26T09:43:49.943" v="7" actId="47"/>
-        <pc:sldMkLst>
-          <pc:docMk/>
-          <pc:sldMk cId="2781272903" sldId="406"/>
-        </pc:sldMkLst>
-      </pc:sldChg>
-      <pc:sldChg chg="del">
-        <pc:chgData name="Matthieu De Mari" userId="dfb708c9-d8dc-439f-9a3b-c772bf4a311c" providerId="ADAL" clId="{403567CB-61B7-4D72-87CB-85A35F135302}" dt="2023-02-26T09:44:31.317" v="49" actId="47"/>
-        <pc:sldMkLst>
-          <pc:docMk/>
-          <pc:sldMk cId="3078664734" sldId="574"/>
-        </pc:sldMkLst>
-      </pc:sldChg>
-      <pc:sldChg chg="del">
-        <pc:chgData name="Matthieu De Mari" userId="dfb708c9-d8dc-439f-9a3b-c772bf4a311c" providerId="ADAL" clId="{403567CB-61B7-4D72-87CB-85A35F135302}" dt="2023-02-26T09:43:45.724" v="5" actId="47"/>
-        <pc:sldMkLst>
-          <pc:docMk/>
-          <pc:sldMk cId="3542276236" sldId="575"/>
-        </pc:sldMkLst>
-      </pc:sldChg>
-      <pc:sldChg chg="del">
-        <pc:chgData name="Matthieu De Mari" userId="dfb708c9-d8dc-439f-9a3b-c772bf4a311c" providerId="ADAL" clId="{403567CB-61B7-4D72-87CB-85A35F135302}" dt="2023-02-26T09:43:45.724" v="5" actId="47"/>
-        <pc:sldMkLst>
-          <pc:docMk/>
-          <pc:sldMk cId="1343460073" sldId="576"/>
-        </pc:sldMkLst>
-      </pc:sldChg>
-      <pc:sldChg chg="del">
-        <pc:chgData name="Matthieu De Mari" userId="dfb708c9-d8dc-439f-9a3b-c772bf4a311c" providerId="ADAL" clId="{403567CB-61B7-4D72-87CB-85A35F135302}" dt="2023-02-26T09:43:45.724" v="5" actId="47"/>
-        <pc:sldMkLst>
-          <pc:docMk/>
-          <pc:sldMk cId="3821622736" sldId="577"/>
-        </pc:sldMkLst>
-      </pc:sldChg>
-      <pc:sldChg chg="del">
-        <pc:chgData name="Matthieu De Mari" userId="dfb708c9-d8dc-439f-9a3b-c772bf4a311c" providerId="ADAL" clId="{403567CB-61B7-4D72-87CB-85A35F135302}" dt="2023-02-26T09:43:47.843" v="6" actId="47"/>
-        <pc:sldMkLst>
-          <pc:docMk/>
-          <pc:sldMk cId="3867797258" sldId="578"/>
-        </pc:sldMkLst>
-      </pc:sldChg>
-      <pc:sldChg chg="del">
-        <pc:chgData name="Matthieu De Mari" userId="dfb708c9-d8dc-439f-9a3b-c772bf4a311c" providerId="ADAL" clId="{403567CB-61B7-4D72-87CB-85A35F135302}" dt="2023-02-26T09:43:45.724" v="5" actId="47"/>
-        <pc:sldMkLst>
-          <pc:docMk/>
-          <pc:sldMk cId="884373967" sldId="580"/>
-        </pc:sldMkLst>
-      </pc:sldChg>
-      <pc:sldChg chg="del">
-        <pc:chgData name="Matthieu De Mari" userId="dfb708c9-d8dc-439f-9a3b-c772bf4a311c" providerId="ADAL" clId="{403567CB-61B7-4D72-87CB-85A35F135302}" dt="2023-02-26T09:43:47.843" v="6" actId="47"/>
-        <pc:sldMkLst>
-          <pc:docMk/>
-          <pc:sldMk cId="4262229869" sldId="581"/>
-        </pc:sldMkLst>
-      </pc:sldChg>
-      <pc:sldChg chg="del">
-        <pc:chgData name="Matthieu De Mari" userId="dfb708c9-d8dc-439f-9a3b-c772bf4a311c" providerId="ADAL" clId="{403567CB-61B7-4D72-87CB-85A35F135302}" dt="2023-02-26T09:43:49.943" v="7" actId="47"/>
-        <pc:sldMkLst>
-          <pc:docMk/>
-          <pc:sldMk cId="445144023" sldId="582"/>
-        </pc:sldMkLst>
-      </pc:sldChg>
-      <pc:sldChg chg="del">
-        <pc:chgData name="Matthieu De Mari" userId="dfb708c9-d8dc-439f-9a3b-c772bf4a311c" providerId="ADAL" clId="{403567CB-61B7-4D72-87CB-85A35F135302}" dt="2023-02-26T09:43:49.943" v="7" actId="47"/>
-        <pc:sldMkLst>
-          <pc:docMk/>
-          <pc:sldMk cId="1327648275" sldId="583"/>
-        </pc:sldMkLst>
-      </pc:sldChg>
-      <pc:sldChg chg="del">
-        <pc:chgData name="Matthieu De Mari" userId="dfb708c9-d8dc-439f-9a3b-c772bf4a311c" providerId="ADAL" clId="{403567CB-61B7-4D72-87CB-85A35F135302}" dt="2023-02-26T09:43:49.943" v="7" actId="47"/>
-        <pc:sldMkLst>
-          <pc:docMk/>
-          <pc:sldMk cId="1700821507" sldId="584"/>
-        </pc:sldMkLst>
-      </pc:sldChg>
-      <pc:sldChg chg="del">
-        <pc:chgData name="Matthieu De Mari" userId="dfb708c9-d8dc-439f-9a3b-c772bf4a311c" providerId="ADAL" clId="{403567CB-61B7-4D72-87CB-85A35F135302}" dt="2023-02-26T09:43:49.943" v="7" actId="47"/>
-        <pc:sldMkLst>
-          <pc:docMk/>
-          <pc:sldMk cId="2986323806" sldId="585"/>
-        </pc:sldMkLst>
-      </pc:sldChg>
-      <pc:sldChg chg="del">
-        <pc:chgData name="Matthieu De Mari" userId="dfb708c9-d8dc-439f-9a3b-c772bf4a311c" providerId="ADAL" clId="{403567CB-61B7-4D72-87CB-85A35F135302}" dt="2023-02-26T09:43:49.943" v="7" actId="47"/>
-        <pc:sldMkLst>
-          <pc:docMk/>
-          <pc:sldMk cId="2080496661" sldId="586"/>
-        </pc:sldMkLst>
-      </pc:sldChg>
-      <pc:sldChg chg="del">
-        <pc:chgData name="Matthieu De Mari" userId="dfb708c9-d8dc-439f-9a3b-c772bf4a311c" providerId="ADAL" clId="{403567CB-61B7-4D72-87CB-85A35F135302}" dt="2023-02-26T09:44:31.317" v="49" actId="47"/>
-        <pc:sldMkLst>
-          <pc:docMk/>
-          <pc:sldMk cId="2743590117" sldId="588"/>
-        </pc:sldMkLst>
-      </pc:sldChg>
-      <pc:sldChg chg="del">
-        <pc:chgData name="Matthieu De Mari" userId="dfb708c9-d8dc-439f-9a3b-c772bf4a311c" providerId="ADAL" clId="{403567CB-61B7-4D72-87CB-85A35F135302}" dt="2023-02-26T09:44:31.317" v="49" actId="47"/>
-        <pc:sldMkLst>
-          <pc:docMk/>
-          <pc:sldMk cId="1885554493" sldId="589"/>
-        </pc:sldMkLst>
-      </pc:sldChg>
-      <pc:sldChg chg="ord">
-        <pc:chgData name="Matthieu De Mari" userId="dfb708c9-d8dc-439f-9a3b-c772bf4a311c" providerId="ADAL" clId="{403567CB-61B7-4D72-87CB-85A35F135302}" dt="2023-02-26T09:44:34.303" v="51"/>
-        <pc:sldMkLst>
-          <pc:docMk/>
-          <pc:sldMk cId="37425589" sldId="591"/>
-        </pc:sldMkLst>
-      </pc:sldChg>
-      <pc:sldChg chg="del">
-        <pc:chgData name="Matthieu De Mari" userId="dfb708c9-d8dc-439f-9a3b-c772bf4a311c" providerId="ADAL" clId="{403567CB-61B7-4D72-87CB-85A35F135302}" dt="2023-02-26T09:43:49.943" v="7" actId="47"/>
-        <pc:sldMkLst>
-          <pc:docMk/>
-          <pc:sldMk cId="3292545768" sldId="596"/>
-        </pc:sldMkLst>
-      </pc:sldChg>
-      <pc:sldChg chg="del">
-        <pc:chgData name="Matthieu De Mari" userId="dfb708c9-d8dc-439f-9a3b-c772bf4a311c" providerId="ADAL" clId="{403567CB-61B7-4D72-87CB-85A35F135302}" dt="2023-02-28T06:08:27.444" v="55" actId="47"/>
-        <pc:sldMkLst>
-          <pc:docMk/>
-          <pc:sldMk cId="337788125" sldId="597"/>
-        </pc:sldMkLst>
-      </pc:sldChg>
-      <pc:sldChg chg="modSp">
-        <pc:chgData name="Matthieu De Mari" userId="dfb708c9-d8dc-439f-9a3b-c772bf4a311c" providerId="ADAL" clId="{403567CB-61B7-4D72-87CB-85A35F135302}" dt="2023-02-28T06:15:15.666" v="292" actId="113"/>
-        <pc:sldMkLst>
-          <pc:docMk/>
-          <pc:sldMk cId="3298110552" sldId="641"/>
-        </pc:sldMkLst>
-      </pc:sldChg>
-      <pc:sldChg chg="modSp mod">
-        <pc:chgData name="Matthieu De Mari" userId="dfb708c9-d8dc-439f-9a3b-c772bf4a311c" providerId="ADAL" clId="{403567CB-61B7-4D72-87CB-85A35F135302}" dt="2023-02-28T06:16:20.728" v="303" actId="20577"/>
-        <pc:sldMkLst>
-          <pc:docMk/>
-          <pc:sldMk cId="1850403076" sldId="645"/>
-        </pc:sldMkLst>
-      </pc:sldChg>
-      <pc:sldChg chg="modSp mod">
-        <pc:chgData name="Matthieu De Mari" userId="dfb708c9-d8dc-439f-9a3b-c772bf4a311c" providerId="ADAL" clId="{403567CB-61B7-4D72-87CB-85A35F135302}" dt="2023-02-28T06:16:35.626" v="309" actId="113"/>
-        <pc:sldMkLst>
-          <pc:docMk/>
-          <pc:sldMk cId="3708794977" sldId="646"/>
-        </pc:sldMkLst>
-      </pc:sldChg>
-      <pc:sldChg chg="modSp mod">
-        <pc:chgData name="Matthieu De Mari" userId="dfb708c9-d8dc-439f-9a3b-c772bf4a311c" providerId="ADAL" clId="{403567CB-61B7-4D72-87CB-85A35F135302}" dt="2023-02-28T06:16:50.571" v="319" actId="113"/>
-        <pc:sldMkLst>
-          <pc:docMk/>
-          <pc:sldMk cId="2404237809" sldId="648"/>
-        </pc:sldMkLst>
-      </pc:sldChg>
-      <pc:sldChg chg="modSp mod">
-        <pc:chgData name="Matthieu De Mari" userId="dfb708c9-d8dc-439f-9a3b-c772bf4a311c" providerId="ADAL" clId="{403567CB-61B7-4D72-87CB-85A35F135302}" dt="2023-02-28T06:11:56.660" v="138" actId="20577"/>
-        <pc:sldMkLst>
-          <pc:docMk/>
-          <pc:sldMk cId="3215884619" sldId="650"/>
-        </pc:sldMkLst>
-      </pc:sldChg>
-      <pc:sldChg chg="addSp delSp modSp mod">
-        <pc:chgData name="Matthieu De Mari" userId="dfb708c9-d8dc-439f-9a3b-c772bf4a311c" providerId="ADAL" clId="{403567CB-61B7-4D72-87CB-85A35F135302}" dt="2023-02-28T06:16:25.409" v="308" actId="20577"/>
-        <pc:sldMkLst>
-          <pc:docMk/>
-          <pc:sldMk cId="773672680" sldId="652"/>
-        </pc:sldMkLst>
-      </pc:sldChg>
-      <pc:sldChg chg="modSp mod">
-        <pc:chgData name="Matthieu De Mari" userId="dfb708c9-d8dc-439f-9a3b-c772bf4a311c" providerId="ADAL" clId="{403567CB-61B7-4D72-87CB-85A35F135302}" dt="2023-02-28T06:17:49.500" v="358" actId="207"/>
-        <pc:sldMkLst>
-          <pc:docMk/>
-          <pc:sldMk cId="855321949" sldId="653"/>
-        </pc:sldMkLst>
-      </pc:sldChg>
-      <pc:sldChg chg="modSp mod">
-        <pc:chgData name="Matthieu De Mari" userId="dfb708c9-d8dc-439f-9a3b-c772bf4a311c" providerId="ADAL" clId="{403567CB-61B7-4D72-87CB-85A35F135302}" dt="2023-02-28T06:18:00.125" v="363" actId="207"/>
-        <pc:sldMkLst>
-          <pc:docMk/>
-          <pc:sldMk cId="2099660639" sldId="654"/>
-        </pc:sldMkLst>
-      </pc:sldChg>
-      <pc:sldChg chg="modSp">
-        <pc:chgData name="Matthieu De Mari" userId="dfb708c9-d8dc-439f-9a3b-c772bf4a311c" providerId="ADAL" clId="{403567CB-61B7-4D72-87CB-85A35F135302}" dt="2023-02-28T06:13:07.100" v="157" actId="20577"/>
-        <pc:sldMkLst>
-          <pc:docMk/>
-          <pc:sldMk cId="2451971174" sldId="655"/>
-        </pc:sldMkLst>
-      </pc:sldChg>
-      <pc:sldChg chg="modSp mod">
-        <pc:chgData name="Matthieu De Mari" userId="dfb708c9-d8dc-439f-9a3b-c772bf4a311c" providerId="ADAL" clId="{403567CB-61B7-4D72-87CB-85A35F135302}" dt="2023-02-28T06:13:16.340" v="172" actId="20577"/>
-        <pc:sldMkLst>
-          <pc:docMk/>
-          <pc:sldMk cId="4035742227" sldId="658"/>
-        </pc:sldMkLst>
-      </pc:sldChg>
-      <pc:sldChg chg="modSp mod">
-        <pc:chgData name="Matthieu De Mari" userId="dfb708c9-d8dc-439f-9a3b-c772bf4a311c" providerId="ADAL" clId="{403567CB-61B7-4D72-87CB-85A35F135302}" dt="2023-02-28T06:13:54.567" v="210" actId="20577"/>
-        <pc:sldMkLst>
-          <pc:docMk/>
-          <pc:sldMk cId="2303339168" sldId="661"/>
-        </pc:sldMkLst>
-      </pc:sldChg>
-      <pc:sldChg chg="modSp mod">
-        <pc:chgData name="Matthieu De Mari" userId="dfb708c9-d8dc-439f-9a3b-c772bf4a311c" providerId="ADAL" clId="{403567CB-61B7-4D72-87CB-85A35F135302}" dt="2023-02-28T06:14:05.133" v="211"/>
-        <pc:sldMkLst>
-          <pc:docMk/>
-          <pc:sldMk cId="365986058" sldId="663"/>
-        </pc:sldMkLst>
-      </pc:sldChg>
-      <pc:sldChg chg="addSp delSp modSp new mod modClrScheme chgLayout">
-        <pc:chgData name="Matthieu De Mari" userId="dfb708c9-d8dc-439f-9a3b-c772bf4a311c" providerId="ADAL" clId="{403567CB-61B7-4D72-87CB-85A35F135302}" dt="2023-02-28T06:14:59.372" v="291" actId="20577"/>
-        <pc:sldMkLst>
-          <pc:docMk/>
-          <pc:sldMk cId="2175023596" sldId="664"/>
-        </pc:sldMkLst>
-      </pc:sldChg>
-      <pc:sldChg chg="addSp delSp modSp new del mod modClrScheme chgLayout">
-        <pc:chgData name="Matthieu De Mari" userId="dfb708c9-d8dc-439f-9a3b-c772bf4a311c" providerId="ADAL" clId="{403567CB-61B7-4D72-87CB-85A35F135302}" dt="2023-02-26T09:44:19.157" v="48" actId="47"/>
-        <pc:sldMkLst>
-          <pc:docMk/>
-          <pc:sldMk cId="2187151882" sldId="664"/>
-        </pc:sldMkLst>
-      </pc:sldChg>
-    </pc:docChg>
-  </pc:docChgLst>
-  <pc:docChgLst>
-    <pc:chgData name="Matthieu De Mari" userId="dfb708c9-d8dc-439f-9a3b-c772bf4a311c" providerId="ADAL" clId="{AFBB5070-511B-4CA0-9A42-F23C012C9EC3}"/>
-    <pc:docChg chg="undo custSel addSld delSld modSld modSection">
-      <pc:chgData name="Matthieu De Mari" userId="dfb708c9-d8dc-439f-9a3b-c772bf4a311c" providerId="ADAL" clId="{AFBB5070-511B-4CA0-9A42-F23C012C9EC3}" dt="2024-03-05T09:24:36.942" v="2287" actId="1076"/>
-      <pc:docMkLst>
-        <pc:docMk/>
-      </pc:docMkLst>
-      <pc:sldChg chg="modSp mod">
-        <pc:chgData name="Matthieu De Mari" userId="dfb708c9-d8dc-439f-9a3b-c772bf4a311c" providerId="ADAL" clId="{AFBB5070-511B-4CA0-9A42-F23C012C9EC3}" dt="2024-02-09T00:48:57.597" v="0" actId="207"/>
-        <pc:sldMkLst>
-          <pc:docMk/>
-          <pc:sldMk cId="3442501962" sldId="257"/>
-        </pc:sldMkLst>
-      </pc:sldChg>
-      <pc:sldChg chg="del">
-        <pc:chgData name="Matthieu De Mari" userId="dfb708c9-d8dc-439f-9a3b-c772bf4a311c" providerId="ADAL" clId="{AFBB5070-511B-4CA0-9A42-F23C012C9EC3}" dt="2024-02-09T00:49:42.822" v="1" actId="47"/>
-        <pc:sldMkLst>
-          <pc:docMk/>
-          <pc:sldMk cId="3425780644" sldId="407"/>
-        </pc:sldMkLst>
-      </pc:sldChg>
-      <pc:sldChg chg="modSp mod">
-        <pc:chgData name="Matthieu De Mari" userId="dfb708c9-d8dc-439f-9a3b-c772bf4a311c" providerId="ADAL" clId="{AFBB5070-511B-4CA0-9A42-F23C012C9EC3}" dt="2024-02-09T00:50:16.570" v="45" actId="20577"/>
-        <pc:sldMkLst>
-          <pc:docMk/>
-          <pc:sldMk cId="1390758074" sldId="599"/>
-        </pc:sldMkLst>
-      </pc:sldChg>
-      <pc:sldChg chg="modSp mod">
-        <pc:chgData name="Matthieu De Mari" userId="dfb708c9-d8dc-439f-9a3b-c772bf4a311c" providerId="ADAL" clId="{AFBB5070-511B-4CA0-9A42-F23C012C9EC3}" dt="2024-02-09T00:51:45.116" v="59" actId="20577"/>
-        <pc:sldMkLst>
-          <pc:docMk/>
-          <pc:sldMk cId="1913740079" sldId="601"/>
-        </pc:sldMkLst>
-      </pc:sldChg>
-      <pc:sldChg chg="modSp mod">
-        <pc:chgData name="Matthieu De Mari" userId="dfb708c9-d8dc-439f-9a3b-c772bf4a311c" providerId="ADAL" clId="{AFBB5070-511B-4CA0-9A42-F23C012C9EC3}" dt="2024-03-05T09:01:06.191" v="1306" actId="14100"/>
-        <pc:sldMkLst>
-          <pc:docMk/>
-          <pc:sldMk cId="4011461575" sldId="602"/>
-        </pc:sldMkLst>
-      </pc:sldChg>
-      <pc:sldChg chg="modSp mod">
-        <pc:chgData name="Matthieu De Mari" userId="dfb708c9-d8dc-439f-9a3b-c772bf4a311c" providerId="ADAL" clId="{AFBB5070-511B-4CA0-9A42-F23C012C9EC3}" dt="2024-02-09T00:52:30.450" v="87" actId="27636"/>
-        <pc:sldMkLst>
-          <pc:docMk/>
-          <pc:sldMk cId="2445909842" sldId="603"/>
-        </pc:sldMkLst>
-      </pc:sldChg>
-      <pc:sldChg chg="modSp mod">
-        <pc:chgData name="Matthieu De Mari" userId="dfb708c9-d8dc-439f-9a3b-c772bf4a311c" providerId="ADAL" clId="{AFBB5070-511B-4CA0-9A42-F23C012C9EC3}" dt="2024-02-09T00:52:44.719" v="94" actId="20577"/>
-        <pc:sldMkLst>
-          <pc:docMk/>
-          <pc:sldMk cId="1888637577" sldId="604"/>
-        </pc:sldMkLst>
-      </pc:sldChg>
-      <pc:sldChg chg="addSp delSp modSp mod">
-        <pc:chgData name="Matthieu De Mari" userId="dfb708c9-d8dc-439f-9a3b-c772bf4a311c" providerId="ADAL" clId="{AFBB5070-511B-4CA0-9A42-F23C012C9EC3}" dt="2024-03-05T09:23:46.134" v="2282" actId="1076"/>
-        <pc:sldMkLst>
-          <pc:docMk/>
-          <pc:sldMk cId="544744450" sldId="606"/>
-        </pc:sldMkLst>
-      </pc:sldChg>
-      <pc:sldChg chg="addSp delSp modSp mod">
-        <pc:chgData name="Matthieu De Mari" userId="dfb708c9-d8dc-439f-9a3b-c772bf4a311c" providerId="ADAL" clId="{AFBB5070-511B-4CA0-9A42-F23C012C9EC3}" dt="2024-03-05T09:22:55.335" v="2277" actId="1076"/>
-        <pc:sldMkLst>
-          <pc:docMk/>
-          <pc:sldMk cId="2835508014" sldId="607"/>
-        </pc:sldMkLst>
-      </pc:sldChg>
-      <pc:sldChg chg="modSp mod">
-        <pc:chgData name="Matthieu De Mari" userId="dfb708c9-d8dc-439f-9a3b-c772bf4a311c" providerId="ADAL" clId="{AFBB5070-511B-4CA0-9A42-F23C012C9EC3}" dt="2024-03-05T09:21:29.328" v="2265" actId="20577"/>
-        <pc:sldMkLst>
-          <pc:docMk/>
-          <pc:sldMk cId="1655947162" sldId="611"/>
-        </pc:sldMkLst>
-      </pc:sldChg>
-      <pc:sldChg chg="addSp delSp modSp mod">
-        <pc:chgData name="Matthieu De Mari" userId="dfb708c9-d8dc-439f-9a3b-c772bf4a311c" providerId="ADAL" clId="{AFBB5070-511B-4CA0-9A42-F23C012C9EC3}" dt="2024-03-05T09:22:20.716" v="2270" actId="14100"/>
-        <pc:sldMkLst>
-          <pc:docMk/>
-          <pc:sldMk cId="1079237185" sldId="612"/>
-        </pc:sldMkLst>
-      </pc:sldChg>
-      <pc:sldChg chg="modSp">
-        <pc:chgData name="Matthieu De Mari" userId="dfb708c9-d8dc-439f-9a3b-c772bf4a311c" providerId="ADAL" clId="{AFBB5070-511B-4CA0-9A42-F23C012C9EC3}" dt="2024-03-05T09:21:08.403" v="2230" actId="20577"/>
-        <pc:sldMkLst>
-          <pc:docMk/>
-          <pc:sldMk cId="3584089474" sldId="613"/>
-        </pc:sldMkLst>
-      </pc:sldChg>
-      <pc:sldChg chg="addSp delSp modSp mod">
-        <pc:chgData name="Matthieu De Mari" userId="dfb708c9-d8dc-439f-9a3b-c772bf4a311c" providerId="ADAL" clId="{AFBB5070-511B-4CA0-9A42-F23C012C9EC3}" dt="2024-03-05T09:24:36.942" v="2287" actId="1076"/>
-        <pc:sldMkLst>
-          <pc:docMk/>
-          <pc:sldMk cId="1478687394" sldId="615"/>
-        </pc:sldMkLst>
-      </pc:sldChg>
-      <pc:sldChg chg="addSp delSp modSp mod modClrScheme chgLayout">
-        <pc:chgData name="Matthieu De Mari" userId="dfb708c9-d8dc-439f-9a3b-c772bf4a311c" providerId="ADAL" clId="{AFBB5070-511B-4CA0-9A42-F23C012C9EC3}" dt="2024-02-27T02:39:21.271" v="565" actId="207"/>
-        <pc:sldMkLst>
-          <pc:docMk/>
-          <pc:sldMk cId="2697134679" sldId="616"/>
-        </pc:sldMkLst>
-      </pc:sldChg>
-      <pc:sldChg chg="modSp mod">
-        <pc:chgData name="Matthieu De Mari" userId="dfb708c9-d8dc-439f-9a3b-c772bf4a311c" providerId="ADAL" clId="{AFBB5070-511B-4CA0-9A42-F23C012C9EC3}" dt="2024-02-09T00:53:57.046" v="168" actId="115"/>
-        <pc:sldMkLst>
-          <pc:docMk/>
-          <pc:sldMk cId="1087818113" sldId="617"/>
-        </pc:sldMkLst>
-      </pc:sldChg>
-      <pc:sldChg chg="addSp delSp modSp mod modClrScheme chgLayout">
-        <pc:chgData name="Matthieu De Mari" userId="dfb708c9-d8dc-439f-9a3b-c772bf4a311c" providerId="ADAL" clId="{AFBB5070-511B-4CA0-9A42-F23C012C9EC3}" dt="2024-02-27T02:40:05.950" v="682" actId="20577"/>
-        <pc:sldMkLst>
-          <pc:docMk/>
-          <pc:sldMk cId="2052607657" sldId="619"/>
-        </pc:sldMkLst>
-      </pc:sldChg>
-      <pc:sldChg chg="modSp mod">
-        <pc:chgData name="Matthieu De Mari" userId="dfb708c9-d8dc-439f-9a3b-c772bf4a311c" providerId="ADAL" clId="{AFBB5070-511B-4CA0-9A42-F23C012C9EC3}" dt="2024-03-05T09:10:31.976" v="1975" actId="20577"/>
-        <pc:sldMkLst>
-          <pc:docMk/>
-          <pc:sldMk cId="3109980527" sldId="624"/>
-        </pc:sldMkLst>
-      </pc:sldChg>
-      <pc:sldChg chg="modSp">
-        <pc:chgData name="Matthieu De Mari" userId="dfb708c9-d8dc-439f-9a3b-c772bf4a311c" providerId="ADAL" clId="{AFBB5070-511B-4CA0-9A42-F23C012C9EC3}" dt="2024-03-05T09:17:29.333" v="2199" actId="20577"/>
-        <pc:sldMkLst>
-          <pc:docMk/>
-          <pc:sldMk cId="491578291" sldId="627"/>
-        </pc:sldMkLst>
-      </pc:sldChg>
-      <pc:sldChg chg="addSp delSp modSp mod">
-        <pc:chgData name="Matthieu De Mari" userId="dfb708c9-d8dc-439f-9a3b-c772bf4a311c" providerId="ADAL" clId="{AFBB5070-511B-4CA0-9A42-F23C012C9EC3}" dt="2024-03-05T09:18:44.315" v="2205" actId="1076"/>
-        <pc:sldMkLst>
-          <pc:docMk/>
-          <pc:sldMk cId="4059265678" sldId="628"/>
-        </pc:sldMkLst>
-      </pc:sldChg>
-      <pc:sldChg chg="addSp delSp modSp mod">
-        <pc:chgData name="Matthieu De Mari" userId="dfb708c9-d8dc-439f-9a3b-c772bf4a311c" providerId="ADAL" clId="{AFBB5070-511B-4CA0-9A42-F23C012C9EC3}" dt="2024-03-05T09:19:23.738" v="2214" actId="1035"/>
-        <pc:sldMkLst>
-          <pc:docMk/>
-          <pc:sldMk cId="2696285505" sldId="629"/>
-        </pc:sldMkLst>
-      </pc:sldChg>
-      <pc:sldChg chg="modSp mod">
-        <pc:chgData name="Matthieu De Mari" userId="dfb708c9-d8dc-439f-9a3b-c772bf4a311c" providerId="ADAL" clId="{AFBB5070-511B-4CA0-9A42-F23C012C9EC3}" dt="2024-02-09T00:58:01.890" v="308" actId="1076"/>
-        <pc:sldMkLst>
-          <pc:docMk/>
-          <pc:sldMk cId="3403244392" sldId="630"/>
-        </pc:sldMkLst>
-      </pc:sldChg>
-      <pc:sldChg chg="addSp delSp modSp mod">
-        <pc:chgData name="Matthieu De Mari" userId="dfb708c9-d8dc-439f-9a3b-c772bf4a311c" providerId="ADAL" clId="{AFBB5070-511B-4CA0-9A42-F23C012C9EC3}" dt="2024-03-05T09:20:59.053" v="2220" actId="1076"/>
-        <pc:sldMkLst>
-          <pc:docMk/>
-          <pc:sldMk cId="3378674748" sldId="631"/>
-        </pc:sldMkLst>
-      </pc:sldChg>
-      <pc:sldChg chg="modSp mod">
-        <pc:chgData name="Matthieu De Mari" userId="dfb708c9-d8dc-439f-9a3b-c772bf4a311c" providerId="ADAL" clId="{AFBB5070-511B-4CA0-9A42-F23C012C9EC3}" dt="2024-03-05T08:54:44.345" v="690" actId="20577"/>
-        <pc:sldMkLst>
-          <pc:docMk/>
-          <pc:sldMk cId="3237577112" sldId="632"/>
-        </pc:sldMkLst>
-      </pc:sldChg>
-      <pc:sldChg chg="modSp">
-        <pc:chgData name="Matthieu De Mari" userId="dfb708c9-d8dc-439f-9a3b-c772bf4a311c" providerId="ADAL" clId="{AFBB5070-511B-4CA0-9A42-F23C012C9EC3}" dt="2024-02-09T00:55:52.996" v="276" actId="20577"/>
-        <pc:sldMkLst>
-          <pc:docMk/>
-          <pc:sldMk cId="875945898" sldId="634"/>
-        </pc:sldMkLst>
-      </pc:sldChg>
-      <pc:sldChg chg="addSp delSp modSp mod modClrScheme chgLayout">
-        <pc:chgData name="Matthieu De Mari" userId="dfb708c9-d8dc-439f-9a3b-c772bf4a311c" providerId="ADAL" clId="{AFBB5070-511B-4CA0-9A42-F23C012C9EC3}" dt="2024-03-05T09:06:18.398" v="1810" actId="207"/>
-        <pc:sldMkLst>
-          <pc:docMk/>
-          <pc:sldMk cId="956888542" sldId="635"/>
-        </pc:sldMkLst>
-      </pc:sldChg>
-      <pc:sldChg chg="modSp mod">
-        <pc:chgData name="Matthieu De Mari" userId="dfb708c9-d8dc-439f-9a3b-c772bf4a311c" providerId="ADAL" clId="{AFBB5070-511B-4CA0-9A42-F23C012C9EC3}" dt="2024-03-05T09:17:14.129" v="2187" actId="20577"/>
-        <pc:sldMkLst>
-          <pc:docMk/>
-          <pc:sldMk cId="9821103" sldId="636"/>
-        </pc:sldMkLst>
-      </pc:sldChg>
-      <pc:sldChg chg="modSp">
-        <pc:chgData name="Matthieu De Mari" userId="dfb708c9-d8dc-439f-9a3b-c772bf4a311c" providerId="ADAL" clId="{AFBB5070-511B-4CA0-9A42-F23C012C9EC3}" dt="2024-02-09T01:02:10.056" v="372" actId="20577"/>
-        <pc:sldMkLst>
-          <pc:docMk/>
-          <pc:sldMk cId="3298110552" sldId="641"/>
-        </pc:sldMkLst>
-      </pc:sldChg>
-      <pc:sldChg chg="modSp mod">
-        <pc:chgData name="Matthieu De Mari" userId="dfb708c9-d8dc-439f-9a3b-c772bf4a311c" providerId="ADAL" clId="{AFBB5070-511B-4CA0-9A42-F23C012C9EC3}" dt="2024-02-09T01:04:42.320" v="430" actId="14100"/>
-        <pc:sldMkLst>
-          <pc:docMk/>
-          <pc:sldMk cId="715032396" sldId="644"/>
-        </pc:sldMkLst>
-      </pc:sldChg>
-      <pc:sldChg chg="addSp delSp modSp mod">
-        <pc:chgData name="Matthieu De Mari" userId="dfb708c9-d8dc-439f-9a3b-c772bf4a311c" providerId="ADAL" clId="{AFBB5070-511B-4CA0-9A42-F23C012C9EC3}" dt="2024-02-09T01:04:49.766" v="433"/>
-        <pc:sldMkLst>
-          <pc:docMk/>
-          <pc:sldMk cId="1850403076" sldId="645"/>
-        </pc:sldMkLst>
-      </pc:sldChg>
-      <pc:sldChg chg="addSp delSp modSp mod">
-        <pc:chgData name="Matthieu De Mari" userId="dfb708c9-d8dc-439f-9a3b-c772bf4a311c" providerId="ADAL" clId="{AFBB5070-511B-4CA0-9A42-F23C012C9EC3}" dt="2024-02-09T01:05:05.864" v="441"/>
-        <pc:sldMkLst>
-          <pc:docMk/>
-          <pc:sldMk cId="3708794977" sldId="646"/>
-        </pc:sldMkLst>
-      </pc:sldChg>
-      <pc:sldChg chg="del">
-        <pc:chgData name="Matthieu De Mari" userId="dfb708c9-d8dc-439f-9a3b-c772bf4a311c" providerId="ADAL" clId="{AFBB5070-511B-4CA0-9A42-F23C012C9EC3}" dt="2024-02-09T01:03:14.436" v="373" actId="47"/>
-        <pc:sldMkLst>
-          <pc:docMk/>
-          <pc:sldMk cId="2404237809" sldId="648"/>
-        </pc:sldMkLst>
-      </pc:sldChg>
-      <pc:sldChg chg="modSp mod">
-        <pc:chgData name="Matthieu De Mari" userId="dfb708c9-d8dc-439f-9a3b-c772bf4a311c" providerId="ADAL" clId="{AFBB5070-511B-4CA0-9A42-F23C012C9EC3}" dt="2024-02-09T01:05:39.092" v="442" actId="20577"/>
-        <pc:sldMkLst>
-          <pc:docMk/>
-          <pc:sldMk cId="1952442680" sldId="649"/>
-        </pc:sldMkLst>
-      </pc:sldChg>
-      <pc:sldChg chg="addSp delSp modSp mod">
-        <pc:chgData name="Matthieu De Mari" userId="dfb708c9-d8dc-439f-9a3b-c772bf4a311c" providerId="ADAL" clId="{AFBB5070-511B-4CA0-9A42-F23C012C9EC3}" dt="2024-02-09T01:04:58.682" v="438" actId="1076"/>
-        <pc:sldMkLst>
-          <pc:docMk/>
-          <pc:sldMk cId="773672680" sldId="652"/>
-        </pc:sldMkLst>
-      </pc:sldChg>
-      <pc:sldChg chg="modSp del mod">
-        <pc:chgData name="Matthieu De Mari" userId="dfb708c9-d8dc-439f-9a3b-c772bf4a311c" providerId="ADAL" clId="{AFBB5070-511B-4CA0-9A42-F23C012C9EC3}" dt="2024-02-09T01:06:07.404" v="444" actId="47"/>
-        <pc:sldMkLst>
-          <pc:docMk/>
-          <pc:sldMk cId="2099660639" sldId="654"/>
-        </pc:sldMkLst>
-      </pc:sldChg>
-      <pc:sldChg chg="delSp modSp mod">
-        <pc:chgData name="Matthieu De Mari" userId="dfb708c9-d8dc-439f-9a3b-c772bf4a311c" providerId="ADAL" clId="{AFBB5070-511B-4CA0-9A42-F23C012C9EC3}" dt="2024-02-09T01:08:16.071" v="506" actId="21"/>
-        <pc:sldMkLst>
-          <pc:docMk/>
-          <pc:sldMk cId="2303339168" sldId="661"/>
-        </pc:sldMkLst>
-      </pc:sldChg>
-      <pc:sldChg chg="modSp mod">
-        <pc:chgData name="Matthieu De Mari" userId="dfb708c9-d8dc-439f-9a3b-c772bf4a311c" providerId="ADAL" clId="{AFBB5070-511B-4CA0-9A42-F23C012C9EC3}" dt="2024-02-09T01:08:06.790" v="504" actId="207"/>
-        <pc:sldMkLst>
-          <pc:docMk/>
-          <pc:sldMk cId="365986058" sldId="663"/>
-        </pc:sldMkLst>
-      </pc:sldChg>
-      <pc:sldChg chg="delSp modSp add mod modClrScheme chgLayout">
-        <pc:chgData name="Matthieu De Mari" userId="dfb708c9-d8dc-439f-9a3b-c772bf4a311c" providerId="ADAL" clId="{AFBB5070-511B-4CA0-9A42-F23C012C9EC3}" dt="2024-03-05T09:06:13.449" v="1809" actId="207"/>
-        <pc:sldMkLst>
-          <pc:docMk/>
-          <pc:sldMk cId="3985714035" sldId="665"/>
-        </pc:sldMkLst>
-      </pc:sldChg>
-      <pc:sldChg chg="delSp modSp add mod modClrScheme chgLayout">
-        <pc:chgData name="Matthieu De Mari" userId="dfb708c9-d8dc-439f-9a3b-c772bf4a311c" providerId="ADAL" clId="{AFBB5070-511B-4CA0-9A42-F23C012C9EC3}" dt="2024-02-27T02:38:56.906" v="515" actId="20577"/>
-        <pc:sldMkLst>
-          <pc:docMk/>
-          <pc:sldMk cId="328652294" sldId="666"/>
-        </pc:sldMkLst>
-      </pc:sldChg>
-      <pc:sldChg chg="delSp modSp add mod modClrScheme chgLayout">
-        <pc:chgData name="Matthieu De Mari" userId="dfb708c9-d8dc-439f-9a3b-c772bf4a311c" providerId="ADAL" clId="{AFBB5070-511B-4CA0-9A42-F23C012C9EC3}" dt="2024-02-09T01:01:15.301" v="340" actId="27636"/>
-        <pc:sldMkLst>
-          <pc:docMk/>
-          <pc:sldMk cId="4024913740" sldId="667"/>
-        </pc:sldMkLst>
-      </pc:sldChg>
-      <pc:sldChg chg="del">
-        <pc:chgData name="Matthieu De Mari" userId="dfb708c9-d8dc-439f-9a3b-c772bf4a311c" providerId="ADAL" clId="{AFBB5070-511B-4CA0-9A42-F23C012C9EC3}" dt="2024-02-09T00:49:55.084" v="4" actId="47"/>
-        <pc:sldMkLst>
-          <pc:docMk/>
-          <pc:sldMk cId="2828164903" sldId="668"/>
-        </pc:sldMkLst>
-      </pc:sldChg>
-      <pc:sldChg chg="addSp modSp add mod">
-        <pc:chgData name="Matthieu De Mari" userId="dfb708c9-d8dc-439f-9a3b-c772bf4a311c" providerId="ADAL" clId="{AFBB5070-511B-4CA0-9A42-F23C012C9EC3}" dt="2024-02-09T01:08:29.825" v="513" actId="14100"/>
-        <pc:sldMkLst>
-          <pc:docMk/>
-          <pc:sldMk cId="2917180269" sldId="668"/>
-        </pc:sldMkLst>
-      </pc:sldChg>
-      <pc:sldChg chg="modSp add mod">
-        <pc:chgData name="Matthieu De Mari" userId="dfb708c9-d8dc-439f-9a3b-c772bf4a311c" providerId="ADAL" clId="{AFBB5070-511B-4CA0-9A42-F23C012C9EC3}" dt="2024-03-05T08:58:55.719" v="1152" actId="113"/>
-        <pc:sldMkLst>
-          <pc:docMk/>
-          <pc:sldMk cId="2636755818" sldId="669"/>
-        </pc:sldMkLst>
-      </pc:sldChg>
-      <pc:sldChg chg="del">
-        <pc:chgData name="Matthieu De Mari" userId="dfb708c9-d8dc-439f-9a3b-c772bf4a311c" providerId="ADAL" clId="{AFBB5070-511B-4CA0-9A42-F23C012C9EC3}" dt="2024-02-09T00:49:51.166" v="3" actId="47"/>
-        <pc:sldMkLst>
-          <pc:docMk/>
-          <pc:sldMk cId="3980169169" sldId="669"/>
-        </pc:sldMkLst>
-      </pc:sldChg>
-      <pc:sldChg chg="modSp add mod">
-        <pc:chgData name="Matthieu De Mari" userId="dfb708c9-d8dc-439f-9a3b-c772bf4a311c" providerId="ADAL" clId="{AFBB5070-511B-4CA0-9A42-F23C012C9EC3}" dt="2024-03-05T09:04:21.151" v="1733" actId="20577"/>
-        <pc:sldMkLst>
-          <pc:docMk/>
-          <pc:sldMk cId="370734377" sldId="670"/>
-        </pc:sldMkLst>
-      </pc:sldChg>
-      <pc:sldChg chg="del">
-        <pc:chgData name="Matthieu De Mari" userId="dfb708c9-d8dc-439f-9a3b-c772bf4a311c" providerId="ADAL" clId="{AFBB5070-511B-4CA0-9A42-F23C012C9EC3}" dt="2024-02-09T00:49:44.944" v="2" actId="47"/>
-        <pc:sldMkLst>
-          <pc:docMk/>
-          <pc:sldMk cId="4122990920" sldId="670"/>
-        </pc:sldMkLst>
-      </pc:sldChg>
-    </pc:docChg>
-  </pc:docChgLst>
-  <pc:docChgLst>
-    <pc:chgData name="Matthieu De Mari" userId="dfb708c9-d8dc-439f-9a3b-c772bf4a311c" providerId="ADAL" clId="{95DC2182-BA54-4583-9E8E-B21E5C8D4D55}"/>
-    <pc:docChg chg="undo custSel addSld delSld modSld sldOrd addSection delSection modSection">
-      <pc:chgData name="Matthieu De Mari" userId="dfb708c9-d8dc-439f-9a3b-c772bf4a311c" providerId="ADAL" clId="{95DC2182-BA54-4583-9E8E-B21E5C8D4D55}" dt="2023-02-26T09:05:17.993" v="27185" actId="20577"/>
-      <pc:docMkLst>
-        <pc:docMk/>
-      </pc:docMkLst>
-      <pc:sldChg chg="modSp mod">
-        <pc:chgData name="Matthieu De Mari" userId="dfb708c9-d8dc-439f-9a3b-c772bf4a311c" providerId="ADAL" clId="{95DC2182-BA54-4583-9E8E-B21E5C8D4D55}" dt="2023-02-26T08:54:41.980" v="25991" actId="113"/>
-        <pc:sldMkLst>
-          <pc:docMk/>
-          <pc:sldMk cId="3442501962" sldId="257"/>
-        </pc:sldMkLst>
-      </pc:sldChg>
-      <pc:sldChg chg="addSp delSp modSp mod">
-        <pc:chgData name="Matthieu De Mari" userId="dfb708c9-d8dc-439f-9a3b-c772bf4a311c" providerId="ADAL" clId="{95DC2182-BA54-4583-9E8E-B21E5C8D4D55}" dt="2023-02-26T09:05:17.993" v="27185" actId="20577"/>
-        <pc:sldMkLst>
-          <pc:docMk/>
-          <pc:sldMk cId="1893873068" sldId="266"/>
-        </pc:sldMkLst>
-      </pc:sldChg>
-      <pc:sldChg chg="modSp mod">
-        <pc:chgData name="Matthieu De Mari" userId="dfb708c9-d8dc-439f-9a3b-c772bf4a311c" providerId="ADAL" clId="{95DC2182-BA54-4583-9E8E-B21E5C8D4D55}" dt="2023-02-23T11:31:31.567" v="17653" actId="207"/>
-        <pc:sldMkLst>
-          <pc:docMk/>
-          <pc:sldMk cId="3880949074" sldId="267"/>
-        </pc:sldMkLst>
-      </pc:sldChg>
-      <pc:sldChg chg="modSp mod">
-        <pc:chgData name="Matthieu De Mari" userId="dfb708c9-d8dc-439f-9a3b-c772bf4a311c" providerId="ADAL" clId="{95DC2182-BA54-4583-9E8E-B21E5C8D4D55}" dt="2023-02-26T09:02:44.409" v="26989" actId="20577"/>
-        <pc:sldMkLst>
-          <pc:docMk/>
-          <pc:sldMk cId="1036081419" sldId="346"/>
-        </pc:sldMkLst>
-      </pc:sldChg>
-      <pc:sldChg chg="modSp mod">
-        <pc:chgData name="Matthieu De Mari" userId="dfb708c9-d8dc-439f-9a3b-c772bf4a311c" providerId="ADAL" clId="{95DC2182-BA54-4583-9E8E-B21E5C8D4D55}" dt="2023-02-21T11:02:32.442" v="9700" actId="20577"/>
-        <pc:sldMkLst>
-          <pc:docMk/>
-          <pc:sldMk cId="1040156172" sldId="377"/>
-        </pc:sldMkLst>
-      </pc:sldChg>
-      <pc:sldChg chg="addSp delSp modSp new mod ord modClrScheme chgLayout">
-        <pc:chgData name="Matthieu De Mari" userId="dfb708c9-d8dc-439f-9a3b-c772bf4a311c" providerId="ADAL" clId="{95DC2182-BA54-4583-9E8E-B21E5C8D4D55}" dt="2023-02-17T09:41:10.957" v="4103"/>
-        <pc:sldMkLst>
-          <pc:docMk/>
-          <pc:sldMk cId="1119657896" sldId="378"/>
-        </pc:sldMkLst>
-      </pc:sldChg>
-      <pc:sldChg chg="modSp add mod ord">
-        <pc:chgData name="Matthieu De Mari" userId="dfb708c9-d8dc-439f-9a3b-c772bf4a311c" providerId="ADAL" clId="{95DC2182-BA54-4583-9E8E-B21E5C8D4D55}" dt="2023-02-26T07:17:50.059" v="19240" actId="5793"/>
-        <pc:sldMkLst>
-          <pc:docMk/>
-          <pc:sldMk cId="3946144614" sldId="379"/>
-        </pc:sldMkLst>
-      </pc:sldChg>
-      <pc:sldChg chg="addSp delSp modSp add mod ord chgLayout">
-        <pc:chgData name="Matthieu De Mari" userId="dfb708c9-d8dc-439f-9a3b-c772bf4a311c" providerId="ADAL" clId="{95DC2182-BA54-4583-9E8E-B21E5C8D4D55}" dt="2023-02-23T02:52:26.148" v="9713" actId="20577"/>
-        <pc:sldMkLst>
-          <pc:docMk/>
-          <pc:sldMk cId="2141271085" sldId="380"/>
-        </pc:sldMkLst>
-      </pc:sldChg>
-      <pc:sldChg chg="addSp modSp add mod ord">
-        <pc:chgData name="Matthieu De Mari" userId="dfb708c9-d8dc-439f-9a3b-c772bf4a311c" providerId="ADAL" clId="{95DC2182-BA54-4583-9E8E-B21E5C8D4D55}" dt="2023-02-17T09:41:10.957" v="4103"/>
-        <pc:sldMkLst>
-          <pc:docMk/>
-          <pc:sldMk cId="1990152231" sldId="381"/>
-        </pc:sldMkLst>
-      </pc:sldChg>
-      <pc:sldChg chg="addSp delSp modSp new mod ord modClrScheme chgLayout">
-        <pc:chgData name="Matthieu De Mari" userId="dfb708c9-d8dc-439f-9a3b-c772bf4a311c" providerId="ADAL" clId="{95DC2182-BA54-4583-9E8E-B21E5C8D4D55}" dt="2023-02-17T09:41:10.957" v="4103"/>
-        <pc:sldMkLst>
-          <pc:docMk/>
-          <pc:sldMk cId="356330123" sldId="382"/>
-        </pc:sldMkLst>
-      </pc:sldChg>
-      <pc:sldChg chg="addSp delSp modSp add del mod">
-        <pc:chgData name="Matthieu De Mari" userId="dfb708c9-d8dc-439f-9a3b-c772bf4a311c" providerId="ADAL" clId="{95DC2182-BA54-4583-9E8E-B21E5C8D4D55}" dt="2023-02-17T08:42:23.672" v="637" actId="47"/>
-        <pc:sldMkLst>
-          <pc:docMk/>
-          <pc:sldMk cId="1597381135" sldId="383"/>
-        </pc:sldMkLst>
-      </pc:sldChg>
-      <pc:sldChg chg="addSp delSp modSp add mod ord modClrScheme chgLayout">
-        <pc:chgData name="Matthieu De Mari" userId="dfb708c9-d8dc-439f-9a3b-c772bf4a311c" providerId="ADAL" clId="{95DC2182-BA54-4583-9E8E-B21E5C8D4D55}" dt="2023-02-23T02:52:10.916" v="9711" actId="113"/>
-        <pc:sldMkLst>
-          <pc:docMk/>
-          <pc:sldMk cId="3535228966" sldId="384"/>
-        </pc:sldMkLst>
-      </pc:sldChg>
-      <pc:sldChg chg="modSp add del mod ord">
-        <pc:chgData name="Matthieu De Mari" userId="dfb708c9-d8dc-439f-9a3b-c772bf4a311c" providerId="ADAL" clId="{95DC2182-BA54-4583-9E8E-B21E5C8D4D55}" dt="2023-02-23T02:52:38.516" v="9714" actId="47"/>
-        <pc:sldMkLst>
-          <pc:docMk/>
-          <pc:sldMk cId="1845912647" sldId="385"/>
-        </pc:sldMkLst>
-      </pc:sldChg>
-      <pc:sldChg chg="addSp modSp add mod ord">
-        <pc:chgData name="Matthieu De Mari" userId="dfb708c9-d8dc-439f-9a3b-c772bf4a311c" providerId="ADAL" clId="{95DC2182-BA54-4583-9E8E-B21E5C8D4D55}" dt="2023-02-21T08:53:50.845" v="4525" actId="20577"/>
-        <pc:sldMkLst>
-          <pc:docMk/>
-          <pc:sldMk cId="3334002964" sldId="386"/>
-        </pc:sldMkLst>
-      </pc:sldChg>
-      <pc:sldChg chg="addSp delSp modSp new mod">
-        <pc:chgData name="Matthieu De Mari" userId="dfb708c9-d8dc-439f-9a3b-c772bf4a311c" providerId="ADAL" clId="{95DC2182-BA54-4583-9E8E-B21E5C8D4D55}" dt="2023-02-26T07:18:05.355" v="19243" actId="113"/>
-        <pc:sldMkLst>
-          <pc:docMk/>
-          <pc:sldMk cId="3292999532" sldId="387"/>
-        </pc:sldMkLst>
-      </pc:sldChg>
-      <pc:sldChg chg="addSp delSp modSp add mod">
-        <pc:chgData name="Matthieu De Mari" userId="dfb708c9-d8dc-439f-9a3b-c772bf4a311c" providerId="ADAL" clId="{95DC2182-BA54-4583-9E8E-B21E5C8D4D55}" dt="2023-02-21T08:53:09.228" v="4502" actId="20577"/>
-        <pc:sldMkLst>
-          <pc:docMk/>
-          <pc:sldMk cId="2586666001" sldId="388"/>
-        </pc:sldMkLst>
-      </pc:sldChg>
-      <pc:sldChg chg="modSp add del mod">
-        <pc:chgData name="Matthieu De Mari" userId="dfb708c9-d8dc-439f-9a3b-c772bf4a311c" providerId="ADAL" clId="{95DC2182-BA54-4583-9E8E-B21E5C8D4D55}" dt="2023-02-17T09:21:02.572" v="2876" actId="47"/>
-        <pc:sldMkLst>
-          <pc:docMk/>
-          <pc:sldMk cId="1425256713" sldId="389"/>
-        </pc:sldMkLst>
-      </pc:sldChg>
-      <pc:sldChg chg="addSp delSp modSp add mod chgLayout">
-        <pc:chgData name="Matthieu De Mari" userId="dfb708c9-d8dc-439f-9a3b-c772bf4a311c" providerId="ADAL" clId="{95DC2182-BA54-4583-9E8E-B21E5C8D4D55}" dt="2023-02-23T02:53:51.114" v="9725" actId="20577"/>
-        <pc:sldMkLst>
-          <pc:docMk/>
-          <pc:sldMk cId="699795487" sldId="390"/>
-        </pc:sldMkLst>
-      </pc:sldChg>
-      <pc:sldChg chg="addSp delSp modSp add mod">
-        <pc:chgData name="Matthieu De Mari" userId="dfb708c9-d8dc-439f-9a3b-c772bf4a311c" providerId="ADAL" clId="{95DC2182-BA54-4583-9E8E-B21E5C8D4D55}" dt="2023-02-26T07:19:07.424" v="19248"/>
-        <pc:sldMkLst>
-          <pc:docMk/>
-          <pc:sldMk cId="3438165640" sldId="391"/>
-        </pc:sldMkLst>
-      </pc:sldChg>
-      <pc:sldChg chg="addSp delSp modSp add mod ord">
-        <pc:chgData name="Matthieu De Mari" userId="dfb708c9-d8dc-439f-9a3b-c772bf4a311c" providerId="ADAL" clId="{95DC2182-BA54-4583-9E8E-B21E5C8D4D55}" dt="2023-02-17T09:22:42.121" v="3052" actId="20577"/>
-        <pc:sldMkLst>
-          <pc:docMk/>
-          <pc:sldMk cId="2064353129" sldId="392"/>
-        </pc:sldMkLst>
-      </pc:sldChg>
-      <pc:sldChg chg="addSp delSp modSp add mod">
-        <pc:chgData name="Matthieu De Mari" userId="dfb708c9-d8dc-439f-9a3b-c772bf4a311c" providerId="ADAL" clId="{95DC2182-BA54-4583-9E8E-B21E5C8D4D55}" dt="2023-02-23T02:54:05.876" v="9727" actId="20577"/>
-        <pc:sldMkLst>
-          <pc:docMk/>
-          <pc:sldMk cId="3842187934" sldId="393"/>
-        </pc:sldMkLst>
-      </pc:sldChg>
-      <pc:sldChg chg="addSp delSp modSp add mod">
-        <pc:chgData name="Matthieu De Mari" userId="dfb708c9-d8dc-439f-9a3b-c772bf4a311c" providerId="ADAL" clId="{95DC2182-BA54-4583-9E8E-B21E5C8D4D55}" dt="2023-02-21T08:55:11.719" v="4562"/>
-        <pc:sldMkLst>
-          <pc:docMk/>
-          <pc:sldMk cId="781649533" sldId="394"/>
-        </pc:sldMkLst>
-      </pc:sldChg>
-      <pc:sldChg chg="addSp delSp modSp add mod modClrScheme chgLayout">
-        <pc:chgData name="Matthieu De Mari" userId="dfb708c9-d8dc-439f-9a3b-c772bf4a311c" providerId="ADAL" clId="{95DC2182-BA54-4583-9E8E-B21E5C8D4D55}" dt="2023-02-23T02:54:30.470" v="9741" actId="20577"/>
-        <pc:sldMkLst>
-          <pc:docMk/>
-          <pc:sldMk cId="2316878562" sldId="395"/>
-        </pc:sldMkLst>
-      </pc:sldChg>
-      <pc:sldChg chg="addSp delSp modSp new mod">
-        <pc:chgData name="Matthieu De Mari" userId="dfb708c9-d8dc-439f-9a3b-c772bf4a311c" providerId="ADAL" clId="{95DC2182-BA54-4583-9E8E-B21E5C8D4D55}" dt="2023-02-26T07:19:06.094" v="19247"/>
-        <pc:sldMkLst>
-          <pc:docMk/>
-          <pc:sldMk cId="1870305378" sldId="396"/>
-        </pc:sldMkLst>
-      </pc:sldChg>
-      <pc:sldChg chg="addSp delSp modSp add mod">
-        <pc:chgData name="Matthieu De Mari" userId="dfb708c9-d8dc-439f-9a3b-c772bf4a311c" providerId="ADAL" clId="{95DC2182-BA54-4583-9E8E-B21E5C8D4D55}" dt="2023-02-23T02:58:02.175" v="9793" actId="20577"/>
-        <pc:sldMkLst>
-          <pc:docMk/>
-          <pc:sldMk cId="1413966137" sldId="397"/>
-        </pc:sldMkLst>
-      </pc:sldChg>
-      <pc:sldChg chg="addSp delSp modSp new mod">
-        <pc:chgData name="Matthieu De Mari" userId="dfb708c9-d8dc-439f-9a3b-c772bf4a311c" providerId="ADAL" clId="{95DC2182-BA54-4583-9E8E-B21E5C8D4D55}" dt="2023-02-23T02:59:11.897" v="9835" actId="20577"/>
-        <pc:sldMkLst>
-          <pc:docMk/>
-          <pc:sldMk cId="2506346402" sldId="398"/>
-        </pc:sldMkLst>
-      </pc:sldChg>
-      <pc:sldChg chg="addSp delSp modSp add mod modClrScheme chgLayout">
-        <pc:chgData name="Matthieu De Mari" userId="dfb708c9-d8dc-439f-9a3b-c772bf4a311c" providerId="ADAL" clId="{95DC2182-BA54-4583-9E8E-B21E5C8D4D55}" dt="2023-02-17T09:40:50.204" v="4101" actId="20577"/>
-        <pc:sldMkLst>
-          <pc:docMk/>
-          <pc:sldMk cId="1835834167" sldId="399"/>
-        </pc:sldMkLst>
-      </pc:sldChg>
-      <pc:sldChg chg="addSp delSp modSp add mod ord modClrScheme chgLayout">
-        <pc:chgData name="Matthieu De Mari" userId="dfb708c9-d8dc-439f-9a3b-c772bf4a311c" providerId="ADAL" clId="{95DC2182-BA54-4583-9E8E-B21E5C8D4D55}" dt="2023-02-23T02:58:40.249" v="9816" actId="20577"/>
-        <pc:sldMkLst>
-          <pc:docMk/>
-          <pc:sldMk cId="4048808033" sldId="400"/>
-        </pc:sldMkLst>
-      </pc:sldChg>
-      <pc:sldChg chg="addSp delSp new del mod">
-        <pc:chgData name="Matthieu De Mari" userId="dfb708c9-d8dc-439f-9a3b-c772bf4a311c" providerId="ADAL" clId="{95DC2182-BA54-4583-9E8E-B21E5C8D4D55}" dt="2023-02-17T09:43:44.070" v="4143" actId="47"/>
-        <pc:sldMkLst>
-          <pc:docMk/>
-          <pc:sldMk cId="4083174369" sldId="401"/>
-        </pc:sldMkLst>
-      </pc:sldChg>
-      <pc:sldChg chg="addSp delSp modSp add mod ord">
-        <pc:chgData name="Matthieu De Mari" userId="dfb708c9-d8dc-439f-9a3b-c772bf4a311c" providerId="ADAL" clId="{95DC2182-BA54-4583-9E8E-B21E5C8D4D55}" dt="2023-02-26T07:19:59.779" v="19287" actId="20577"/>
-        <pc:sldMkLst>
-          <pc:docMk/>
-          <pc:sldMk cId="736987387" sldId="402"/>
-        </pc:sldMkLst>
-      </pc:sldChg>
-      <pc:sldChg chg="addSp delSp modSp add mod ord">
-        <pc:chgData name="Matthieu De Mari" userId="dfb708c9-d8dc-439f-9a3b-c772bf4a311c" providerId="ADAL" clId="{95DC2182-BA54-4583-9E8E-B21E5C8D4D55}" dt="2023-02-23T03:00:12.707" v="9872" actId="20577"/>
-        <pc:sldMkLst>
-          <pc:docMk/>
-          <pc:sldMk cId="105113267" sldId="403"/>
-        </pc:sldMkLst>
-      </pc:sldChg>
-      <pc:sldChg chg="modSp new del mod">
-        <pc:chgData name="Matthieu De Mari" userId="dfb708c9-d8dc-439f-9a3b-c772bf4a311c" providerId="ADAL" clId="{95DC2182-BA54-4583-9E8E-B21E5C8D4D55}" dt="2023-02-21T10:03:31.963" v="5683" actId="2696"/>
-        <pc:sldMkLst>
-          <pc:docMk/>
-          <pc:sldMk cId="955831919" sldId="404"/>
-        </pc:sldMkLst>
-      </pc:sldChg>
-      <pc:sldChg chg="modSp add mod ord">
-        <pc:chgData name="Matthieu De Mari" userId="dfb708c9-d8dc-439f-9a3b-c772bf4a311c" providerId="ADAL" clId="{95DC2182-BA54-4583-9E8E-B21E5C8D4D55}" dt="2023-02-26T07:35:56.470" v="19349" actId="20577"/>
-        <pc:sldMkLst>
-          <pc:docMk/>
-          <pc:sldMk cId="1663617131" sldId="404"/>
-        </pc:sldMkLst>
-      </pc:sldChg>
-      <pc:sldChg chg="modSp new mod ord">
-        <pc:chgData name="Matthieu De Mari" userId="dfb708c9-d8dc-439f-9a3b-c772bf4a311c" providerId="ADAL" clId="{95DC2182-BA54-4583-9E8E-B21E5C8D4D55}" dt="2023-02-23T03:01:30.211" v="9898" actId="20577"/>
-        <pc:sldMkLst>
-          <pc:docMk/>
-          <pc:sldMk cId="2755235485" sldId="405"/>
-        </pc:sldMkLst>
-      </pc:sldChg>
-      <pc:sldChg chg="modSp new mod">
-        <pc:chgData name="Matthieu De Mari" userId="dfb708c9-d8dc-439f-9a3b-c772bf4a311c" providerId="ADAL" clId="{95DC2182-BA54-4583-9E8E-B21E5C8D4D55}" dt="2023-02-23T03:03:41.570" v="9949" actId="20577"/>
-        <pc:sldMkLst>
-          <pc:docMk/>
-          <pc:sldMk cId="2781272903" sldId="406"/>
-        </pc:sldMkLst>
-      </pc:sldChg>
-      <pc:sldChg chg="addSp modSp new mod ord modClrScheme chgLayout">
-        <pc:chgData name="Matthieu De Mari" userId="dfb708c9-d8dc-439f-9a3b-c772bf4a311c" providerId="ADAL" clId="{95DC2182-BA54-4583-9E8E-B21E5C8D4D55}" dt="2023-02-26T08:51:59.487" v="25507"/>
-        <pc:sldMkLst>
-          <pc:docMk/>
-          <pc:sldMk cId="3425780644" sldId="407"/>
-        </pc:sldMkLst>
-      </pc:sldChg>
-      <pc:sldChg chg="modSp new del mod ord">
-        <pc:chgData name="Matthieu De Mari" userId="dfb708c9-d8dc-439f-9a3b-c772bf4a311c" providerId="ADAL" clId="{95DC2182-BA54-4583-9E8E-B21E5C8D4D55}" dt="2023-02-17T09:58:52.785" v="4408" actId="2696"/>
-        <pc:sldMkLst>
-          <pc:docMk/>
-          <pc:sldMk cId="720065278" sldId="408"/>
-        </pc:sldMkLst>
-      </pc:sldChg>
-      <pc:sldChg chg="modSp add mod">
-        <pc:chgData name="Matthieu De Mari" userId="dfb708c9-d8dc-439f-9a3b-c772bf4a311c" providerId="ADAL" clId="{95DC2182-BA54-4583-9E8E-B21E5C8D4D55}" dt="2023-02-23T06:53:08.162" v="14364"/>
-        <pc:sldMkLst>
-          <pc:docMk/>
-          <pc:sldMk cId="1300324164" sldId="408"/>
-        </pc:sldMkLst>
-      </pc:sldChg>
-      <pc:sldChg chg="modSp new del mod">
-        <pc:chgData name="Matthieu De Mari" userId="dfb708c9-d8dc-439f-9a3b-c772bf4a311c" providerId="ADAL" clId="{95DC2182-BA54-4583-9E8E-B21E5C8D4D55}" dt="2023-02-26T08:25:23.381" v="22856" actId="47"/>
-        <pc:sldMkLst>
-          <pc:docMk/>
-          <pc:sldMk cId="2990823243" sldId="409"/>
-        </pc:sldMkLst>
-      </pc:sldChg>
-      <pc:sldChg chg="modSp new mod ord">
-        <pc:chgData name="Matthieu De Mari" userId="dfb708c9-d8dc-439f-9a3b-c772bf4a311c" providerId="ADAL" clId="{95DC2182-BA54-4583-9E8E-B21E5C8D4D55}" dt="2023-02-26T07:38:17.095" v="19376" actId="113"/>
-        <pc:sldMkLst>
-          <pc:docMk/>
-          <pc:sldMk cId="3793163593" sldId="410"/>
-        </pc:sldMkLst>
-      </pc:sldChg>
-      <pc:sldChg chg="modSp new del mod">
-        <pc:chgData name="Matthieu De Mari" userId="dfb708c9-d8dc-439f-9a3b-c772bf4a311c" providerId="ADAL" clId="{95DC2182-BA54-4583-9E8E-B21E5C8D4D55}" dt="2023-02-21T10:36:46.337" v="7652" actId="47"/>
-        <pc:sldMkLst>
-          <pc:docMk/>
-          <pc:sldMk cId="1374902952" sldId="411"/>
-        </pc:sldMkLst>
-      </pc:sldChg>
-      <pc:sldChg chg="new del">
-        <pc:chgData name="Matthieu De Mari" userId="dfb708c9-d8dc-439f-9a3b-c772bf4a311c" providerId="ADAL" clId="{95DC2182-BA54-4583-9E8E-B21E5C8D4D55}" dt="2023-02-17T09:59:05.481" v="4413" actId="47"/>
-        <pc:sldMkLst>
-          <pc:docMk/>
-          <pc:sldMk cId="1249392804" sldId="412"/>
-        </pc:sldMkLst>
-      </pc:sldChg>
-      <pc:sldChg chg="new del">
-        <pc:chgData name="Matthieu De Mari" userId="dfb708c9-d8dc-439f-9a3b-c772bf4a311c" providerId="ADAL" clId="{95DC2182-BA54-4583-9E8E-B21E5C8D4D55}" dt="2023-02-21T10:36:26.763" v="7648" actId="47"/>
-        <pc:sldMkLst>
-          <pc:docMk/>
-          <pc:sldMk cId="3553139110" sldId="412"/>
-        </pc:sldMkLst>
-      </pc:sldChg>
-      <pc:sldChg chg="modSp add mod">
-        <pc:chgData name="Matthieu De Mari" userId="dfb708c9-d8dc-439f-9a3b-c772bf4a311c" providerId="ADAL" clId="{95DC2182-BA54-4583-9E8E-B21E5C8D4D55}" dt="2023-02-23T06:51:59.350" v="14354" actId="20577"/>
-        <pc:sldMkLst>
-          <pc:docMk/>
-          <pc:sldMk cId="1165688587" sldId="571"/>
-        </pc:sldMkLst>
-      </pc:sldChg>
-      <pc:sldChg chg="modSp add del mod">
-        <pc:chgData name="Matthieu De Mari" userId="dfb708c9-d8dc-439f-9a3b-c772bf4a311c" providerId="ADAL" clId="{95DC2182-BA54-4583-9E8E-B21E5C8D4D55}" dt="2023-02-21T09:56:31.484" v="4852" actId="47"/>
-        <pc:sldMkLst>
-          <pc:docMk/>
-          <pc:sldMk cId="2791256840" sldId="572"/>
-        </pc:sldMkLst>
-      </pc:sldChg>
-      <pc:sldChg chg="add del">
-        <pc:chgData name="Matthieu De Mari" userId="dfb708c9-d8dc-439f-9a3b-c772bf4a311c" providerId="ADAL" clId="{95DC2182-BA54-4583-9E8E-B21E5C8D4D55}" dt="2023-02-21T09:58:08.296" v="4895" actId="47"/>
-        <pc:sldMkLst>
-          <pc:docMk/>
-          <pc:sldMk cId="2218721771" sldId="573"/>
-        </pc:sldMkLst>
-      </pc:sldChg>
-      <pc:sldChg chg="modSp add del mod ord">
-        <pc:chgData name="Matthieu De Mari" userId="dfb708c9-d8dc-439f-9a3b-c772bf4a311c" providerId="ADAL" clId="{95DC2182-BA54-4583-9E8E-B21E5C8D4D55}" dt="2023-02-21T10:03:31.963" v="5683" actId="2696"/>
-        <pc:sldMkLst>
-          <pc:docMk/>
-          <pc:sldMk cId="1165490893" sldId="574"/>
-        </pc:sldMkLst>
-      </pc:sldChg>
-      <pc:sldChg chg="modSp add mod ord">
-        <pc:chgData name="Matthieu De Mari" userId="dfb708c9-d8dc-439f-9a3b-c772bf4a311c" providerId="ADAL" clId="{95DC2182-BA54-4583-9E8E-B21E5C8D4D55}" dt="2023-02-26T07:36:09.332" v="19354" actId="20577"/>
-        <pc:sldMkLst>
-          <pc:docMk/>
-          <pc:sldMk cId="3078664734" sldId="574"/>
-        </pc:sldMkLst>
-      </pc:sldChg>
-      <pc:sldChg chg="modSp new del mod">
-        <pc:chgData name="Matthieu De Mari" userId="dfb708c9-d8dc-439f-9a3b-c772bf4a311c" providerId="ADAL" clId="{95DC2182-BA54-4583-9E8E-B21E5C8D4D55}" dt="2023-02-21T09:56:32.308" v="4853" actId="47"/>
-        <pc:sldMkLst>
-          <pc:docMk/>
-          <pc:sldMk cId="937325559" sldId="575"/>
-        </pc:sldMkLst>
-      </pc:sldChg>
-      <pc:sldChg chg="modSp add mod">
-        <pc:chgData name="Matthieu De Mari" userId="dfb708c9-d8dc-439f-9a3b-c772bf4a311c" providerId="ADAL" clId="{95DC2182-BA54-4583-9E8E-B21E5C8D4D55}" dt="2023-02-23T03:01:12.697" v="9892" actId="20577"/>
-        <pc:sldMkLst>
-          <pc:docMk/>
-          <pc:sldMk cId="3542276236" sldId="575"/>
-        </pc:sldMkLst>
-      </pc:sldChg>
-      <pc:sldChg chg="modSp new mod ord">
-        <pc:chgData name="Matthieu De Mari" userId="dfb708c9-d8dc-439f-9a3b-c772bf4a311c" providerId="ADAL" clId="{95DC2182-BA54-4583-9E8E-B21E5C8D4D55}" dt="2023-02-23T03:02:15.773" v="9930"/>
-        <pc:sldMkLst>
-          <pc:docMk/>
-          <pc:sldMk cId="1343460073" sldId="576"/>
-        </pc:sldMkLst>
-      </pc:sldChg>
-      <pc:sldChg chg="addSp modSp add mod ord">
-        <pc:chgData name="Matthieu De Mari" userId="dfb708c9-d8dc-439f-9a3b-c772bf4a311c" providerId="ADAL" clId="{95DC2182-BA54-4583-9E8E-B21E5C8D4D55}" dt="2023-02-23T03:02:10.624" v="9929" actId="113"/>
-        <pc:sldMkLst>
-          <pc:docMk/>
-          <pc:sldMk cId="3821622736" sldId="577"/>
-        </pc:sldMkLst>
-      </pc:sldChg>
-      <pc:sldChg chg="modSp new mod">
-        <pc:chgData name="Matthieu De Mari" userId="dfb708c9-d8dc-439f-9a3b-c772bf4a311c" providerId="ADAL" clId="{95DC2182-BA54-4583-9E8E-B21E5C8D4D55}" dt="2023-02-23T03:02:42.860" v="9932" actId="20577"/>
-        <pc:sldMkLst>
-          <pc:docMk/>
-          <pc:sldMk cId="3867797258" sldId="578"/>
-        </pc:sldMkLst>
-      </pc:sldChg>
-      <pc:sldChg chg="add del ord">
-        <pc:chgData name="Matthieu De Mari" userId="dfb708c9-d8dc-439f-9a3b-c772bf4a311c" providerId="ADAL" clId="{95DC2182-BA54-4583-9E8E-B21E5C8D4D55}" dt="2023-02-21T10:36:15.246" v="7647" actId="47"/>
-        <pc:sldMkLst>
-          <pc:docMk/>
-          <pc:sldMk cId="796962667" sldId="579"/>
-        </pc:sldMkLst>
-      </pc:sldChg>
-      <pc:sldChg chg="modSp add mod">
-        <pc:chgData name="Matthieu De Mari" userId="dfb708c9-d8dc-439f-9a3b-c772bf4a311c" providerId="ADAL" clId="{95DC2182-BA54-4583-9E8E-B21E5C8D4D55}" dt="2023-02-23T03:02:23.621" v="9931"/>
-        <pc:sldMkLst>
-          <pc:docMk/>
-          <pc:sldMk cId="884373967" sldId="580"/>
-        </pc:sldMkLst>
-      </pc:sldChg>
-      <pc:sldChg chg="addSp delSp modSp new mod">
-        <pc:chgData name="Matthieu De Mari" userId="dfb708c9-d8dc-439f-9a3b-c772bf4a311c" providerId="ADAL" clId="{95DC2182-BA54-4583-9E8E-B21E5C8D4D55}" dt="2023-02-21T10:37:11.013" v="7685" actId="122"/>
-        <pc:sldMkLst>
-          <pc:docMk/>
-          <pc:sldMk cId="4262229869" sldId="581"/>
-        </pc:sldMkLst>
-      </pc:sldChg>
-      <pc:sldChg chg="add">
-        <pc:chgData name="Matthieu De Mari" userId="dfb708c9-d8dc-439f-9a3b-c772bf4a311c" providerId="ADAL" clId="{95DC2182-BA54-4583-9E8E-B21E5C8D4D55}" dt="2023-02-21T10:42:01.942" v="8296"/>
-        <pc:sldMkLst>
-          <pc:docMk/>
-          <pc:sldMk cId="445144023" sldId="582"/>
-        </pc:sldMkLst>
-      </pc:sldChg>
-      <pc:sldChg chg="addSp delSp modSp new mod">
-        <pc:chgData name="Matthieu De Mari" userId="dfb708c9-d8dc-439f-9a3b-c772bf4a311c" providerId="ADAL" clId="{95DC2182-BA54-4583-9E8E-B21E5C8D4D55}" dt="2023-02-23T03:04:42.732" v="9954" actId="207"/>
-        <pc:sldMkLst>
-          <pc:docMk/>
-          <pc:sldMk cId="1327648275" sldId="583"/>
-        </pc:sldMkLst>
-      </pc:sldChg>
-      <pc:sldChg chg="addSp delSp modSp new mod">
-        <pc:chgData name="Matthieu De Mari" userId="dfb708c9-d8dc-439f-9a3b-c772bf4a311c" providerId="ADAL" clId="{95DC2182-BA54-4583-9E8E-B21E5C8D4D55}" dt="2023-02-21T10:52:14.651" v="9032" actId="1076"/>
-        <pc:sldMkLst>
-          <pc:docMk/>
-          <pc:sldMk cId="1700821507" sldId="584"/>
-        </pc:sldMkLst>
-      </pc:sldChg>
-      <pc:sldChg chg="addSp delSp modSp add mod">
-        <pc:chgData name="Matthieu De Mari" userId="dfb708c9-d8dc-439f-9a3b-c772bf4a311c" providerId="ADAL" clId="{95DC2182-BA54-4583-9E8E-B21E5C8D4D55}" dt="2023-02-26T07:35:23.013" v="19289" actId="14100"/>
-        <pc:sldMkLst>
-          <pc:docMk/>
-          <pc:sldMk cId="2986323806" sldId="585"/>
-        </pc:sldMkLst>
-      </pc:sldChg>
-      <pc:sldChg chg="addSp delSp modSp add mod">
-        <pc:chgData name="Matthieu De Mari" userId="dfb708c9-d8dc-439f-9a3b-c772bf4a311c" providerId="ADAL" clId="{95DC2182-BA54-4583-9E8E-B21E5C8D4D55}" dt="2023-02-21T10:54:10.017" v="9091" actId="20577"/>
-        <pc:sldMkLst>
-          <pc:docMk/>
-          <pc:sldMk cId="2080496661" sldId="586"/>
-        </pc:sldMkLst>
-      </pc:sldChg>
-      <pc:sldChg chg="new del">
-        <pc:chgData name="Matthieu De Mari" userId="dfb708c9-d8dc-439f-9a3b-c772bf4a311c" providerId="ADAL" clId="{95DC2182-BA54-4583-9E8E-B21E5C8D4D55}" dt="2023-02-21T10:54:41.672" v="9094" actId="47"/>
-        <pc:sldMkLst>
-          <pc:docMk/>
-          <pc:sldMk cId="2237088828" sldId="587"/>
-        </pc:sldMkLst>
-      </pc:sldChg>
-      <pc:sldChg chg="modSp add mod">
-        <pc:chgData name="Matthieu De Mari" userId="dfb708c9-d8dc-439f-9a3b-c772bf4a311c" providerId="ADAL" clId="{95DC2182-BA54-4583-9E8E-B21E5C8D4D55}" dt="2023-02-21T10:57:48.169" v="9418" actId="207"/>
-        <pc:sldMkLst>
-          <pc:docMk/>
-          <pc:sldMk cId="2743590117" sldId="588"/>
-        </pc:sldMkLst>
-      </pc:sldChg>
-      <pc:sldChg chg="modSp add mod">
-        <pc:chgData name="Matthieu De Mari" userId="dfb708c9-d8dc-439f-9a3b-c772bf4a311c" providerId="ADAL" clId="{95DC2182-BA54-4583-9E8E-B21E5C8D4D55}" dt="2023-02-23T03:06:37.700" v="10094" actId="20577"/>
-        <pc:sldMkLst>
-          <pc:docMk/>
-          <pc:sldMk cId="1885554493" sldId="589"/>
-        </pc:sldMkLst>
-      </pc:sldChg>
-      <pc:sldChg chg="modSp new mod ord">
-        <pc:chgData name="Matthieu De Mari" userId="dfb708c9-d8dc-439f-9a3b-c772bf4a311c" providerId="ADAL" clId="{95DC2182-BA54-4583-9E8E-B21E5C8D4D55}" dt="2023-02-26T08:51:59.487" v="25507"/>
-        <pc:sldMkLst>
-          <pc:docMk/>
-          <pc:sldMk cId="1038252774" sldId="590"/>
-        </pc:sldMkLst>
-      </pc:sldChg>
-      <pc:sldChg chg="modSp add mod">
-        <pc:chgData name="Matthieu De Mari" userId="dfb708c9-d8dc-439f-9a3b-c772bf4a311c" providerId="ADAL" clId="{95DC2182-BA54-4583-9E8E-B21E5C8D4D55}" dt="2023-02-21T11:02:29.181" v="9698" actId="20577"/>
-        <pc:sldMkLst>
-          <pc:docMk/>
-          <pc:sldMk cId="37425589" sldId="591"/>
-        </pc:sldMkLst>
-      </pc:sldChg>
-      <pc:sldChg chg="add ord">
-        <pc:chgData name="Matthieu De Mari" userId="dfb708c9-d8dc-439f-9a3b-c772bf4a311c" providerId="ADAL" clId="{95DC2182-BA54-4583-9E8E-B21E5C8D4D55}" dt="2023-02-26T08:51:59.487" v="25507"/>
-        <pc:sldMkLst>
-          <pc:docMk/>
-          <pc:sldMk cId="3688488777" sldId="592"/>
-        </pc:sldMkLst>
-      </pc:sldChg>
-      <pc:sldChg chg="add ord">
-        <pc:chgData name="Matthieu De Mari" userId="dfb708c9-d8dc-439f-9a3b-c772bf4a311c" providerId="ADAL" clId="{95DC2182-BA54-4583-9E8E-B21E5C8D4D55}" dt="2023-02-26T08:51:59.487" v="25507"/>
-        <pc:sldMkLst>
-          <pc:docMk/>
-          <pc:sldMk cId="3362761059" sldId="593"/>
-        </pc:sldMkLst>
-      </pc:sldChg>
-      <pc:sldChg chg="add ord">
-        <pc:chgData name="Matthieu De Mari" userId="dfb708c9-d8dc-439f-9a3b-c772bf4a311c" providerId="ADAL" clId="{95DC2182-BA54-4583-9E8E-B21E5C8D4D55}" dt="2023-02-26T08:51:59.487" v="25507"/>
-        <pc:sldMkLst>
-          <pc:docMk/>
-          <pc:sldMk cId="239607028" sldId="594"/>
-        </pc:sldMkLst>
-      </pc:sldChg>
-      <pc:sldChg chg="modSp add mod ord">
-        <pc:chgData name="Matthieu De Mari" userId="dfb708c9-d8dc-439f-9a3b-c772bf4a311c" providerId="ADAL" clId="{95DC2182-BA54-4583-9E8E-B21E5C8D4D55}" dt="2023-02-26T08:51:59.487" v="25507"/>
-        <pc:sldMkLst>
-          <pc:docMk/>
-          <pc:sldMk cId="3681758499" sldId="595"/>
-        </pc:sldMkLst>
-      </pc:sldChg>
-      <pc:sldChg chg="addSp delSp modSp add mod">
-        <pc:chgData name="Matthieu De Mari" userId="dfb708c9-d8dc-439f-9a3b-c772bf4a311c" providerId="ADAL" clId="{95DC2182-BA54-4583-9E8E-B21E5C8D4D55}" dt="2023-02-23T05:59:57.960" v="10204" actId="22"/>
-        <pc:sldMkLst>
-          <pc:docMk/>
-          <pc:sldMk cId="3292545768" sldId="596"/>
-        </pc:sldMkLst>
-      </pc:sldChg>
-      <pc:sldChg chg="add ord">
-        <pc:chgData name="Matthieu De Mari" userId="dfb708c9-d8dc-439f-9a3b-c772bf4a311c" providerId="ADAL" clId="{95DC2182-BA54-4583-9E8E-B21E5C8D4D55}" dt="2023-02-26T08:51:59.487" v="25507"/>
-        <pc:sldMkLst>
-          <pc:docMk/>
-          <pc:sldMk cId="337788125" sldId="597"/>
-        </pc:sldMkLst>
-      </pc:sldChg>
-      <pc:sldChg chg="addSp delSp modSp new mod ord modClrScheme chgLayout">
-        <pc:chgData name="Matthieu De Mari" userId="dfb708c9-d8dc-439f-9a3b-c772bf4a311c" providerId="ADAL" clId="{95DC2182-BA54-4583-9E8E-B21E5C8D4D55}" dt="2023-02-26T08:51:59.487" v="25507"/>
-        <pc:sldMkLst>
-          <pc:docMk/>
-          <pc:sldMk cId="2646292586" sldId="598"/>
-        </pc:sldMkLst>
-      </pc:sldChg>
-      <pc:sldChg chg="modSp new mod ord">
-        <pc:chgData name="Matthieu De Mari" userId="dfb708c9-d8dc-439f-9a3b-c772bf4a311c" providerId="ADAL" clId="{95DC2182-BA54-4583-9E8E-B21E5C8D4D55}" dt="2023-02-26T08:51:59.487" v="25507"/>
-        <pc:sldMkLst>
-          <pc:docMk/>
-          <pc:sldMk cId="1390758074" sldId="599"/>
-        </pc:sldMkLst>
-      </pc:sldChg>
-      <pc:sldChg chg="addSp delSp modSp new mod modClrScheme chgLayout">
-        <pc:chgData name="Matthieu De Mari" userId="dfb708c9-d8dc-439f-9a3b-c772bf4a311c" providerId="ADAL" clId="{95DC2182-BA54-4583-9E8E-B21E5C8D4D55}" dt="2023-02-26T07:37:19.683" v="19358" actId="113"/>
-        <pc:sldMkLst>
-          <pc:docMk/>
-          <pc:sldMk cId="3499753351" sldId="600"/>
-        </pc:sldMkLst>
-      </pc:sldChg>
-      <pc:sldChg chg="addSp delSp modSp new mod">
-        <pc:chgData name="Matthieu De Mari" userId="dfb708c9-d8dc-439f-9a3b-c772bf4a311c" providerId="ADAL" clId="{95DC2182-BA54-4583-9E8E-B21E5C8D4D55}" dt="2023-02-23T06:38:30.396" v="13775"/>
-        <pc:sldMkLst>
-          <pc:docMk/>
-          <pc:sldMk cId="1913740079" sldId="601"/>
-        </pc:sldMkLst>
-      </pc:sldChg>
-      <pc:sldChg chg="addSp delSp modSp add mod">
-        <pc:chgData name="Matthieu De Mari" userId="dfb708c9-d8dc-439f-9a3b-c772bf4a311c" providerId="ADAL" clId="{95DC2182-BA54-4583-9E8E-B21E5C8D4D55}" dt="2023-02-26T07:37:49.435" v="19374" actId="20577"/>
-        <pc:sldMkLst>
-          <pc:docMk/>
-          <pc:sldMk cId="4011461575" sldId="602"/>
-        </pc:sldMkLst>
-      </pc:sldChg>
-      <pc:sldChg chg="addSp delSp modSp add mod">
-        <pc:chgData name="Matthieu De Mari" userId="dfb708c9-d8dc-439f-9a3b-c772bf4a311c" providerId="ADAL" clId="{95DC2182-BA54-4583-9E8E-B21E5C8D4D55}" dt="2023-02-23T06:38:32.702" v="13777"/>
-        <pc:sldMkLst>
-          <pc:docMk/>
-          <pc:sldMk cId="2445909842" sldId="603"/>
-        </pc:sldMkLst>
-      </pc:sldChg>
-      <pc:sldChg chg="addSp modSp add mod">
-        <pc:chgData name="Matthieu De Mari" userId="dfb708c9-d8dc-439f-9a3b-c772bf4a311c" providerId="ADAL" clId="{95DC2182-BA54-4583-9E8E-B21E5C8D4D55}" dt="2023-02-23T06:38:27.236" v="13773" actId="1076"/>
-        <pc:sldMkLst>
-          <pc:docMk/>
-          <pc:sldMk cId="1888637577" sldId="604"/>
-        </pc:sldMkLst>
-      </pc:sldChg>
-      <pc:sldChg chg="addSp delSp modSp add mod modClrScheme chgLayout">
-        <pc:chgData name="Matthieu De Mari" userId="dfb708c9-d8dc-439f-9a3b-c772bf4a311c" providerId="ADAL" clId="{95DC2182-BA54-4583-9E8E-B21E5C8D4D55}" dt="2023-02-23T11:36:18.598" v="17804" actId="5793"/>
-        <pc:sldMkLst>
-          <pc:docMk/>
-          <pc:sldMk cId="3313007867" sldId="605"/>
-        </pc:sldMkLst>
-      </pc:sldChg>
-      <pc:sldChg chg="addSp delSp modSp new add del mod ord">
-        <pc:chgData name="Matthieu De Mari" userId="dfb708c9-d8dc-439f-9a3b-c772bf4a311c" providerId="ADAL" clId="{95DC2182-BA54-4583-9E8E-B21E5C8D4D55}" dt="2023-02-23T11:01:07.522" v="17147" actId="1076"/>
-        <pc:sldMkLst>
-          <pc:docMk/>
-          <pc:sldMk cId="544744450" sldId="606"/>
-        </pc:sldMkLst>
-      </pc:sldChg>
-      <pc:sldChg chg="addSp delSp modSp add mod modClrScheme chgLayout">
-        <pc:chgData name="Matthieu De Mari" userId="dfb708c9-d8dc-439f-9a3b-c772bf4a311c" providerId="ADAL" clId="{95DC2182-BA54-4583-9E8E-B21E5C8D4D55}" dt="2023-02-23T09:34:43.593" v="16656" actId="1076"/>
-        <pc:sldMkLst>
-          <pc:docMk/>
-          <pc:sldMk cId="2835508014" sldId="607"/>
-        </pc:sldMkLst>
-      </pc:sldChg>
-      <pc:sldChg chg="addSp delSp modSp add mod modClrScheme chgLayout">
-        <pc:chgData name="Matthieu De Mari" userId="dfb708c9-d8dc-439f-9a3b-c772bf4a311c" providerId="ADAL" clId="{95DC2182-BA54-4583-9E8E-B21E5C8D4D55}" dt="2023-02-23T09:43:19.433" v="16892" actId="20577"/>
-        <pc:sldMkLst>
-          <pc:docMk/>
-          <pc:sldMk cId="3494463352" sldId="608"/>
-        </pc:sldMkLst>
-      </pc:sldChg>
-      <pc:sldChg chg="modSp add mod">
-        <pc:chgData name="Matthieu De Mari" userId="dfb708c9-d8dc-439f-9a3b-c772bf4a311c" providerId="ADAL" clId="{95DC2182-BA54-4583-9E8E-B21E5C8D4D55}" dt="2023-02-23T11:36:16.260" v="17803" actId="5793"/>
-        <pc:sldMkLst>
-          <pc:docMk/>
-          <pc:sldMk cId="1274089717" sldId="609"/>
-        </pc:sldMkLst>
-      </pc:sldChg>
-      <pc:sldChg chg="modSp add mod">
-        <pc:chgData name="Matthieu De Mari" userId="dfb708c9-d8dc-439f-9a3b-c772bf4a311c" providerId="ADAL" clId="{95DC2182-BA54-4583-9E8E-B21E5C8D4D55}" dt="2023-02-23T09:42:56.991" v="16878" actId="27636"/>
-        <pc:sldMkLst>
-          <pc:docMk/>
-          <pc:sldMk cId="1149178855" sldId="610"/>
-        </pc:sldMkLst>
-      </pc:sldChg>
-      <pc:sldChg chg="modSp add mod">
-        <pc:chgData name="Matthieu De Mari" userId="dfb708c9-d8dc-439f-9a3b-c772bf4a311c" providerId="ADAL" clId="{95DC2182-BA54-4583-9E8E-B21E5C8D4D55}" dt="2023-02-23T09:32:16.226" v="16259" actId="5793"/>
-        <pc:sldMkLst>
-          <pc:docMk/>
-          <pc:sldMk cId="1655947162" sldId="611"/>
-        </pc:sldMkLst>
-      </pc:sldChg>
-      <pc:sldChg chg="add ord">
-        <pc:chgData name="Matthieu De Mari" userId="dfb708c9-d8dc-439f-9a3b-c772bf4a311c" providerId="ADAL" clId="{95DC2182-BA54-4583-9E8E-B21E5C8D4D55}" dt="2023-02-23T11:04:15.978" v="17200"/>
-        <pc:sldMkLst>
-          <pc:docMk/>
-          <pc:sldMk cId="1079237185" sldId="612"/>
-        </pc:sldMkLst>
-      </pc:sldChg>
-      <pc:sldChg chg="addSp delSp modSp new mod">
-        <pc:chgData name="Matthieu De Mari" userId="dfb708c9-d8dc-439f-9a3b-c772bf4a311c" providerId="ADAL" clId="{95DC2182-BA54-4583-9E8E-B21E5C8D4D55}" dt="2023-02-23T09:38:29.534" v="16823" actId="20577"/>
-        <pc:sldMkLst>
-          <pc:docMk/>
-          <pc:sldMk cId="3584089474" sldId="613"/>
-        </pc:sldMkLst>
-      </pc:sldChg>
-      <pc:sldChg chg="addSp delSp modSp add mod modClrScheme chgLayout">
-        <pc:chgData name="Matthieu De Mari" userId="dfb708c9-d8dc-439f-9a3b-c772bf4a311c" providerId="ADAL" clId="{95DC2182-BA54-4583-9E8E-B21E5C8D4D55}" dt="2023-02-23T11:05:02.668" v="17237" actId="20577"/>
-        <pc:sldMkLst>
-          <pc:docMk/>
-          <pc:sldMk cId="1726322392" sldId="614"/>
-        </pc:sldMkLst>
-      </pc:sldChg>
-      <pc:sldChg chg="addSp delSp modSp new del mod">
-        <pc:chgData name="Matthieu De Mari" userId="dfb708c9-d8dc-439f-9a3b-c772bf4a311c" providerId="ADAL" clId="{95DC2182-BA54-4583-9E8E-B21E5C8D4D55}" dt="2023-02-23T11:00:47.480" v="17143" actId="47"/>
-        <pc:sldMkLst>
-          <pc:docMk/>
-          <pc:sldMk cId="469800146" sldId="615"/>
-        </pc:sldMkLst>
-      </pc:sldChg>
-      <pc:sldChg chg="addSp delSp modSp add mod">
-        <pc:chgData name="Matthieu De Mari" userId="dfb708c9-d8dc-439f-9a3b-c772bf4a311c" providerId="ADAL" clId="{95DC2182-BA54-4583-9E8E-B21E5C8D4D55}" dt="2023-02-23T11:01:35.124" v="17195" actId="1076"/>
-        <pc:sldMkLst>
-          <pc:docMk/>
-          <pc:sldMk cId="1478687394" sldId="615"/>
-        </pc:sldMkLst>
-      </pc:sldChg>
-      <pc:sldChg chg="add del ord">
-        <pc:chgData name="Matthieu De Mari" userId="dfb708c9-d8dc-439f-9a3b-c772bf4a311c" providerId="ADAL" clId="{95DC2182-BA54-4583-9E8E-B21E5C8D4D55}" dt="2023-02-23T11:22:28.169" v="17391" actId="2696"/>
-        <pc:sldMkLst>
-          <pc:docMk/>
-          <pc:sldMk cId="2287299756" sldId="616"/>
-        </pc:sldMkLst>
-      </pc:sldChg>
-      <pc:sldChg chg="addSp modSp add mod ord modClrScheme chgLayout">
-        <pc:chgData name="Matthieu De Mari" userId="dfb708c9-d8dc-439f-9a3b-c772bf4a311c" providerId="ADAL" clId="{95DC2182-BA54-4583-9E8E-B21E5C8D4D55}" dt="2023-02-23T11:24:51.984" v="17467" actId="20577"/>
-        <pc:sldMkLst>
-          <pc:docMk/>
-          <pc:sldMk cId="2697134679" sldId="616"/>
-        </pc:sldMkLst>
-      </pc:sldChg>
-      <pc:sldChg chg="addSp delSp modSp add del mod">
-        <pc:chgData name="Matthieu De Mari" userId="dfb708c9-d8dc-439f-9a3b-c772bf4a311c" providerId="ADAL" clId="{95DC2182-BA54-4583-9E8E-B21E5C8D4D55}" dt="2023-02-23T11:00:48.453" v="17144" actId="47"/>
-        <pc:sldMkLst>
-          <pc:docMk/>
-          <pc:sldMk cId="2860911120" sldId="616"/>
-        </pc:sldMkLst>
-      </pc:sldChg>
-      <pc:sldChg chg="modSp add mod">
-        <pc:chgData name="Matthieu De Mari" userId="dfb708c9-d8dc-439f-9a3b-c772bf4a311c" providerId="ADAL" clId="{95DC2182-BA54-4583-9E8E-B21E5C8D4D55}" dt="2023-02-26T07:38:59.531" v="19401" actId="113"/>
-        <pc:sldMkLst>
-          <pc:docMk/>
-          <pc:sldMk cId="1087818113" sldId="617"/>
-        </pc:sldMkLst>
-      </pc:sldChg>
-      <pc:sldChg chg="addSp delSp modSp add del mod">
-        <pc:chgData name="Matthieu De Mari" userId="dfb708c9-d8dc-439f-9a3b-c772bf4a311c" providerId="ADAL" clId="{95DC2182-BA54-4583-9E8E-B21E5C8D4D55}" dt="2023-02-23T11:00:50.614" v="17145" actId="47"/>
-        <pc:sldMkLst>
-          <pc:docMk/>
-          <pc:sldMk cId="2582365728" sldId="617"/>
-        </pc:sldMkLst>
-      </pc:sldChg>
-      <pc:sldChg chg="modSp new del mod">
-        <pc:chgData name="Matthieu De Mari" userId="dfb708c9-d8dc-439f-9a3b-c772bf4a311c" providerId="ADAL" clId="{95DC2182-BA54-4583-9E8E-B21E5C8D4D55}" dt="2023-02-23T11:25:02.305" v="17470" actId="47"/>
-        <pc:sldMkLst>
-          <pc:docMk/>
-          <pc:sldMk cId="1744965747" sldId="618"/>
-        </pc:sldMkLst>
-      </pc:sldChg>
-      <pc:sldChg chg="modSp add mod">
-        <pc:chgData name="Matthieu De Mari" userId="dfb708c9-d8dc-439f-9a3b-c772bf4a311c" providerId="ADAL" clId="{95DC2182-BA54-4583-9E8E-B21E5C8D4D55}" dt="2023-02-23T11:26:25.692" v="17518" actId="20577"/>
-        <pc:sldMkLst>
-          <pc:docMk/>
-          <pc:sldMk cId="2052607657" sldId="619"/>
-        </pc:sldMkLst>
-      </pc:sldChg>
-      <pc:sldChg chg="modSp add mod">
-        <pc:chgData name="Matthieu De Mari" userId="dfb708c9-d8dc-439f-9a3b-c772bf4a311c" providerId="ADAL" clId="{95DC2182-BA54-4583-9E8E-B21E5C8D4D55}" dt="2023-02-23T11:30:14.608" v="17593" actId="20577"/>
-        <pc:sldMkLst>
-          <pc:docMk/>
-          <pc:sldMk cId="1028237814" sldId="620"/>
-        </pc:sldMkLst>
-      </pc:sldChg>
-      <pc:sldChg chg="modSp new del mod">
-        <pc:chgData name="Matthieu De Mari" userId="dfb708c9-d8dc-439f-9a3b-c772bf4a311c" providerId="ADAL" clId="{95DC2182-BA54-4583-9E8E-B21E5C8D4D55}" dt="2023-02-23T11:32:21.609" v="17677" actId="47"/>
-        <pc:sldMkLst>
-          <pc:docMk/>
-          <pc:sldMk cId="674043654" sldId="621"/>
-        </pc:sldMkLst>
-      </pc:sldChg>
-      <pc:sldChg chg="modSp add mod">
-        <pc:chgData name="Matthieu De Mari" userId="dfb708c9-d8dc-439f-9a3b-c772bf4a311c" providerId="ADAL" clId="{95DC2182-BA54-4583-9E8E-B21E5C8D4D55}" dt="2023-02-23T11:40:07.473" v="17897" actId="113"/>
-        <pc:sldMkLst>
-          <pc:docMk/>
-          <pc:sldMk cId="204647563" sldId="622"/>
-        </pc:sldMkLst>
-      </pc:sldChg>
-      <pc:sldChg chg="add del">
-        <pc:chgData name="Matthieu De Mari" userId="dfb708c9-d8dc-439f-9a3b-c772bf4a311c" providerId="ADAL" clId="{95DC2182-BA54-4583-9E8E-B21E5C8D4D55}" dt="2023-02-23T11:32:32.069" v="17686" actId="47"/>
-        <pc:sldMkLst>
-          <pc:docMk/>
-          <pc:sldMk cId="1519993866" sldId="623"/>
-        </pc:sldMkLst>
-      </pc:sldChg>
-      <pc:sldChg chg="modSp add mod">
-        <pc:chgData name="Matthieu De Mari" userId="dfb708c9-d8dc-439f-9a3b-c772bf4a311c" providerId="ADAL" clId="{95DC2182-BA54-4583-9E8E-B21E5C8D4D55}" dt="2023-02-23T11:46:58.301" v="18586" actId="20577"/>
-        <pc:sldMkLst>
-          <pc:docMk/>
-          <pc:sldMk cId="3109980527" sldId="624"/>
-        </pc:sldMkLst>
-      </pc:sldChg>
-      <pc:sldChg chg="add del">
-        <pc:chgData name="Matthieu De Mari" userId="dfb708c9-d8dc-439f-9a3b-c772bf4a311c" providerId="ADAL" clId="{95DC2182-BA54-4583-9E8E-B21E5C8D4D55}" dt="2023-02-23T11:32:33.987" v="17687" actId="47"/>
-        <pc:sldMkLst>
-          <pc:docMk/>
-          <pc:sldMk cId="1400857828" sldId="625"/>
-        </pc:sldMkLst>
-      </pc:sldChg>
-      <pc:sldChg chg="add del">
-        <pc:chgData name="Matthieu De Mari" userId="dfb708c9-d8dc-439f-9a3b-c772bf4a311c" providerId="ADAL" clId="{95DC2182-BA54-4583-9E8E-B21E5C8D4D55}" dt="2023-02-23T11:32:35.205" v="17688" actId="47"/>
-        <pc:sldMkLst>
-          <pc:docMk/>
-          <pc:sldMk cId="2617072352" sldId="626"/>
-        </pc:sldMkLst>
-      </pc:sldChg>
-      <pc:sldChg chg="addSp delSp modSp add mod">
-        <pc:chgData name="Matthieu De Mari" userId="dfb708c9-d8dc-439f-9a3b-c772bf4a311c" providerId="ADAL" clId="{95DC2182-BA54-4583-9E8E-B21E5C8D4D55}" dt="2023-02-26T07:39:25.714" v="19403"/>
-        <pc:sldMkLst>
-          <pc:docMk/>
-          <pc:sldMk cId="491578291" sldId="627"/>
-        </pc:sldMkLst>
-      </pc:sldChg>
-      <pc:sldChg chg="addSp delSp modSp add mod">
-        <pc:chgData name="Matthieu De Mari" userId="dfb708c9-d8dc-439f-9a3b-c772bf4a311c" providerId="ADAL" clId="{95DC2182-BA54-4583-9E8E-B21E5C8D4D55}" dt="2023-02-23T11:57:51.740" v="19189" actId="20577"/>
-        <pc:sldMkLst>
-          <pc:docMk/>
-          <pc:sldMk cId="4059265678" sldId="628"/>
-        </pc:sldMkLst>
-      </pc:sldChg>
-      <pc:sldChg chg="addSp delSp modSp add mod">
-        <pc:chgData name="Matthieu De Mari" userId="dfb708c9-d8dc-439f-9a3b-c772bf4a311c" providerId="ADAL" clId="{95DC2182-BA54-4583-9E8E-B21E5C8D4D55}" dt="2023-02-23T11:58:11.946" v="19193" actId="1076"/>
-        <pc:sldMkLst>
-          <pc:docMk/>
-          <pc:sldMk cId="2696285505" sldId="629"/>
-        </pc:sldMkLst>
-      </pc:sldChg>
-      <pc:sldChg chg="addSp delSp modSp add mod">
-        <pc:chgData name="Matthieu De Mari" userId="dfb708c9-d8dc-439f-9a3b-c772bf4a311c" providerId="ADAL" clId="{95DC2182-BA54-4583-9E8E-B21E5C8D4D55}" dt="2023-02-23T11:58:24.032" v="19195" actId="1076"/>
-        <pc:sldMkLst>
-          <pc:docMk/>
-          <pc:sldMk cId="3403244392" sldId="630"/>
-        </pc:sldMkLst>
-      </pc:sldChg>
-      <pc:sldChg chg="addSp delSp modSp add mod">
-        <pc:chgData name="Matthieu De Mari" userId="dfb708c9-d8dc-439f-9a3b-c772bf4a311c" providerId="ADAL" clId="{95DC2182-BA54-4583-9E8E-B21E5C8D4D55}" dt="2023-02-23T11:58:36.759" v="19197" actId="1076"/>
-        <pc:sldMkLst>
-          <pc:docMk/>
-          <pc:sldMk cId="3378674748" sldId="631"/>
-        </pc:sldMkLst>
-      </pc:sldChg>
-      <pc:sldChg chg="addSp delSp modSp add mod">
-        <pc:chgData name="Matthieu De Mari" userId="dfb708c9-d8dc-439f-9a3b-c772bf4a311c" providerId="ADAL" clId="{95DC2182-BA54-4583-9E8E-B21E5C8D4D55}" dt="2023-02-23T11:58:58.685" v="19200" actId="1076"/>
-        <pc:sldMkLst>
-          <pc:docMk/>
-          <pc:sldMk cId="3237577112" sldId="632"/>
-        </pc:sldMkLst>
-      </pc:sldChg>
-      <pc:sldChg chg="modSp add mod">
-        <pc:chgData name="Matthieu De Mari" userId="dfb708c9-d8dc-439f-9a3b-c772bf4a311c" providerId="ADAL" clId="{95DC2182-BA54-4583-9E8E-B21E5C8D4D55}" dt="2023-02-23T11:44:43.452" v="18255" actId="113"/>
-        <pc:sldMkLst>
-          <pc:docMk/>
-          <pc:sldMk cId="3821484596" sldId="633"/>
-        </pc:sldMkLst>
-      </pc:sldChg>
-      <pc:sldChg chg="modSp add mod">
-        <pc:chgData name="Matthieu De Mari" userId="dfb708c9-d8dc-439f-9a3b-c772bf4a311c" providerId="ADAL" clId="{95DC2182-BA54-4583-9E8E-B21E5C8D4D55}" dt="2023-02-26T07:39:41.850" v="19415" actId="20577"/>
-        <pc:sldMkLst>
-          <pc:docMk/>
-          <pc:sldMk cId="875945898" sldId="634"/>
-        </pc:sldMkLst>
-      </pc:sldChg>
-      <pc:sldChg chg="addSp modSp add mod modClrScheme chgLayout">
-        <pc:chgData name="Matthieu De Mari" userId="dfb708c9-d8dc-439f-9a3b-c772bf4a311c" providerId="ADAL" clId="{95DC2182-BA54-4583-9E8E-B21E5C8D4D55}" dt="2023-02-26T07:40:44.893" v="19434" actId="20577"/>
-        <pc:sldMkLst>
-          <pc:docMk/>
-          <pc:sldMk cId="956888542" sldId="635"/>
-        </pc:sldMkLst>
-      </pc:sldChg>
-      <pc:sldChg chg="modSp add mod">
-        <pc:chgData name="Matthieu De Mari" userId="dfb708c9-d8dc-439f-9a3b-c772bf4a311c" providerId="ADAL" clId="{95DC2182-BA54-4583-9E8E-B21E5C8D4D55}" dt="2023-02-26T07:41:01.441" v="19435"/>
-        <pc:sldMkLst>
-          <pc:docMk/>
-          <pc:sldMk cId="9821103" sldId="636"/>
-        </pc:sldMkLst>
-      </pc:sldChg>
-      <pc:sldChg chg="addSp delSp modSp new mod">
-        <pc:chgData name="Matthieu De Mari" userId="dfb708c9-d8dc-439f-9a3b-c772bf4a311c" providerId="ADAL" clId="{95DC2182-BA54-4583-9E8E-B21E5C8D4D55}" dt="2023-02-26T08:33:50.414" v="23836" actId="20577"/>
-        <pc:sldMkLst>
-          <pc:docMk/>
-          <pc:sldMk cId="1731878414" sldId="637"/>
-        </pc:sldMkLst>
-      </pc:sldChg>
-      <pc:sldChg chg="addSp delSp modSp new mod modClrScheme chgLayout">
-        <pc:chgData name="Matthieu De Mari" userId="dfb708c9-d8dc-439f-9a3b-c772bf4a311c" providerId="ADAL" clId="{95DC2182-BA54-4583-9E8E-B21E5C8D4D55}" dt="2023-02-26T07:51:17.949" v="20100" actId="207"/>
-        <pc:sldMkLst>
-          <pc:docMk/>
-          <pc:sldMk cId="1290242122" sldId="638"/>
-        </pc:sldMkLst>
-      </pc:sldChg>
-      <pc:sldChg chg="addSp delSp modSp new mod">
-        <pc:chgData name="Matthieu De Mari" userId="dfb708c9-d8dc-439f-9a3b-c772bf4a311c" providerId="ADAL" clId="{95DC2182-BA54-4583-9E8E-B21E5C8D4D55}" dt="2023-02-26T07:49:29.626" v="19989" actId="208"/>
-        <pc:sldMkLst>
-          <pc:docMk/>
-          <pc:sldMk cId="4283342382" sldId="639"/>
-        </pc:sldMkLst>
-      </pc:sldChg>
-      <pc:sldChg chg="addSp delSp modSp new mod">
-        <pc:chgData name="Matthieu De Mari" userId="dfb708c9-d8dc-439f-9a3b-c772bf4a311c" providerId="ADAL" clId="{95DC2182-BA54-4583-9E8E-B21E5C8D4D55}" dt="2023-02-26T07:54:53.760" v="20579" actId="14100"/>
-        <pc:sldMkLst>
-          <pc:docMk/>
-          <pc:sldMk cId="3527748531" sldId="640"/>
-        </pc:sldMkLst>
-      </pc:sldChg>
-      <pc:sldChg chg="modSp add mod">
-        <pc:chgData name="Matthieu De Mari" userId="dfb708c9-d8dc-439f-9a3b-c772bf4a311c" providerId="ADAL" clId="{95DC2182-BA54-4583-9E8E-B21E5C8D4D55}" dt="2023-02-26T08:01:55.944" v="21493" actId="20577"/>
-        <pc:sldMkLst>
-          <pc:docMk/>
-          <pc:sldMk cId="3298110552" sldId="641"/>
-        </pc:sldMkLst>
-      </pc:sldChg>
-      <pc:sldChg chg="addSp modSp add mod">
-        <pc:chgData name="Matthieu De Mari" userId="dfb708c9-d8dc-439f-9a3b-c772bf4a311c" providerId="ADAL" clId="{95DC2182-BA54-4583-9E8E-B21E5C8D4D55}" dt="2023-02-26T07:55:50.474" v="20800" actId="1076"/>
-        <pc:sldMkLst>
-          <pc:docMk/>
-          <pc:sldMk cId="4241197121" sldId="642"/>
-        </pc:sldMkLst>
-      </pc:sldChg>
-      <pc:sldChg chg="add del">
-        <pc:chgData name="Matthieu De Mari" userId="dfb708c9-d8dc-439f-9a3b-c772bf4a311c" providerId="ADAL" clId="{95DC2182-BA54-4583-9E8E-B21E5C8D4D55}" dt="2023-02-26T07:55:43.929" v="20797"/>
-        <pc:sldMkLst>
-          <pc:docMk/>
-          <pc:sldMk cId="610146181" sldId="643"/>
-        </pc:sldMkLst>
-      </pc:sldChg>
-      <pc:sldChg chg="addSp delSp modSp add mod">
-        <pc:chgData name="Matthieu De Mari" userId="dfb708c9-d8dc-439f-9a3b-c772bf4a311c" providerId="ADAL" clId="{95DC2182-BA54-4583-9E8E-B21E5C8D4D55}" dt="2023-02-26T08:02:06.838" v="21504" actId="20577"/>
-        <pc:sldMkLst>
-          <pc:docMk/>
-          <pc:sldMk cId="1487822837" sldId="643"/>
-        </pc:sldMkLst>
-      </pc:sldChg>
-      <pc:sldChg chg="addSp delSp modSp add mod">
-        <pc:chgData name="Matthieu De Mari" userId="dfb708c9-d8dc-439f-9a3b-c772bf4a311c" providerId="ADAL" clId="{95DC2182-BA54-4583-9E8E-B21E5C8D4D55}" dt="2023-02-26T08:02:12.887" v="21513" actId="20577"/>
-        <pc:sldMkLst>
-          <pc:docMk/>
-          <pc:sldMk cId="715032396" sldId="644"/>
-        </pc:sldMkLst>
-      </pc:sldChg>
-      <pc:sldChg chg="addSp delSp modSp add mod chgLayout">
-        <pc:chgData name="Matthieu De Mari" userId="dfb708c9-d8dc-439f-9a3b-c772bf4a311c" providerId="ADAL" clId="{95DC2182-BA54-4583-9E8E-B21E5C8D4D55}" dt="2023-02-26T08:08:00.561" v="21944" actId="20577"/>
-        <pc:sldMkLst>
-          <pc:docMk/>
-          <pc:sldMk cId="1850403076" sldId="645"/>
-        </pc:sldMkLst>
-      </pc:sldChg>
-      <pc:sldChg chg="addSp delSp modSp add mod">
-        <pc:chgData name="Matthieu De Mari" userId="dfb708c9-d8dc-439f-9a3b-c772bf4a311c" providerId="ADAL" clId="{95DC2182-BA54-4583-9E8E-B21E5C8D4D55}" dt="2023-02-26T08:03:15.451" v="21600" actId="1076"/>
-        <pc:sldMkLst>
-          <pc:docMk/>
-          <pc:sldMk cId="3708794977" sldId="646"/>
-        </pc:sldMkLst>
-      </pc:sldChg>
-      <pc:sldChg chg="new del">
-        <pc:chgData name="Matthieu De Mari" userId="dfb708c9-d8dc-439f-9a3b-c772bf4a311c" providerId="ADAL" clId="{95DC2182-BA54-4583-9E8E-B21E5C8D4D55}" dt="2023-02-26T08:25:21.334" v="22855" actId="47"/>
-        <pc:sldMkLst>
-          <pc:docMk/>
-          <pc:sldMk cId="643363626" sldId="647"/>
-        </pc:sldMkLst>
-      </pc:sldChg>
-      <pc:sldChg chg="addSp delSp modSp add mod ord">
-        <pc:chgData name="Matthieu De Mari" userId="dfb708c9-d8dc-439f-9a3b-c772bf4a311c" providerId="ADAL" clId="{95DC2182-BA54-4583-9E8E-B21E5C8D4D55}" dt="2023-02-26T08:25:45.717" v="22863" actId="20577"/>
-        <pc:sldMkLst>
-          <pc:docMk/>
-          <pc:sldMk cId="2404237809" sldId="648"/>
-        </pc:sldMkLst>
-      </pc:sldChg>
-      <pc:sldChg chg="addSp modSp add mod ord">
-        <pc:chgData name="Matthieu De Mari" userId="dfb708c9-d8dc-439f-9a3b-c772bf4a311c" providerId="ADAL" clId="{95DC2182-BA54-4583-9E8E-B21E5C8D4D55}" dt="2023-02-26T08:26:02.661" v="22885"/>
-        <pc:sldMkLst>
-          <pc:docMk/>
-          <pc:sldMk cId="1952442680" sldId="649"/>
-        </pc:sldMkLst>
-      </pc:sldChg>
-      <pc:sldChg chg="modSp add mod">
-        <pc:chgData name="Matthieu De Mari" userId="dfb708c9-d8dc-439f-9a3b-c772bf4a311c" providerId="ADAL" clId="{95DC2182-BA54-4583-9E8E-B21E5C8D4D55}" dt="2023-02-26T08:25:58.425" v="22884" actId="20577"/>
-        <pc:sldMkLst>
-          <pc:docMk/>
-          <pc:sldMk cId="3215884619" sldId="650"/>
-        </pc:sldMkLst>
-      </pc:sldChg>
-      <pc:sldChg chg="addSp modSp add mod">
-        <pc:chgData name="Matthieu De Mari" userId="dfb708c9-d8dc-439f-9a3b-c772bf4a311c" providerId="ADAL" clId="{95DC2182-BA54-4583-9E8E-B21E5C8D4D55}" dt="2023-02-26T08:21:09.108" v="22566" actId="1076"/>
-        <pc:sldMkLst>
-          <pc:docMk/>
-          <pc:sldMk cId="2595195584" sldId="651"/>
-        </pc:sldMkLst>
-      </pc:sldChg>
-      <pc:sldChg chg="addSp modSp add mod">
-        <pc:chgData name="Matthieu De Mari" userId="dfb708c9-d8dc-439f-9a3b-c772bf4a311c" providerId="ADAL" clId="{95DC2182-BA54-4583-9E8E-B21E5C8D4D55}" dt="2023-02-26T08:22:28.656" v="22594" actId="1037"/>
-        <pc:sldMkLst>
-          <pc:docMk/>
-          <pc:sldMk cId="773672680" sldId="652"/>
-        </pc:sldMkLst>
-      </pc:sldChg>
-      <pc:sldChg chg="addSp delSp modSp add mod chgLayout">
-        <pc:chgData name="Matthieu De Mari" userId="dfb708c9-d8dc-439f-9a3b-c772bf4a311c" providerId="ADAL" clId="{95DC2182-BA54-4583-9E8E-B21E5C8D4D55}" dt="2023-02-26T08:29:10.127" v="23267" actId="20577"/>
-        <pc:sldMkLst>
-          <pc:docMk/>
-          <pc:sldMk cId="855321949" sldId="653"/>
-        </pc:sldMkLst>
-      </pc:sldChg>
-      <pc:sldChg chg="addSp delSp modSp new mod ord modClrScheme chgLayout">
-        <pc:chgData name="Matthieu De Mari" userId="dfb708c9-d8dc-439f-9a3b-c772bf4a311c" providerId="ADAL" clId="{95DC2182-BA54-4583-9E8E-B21E5C8D4D55}" dt="2023-02-26T08:30:34.396" v="23518" actId="1076"/>
-        <pc:sldMkLst>
-          <pc:docMk/>
-          <pc:sldMk cId="2099660639" sldId="654"/>
-        </pc:sldMkLst>
-      </pc:sldChg>
-      <pc:sldChg chg="addSp delSp modSp add mod modClrScheme chgLayout">
-        <pc:chgData name="Matthieu De Mari" userId="dfb708c9-d8dc-439f-9a3b-c772bf4a311c" providerId="ADAL" clId="{95DC2182-BA54-4583-9E8E-B21E5C8D4D55}" dt="2023-02-26T08:45:11.474" v="24818" actId="20577"/>
-        <pc:sldMkLst>
-          <pc:docMk/>
-          <pc:sldMk cId="2451971174" sldId="655"/>
-        </pc:sldMkLst>
-      </pc:sldChg>
-      <pc:sldChg chg="addSp modSp add mod">
-        <pc:chgData name="Matthieu De Mari" userId="dfb708c9-d8dc-439f-9a3b-c772bf4a311c" providerId="ADAL" clId="{95DC2182-BA54-4583-9E8E-B21E5C8D4D55}" dt="2023-02-26T08:35:48.718" v="23984" actId="20577"/>
-        <pc:sldMkLst>
-          <pc:docMk/>
-          <pc:sldMk cId="148017835" sldId="656"/>
-        </pc:sldMkLst>
-      </pc:sldChg>
-      <pc:sldChg chg="addSp delSp modSp add mod">
-        <pc:chgData name="Matthieu De Mari" userId="dfb708c9-d8dc-439f-9a3b-c772bf4a311c" providerId="ADAL" clId="{95DC2182-BA54-4583-9E8E-B21E5C8D4D55}" dt="2023-02-26T08:37:03.529" v="24034" actId="20577"/>
-        <pc:sldMkLst>
-          <pc:docMk/>
-          <pc:sldMk cId="1922511899" sldId="657"/>
-        </pc:sldMkLst>
-      </pc:sldChg>
-      <pc:sldChg chg="addSp delSp modSp add mod">
-        <pc:chgData name="Matthieu De Mari" userId="dfb708c9-d8dc-439f-9a3b-c772bf4a311c" providerId="ADAL" clId="{95DC2182-BA54-4583-9E8E-B21E5C8D4D55}" dt="2023-02-26T08:45:36.452" v="24846" actId="20577"/>
-        <pc:sldMkLst>
-          <pc:docMk/>
-          <pc:sldMk cId="4035742227" sldId="658"/>
-        </pc:sldMkLst>
-      </pc:sldChg>
-      <pc:sldChg chg="addSp modSp add mod">
-        <pc:chgData name="Matthieu De Mari" userId="dfb708c9-d8dc-439f-9a3b-c772bf4a311c" providerId="ADAL" clId="{95DC2182-BA54-4583-9E8E-B21E5C8D4D55}" dt="2023-02-26T08:48:44.816" v="25240" actId="208"/>
-        <pc:sldMkLst>
-          <pc:docMk/>
-          <pc:sldMk cId="2096824087" sldId="659"/>
-        </pc:sldMkLst>
-      </pc:sldChg>
-      <pc:sldChg chg="addSp modSp add mod">
-        <pc:chgData name="Matthieu De Mari" userId="dfb708c9-d8dc-439f-9a3b-c772bf4a311c" providerId="ADAL" clId="{95DC2182-BA54-4583-9E8E-B21E5C8D4D55}" dt="2023-02-26T08:50:31.401" v="25403" actId="27636"/>
-        <pc:sldMkLst>
-          <pc:docMk/>
-          <pc:sldMk cId="3023865042" sldId="660"/>
-        </pc:sldMkLst>
-      </pc:sldChg>
-      <pc:sldChg chg="addSp delSp modSp add mod modClrScheme chgLayout">
-        <pc:chgData name="Matthieu De Mari" userId="dfb708c9-d8dc-439f-9a3b-c772bf4a311c" providerId="ADAL" clId="{95DC2182-BA54-4583-9E8E-B21E5C8D4D55}" dt="2023-02-26T08:59:57.695" v="26564" actId="27614"/>
-        <pc:sldMkLst>
-          <pc:docMk/>
-          <pc:sldMk cId="2303339168" sldId="661"/>
-        </pc:sldMkLst>
-      </pc:sldChg>
-      <pc:sldChg chg="modSp add mod">
-        <pc:chgData name="Matthieu De Mari" userId="dfb708c9-d8dc-439f-9a3b-c772bf4a311c" providerId="ADAL" clId="{95DC2182-BA54-4583-9E8E-B21E5C8D4D55}" dt="2023-02-26T08:57:11.565" v="26343" actId="113"/>
-        <pc:sldMkLst>
-          <pc:docMk/>
-          <pc:sldMk cId="444206811" sldId="662"/>
-        </pc:sldMkLst>
-      </pc:sldChg>
-      <pc:sldChg chg="modSp add mod">
-        <pc:chgData name="Matthieu De Mari" userId="dfb708c9-d8dc-439f-9a3b-c772bf4a311c" providerId="ADAL" clId="{95DC2182-BA54-4583-9E8E-B21E5C8D4D55}" dt="2023-02-26T08:59:51.154" v="26561" actId="20577"/>
-        <pc:sldMkLst>
-          <pc:docMk/>
-          <pc:sldMk cId="365986058" sldId="663"/>
-        </pc:sldMkLst>
-      </pc:sldChg>
-      <pc:sldChg chg="add del">
-        <pc:chgData name="Matthieu De Mari" userId="dfb708c9-d8dc-439f-9a3b-c772bf4a311c" providerId="ADAL" clId="{95DC2182-BA54-4583-9E8E-B21E5C8D4D55}" dt="2023-02-26T09:02:25.500" v="26957" actId="47"/>
-        <pc:sldMkLst>
-          <pc:docMk/>
-          <pc:sldMk cId="2221986219" sldId="664"/>
-        </pc:sldMkLst>
-      </pc:sldChg>
-      <pc:sldChg chg="add del">
-        <pc:chgData name="Matthieu De Mari" userId="dfb708c9-d8dc-439f-9a3b-c772bf4a311c" providerId="ADAL" clId="{95DC2182-BA54-4583-9E8E-B21E5C8D4D55}" dt="2023-02-26T09:02:26.166" v="26958" actId="47"/>
-        <pc:sldMkLst>
-          <pc:docMk/>
-          <pc:sldMk cId="2597465754" sldId="665"/>
+          <pc:sldMk cId="472427046" sldId="760"/>
         </pc:sldMkLst>
       </pc:sldChg>
     </pc:docChg>
@@ -4058,7 +471,7 @@
           <a:p>
             <a:fld id="{61478373-EB31-4867-8CF0-FA31364748A5}" type="datetimeFigureOut">
               <a:rPr lang="en-GB" smtClean="0"/>
-              <a:t>05/03/2025</a:t>
+              <a:t>18/12/2025</a:t>
             </a:fld>
             <a:endParaRPr lang="en-GB"/>
           </a:p>
@@ -4475,7 +888,7 @@
           <a:p>
             <a:fld id="{E85DF616-B21E-4EF6-A6A5-95E2FB3EB1A1}" type="datetimeFigureOut">
               <a:rPr lang="en-GB" smtClean="0"/>
-              <a:t>05/03/2025</a:t>
+              <a:t>18/12/2025</a:t>
             </a:fld>
             <a:endParaRPr lang="en-GB"/>
           </a:p>
@@ -4675,7 +1088,7 @@
           <a:p>
             <a:fld id="{E85DF616-B21E-4EF6-A6A5-95E2FB3EB1A1}" type="datetimeFigureOut">
               <a:rPr lang="en-GB" smtClean="0"/>
-              <a:t>05/03/2025</a:t>
+              <a:t>18/12/2025</a:t>
             </a:fld>
             <a:endParaRPr lang="en-GB"/>
           </a:p>
@@ -4885,7 +1298,7 @@
           <a:p>
             <a:fld id="{E85DF616-B21E-4EF6-A6A5-95E2FB3EB1A1}" type="datetimeFigureOut">
               <a:rPr lang="en-GB" smtClean="0"/>
-              <a:t>05/03/2025</a:t>
+              <a:t>18/12/2025</a:t>
             </a:fld>
             <a:endParaRPr lang="en-GB"/>
           </a:p>
@@ -5085,7 +1498,7 @@
           <a:p>
             <a:fld id="{E85DF616-B21E-4EF6-A6A5-95E2FB3EB1A1}" type="datetimeFigureOut">
               <a:rPr lang="en-GB" smtClean="0"/>
-              <a:t>05/03/2025</a:t>
+              <a:t>18/12/2025</a:t>
             </a:fld>
             <a:endParaRPr lang="en-GB"/>
           </a:p>
@@ -5361,7 +1774,7 @@
           <a:p>
             <a:fld id="{E85DF616-B21E-4EF6-A6A5-95E2FB3EB1A1}" type="datetimeFigureOut">
               <a:rPr lang="en-GB" smtClean="0"/>
-              <a:t>05/03/2025</a:t>
+              <a:t>18/12/2025</a:t>
             </a:fld>
             <a:endParaRPr lang="en-GB"/>
           </a:p>
@@ -5629,7 +2042,7 @@
           <a:p>
             <a:fld id="{E85DF616-B21E-4EF6-A6A5-95E2FB3EB1A1}" type="datetimeFigureOut">
               <a:rPr lang="en-GB" smtClean="0"/>
-              <a:t>05/03/2025</a:t>
+              <a:t>18/12/2025</a:t>
             </a:fld>
             <a:endParaRPr lang="en-GB"/>
           </a:p>
@@ -6044,7 +2457,7 @@
           <a:p>
             <a:fld id="{E85DF616-B21E-4EF6-A6A5-95E2FB3EB1A1}" type="datetimeFigureOut">
               <a:rPr lang="en-GB" smtClean="0"/>
-              <a:t>05/03/2025</a:t>
+              <a:t>18/12/2025</a:t>
             </a:fld>
             <a:endParaRPr lang="en-GB"/>
           </a:p>
@@ -6186,7 +2599,7 @@
           <a:p>
             <a:fld id="{E85DF616-B21E-4EF6-A6A5-95E2FB3EB1A1}" type="datetimeFigureOut">
               <a:rPr lang="en-GB" smtClean="0"/>
-              <a:t>05/03/2025</a:t>
+              <a:t>18/12/2025</a:t>
             </a:fld>
             <a:endParaRPr lang="en-GB"/>
           </a:p>
@@ -6299,7 +2712,7 @@
           <a:p>
             <a:fld id="{E85DF616-B21E-4EF6-A6A5-95E2FB3EB1A1}" type="datetimeFigureOut">
               <a:rPr lang="en-GB" smtClean="0"/>
-              <a:t>05/03/2025</a:t>
+              <a:t>18/12/2025</a:t>
             </a:fld>
             <a:endParaRPr lang="en-GB"/>
           </a:p>
@@ -6612,7 +3025,7 @@
           <a:p>
             <a:fld id="{E85DF616-B21E-4EF6-A6A5-95E2FB3EB1A1}" type="datetimeFigureOut">
               <a:rPr lang="en-GB" smtClean="0"/>
-              <a:t>05/03/2025</a:t>
+              <a:t>18/12/2025</a:t>
             </a:fld>
             <a:endParaRPr lang="en-GB"/>
           </a:p>
@@ -6901,7 +3314,7 @@
           <a:p>
             <a:fld id="{E85DF616-B21E-4EF6-A6A5-95E2FB3EB1A1}" type="datetimeFigureOut">
               <a:rPr lang="en-GB" smtClean="0"/>
-              <a:t>05/03/2025</a:t>
+              <a:t>18/12/2025</a:t>
             </a:fld>
             <a:endParaRPr lang="en-GB"/>
           </a:p>
@@ -7144,7 +3557,7 @@
           <a:p>
             <a:fld id="{E85DF616-B21E-4EF6-A6A5-95E2FB3EB1A1}" type="datetimeFigureOut">
               <a:rPr lang="en-GB" smtClean="0"/>
-              <a:t>05/03/2025</a:t>
+              <a:t>18/12/2025</a:t>
             </a:fld>
             <a:endParaRPr lang="en-GB"/>
           </a:p>
@@ -13287,7 +9700,7 @@
           <p:cNvPr id="2" name="Title 1">
             <a:extLst>
               <a:ext uri="{FF2B5EF4-FFF2-40B4-BE49-F238E27FC236}">
-                <a16:creationId xmlns:a16="http://schemas.microsoft.com/office/drawing/2014/main" id="{D4795DED-4F6A-4420-1474-79C41D9C7151}"/>
+                <a16:creationId xmlns:a16="http://schemas.microsoft.com/office/drawing/2014/main" id="{DF43E1B4-C323-B73D-1BA2-A75F6B822FC5}"/>
               </a:ext>
             </a:extLst>
           </p:cNvPr>
@@ -13305,7 +9718,478 @@
           <a:p>
             <a:r>
               <a:rPr lang="en-GB" dirty="0"/>
-              <a:t>A quick word on autoregressive RNNs</a:t>
+              <a:t>An example of auto-regression in action</a:t>
+            </a:r>
+          </a:p>
+        </p:txBody>
+      </p:sp>
+      <p:pic>
+        <p:nvPicPr>
+          <p:cNvPr id="8" name="Picture 7">
+            <a:extLst>
+              <a:ext uri="{FF2B5EF4-FFF2-40B4-BE49-F238E27FC236}">
+                <a16:creationId xmlns:a16="http://schemas.microsoft.com/office/drawing/2014/main" id="{EA9FEC9B-B3BB-0334-DD84-ADD7B3433685}"/>
+              </a:ext>
+            </a:extLst>
+          </p:cNvPr>
+          <p:cNvPicPr>
+            <a:picLocks noChangeAspect="1"/>
+          </p:cNvPicPr>
+          <p:nvPr/>
+        </p:nvPicPr>
+        <p:blipFill>
+          <a:blip r:embed="rId2"/>
+          <a:stretch>
+            <a:fillRect/>
+          </a:stretch>
+        </p:blipFill>
+        <p:spPr>
+          <a:xfrm>
+            <a:off x="3444273" y="3192281"/>
+            <a:ext cx="5303451" cy="2994410"/>
+          </a:xfrm>
+          <a:prstGeom prst="rect">
+            <a:avLst/>
+          </a:prstGeom>
+        </p:spPr>
+      </p:pic>
+      <p:pic>
+        <p:nvPicPr>
+          <p:cNvPr id="10" name="Picture 9">
+            <a:extLst>
+              <a:ext uri="{FF2B5EF4-FFF2-40B4-BE49-F238E27FC236}">
+                <a16:creationId xmlns:a16="http://schemas.microsoft.com/office/drawing/2014/main" id="{1BA9865F-4034-26E7-9E6E-4DDB9312337C}"/>
+              </a:ext>
+            </a:extLst>
+          </p:cNvPr>
+          <p:cNvPicPr>
+            <a:picLocks noChangeAspect="1"/>
+          </p:cNvPicPr>
+          <p:nvPr/>
+        </p:nvPicPr>
+        <p:blipFill>
+          <a:blip r:embed="rId3"/>
+          <a:stretch>
+            <a:fillRect/>
+          </a:stretch>
+        </p:blipFill>
+        <p:spPr>
+          <a:xfrm>
+            <a:off x="3200399" y="1782698"/>
+            <a:ext cx="5791201" cy="1069377"/>
+          </a:xfrm>
+          <a:prstGeom prst="rect">
+            <a:avLst/>
+          </a:prstGeom>
+        </p:spPr>
+      </p:pic>
+    </p:spTree>
+    <p:extLst>
+      <p:ext uri="{BB962C8B-B14F-4D97-AF65-F5344CB8AC3E}">
+        <p14:creationId xmlns:p14="http://schemas.microsoft.com/office/powerpoint/2010/main" val="1940866884"/>
+      </p:ext>
+    </p:extLst>
+  </p:cSld>
+  <p:clrMapOvr>
+    <a:masterClrMapping/>
+  </p:clrMapOvr>
+</p:sld>
+</file>
+
+<file path=ppt/slides/slide27.xml><?xml version="1.0" encoding="utf-8"?>
+<p:sld xmlns:a="http://schemas.openxmlformats.org/drawingml/2006/main" xmlns:r="http://schemas.openxmlformats.org/officeDocument/2006/relationships" xmlns:p="http://schemas.openxmlformats.org/presentationml/2006/main">
+  <p:cSld>
+    <p:spTree>
+      <p:nvGrpSpPr>
+        <p:cNvPr id="1" name="">
+          <a:extLst>
+            <a:ext uri="{FF2B5EF4-FFF2-40B4-BE49-F238E27FC236}">
+              <a16:creationId xmlns:a16="http://schemas.microsoft.com/office/drawing/2014/main" id="{1A2880CF-D905-B365-9EB4-0981D3329CA6}"/>
+            </a:ext>
+          </a:extLst>
+        </p:cNvPr>
+        <p:cNvGrpSpPr/>
+        <p:nvPr/>
+      </p:nvGrpSpPr>
+      <p:grpSpPr>
+        <a:xfrm>
+          <a:off x="0" y="0"/>
+          <a:ext cx="0" cy="0"/>
+          <a:chOff x="0" y="0"/>
+          <a:chExt cx="0" cy="0"/>
+        </a:xfrm>
+      </p:grpSpPr>
+      <p:sp>
+        <p:nvSpPr>
+          <p:cNvPr id="2" name="Title 1">
+            <a:extLst>
+              <a:ext uri="{FF2B5EF4-FFF2-40B4-BE49-F238E27FC236}">
+                <a16:creationId xmlns:a16="http://schemas.microsoft.com/office/drawing/2014/main" id="{1C5A6AB4-3F85-5F33-3A87-2C61E830C1B6}"/>
+              </a:ext>
+            </a:extLst>
+          </p:cNvPr>
+          <p:cNvSpPr>
+            <a:spLocks noGrp="1"/>
+          </p:cNvSpPr>
+          <p:nvPr>
+            <p:ph type="title"/>
+          </p:nvPr>
+        </p:nvSpPr>
+        <p:spPr/>
+        <p:txBody>
+          <a:bodyPr/>
+          <a:lstStyle/>
+          <a:p>
+            <a:r>
+              <a:rPr lang="en-GB" dirty="0"/>
+              <a:t>Chaining GPT to make full sentences</a:t>
+            </a:r>
+          </a:p>
+        </p:txBody>
+      </p:sp>
+      <p:sp>
+        <p:nvSpPr>
+          <p:cNvPr id="5" name="Content Placeholder 4">
+            <a:extLst>
+              <a:ext uri="{FF2B5EF4-FFF2-40B4-BE49-F238E27FC236}">
+                <a16:creationId xmlns:a16="http://schemas.microsoft.com/office/drawing/2014/main" id="{5C8A74D9-3FD1-FCE2-9AB1-8906E8BE660E}"/>
+              </a:ext>
+            </a:extLst>
+          </p:cNvPr>
+          <p:cNvSpPr>
+            <a:spLocks noGrp="1"/>
+          </p:cNvSpPr>
+          <p:nvPr>
+            <p:ph sz="half" idx="1"/>
+          </p:nvPr>
+        </p:nvSpPr>
+        <p:spPr/>
+        <p:txBody>
+          <a:bodyPr/>
+          <a:lstStyle/>
+          <a:p>
+            <a:pPr marL="0" indent="0">
+              <a:buNone/>
+            </a:pPr>
+            <a:r>
+              <a:rPr lang="en-GB" dirty="0"/>
+              <a:t>Having trained a GPT model, you can use it multiple times in a row, </a:t>
+            </a:r>
+            <a:r>
+              <a:rPr lang="en-GB" dirty="0" err="1"/>
+              <a:t>a.k.a</a:t>
+            </a:r>
+            <a:r>
+              <a:rPr lang="en-GB" dirty="0"/>
+              <a:t> the autocomplete game.</a:t>
+            </a:r>
+          </a:p>
+        </p:txBody>
+      </p:sp>
+      <p:pic>
+        <p:nvPicPr>
+          <p:cNvPr id="8" name="Picture 7">
+            <a:extLst>
+              <a:ext uri="{FF2B5EF4-FFF2-40B4-BE49-F238E27FC236}">
+                <a16:creationId xmlns:a16="http://schemas.microsoft.com/office/drawing/2014/main" id="{CEAC68AB-4574-3B3A-0C14-29B9A48CFAC9}"/>
+              </a:ext>
+            </a:extLst>
+          </p:cNvPr>
+          <p:cNvPicPr>
+            <a:picLocks noChangeAspect="1"/>
+          </p:cNvPicPr>
+          <p:nvPr/>
+        </p:nvPicPr>
+        <p:blipFill>
+          <a:blip r:embed="rId4"/>
+          <a:stretch>
+            <a:fillRect/>
+          </a:stretch>
+        </p:blipFill>
+        <p:spPr>
+          <a:xfrm>
+            <a:off x="6381548" y="3182553"/>
+            <a:ext cx="5303451" cy="2994410"/>
+          </a:xfrm>
+          <a:prstGeom prst="rect">
+            <a:avLst/>
+          </a:prstGeom>
+        </p:spPr>
+      </p:pic>
+      <p:pic>
+        <p:nvPicPr>
+          <p:cNvPr id="10" name="Picture 9">
+            <a:extLst>
+              <a:ext uri="{FF2B5EF4-FFF2-40B4-BE49-F238E27FC236}">
+                <a16:creationId xmlns:a16="http://schemas.microsoft.com/office/drawing/2014/main" id="{71AEB1FD-478A-6056-4B76-019B596D1784}"/>
+              </a:ext>
+            </a:extLst>
+          </p:cNvPr>
+          <p:cNvPicPr>
+            <a:picLocks noChangeAspect="1"/>
+          </p:cNvPicPr>
+          <p:nvPr/>
+        </p:nvPicPr>
+        <p:blipFill>
+          <a:blip r:embed="rId5"/>
+          <a:stretch>
+            <a:fillRect/>
+          </a:stretch>
+        </p:blipFill>
+        <p:spPr>
+          <a:xfrm>
+            <a:off x="6294921" y="1967524"/>
+            <a:ext cx="5791201" cy="1069377"/>
+          </a:xfrm>
+          <a:prstGeom prst="rect">
+            <a:avLst/>
+          </a:prstGeom>
+        </p:spPr>
+      </p:pic>
+      <p:pic>
+        <p:nvPicPr>
+          <p:cNvPr id="3" name="Predictive text game!(1)">
+            <a:hlinkClick r:id="" action="ppaction://media"/>
+            <a:extLst>
+              <a:ext uri="{FF2B5EF4-FFF2-40B4-BE49-F238E27FC236}">
+                <a16:creationId xmlns:a16="http://schemas.microsoft.com/office/drawing/2014/main" id="{F053B1CA-59DA-4CB9-1B7A-DEBB38498873}"/>
+              </a:ext>
+            </a:extLst>
+          </p:cNvPr>
+          <p:cNvPicPr>
+            <a:picLocks noChangeAspect="1"/>
+          </p:cNvPicPr>
+          <p:nvPr>
+            <a:videoFile r:link="rId2"/>
+            <p:extLst>
+              <p:ext uri="{DAA4B4D4-6D71-4841-9C94-3DE7FCFB9230}">
+                <p14:media xmlns:p14="http://schemas.microsoft.com/office/powerpoint/2010/main" r:embed="rId1"/>
+              </p:ext>
+            </p:extLst>
+          </p:nvPr>
+        </p:nvPicPr>
+        <p:blipFill>
+          <a:blip r:embed="rId6"/>
+          <a:stretch>
+            <a:fillRect/>
+          </a:stretch>
+        </p:blipFill>
+        <p:spPr>
+          <a:xfrm>
+            <a:off x="507001" y="182562"/>
+            <a:ext cx="11542889" cy="6492875"/>
+          </a:xfrm>
+          <a:prstGeom prst="rect">
+            <a:avLst/>
+          </a:prstGeom>
+          <a:ln w="38100" cap="sq">
+            <a:solidFill>
+              <a:srgbClr val="000000"/>
+            </a:solidFill>
+            <a:prstDash val="solid"/>
+            <a:miter lim="800000"/>
+          </a:ln>
+          <a:effectLst>
+            <a:outerShdw blurRad="50800" dist="38100" dir="2700000" algn="tl" rotWithShape="0">
+              <a:srgbClr val="000000">
+                <a:alpha val="43000"/>
+              </a:srgbClr>
+            </a:outerShdw>
+          </a:effectLst>
+        </p:spPr>
+      </p:pic>
+    </p:spTree>
+    <p:extLst>
+      <p:ext uri="{BB962C8B-B14F-4D97-AF65-F5344CB8AC3E}">
+        <p14:creationId xmlns:p14="http://schemas.microsoft.com/office/powerpoint/2010/main" val="472427046"/>
+      </p:ext>
+    </p:extLst>
+  </p:cSld>
+  <p:clrMapOvr>
+    <a:masterClrMapping/>
+  </p:clrMapOvr>
+  <p:timing>
+    <p:tnLst>
+      <p:par>
+        <p:cTn id="1" dur="indefinite" restart="never" nodeType="tmRoot">
+          <p:childTnLst>
+            <p:seq concurrent="1" nextAc="seek">
+              <p:cTn id="2" dur="indefinite" nodeType="mainSeq">
+                <p:childTnLst>
+                  <p:par>
+                    <p:cTn id="3" fill="hold">
+                      <p:stCondLst>
+                        <p:cond delay="indefinite"/>
+                        <p:cond evt="onBegin" delay="0">
+                          <p:tn val="2"/>
+                        </p:cond>
+                      </p:stCondLst>
+                      <p:childTnLst>
+                        <p:par>
+                          <p:cTn id="4" fill="hold">
+                            <p:stCondLst>
+                              <p:cond delay="0"/>
+                            </p:stCondLst>
+                            <p:childTnLst>
+                              <p:par>
+                                <p:cTn id="5" presetID="1" presetClass="mediacall" presetSubtype="0" fill="hold" nodeType="afterEffect">
+                                  <p:stCondLst>
+                                    <p:cond delay="0"/>
+                                  </p:stCondLst>
+                                  <p:childTnLst>
+                                    <p:cmd type="call" cmd="playFrom(0.0)">
+                                      <p:cBhvr>
+                                        <p:cTn id="6" dur="16834" fill="hold"/>
+                                        <p:tgtEl>
+                                          <p:spTgt spid="3"/>
+                                        </p:tgtEl>
+                                      </p:cBhvr>
+                                    </p:cmd>
+                                  </p:childTnLst>
+                                </p:cTn>
+                              </p:par>
+                            </p:childTnLst>
+                          </p:cTn>
+                        </p:par>
+                      </p:childTnLst>
+                    </p:cTn>
+                  </p:par>
+                </p:childTnLst>
+              </p:cTn>
+              <p:prevCondLst>
+                <p:cond evt="onPrev" delay="0">
+                  <p:tgtEl>
+                    <p:sldTgt/>
+                  </p:tgtEl>
+                </p:cond>
+              </p:prevCondLst>
+              <p:nextCondLst>
+                <p:cond evt="onNext" delay="0">
+                  <p:tgtEl>
+                    <p:sldTgt/>
+                  </p:tgtEl>
+                </p:cond>
+              </p:nextCondLst>
+            </p:seq>
+            <p:video>
+              <p:cMediaNode vol="80000">
+                <p:cTn id="7" fill="hold" display="0">
+                  <p:stCondLst>
+                    <p:cond delay="indefinite"/>
+                  </p:stCondLst>
+                </p:cTn>
+                <p:tgtEl>
+                  <p:spTgt spid="3"/>
+                </p:tgtEl>
+              </p:cMediaNode>
+            </p:video>
+            <p:seq concurrent="1" nextAc="seek">
+              <p:cTn id="8" restart="whenNotActive" fill="hold" evtFilter="cancelBubble" nodeType="interactiveSeq">
+                <p:stCondLst>
+                  <p:cond evt="onClick" delay="0">
+                    <p:tgtEl>
+                      <p:spTgt spid="3"/>
+                    </p:tgtEl>
+                  </p:cond>
+                </p:stCondLst>
+                <p:endSync evt="end" delay="0">
+                  <p:rtn val="all"/>
+                </p:endSync>
+                <p:childTnLst>
+                  <p:par>
+                    <p:cTn id="9" fill="hold">
+                      <p:stCondLst>
+                        <p:cond delay="0"/>
+                      </p:stCondLst>
+                      <p:childTnLst>
+                        <p:par>
+                          <p:cTn id="10" fill="hold">
+                            <p:stCondLst>
+                              <p:cond delay="0"/>
+                            </p:stCondLst>
+                            <p:childTnLst>
+                              <p:par>
+                                <p:cTn id="11" presetID="2" presetClass="mediacall" presetSubtype="0" fill="hold" nodeType="clickEffect">
+                                  <p:stCondLst>
+                                    <p:cond delay="0"/>
+                                  </p:stCondLst>
+                                  <p:childTnLst>
+                                    <p:cmd type="call" cmd="togglePause">
+                                      <p:cBhvr>
+                                        <p:cTn id="12" dur="1" fill="hold"/>
+                                        <p:tgtEl>
+                                          <p:spTgt spid="3"/>
+                                        </p:tgtEl>
+                                      </p:cBhvr>
+                                    </p:cmd>
+                                  </p:childTnLst>
+                                </p:cTn>
+                              </p:par>
+                            </p:childTnLst>
+                          </p:cTn>
+                        </p:par>
+                      </p:childTnLst>
+                    </p:cTn>
+                  </p:par>
+                </p:childTnLst>
+              </p:cTn>
+              <p:nextCondLst>
+                <p:cond evt="onClick" delay="0">
+                  <p:tgtEl>
+                    <p:spTgt spid="3"/>
+                  </p:tgtEl>
+                </p:cond>
+              </p:nextCondLst>
+            </p:seq>
+          </p:childTnLst>
+        </p:cTn>
+      </p:par>
+    </p:tnLst>
+  </p:timing>
+</p:sld>
+</file>
+
+<file path=ppt/slides/slide28.xml><?xml version="1.0" encoding="utf-8"?>
+<p:sld xmlns:a="http://schemas.openxmlformats.org/drawingml/2006/main" xmlns:r="http://schemas.openxmlformats.org/officeDocument/2006/relationships" xmlns:p="http://schemas.openxmlformats.org/presentationml/2006/main">
+  <p:cSld>
+    <p:spTree>
+      <p:nvGrpSpPr>
+        <p:cNvPr id="1" name=""/>
+        <p:cNvGrpSpPr/>
+        <p:nvPr/>
+      </p:nvGrpSpPr>
+      <p:grpSpPr>
+        <a:xfrm>
+          <a:off x="0" y="0"/>
+          <a:ext cx="0" cy="0"/>
+          <a:chOff x="0" y="0"/>
+          <a:chExt cx="0" cy="0"/>
+        </a:xfrm>
+      </p:grpSpPr>
+      <p:sp>
+        <p:nvSpPr>
+          <p:cNvPr id="2" name="Title 1">
+            <a:extLst>
+              <a:ext uri="{FF2B5EF4-FFF2-40B4-BE49-F238E27FC236}">
+                <a16:creationId xmlns:a16="http://schemas.microsoft.com/office/drawing/2014/main" id="{D4795DED-4F6A-4420-1474-79C41D9C7151}"/>
+              </a:ext>
+            </a:extLst>
+          </p:cNvPr>
+          <p:cNvSpPr>
+            <a:spLocks noGrp="1"/>
+          </p:cNvSpPr>
+          <p:nvPr>
+            <p:ph type="title"/>
+          </p:nvPr>
+        </p:nvSpPr>
+        <p:spPr/>
+        <p:txBody>
+          <a:bodyPr/>
+          <a:lstStyle/>
+          <a:p>
+            <a:r>
+              <a:rPr lang="en-GB" dirty="0"/>
+              <a:t>Another very important autoregressive RNN</a:t>
             </a:r>
             <a:endParaRPr lang="en-SG" dirty="0"/>
           </a:p>
@@ -13432,7 +10316,7 @@
 </p:sld>
 </file>
 
-<file path=ppt/slides/slide27.xml><?xml version="1.0" encoding="utf-8"?>
+<file path=ppt/slides/slide29.xml><?xml version="1.0" encoding="utf-8"?>
 <p:sld xmlns:a="http://schemas.openxmlformats.org/drawingml/2006/main" xmlns:r="http://schemas.openxmlformats.org/officeDocument/2006/relationships" xmlns:p="http://schemas.openxmlformats.org/presentationml/2006/main">
   <p:cSld>
     <p:spTree>
@@ -13478,7 +10362,7 @@
           <a:p>
             <a:r>
               <a:rPr lang="en-GB" dirty="0"/>
-              <a:t>A quick word on autoregressive RNNs</a:t>
+              <a:t>Another very important autoregressive RNN</a:t>
             </a:r>
             <a:endParaRPr lang="en-SG" dirty="0"/>
           </a:p>
@@ -13617,7 +10501,7 @@
 </p:sld>
 </file>
 
-<file path=ppt/slides/slide28.xml><?xml version="1.0" encoding="utf-8"?>
+<file path=ppt/slides/slide3.xml><?xml version="1.0" encoding="utf-8"?>
 <p:sld xmlns:a="http://schemas.openxmlformats.org/drawingml/2006/main" xmlns:r="http://schemas.openxmlformats.org/officeDocument/2006/relationships" xmlns:p="http://schemas.openxmlformats.org/presentationml/2006/main">
   <p:cSld>
     <p:spTree>
@@ -13639,7 +10523,7 @@
           <p:cNvPr id="2" name="Title 1">
             <a:extLst>
               <a:ext uri="{FF2B5EF4-FFF2-40B4-BE49-F238E27FC236}">
-                <a16:creationId xmlns:a16="http://schemas.microsoft.com/office/drawing/2014/main" id="{D4795DED-4F6A-4420-1474-79C41D9C7151}"/>
+                <a16:creationId xmlns:a16="http://schemas.microsoft.com/office/drawing/2014/main" id="{49D40417-A4D3-4CE8-96E7-708E2439AE7B}"/>
               </a:ext>
             </a:extLst>
           </p:cNvPr>
@@ -13656,8 +10540,307 @@
           <a:lstStyle/>
           <a:p>
             <a:r>
-              <a:rPr lang="en-GB" dirty="0"/>
-              <a:t>A quick word on autoregressive RNNs</a:t>
+              <a:rPr lang="en-US" dirty="0"/>
+              <a:t>About this week (</a:t>
+            </a:r>
+            <a:r>
+              <a:rPr lang="en-US"/>
+              <a:t>Week 5)</a:t>
+            </a:r>
+            <a:endParaRPr lang="en-GB" dirty="0"/>
+          </a:p>
+        </p:txBody>
+      </p:sp>
+      <p:sp>
+        <p:nvSpPr>
+          <p:cNvPr id="3" name="Content Placeholder 2">
+            <a:extLst>
+              <a:ext uri="{FF2B5EF4-FFF2-40B4-BE49-F238E27FC236}">
+                <a16:creationId xmlns:a16="http://schemas.microsoft.com/office/drawing/2014/main" id="{35995840-A9D9-479A-A34F-EA7DC229D38E}"/>
+              </a:ext>
+            </a:extLst>
+          </p:cNvPr>
+          <p:cNvSpPr>
+            <a:spLocks noGrp="1"/>
+          </p:cNvSpPr>
+          <p:nvPr>
+            <p:ph idx="1"/>
+          </p:nvPr>
+        </p:nvSpPr>
+        <p:spPr>
+          <a:xfrm>
+            <a:off x="838200" y="1825624"/>
+            <a:ext cx="10515600" cy="5032375"/>
+          </a:xfrm>
+        </p:spPr>
+        <p:txBody>
+          <a:bodyPr/>
+          <a:lstStyle/>
+          <a:p>
+            <a:pPr marL="514350" indent="-514350">
+              <a:buFont typeface="+mj-lt"/>
+              <a:buAutoNum type="arabicPeriod" startAt="8"/>
+            </a:pPr>
+            <a:r>
+              <a:rPr lang="en-US" dirty="0">
+                <a:solidFill>
+                  <a:schemeClr val="bg1">
+                    <a:lumMod val="65000"/>
+                  </a:schemeClr>
+                </a:solidFill>
+              </a:rPr>
+              <a:t>What is the </a:t>
+            </a:r>
+            <a:r>
+              <a:rPr lang="en-US" b="1" dirty="0">
+                <a:solidFill>
+                  <a:schemeClr val="bg1">
+                    <a:lumMod val="65000"/>
+                  </a:schemeClr>
+                </a:solidFill>
+              </a:rPr>
+              <a:t>LSTM</a:t>
+            </a:r>
+            <a:r>
+              <a:rPr lang="en-US" dirty="0">
+                <a:solidFill>
+                  <a:schemeClr val="bg1">
+                    <a:lumMod val="65000"/>
+                  </a:schemeClr>
+                </a:solidFill>
+              </a:rPr>
+              <a:t> model?</a:t>
+            </a:r>
+          </a:p>
+          <a:p>
+            <a:pPr marL="514350" indent="-514350">
+              <a:buFont typeface="+mj-lt"/>
+              <a:buAutoNum type="arabicPeriod" startAt="8"/>
+            </a:pPr>
+            <a:r>
+              <a:rPr lang="en-US" dirty="0">
+                <a:solidFill>
+                  <a:schemeClr val="bg1">
+                    <a:lumMod val="65000"/>
+                  </a:schemeClr>
+                </a:solidFill>
+              </a:rPr>
+              <a:t>What is the </a:t>
+            </a:r>
+            <a:r>
+              <a:rPr lang="en-US" b="1" dirty="0">
+                <a:solidFill>
+                  <a:schemeClr val="bg1">
+                    <a:lumMod val="65000"/>
+                  </a:schemeClr>
+                </a:solidFill>
+              </a:rPr>
+              <a:t>GRU</a:t>
+            </a:r>
+            <a:r>
+              <a:rPr lang="en-US" dirty="0">
+                <a:solidFill>
+                  <a:schemeClr val="bg1">
+                    <a:lumMod val="65000"/>
+                  </a:schemeClr>
+                </a:solidFill>
+              </a:rPr>
+              <a:t> model?</a:t>
+            </a:r>
+          </a:p>
+          <a:p>
+            <a:pPr marL="514350" indent="-514350">
+              <a:buFont typeface="+mj-lt"/>
+              <a:buAutoNum type="arabicPeriod" startAt="8"/>
+            </a:pPr>
+            <a:r>
+              <a:rPr lang="en-US" dirty="0"/>
+              <a:t>What are </a:t>
+            </a:r>
+            <a:r>
+              <a:rPr lang="en-US" b="1" dirty="0"/>
+              <a:t>one-to-one</a:t>
+            </a:r>
+            <a:r>
+              <a:rPr lang="en-US" dirty="0"/>
+              <a:t>, </a:t>
+            </a:r>
+            <a:r>
+              <a:rPr lang="en-US" b="1" dirty="0"/>
+              <a:t>one-to-many</a:t>
+            </a:r>
+            <a:r>
+              <a:rPr lang="en-US" dirty="0"/>
+              <a:t>, </a:t>
+            </a:r>
+            <a:r>
+              <a:rPr lang="en-US" b="1" dirty="0"/>
+              <a:t>many-to-one</a:t>
+            </a:r>
+            <a:r>
+              <a:rPr lang="en-US" dirty="0"/>
+              <a:t> and </a:t>
+            </a:r>
+            <a:r>
+              <a:rPr lang="en-US" b="1" dirty="0"/>
+              <a:t>many-to-many</a:t>
+            </a:r>
+            <a:r>
+              <a:rPr lang="en-US" dirty="0"/>
+              <a:t> models? </a:t>
+            </a:r>
+          </a:p>
+          <a:p>
+            <a:pPr marL="514350" indent="-514350">
+              <a:buFont typeface="+mj-lt"/>
+              <a:buAutoNum type="arabicPeriod" startAt="8"/>
+            </a:pPr>
+            <a:r>
+              <a:rPr lang="en-US" dirty="0"/>
+              <a:t>What are some </a:t>
+            </a:r>
+            <a:r>
+              <a:rPr lang="en-US" b="1" dirty="0"/>
+              <a:t>typical application examples </a:t>
+            </a:r>
+            <a:r>
+              <a:rPr lang="en-US" dirty="0"/>
+              <a:t>of these?</a:t>
+            </a:r>
+          </a:p>
+          <a:p>
+            <a:pPr marL="514350" indent="-514350">
+              <a:buFont typeface="+mj-lt"/>
+              <a:buAutoNum type="arabicPeriod" startAt="8"/>
+            </a:pPr>
+            <a:r>
+              <a:rPr lang="en-US" dirty="0"/>
+              <a:t>What is a </a:t>
+            </a:r>
+            <a:r>
+              <a:rPr lang="en-US" b="1" dirty="0"/>
+              <a:t>Seq2Seq</a:t>
+            </a:r>
+            <a:r>
+              <a:rPr lang="en-US" dirty="0"/>
+              <a:t> model?</a:t>
+            </a:r>
+          </a:p>
+          <a:p>
+            <a:pPr marL="514350" indent="-514350">
+              <a:buFont typeface="+mj-lt"/>
+              <a:buAutoNum type="arabicPeriod" startAt="8"/>
+            </a:pPr>
+            <a:r>
+              <a:rPr lang="en-US" dirty="0"/>
+              <a:t>What are </a:t>
+            </a:r>
+            <a:r>
+              <a:rPr lang="en-US" b="1" dirty="0"/>
+              <a:t>encoder</a:t>
+            </a:r>
+            <a:r>
+              <a:rPr lang="en-US" dirty="0"/>
+              <a:t> and </a:t>
+            </a:r>
+            <a:r>
+              <a:rPr lang="en-US" b="1" dirty="0"/>
+              <a:t>decoder</a:t>
+            </a:r>
+            <a:r>
+              <a:rPr lang="en-US" dirty="0"/>
+              <a:t> architectures?</a:t>
+            </a:r>
+          </a:p>
+          <a:p>
+            <a:pPr marL="514350" indent="-514350">
+              <a:buFont typeface="+mj-lt"/>
+              <a:buAutoNum type="arabicPeriod" startAt="8"/>
+            </a:pPr>
+            <a:r>
+              <a:rPr lang="en-US" dirty="0"/>
+              <a:t>What is an </a:t>
+            </a:r>
+            <a:r>
+              <a:rPr lang="en-US" b="1" dirty="0"/>
+              <a:t>autoregressive</a:t>
+            </a:r>
+            <a:r>
+              <a:rPr lang="en-US" dirty="0"/>
+              <a:t> </a:t>
+            </a:r>
+            <a:r>
+              <a:rPr lang="en-US" b="1" dirty="0"/>
+              <a:t>RNN</a:t>
+            </a:r>
+            <a:r>
+              <a:rPr lang="en-US" dirty="0"/>
+              <a:t>?</a:t>
+            </a:r>
+          </a:p>
+          <a:p>
+            <a:pPr marL="514350" indent="-514350">
+              <a:buFont typeface="+mj-lt"/>
+              <a:buAutoNum type="arabicPeriod" startAt="8"/>
+            </a:pPr>
+            <a:endParaRPr lang="en-GB" dirty="0"/>
+          </a:p>
+        </p:txBody>
+      </p:sp>
+    </p:spTree>
+    <p:extLst>
+      <p:ext uri="{BB962C8B-B14F-4D97-AF65-F5344CB8AC3E}">
+        <p14:creationId xmlns:p14="http://schemas.microsoft.com/office/powerpoint/2010/main" val="444206811"/>
+      </p:ext>
+    </p:extLst>
+  </p:cSld>
+  <p:clrMapOvr>
+    <a:masterClrMapping/>
+  </p:clrMapOvr>
+</p:sld>
+</file>
+
+<file path=ppt/slides/slide30.xml><?xml version="1.0" encoding="utf-8"?>
+<p:sld xmlns:a="http://schemas.openxmlformats.org/drawingml/2006/main" xmlns:r="http://schemas.openxmlformats.org/officeDocument/2006/relationships" xmlns:p="http://schemas.openxmlformats.org/presentationml/2006/main">
+  <p:cSld>
+    <p:spTree>
+      <p:nvGrpSpPr>
+        <p:cNvPr id="1" name=""/>
+        <p:cNvGrpSpPr/>
+        <p:nvPr/>
+      </p:nvGrpSpPr>
+      <p:grpSpPr>
+        <a:xfrm>
+          <a:off x="0" y="0"/>
+          <a:ext cx="0" cy="0"/>
+          <a:chOff x="0" y="0"/>
+          <a:chExt cx="0" cy="0"/>
+        </a:xfrm>
+      </p:grpSpPr>
+      <p:sp>
+        <p:nvSpPr>
+          <p:cNvPr id="2" name="Title 1">
+            <a:extLst>
+              <a:ext uri="{FF2B5EF4-FFF2-40B4-BE49-F238E27FC236}">
+                <a16:creationId xmlns:a16="http://schemas.microsoft.com/office/drawing/2014/main" id="{D4795DED-4F6A-4420-1474-79C41D9C7151}"/>
+              </a:ext>
+            </a:extLst>
+          </p:cNvPr>
+          <p:cNvSpPr>
+            <a:spLocks noGrp="1"/>
+          </p:cNvSpPr>
+          <p:nvPr>
+            <p:ph type="title"/>
+          </p:nvPr>
+        </p:nvSpPr>
+        <p:spPr/>
+        <p:txBody>
+          <a:bodyPr/>
+          <a:lstStyle/>
+          <a:p>
+            <a:r>
+              <a:rPr lang="en-GB" dirty="0"/>
+              <a:t>Another very important autoregressive RNN</a:t>
             </a:r>
             <a:endParaRPr lang="en-SG" dirty="0"/>
           </a:p>
@@ -13790,7 +10973,7 @@
 </p:sld>
 </file>
 
-<file path=ppt/slides/slide29.xml><?xml version="1.0" encoding="utf-8"?>
+<file path=ppt/slides/slide31.xml><?xml version="1.0" encoding="utf-8"?>
 <p:sld xmlns:a="http://schemas.openxmlformats.org/drawingml/2006/main" xmlns:r="http://schemas.openxmlformats.org/officeDocument/2006/relationships" xmlns:p="http://schemas.openxmlformats.org/presentationml/2006/main">
   <p:cSld>
     <p:spTree>
@@ -14413,306 +11596,7 @@
 </p:sld>
 </file>
 
-<file path=ppt/slides/slide3.xml><?xml version="1.0" encoding="utf-8"?>
-<p:sld xmlns:a="http://schemas.openxmlformats.org/drawingml/2006/main" xmlns:r="http://schemas.openxmlformats.org/officeDocument/2006/relationships" xmlns:p="http://schemas.openxmlformats.org/presentationml/2006/main">
-  <p:cSld>
-    <p:spTree>
-      <p:nvGrpSpPr>
-        <p:cNvPr id="1" name=""/>
-        <p:cNvGrpSpPr/>
-        <p:nvPr/>
-      </p:nvGrpSpPr>
-      <p:grpSpPr>
-        <a:xfrm>
-          <a:off x="0" y="0"/>
-          <a:ext cx="0" cy="0"/>
-          <a:chOff x="0" y="0"/>
-          <a:chExt cx="0" cy="0"/>
-        </a:xfrm>
-      </p:grpSpPr>
-      <p:sp>
-        <p:nvSpPr>
-          <p:cNvPr id="2" name="Title 1">
-            <a:extLst>
-              <a:ext uri="{FF2B5EF4-FFF2-40B4-BE49-F238E27FC236}">
-                <a16:creationId xmlns:a16="http://schemas.microsoft.com/office/drawing/2014/main" id="{49D40417-A4D3-4CE8-96E7-708E2439AE7B}"/>
-              </a:ext>
-            </a:extLst>
-          </p:cNvPr>
-          <p:cNvSpPr>
-            <a:spLocks noGrp="1"/>
-          </p:cNvSpPr>
-          <p:nvPr>
-            <p:ph type="title"/>
-          </p:nvPr>
-        </p:nvSpPr>
-        <p:spPr/>
-        <p:txBody>
-          <a:bodyPr/>
-          <a:lstStyle/>
-          <a:p>
-            <a:r>
-              <a:rPr lang="en-US" dirty="0"/>
-              <a:t>About this week (</a:t>
-            </a:r>
-            <a:r>
-              <a:rPr lang="en-US"/>
-              <a:t>Week 5)</a:t>
-            </a:r>
-            <a:endParaRPr lang="en-GB" dirty="0"/>
-          </a:p>
-        </p:txBody>
-      </p:sp>
-      <p:sp>
-        <p:nvSpPr>
-          <p:cNvPr id="3" name="Content Placeholder 2">
-            <a:extLst>
-              <a:ext uri="{FF2B5EF4-FFF2-40B4-BE49-F238E27FC236}">
-                <a16:creationId xmlns:a16="http://schemas.microsoft.com/office/drawing/2014/main" id="{35995840-A9D9-479A-A34F-EA7DC229D38E}"/>
-              </a:ext>
-            </a:extLst>
-          </p:cNvPr>
-          <p:cNvSpPr>
-            <a:spLocks noGrp="1"/>
-          </p:cNvSpPr>
-          <p:nvPr>
-            <p:ph idx="1"/>
-          </p:nvPr>
-        </p:nvSpPr>
-        <p:spPr>
-          <a:xfrm>
-            <a:off x="838200" y="1825624"/>
-            <a:ext cx="10515600" cy="5032375"/>
-          </a:xfrm>
-        </p:spPr>
-        <p:txBody>
-          <a:bodyPr/>
-          <a:lstStyle/>
-          <a:p>
-            <a:pPr marL="514350" indent="-514350">
-              <a:buFont typeface="+mj-lt"/>
-              <a:buAutoNum type="arabicPeriod" startAt="8"/>
-            </a:pPr>
-            <a:r>
-              <a:rPr lang="en-US" dirty="0">
-                <a:solidFill>
-                  <a:schemeClr val="bg1">
-                    <a:lumMod val="65000"/>
-                  </a:schemeClr>
-                </a:solidFill>
-              </a:rPr>
-              <a:t>What is the </a:t>
-            </a:r>
-            <a:r>
-              <a:rPr lang="en-US" b="1" dirty="0">
-                <a:solidFill>
-                  <a:schemeClr val="bg1">
-                    <a:lumMod val="65000"/>
-                  </a:schemeClr>
-                </a:solidFill>
-              </a:rPr>
-              <a:t>LSTM</a:t>
-            </a:r>
-            <a:r>
-              <a:rPr lang="en-US" dirty="0">
-                <a:solidFill>
-                  <a:schemeClr val="bg1">
-                    <a:lumMod val="65000"/>
-                  </a:schemeClr>
-                </a:solidFill>
-              </a:rPr>
-              <a:t> model?</a:t>
-            </a:r>
-          </a:p>
-          <a:p>
-            <a:pPr marL="514350" indent="-514350">
-              <a:buFont typeface="+mj-lt"/>
-              <a:buAutoNum type="arabicPeriod" startAt="8"/>
-            </a:pPr>
-            <a:r>
-              <a:rPr lang="en-US" dirty="0">
-                <a:solidFill>
-                  <a:schemeClr val="bg1">
-                    <a:lumMod val="65000"/>
-                  </a:schemeClr>
-                </a:solidFill>
-              </a:rPr>
-              <a:t>What is the </a:t>
-            </a:r>
-            <a:r>
-              <a:rPr lang="en-US" b="1" dirty="0">
-                <a:solidFill>
-                  <a:schemeClr val="bg1">
-                    <a:lumMod val="65000"/>
-                  </a:schemeClr>
-                </a:solidFill>
-              </a:rPr>
-              <a:t>GRU</a:t>
-            </a:r>
-            <a:r>
-              <a:rPr lang="en-US" dirty="0">
-                <a:solidFill>
-                  <a:schemeClr val="bg1">
-                    <a:lumMod val="65000"/>
-                  </a:schemeClr>
-                </a:solidFill>
-              </a:rPr>
-              <a:t> model?</a:t>
-            </a:r>
-          </a:p>
-          <a:p>
-            <a:pPr marL="514350" indent="-514350">
-              <a:buFont typeface="+mj-lt"/>
-              <a:buAutoNum type="arabicPeriod" startAt="8"/>
-            </a:pPr>
-            <a:r>
-              <a:rPr lang="en-US" dirty="0"/>
-              <a:t>What are </a:t>
-            </a:r>
-            <a:r>
-              <a:rPr lang="en-US" b="1" dirty="0"/>
-              <a:t>one-to-one</a:t>
-            </a:r>
-            <a:r>
-              <a:rPr lang="en-US" dirty="0"/>
-              <a:t>, </a:t>
-            </a:r>
-            <a:r>
-              <a:rPr lang="en-US" b="1" dirty="0"/>
-              <a:t>one-to-many</a:t>
-            </a:r>
-            <a:r>
-              <a:rPr lang="en-US" dirty="0"/>
-              <a:t>, </a:t>
-            </a:r>
-            <a:r>
-              <a:rPr lang="en-US" b="1" dirty="0"/>
-              <a:t>many-to-one</a:t>
-            </a:r>
-            <a:r>
-              <a:rPr lang="en-US" dirty="0"/>
-              <a:t> and </a:t>
-            </a:r>
-            <a:r>
-              <a:rPr lang="en-US" b="1" dirty="0"/>
-              <a:t>many-to-many</a:t>
-            </a:r>
-            <a:r>
-              <a:rPr lang="en-US" dirty="0"/>
-              <a:t> models? </a:t>
-            </a:r>
-          </a:p>
-          <a:p>
-            <a:pPr marL="514350" indent="-514350">
-              <a:buFont typeface="+mj-lt"/>
-              <a:buAutoNum type="arabicPeriod" startAt="8"/>
-            </a:pPr>
-            <a:r>
-              <a:rPr lang="en-US" dirty="0"/>
-              <a:t>What are some </a:t>
-            </a:r>
-            <a:r>
-              <a:rPr lang="en-US" b="1" dirty="0"/>
-              <a:t>typical application examples </a:t>
-            </a:r>
-            <a:r>
-              <a:rPr lang="en-US" dirty="0"/>
-              <a:t>of these?</a:t>
-            </a:r>
-          </a:p>
-          <a:p>
-            <a:pPr marL="514350" indent="-514350">
-              <a:buFont typeface="+mj-lt"/>
-              <a:buAutoNum type="arabicPeriod" startAt="8"/>
-            </a:pPr>
-            <a:r>
-              <a:rPr lang="en-US" dirty="0"/>
-              <a:t>What is a </a:t>
-            </a:r>
-            <a:r>
-              <a:rPr lang="en-US" b="1" dirty="0"/>
-              <a:t>Seq2Seq</a:t>
-            </a:r>
-            <a:r>
-              <a:rPr lang="en-US" dirty="0"/>
-              <a:t> model?</a:t>
-            </a:r>
-          </a:p>
-          <a:p>
-            <a:pPr marL="514350" indent="-514350">
-              <a:buFont typeface="+mj-lt"/>
-              <a:buAutoNum type="arabicPeriod" startAt="8"/>
-            </a:pPr>
-            <a:r>
-              <a:rPr lang="en-US" dirty="0"/>
-              <a:t>What are </a:t>
-            </a:r>
-            <a:r>
-              <a:rPr lang="en-US" b="1" dirty="0"/>
-              <a:t>encoder</a:t>
-            </a:r>
-            <a:r>
-              <a:rPr lang="en-US" dirty="0"/>
-              <a:t> and </a:t>
-            </a:r>
-            <a:r>
-              <a:rPr lang="en-US" b="1" dirty="0"/>
-              <a:t>decoder</a:t>
-            </a:r>
-            <a:r>
-              <a:rPr lang="en-US" dirty="0"/>
-              <a:t> architectures?</a:t>
-            </a:r>
-          </a:p>
-          <a:p>
-            <a:pPr marL="514350" indent="-514350">
-              <a:buFont typeface="+mj-lt"/>
-              <a:buAutoNum type="arabicPeriod" startAt="8"/>
-            </a:pPr>
-            <a:r>
-              <a:rPr lang="en-US" dirty="0"/>
-              <a:t>What is an </a:t>
-            </a:r>
-            <a:r>
-              <a:rPr lang="en-US" b="1" dirty="0"/>
-              <a:t>autoregressive</a:t>
-            </a:r>
-            <a:r>
-              <a:rPr lang="en-US" dirty="0"/>
-              <a:t> </a:t>
-            </a:r>
-            <a:r>
-              <a:rPr lang="en-US" b="1" dirty="0"/>
-              <a:t>RNN</a:t>
-            </a:r>
-            <a:r>
-              <a:rPr lang="en-US" dirty="0"/>
-              <a:t>?</a:t>
-            </a:r>
-          </a:p>
-          <a:p>
-            <a:pPr marL="514350" indent="-514350">
-              <a:buFont typeface="+mj-lt"/>
-              <a:buAutoNum type="arabicPeriod" startAt="8"/>
-            </a:pPr>
-            <a:endParaRPr lang="en-GB" dirty="0"/>
-          </a:p>
-        </p:txBody>
-      </p:sp>
-    </p:spTree>
-    <p:extLst>
-      <p:ext uri="{BB962C8B-B14F-4D97-AF65-F5344CB8AC3E}">
-        <p14:creationId xmlns:p14="http://schemas.microsoft.com/office/powerpoint/2010/main" val="444206811"/>
-      </p:ext>
-    </p:extLst>
-  </p:cSld>
-  <p:clrMapOvr>
-    <a:masterClrMapping/>
-  </p:clrMapOvr>
-</p:sld>
-</file>
-
-<file path=ppt/slides/slide30.xml><?xml version="1.0" encoding="utf-8"?>
+<file path=ppt/slides/slide32.xml><?xml version="1.0" encoding="utf-8"?>
 <p:sld xmlns:a="http://schemas.openxmlformats.org/drawingml/2006/main" xmlns:r="http://schemas.openxmlformats.org/officeDocument/2006/relationships" xmlns:p="http://schemas.openxmlformats.org/presentationml/2006/main">
   <p:cSld>
     <p:spTree>
@@ -15341,7 +12225,7 @@
 </p:sld>
 </file>
 
-<file path=ppt/slides/slide31.xml><?xml version="1.0" encoding="utf-8"?>
+<file path=ppt/slides/slide33.xml><?xml version="1.0" encoding="utf-8"?>
 <p:sld xmlns:a="http://schemas.openxmlformats.org/drawingml/2006/main" xmlns:r="http://schemas.openxmlformats.org/officeDocument/2006/relationships" xmlns:p="http://schemas.openxmlformats.org/presentationml/2006/main">
   <p:cSld>
     <p:spTree>
@@ -15484,7 +12368,7 @@
 </p:sld>
 </file>
 
-<file path=ppt/slides/slide32.xml><?xml version="1.0" encoding="utf-8"?>
+<file path=ppt/slides/slide34.xml><?xml version="1.0" encoding="utf-8"?>
 <p:sld xmlns:a="http://schemas.openxmlformats.org/drawingml/2006/main" xmlns:r="http://schemas.openxmlformats.org/officeDocument/2006/relationships" xmlns:p="http://schemas.openxmlformats.org/presentationml/2006/main">
   <p:cSld>
     <p:spTree>
@@ -15619,7 +12503,7 @@
 </p:sld>
 </file>
 
-<file path=ppt/slides/slide33.xml><?xml version="1.0" encoding="utf-8"?>
+<file path=ppt/slides/slide35.xml><?xml version="1.0" encoding="utf-8"?>
 <p:sld xmlns:a="http://schemas.openxmlformats.org/drawingml/2006/main" xmlns:r="http://schemas.openxmlformats.org/officeDocument/2006/relationships" xmlns:p="http://schemas.openxmlformats.org/presentationml/2006/main">
   <p:cSld>
     <p:spTree>
@@ -15762,7 +12646,7 @@
 </p:sld>
 </file>
 
-<file path=ppt/slides/slide34.xml><?xml version="1.0" encoding="utf-8"?>
+<file path=ppt/slides/slide36.xml><?xml version="1.0" encoding="utf-8"?>
 <p:sld xmlns:a="http://schemas.openxmlformats.org/drawingml/2006/main" xmlns:r="http://schemas.openxmlformats.org/officeDocument/2006/relationships" xmlns:p="http://schemas.openxmlformats.org/presentationml/2006/main">
   <p:cSld>
     <p:spTree>
@@ -15869,7 +12753,7 @@
 </p:sld>
 </file>
 
-<file path=ppt/slides/slide35.xml><?xml version="1.0" encoding="utf-8"?>
+<file path=ppt/slides/slide37.xml><?xml version="1.0" encoding="utf-8"?>
 <p:sld xmlns:a="http://schemas.openxmlformats.org/drawingml/2006/main" xmlns:r="http://schemas.openxmlformats.org/officeDocument/2006/relationships" xmlns:p="http://schemas.openxmlformats.org/presentationml/2006/main">
   <p:cSld>
     <p:spTree>
@@ -16006,7 +12890,7 @@
 </p:sld>
 </file>
 
-<file path=ppt/slides/slide36.xml><?xml version="1.0" encoding="utf-8"?>
+<file path=ppt/slides/slide38.xml><?xml version="1.0" encoding="utf-8"?>
 <p:sld xmlns:a="http://schemas.openxmlformats.org/drawingml/2006/main" xmlns:r="http://schemas.openxmlformats.org/officeDocument/2006/relationships" xmlns:p="http://schemas.openxmlformats.org/presentationml/2006/main">
   <p:cSld>
     <p:spTree>
@@ -16163,7 +13047,7 @@
 </p:sld>
 </file>
 
-<file path=ppt/slides/slide37.xml><?xml version="1.0" encoding="utf-8"?>
+<file path=ppt/slides/slide39.xml><?xml version="1.0" encoding="utf-8"?>
 <p:sld xmlns:a="http://schemas.openxmlformats.org/drawingml/2006/main" xmlns:r="http://schemas.openxmlformats.org/officeDocument/2006/relationships" xmlns:p="http://schemas.openxmlformats.org/presentationml/2006/main">
   <p:cSld>
     <p:spTree>
@@ -16298,293 +13182,6 @@
 </p:sld>
 </file>
 
-<file path=ppt/slides/slide38.xml><?xml version="1.0" encoding="utf-8"?>
-<p:sld xmlns:a="http://schemas.openxmlformats.org/drawingml/2006/main" xmlns:r="http://schemas.openxmlformats.org/officeDocument/2006/relationships" xmlns:p="http://schemas.openxmlformats.org/presentationml/2006/main">
-  <p:cSld>
-    <p:spTree>
-      <p:nvGrpSpPr>
-        <p:cNvPr id="1" name="">
-          <a:extLst>
-            <a:ext uri="{FF2B5EF4-FFF2-40B4-BE49-F238E27FC236}">
-              <a16:creationId xmlns:a16="http://schemas.microsoft.com/office/drawing/2014/main" id="{501DDC59-6757-2084-A88A-C48FC3C647F8}"/>
-            </a:ext>
-          </a:extLst>
-        </p:cNvPr>
-        <p:cNvGrpSpPr/>
-        <p:nvPr/>
-      </p:nvGrpSpPr>
-      <p:grpSpPr>
-        <a:xfrm>
-          <a:off x="0" y="0"/>
-          <a:ext cx="0" cy="0"/>
-          <a:chOff x="0" y="0"/>
-          <a:chExt cx="0" cy="0"/>
-        </a:xfrm>
-      </p:grpSpPr>
-      <p:sp>
-        <p:nvSpPr>
-          <p:cNvPr id="2" name="Title 1">
-            <a:extLst>
-              <a:ext uri="{FF2B5EF4-FFF2-40B4-BE49-F238E27FC236}">
-                <a16:creationId xmlns:a16="http://schemas.microsoft.com/office/drawing/2014/main" id="{FB4A56BC-BCB7-E644-B413-15D4534D20B0}"/>
-              </a:ext>
-            </a:extLst>
-          </p:cNvPr>
-          <p:cNvSpPr>
-            <a:spLocks noGrp="1"/>
-          </p:cNvSpPr>
-          <p:nvPr>
-            <p:ph type="title"/>
-          </p:nvPr>
-        </p:nvSpPr>
-        <p:spPr/>
-        <p:txBody>
-          <a:bodyPr/>
-          <a:lstStyle/>
-          <a:p>
-            <a:r>
-              <a:rPr lang="en-GB" dirty="0"/>
-              <a:t>Making it autoregressive</a:t>
-            </a:r>
-          </a:p>
-        </p:txBody>
-      </p:sp>
-      <p:sp>
-        <p:nvSpPr>
-          <p:cNvPr id="11" name="Content Placeholder 10">
-            <a:extLst>
-              <a:ext uri="{FF2B5EF4-FFF2-40B4-BE49-F238E27FC236}">
-                <a16:creationId xmlns:a16="http://schemas.microsoft.com/office/drawing/2014/main" id="{9DD280C9-975E-5A19-BD0E-82BCD70408D7}"/>
-              </a:ext>
-            </a:extLst>
-          </p:cNvPr>
-          <p:cNvSpPr>
-            <a:spLocks noGrp="1"/>
-          </p:cNvSpPr>
-          <p:nvPr>
-            <p:ph idx="1"/>
-          </p:nvPr>
-        </p:nvSpPr>
-        <p:spPr/>
-        <p:txBody>
-          <a:bodyPr>
-            <a:normAutofit/>
-          </a:bodyPr>
-          <a:lstStyle/>
-          <a:p>
-            <a:pPr marL="0" indent="0">
-              <a:buNone/>
-            </a:pPr>
-            <a:r>
-              <a:rPr lang="en-GB" dirty="0"/>
-              <a:t>In this first implementation of a Seq2Seq (Notebook 6), we tried to generate the whole output sequence in one go.</a:t>
-            </a:r>
-          </a:p>
-          <a:p>
-            <a:r>
-              <a:rPr lang="en-GB" b="1" dirty="0"/>
-              <a:t>Start: </a:t>
-            </a:r>
-            <a:r>
-              <a:rPr lang="en-GB" dirty="0"/>
-              <a:t>The decoder input is prepared by taking the last time step of the encoder’s input and then simply repeating it for every time step you want to predict.</a:t>
-            </a:r>
-          </a:p>
-          <a:p>
-            <a:r>
-              <a:rPr lang="en-GB" b="1" dirty="0"/>
-              <a:t>Parallel Processing: </a:t>
-            </a:r>
-            <a:r>
-              <a:rPr lang="en-GB" dirty="0"/>
-              <a:t>The decoder then processes this entire repeated input in one pass, generating all the outputs at once.</a:t>
-            </a:r>
-          </a:p>
-          <a:p>
-            <a:r>
-              <a:rPr lang="en-GB" b="1" dirty="0"/>
-              <a:t>Result: </a:t>
-            </a:r>
-            <a:r>
-              <a:rPr lang="en-GB" dirty="0"/>
-              <a:t>All parts of the output sequence are generated simultaneously, without depending on previous outputs.</a:t>
-            </a:r>
-          </a:p>
-        </p:txBody>
-      </p:sp>
-    </p:spTree>
-    <p:extLst>
-      <p:ext uri="{BB962C8B-B14F-4D97-AF65-F5344CB8AC3E}">
-        <p14:creationId xmlns:p14="http://schemas.microsoft.com/office/powerpoint/2010/main" val="1073034095"/>
-      </p:ext>
-    </p:extLst>
-  </p:cSld>
-  <p:clrMapOvr>
-    <a:masterClrMapping/>
-  </p:clrMapOvr>
-</p:sld>
-</file>
-
-<file path=ppt/slides/slide39.xml><?xml version="1.0" encoding="utf-8"?>
-<p:sld xmlns:a="http://schemas.openxmlformats.org/drawingml/2006/main" xmlns:r="http://schemas.openxmlformats.org/officeDocument/2006/relationships" xmlns:p="http://schemas.openxmlformats.org/presentationml/2006/main">
-  <p:cSld>
-    <p:spTree>
-      <p:nvGrpSpPr>
-        <p:cNvPr id="1" name="">
-          <a:extLst>
-            <a:ext uri="{FF2B5EF4-FFF2-40B4-BE49-F238E27FC236}">
-              <a16:creationId xmlns:a16="http://schemas.microsoft.com/office/drawing/2014/main" id="{4861E20C-4CC6-B3B8-B129-EC7A93929A90}"/>
-            </a:ext>
-          </a:extLst>
-        </p:cNvPr>
-        <p:cNvGrpSpPr/>
-        <p:nvPr/>
-      </p:nvGrpSpPr>
-      <p:grpSpPr>
-        <a:xfrm>
-          <a:off x="0" y="0"/>
-          <a:ext cx="0" cy="0"/>
-          <a:chOff x="0" y="0"/>
-          <a:chExt cx="0" cy="0"/>
-        </a:xfrm>
-      </p:grpSpPr>
-      <p:sp>
-        <p:nvSpPr>
-          <p:cNvPr id="2" name="Title 1">
-            <a:extLst>
-              <a:ext uri="{FF2B5EF4-FFF2-40B4-BE49-F238E27FC236}">
-                <a16:creationId xmlns:a16="http://schemas.microsoft.com/office/drawing/2014/main" id="{C163C688-26EA-03E9-ACA2-91DAB77379BE}"/>
-              </a:ext>
-            </a:extLst>
-          </p:cNvPr>
-          <p:cNvSpPr>
-            <a:spLocks noGrp="1"/>
-          </p:cNvSpPr>
-          <p:nvPr>
-            <p:ph type="title"/>
-          </p:nvPr>
-        </p:nvSpPr>
-        <p:spPr/>
-        <p:txBody>
-          <a:bodyPr/>
-          <a:lstStyle/>
-          <a:p>
-            <a:r>
-              <a:rPr lang="en-GB" dirty="0"/>
-              <a:t>Making it autoregressive</a:t>
-            </a:r>
-          </a:p>
-        </p:txBody>
-      </p:sp>
-      <p:sp>
-        <p:nvSpPr>
-          <p:cNvPr id="11" name="Content Placeholder 10">
-            <a:extLst>
-              <a:ext uri="{FF2B5EF4-FFF2-40B4-BE49-F238E27FC236}">
-                <a16:creationId xmlns:a16="http://schemas.microsoft.com/office/drawing/2014/main" id="{22FD8C2A-4D9E-19C6-3A45-C5F6CE906B7F}"/>
-              </a:ext>
-            </a:extLst>
-          </p:cNvPr>
-          <p:cNvSpPr>
-            <a:spLocks noGrp="1"/>
-          </p:cNvSpPr>
-          <p:nvPr>
-            <p:ph idx="1"/>
-          </p:nvPr>
-        </p:nvSpPr>
-        <p:spPr>
-          <a:xfrm>
-            <a:off x="838200" y="1825624"/>
-            <a:ext cx="10515600" cy="5032375"/>
-          </a:xfrm>
-        </p:spPr>
-        <p:txBody>
-          <a:bodyPr>
-            <a:normAutofit/>
-          </a:bodyPr>
-          <a:lstStyle/>
-          <a:p>
-            <a:pPr marL="0" indent="0">
-              <a:buNone/>
-            </a:pPr>
-            <a:r>
-              <a:rPr lang="en-GB" dirty="0"/>
-              <a:t>If we want to make it an </a:t>
-            </a:r>
-            <a:r>
-              <a:rPr lang="en-GB" b="1" dirty="0"/>
-              <a:t>autoregressive</a:t>
-            </a:r>
-            <a:r>
-              <a:rPr lang="en-GB" dirty="0"/>
-              <a:t> </a:t>
-            </a:r>
-            <a:r>
-              <a:rPr lang="en-GB" b="1" dirty="0"/>
-              <a:t>RNN </a:t>
-            </a:r>
-            <a:r>
-              <a:rPr lang="en-GB" dirty="0"/>
-              <a:t>(which is shown in Notebook 7), a few changes need to occur:</a:t>
-            </a:r>
-          </a:p>
-          <a:p>
-            <a:pPr>
-              <a:buFont typeface="Arial" panose="020B0604020202020204" pitchFamily="34" charset="0"/>
-              <a:buChar char="•"/>
-            </a:pPr>
-            <a:r>
-              <a:rPr lang="en-GB" b="1" dirty="0"/>
-              <a:t>Start:</a:t>
-            </a:r>
-            <a:r>
-              <a:rPr lang="en-GB" dirty="0"/>
-              <a:t> The decoder begins with a starting input (taken from the last time step of the encoder’s input), as before.</a:t>
-            </a:r>
-          </a:p>
-          <a:p>
-            <a:pPr>
-              <a:buFont typeface="Arial" panose="020B0604020202020204" pitchFamily="34" charset="0"/>
-              <a:buChar char="•"/>
-            </a:pPr>
-            <a:r>
-              <a:rPr lang="en-GB" b="1" dirty="0"/>
-              <a:t>Loop:</a:t>
-            </a:r>
-            <a:r>
-              <a:rPr lang="en-GB" dirty="0"/>
-              <a:t> For each time step, the decoder produces a single output of the sequence. Using a loop, that output is then fed back as the input to be used by the decoder to generate the next output of the sequence for the next time step.</a:t>
-            </a:r>
-          </a:p>
-          <a:p>
-            <a:pPr>
-              <a:buFont typeface="Arial" panose="020B0604020202020204" pitchFamily="34" charset="0"/>
-              <a:buChar char="•"/>
-            </a:pPr>
-            <a:r>
-              <a:rPr lang="en-GB" b="1" dirty="0"/>
-              <a:t>Result:</a:t>
-            </a:r>
-            <a:r>
-              <a:rPr lang="en-GB" dirty="0"/>
-              <a:t> The final output sequence is built one element at a time, with each prediction depending on the one before it.</a:t>
-            </a:r>
-          </a:p>
-        </p:txBody>
-      </p:sp>
-    </p:spTree>
-    <p:extLst>
-      <p:ext uri="{BB962C8B-B14F-4D97-AF65-F5344CB8AC3E}">
-        <p14:creationId xmlns:p14="http://schemas.microsoft.com/office/powerpoint/2010/main" val="3631118124"/>
-      </p:ext>
-    </p:extLst>
-  </p:cSld>
-  <p:clrMapOvr>
-    <a:masterClrMapping/>
-  </p:clrMapOvr>
-</p:sld>
-</file>
-
 <file path=ppt/slides/slide4.xml><?xml version="1.0" encoding="utf-8"?>
 <p:sld xmlns:a="http://schemas.openxmlformats.org/drawingml/2006/main" xmlns:r="http://schemas.openxmlformats.org/officeDocument/2006/relationships" xmlns:p="http://schemas.openxmlformats.org/presentationml/2006/main">
   <p:cSld>
@@ -16749,6 +13346,293 @@
         <p:cNvPr id="1" name="">
           <a:extLst>
             <a:ext uri="{FF2B5EF4-FFF2-40B4-BE49-F238E27FC236}">
+              <a16:creationId xmlns:a16="http://schemas.microsoft.com/office/drawing/2014/main" id="{501DDC59-6757-2084-A88A-C48FC3C647F8}"/>
+            </a:ext>
+          </a:extLst>
+        </p:cNvPr>
+        <p:cNvGrpSpPr/>
+        <p:nvPr/>
+      </p:nvGrpSpPr>
+      <p:grpSpPr>
+        <a:xfrm>
+          <a:off x="0" y="0"/>
+          <a:ext cx="0" cy="0"/>
+          <a:chOff x="0" y="0"/>
+          <a:chExt cx="0" cy="0"/>
+        </a:xfrm>
+      </p:grpSpPr>
+      <p:sp>
+        <p:nvSpPr>
+          <p:cNvPr id="2" name="Title 1">
+            <a:extLst>
+              <a:ext uri="{FF2B5EF4-FFF2-40B4-BE49-F238E27FC236}">
+                <a16:creationId xmlns:a16="http://schemas.microsoft.com/office/drawing/2014/main" id="{FB4A56BC-BCB7-E644-B413-15D4534D20B0}"/>
+              </a:ext>
+            </a:extLst>
+          </p:cNvPr>
+          <p:cNvSpPr>
+            <a:spLocks noGrp="1"/>
+          </p:cNvSpPr>
+          <p:nvPr>
+            <p:ph type="title"/>
+          </p:nvPr>
+        </p:nvSpPr>
+        <p:spPr/>
+        <p:txBody>
+          <a:bodyPr/>
+          <a:lstStyle/>
+          <a:p>
+            <a:r>
+              <a:rPr lang="en-GB" dirty="0"/>
+              <a:t>Making it autoregressive</a:t>
+            </a:r>
+          </a:p>
+        </p:txBody>
+      </p:sp>
+      <p:sp>
+        <p:nvSpPr>
+          <p:cNvPr id="11" name="Content Placeholder 10">
+            <a:extLst>
+              <a:ext uri="{FF2B5EF4-FFF2-40B4-BE49-F238E27FC236}">
+                <a16:creationId xmlns:a16="http://schemas.microsoft.com/office/drawing/2014/main" id="{9DD280C9-975E-5A19-BD0E-82BCD70408D7}"/>
+              </a:ext>
+            </a:extLst>
+          </p:cNvPr>
+          <p:cNvSpPr>
+            <a:spLocks noGrp="1"/>
+          </p:cNvSpPr>
+          <p:nvPr>
+            <p:ph idx="1"/>
+          </p:nvPr>
+        </p:nvSpPr>
+        <p:spPr/>
+        <p:txBody>
+          <a:bodyPr>
+            <a:normAutofit/>
+          </a:bodyPr>
+          <a:lstStyle/>
+          <a:p>
+            <a:pPr marL="0" indent="0">
+              <a:buNone/>
+            </a:pPr>
+            <a:r>
+              <a:rPr lang="en-GB" dirty="0"/>
+              <a:t>In this first implementation of a Seq2Seq (Notebook 6), we tried to generate the whole output sequence in one go.</a:t>
+            </a:r>
+          </a:p>
+          <a:p>
+            <a:r>
+              <a:rPr lang="en-GB" b="1" dirty="0"/>
+              <a:t>Start: </a:t>
+            </a:r>
+            <a:r>
+              <a:rPr lang="en-GB" dirty="0"/>
+              <a:t>The decoder input is prepared by taking the last time step of the encoder’s input and then simply repeating it for every time step you want to predict.</a:t>
+            </a:r>
+          </a:p>
+          <a:p>
+            <a:r>
+              <a:rPr lang="en-GB" b="1" dirty="0"/>
+              <a:t>Parallel Processing: </a:t>
+            </a:r>
+            <a:r>
+              <a:rPr lang="en-GB" dirty="0"/>
+              <a:t>The decoder then processes this entire repeated input in one pass, generating all the outputs at once.</a:t>
+            </a:r>
+          </a:p>
+          <a:p>
+            <a:r>
+              <a:rPr lang="en-GB" b="1" dirty="0"/>
+              <a:t>Result: </a:t>
+            </a:r>
+            <a:r>
+              <a:rPr lang="en-GB" dirty="0"/>
+              <a:t>All parts of the output sequence are generated simultaneously, without depending on previous outputs.</a:t>
+            </a:r>
+          </a:p>
+        </p:txBody>
+      </p:sp>
+    </p:spTree>
+    <p:extLst>
+      <p:ext uri="{BB962C8B-B14F-4D97-AF65-F5344CB8AC3E}">
+        <p14:creationId xmlns:p14="http://schemas.microsoft.com/office/powerpoint/2010/main" val="1073034095"/>
+      </p:ext>
+    </p:extLst>
+  </p:cSld>
+  <p:clrMapOvr>
+    <a:masterClrMapping/>
+  </p:clrMapOvr>
+</p:sld>
+</file>
+
+<file path=ppt/slides/slide41.xml><?xml version="1.0" encoding="utf-8"?>
+<p:sld xmlns:a="http://schemas.openxmlformats.org/drawingml/2006/main" xmlns:r="http://schemas.openxmlformats.org/officeDocument/2006/relationships" xmlns:p="http://schemas.openxmlformats.org/presentationml/2006/main">
+  <p:cSld>
+    <p:spTree>
+      <p:nvGrpSpPr>
+        <p:cNvPr id="1" name="">
+          <a:extLst>
+            <a:ext uri="{FF2B5EF4-FFF2-40B4-BE49-F238E27FC236}">
+              <a16:creationId xmlns:a16="http://schemas.microsoft.com/office/drawing/2014/main" id="{4861E20C-4CC6-B3B8-B129-EC7A93929A90}"/>
+            </a:ext>
+          </a:extLst>
+        </p:cNvPr>
+        <p:cNvGrpSpPr/>
+        <p:nvPr/>
+      </p:nvGrpSpPr>
+      <p:grpSpPr>
+        <a:xfrm>
+          <a:off x="0" y="0"/>
+          <a:ext cx="0" cy="0"/>
+          <a:chOff x="0" y="0"/>
+          <a:chExt cx="0" cy="0"/>
+        </a:xfrm>
+      </p:grpSpPr>
+      <p:sp>
+        <p:nvSpPr>
+          <p:cNvPr id="2" name="Title 1">
+            <a:extLst>
+              <a:ext uri="{FF2B5EF4-FFF2-40B4-BE49-F238E27FC236}">
+                <a16:creationId xmlns:a16="http://schemas.microsoft.com/office/drawing/2014/main" id="{C163C688-26EA-03E9-ACA2-91DAB77379BE}"/>
+              </a:ext>
+            </a:extLst>
+          </p:cNvPr>
+          <p:cNvSpPr>
+            <a:spLocks noGrp="1"/>
+          </p:cNvSpPr>
+          <p:nvPr>
+            <p:ph type="title"/>
+          </p:nvPr>
+        </p:nvSpPr>
+        <p:spPr/>
+        <p:txBody>
+          <a:bodyPr/>
+          <a:lstStyle/>
+          <a:p>
+            <a:r>
+              <a:rPr lang="en-GB" dirty="0"/>
+              <a:t>Making it autoregressive</a:t>
+            </a:r>
+          </a:p>
+        </p:txBody>
+      </p:sp>
+      <p:sp>
+        <p:nvSpPr>
+          <p:cNvPr id="11" name="Content Placeholder 10">
+            <a:extLst>
+              <a:ext uri="{FF2B5EF4-FFF2-40B4-BE49-F238E27FC236}">
+                <a16:creationId xmlns:a16="http://schemas.microsoft.com/office/drawing/2014/main" id="{22FD8C2A-4D9E-19C6-3A45-C5F6CE906B7F}"/>
+              </a:ext>
+            </a:extLst>
+          </p:cNvPr>
+          <p:cNvSpPr>
+            <a:spLocks noGrp="1"/>
+          </p:cNvSpPr>
+          <p:nvPr>
+            <p:ph idx="1"/>
+          </p:nvPr>
+        </p:nvSpPr>
+        <p:spPr>
+          <a:xfrm>
+            <a:off x="838200" y="1825624"/>
+            <a:ext cx="10515600" cy="5032375"/>
+          </a:xfrm>
+        </p:spPr>
+        <p:txBody>
+          <a:bodyPr>
+            <a:normAutofit/>
+          </a:bodyPr>
+          <a:lstStyle/>
+          <a:p>
+            <a:pPr marL="0" indent="0">
+              <a:buNone/>
+            </a:pPr>
+            <a:r>
+              <a:rPr lang="en-GB" dirty="0"/>
+              <a:t>If we want to make it an </a:t>
+            </a:r>
+            <a:r>
+              <a:rPr lang="en-GB" b="1" dirty="0"/>
+              <a:t>autoregressive</a:t>
+            </a:r>
+            <a:r>
+              <a:rPr lang="en-GB" dirty="0"/>
+              <a:t> </a:t>
+            </a:r>
+            <a:r>
+              <a:rPr lang="en-GB" b="1" dirty="0"/>
+              <a:t>RNN </a:t>
+            </a:r>
+            <a:r>
+              <a:rPr lang="en-GB" dirty="0"/>
+              <a:t>(which is shown in Notebook 7), a few changes need to occur:</a:t>
+            </a:r>
+          </a:p>
+          <a:p>
+            <a:pPr>
+              <a:buFont typeface="Arial" panose="020B0604020202020204" pitchFamily="34" charset="0"/>
+              <a:buChar char="•"/>
+            </a:pPr>
+            <a:r>
+              <a:rPr lang="en-GB" b="1" dirty="0"/>
+              <a:t>Start:</a:t>
+            </a:r>
+            <a:r>
+              <a:rPr lang="en-GB" dirty="0"/>
+              <a:t> The decoder begins with a starting input (taken from the last time step of the encoder’s input), as before.</a:t>
+            </a:r>
+          </a:p>
+          <a:p>
+            <a:pPr>
+              <a:buFont typeface="Arial" panose="020B0604020202020204" pitchFamily="34" charset="0"/>
+              <a:buChar char="•"/>
+            </a:pPr>
+            <a:r>
+              <a:rPr lang="en-GB" b="1" dirty="0"/>
+              <a:t>Loop:</a:t>
+            </a:r>
+            <a:r>
+              <a:rPr lang="en-GB" dirty="0"/>
+              <a:t> For each time step, the decoder produces a single output of the sequence. Using a loop, that output is then fed back as the input to be used by the decoder to generate the next output of the sequence for the next time step.</a:t>
+            </a:r>
+          </a:p>
+          <a:p>
+            <a:pPr>
+              <a:buFont typeface="Arial" panose="020B0604020202020204" pitchFamily="34" charset="0"/>
+              <a:buChar char="•"/>
+            </a:pPr>
+            <a:r>
+              <a:rPr lang="en-GB" b="1" dirty="0"/>
+              <a:t>Result:</a:t>
+            </a:r>
+            <a:r>
+              <a:rPr lang="en-GB" dirty="0"/>
+              <a:t> The final output sequence is built one element at a time, with each prediction depending on the one before it.</a:t>
+            </a:r>
+          </a:p>
+        </p:txBody>
+      </p:sp>
+    </p:spTree>
+    <p:extLst>
+      <p:ext uri="{BB962C8B-B14F-4D97-AF65-F5344CB8AC3E}">
+        <p14:creationId xmlns:p14="http://schemas.microsoft.com/office/powerpoint/2010/main" val="3631118124"/>
+      </p:ext>
+    </p:extLst>
+  </p:cSld>
+  <p:clrMapOvr>
+    <a:masterClrMapping/>
+  </p:clrMapOvr>
+</p:sld>
+</file>
+
+<file path=ppt/slides/slide42.xml><?xml version="1.0" encoding="utf-8"?>
+<p:sld xmlns:a="http://schemas.openxmlformats.org/drawingml/2006/main" xmlns:r="http://schemas.openxmlformats.org/officeDocument/2006/relationships" xmlns:p="http://schemas.openxmlformats.org/presentationml/2006/main">
+  <p:cSld>
+    <p:spTree>
+      <p:nvGrpSpPr>
+        <p:cNvPr id="1" name="">
+          <a:extLst>
+            <a:ext uri="{FF2B5EF4-FFF2-40B4-BE49-F238E27FC236}">
               <a16:creationId xmlns:a16="http://schemas.microsoft.com/office/drawing/2014/main" id="{A53E21F5-33DC-846D-8DC4-499ABF593CD1}"/>
             </a:ext>
           </a:extLst>
@@ -16901,7 +13785,7 @@
 </p:sld>
 </file>
 
-<file path=ppt/slides/slide41.xml><?xml version="1.0" encoding="utf-8"?>
+<file path=ppt/slides/slide43.xml><?xml version="1.0" encoding="utf-8"?>
 <p:sld xmlns:a="http://schemas.openxmlformats.org/drawingml/2006/main" xmlns:r="http://schemas.openxmlformats.org/officeDocument/2006/relationships" xmlns:p="http://schemas.openxmlformats.org/presentationml/2006/main">
   <p:cSld>
     <p:spTree>
@@ -17086,7 +13970,7 @@
 </p:sld>
 </file>
 
-<file path=ppt/slides/slide42.xml><?xml version="1.0" encoding="utf-8"?>
+<file path=ppt/slides/slide44.xml><?xml version="1.0" encoding="utf-8"?>
 <p:sld xmlns:a="http://schemas.openxmlformats.org/drawingml/2006/main" xmlns:r="http://schemas.openxmlformats.org/officeDocument/2006/relationships" xmlns:p="http://schemas.openxmlformats.org/presentationml/2006/main">
   <p:cSld>
     <p:spTree>
@@ -17235,7 +14119,7 @@
 </p:sld>
 </file>
 
-<file path=ppt/slides/slide43.xml><?xml version="1.0" encoding="utf-8"?>
+<file path=ppt/slides/slide45.xml><?xml version="1.0" encoding="utf-8"?>
 <p:sld xmlns:a="http://schemas.openxmlformats.org/drawingml/2006/main" xmlns:r="http://schemas.openxmlformats.org/officeDocument/2006/relationships" xmlns:p="http://schemas.openxmlformats.org/presentationml/2006/main">
   <p:cSld>
     <p:spTree>
@@ -17332,7 +14216,19 @@
             </a:br>
             <a:r>
               <a:rPr lang="en-GB" dirty="0"/>
-              <a:t>In time series forecasting, non-autoregressive models predict future values directly from a fixed window of observed historical data. This contrasts with autoregressive models, which recursively feed each prediction back into the model to generate the next step. By removing the recursive dependency on previous predictions, non-autoregressive models can compute all future values in parallel (at least during training and one-step-ahead prediction), or efficiently process entire sequences in batches, leading to faster inference. This makes non-autoregressive approaches particularly attractive for batch forecasting in operational systems where large numbers of time series need to be processed simultaneously.</a:t>
+              <a:t>In time series forecasting, non-autoregressive models predict future values directly from a fixed window of observed historical data.</a:t>
+            </a:r>
+          </a:p>
+          <a:p>
+            <a:r>
+              <a:rPr lang="en-GB" dirty="0"/>
+              <a:t>This contrasts with autoregressive models, which recursively feed each prediction back into the model to generate the next step. By removing the recursive dependency on previous predictions, non-autoregressive models can compute all future values in parallel (at least during training and one-step-ahead prediction), or efficiently process entire sequences in batches, leading to faster inference.</a:t>
+            </a:r>
+          </a:p>
+          <a:p>
+            <a:r>
+              <a:rPr lang="en-GB" dirty="0"/>
+              <a:t>This makes non-autoregressive approaches particularly attractive for batch forecasting in operational systems where large numbers of time series need to be processed simultaneously.</a:t>
             </a:r>
           </a:p>
         </p:txBody>
@@ -17350,7 +14246,7 @@
 </p:sld>
 </file>
 
-<file path=ppt/slides/slide44.xml><?xml version="1.0" encoding="utf-8"?>
+<file path=ppt/slides/slide46.xml><?xml version="1.0" encoding="utf-8"?>
 <p:sld xmlns:a="http://schemas.openxmlformats.org/drawingml/2006/main" xmlns:r="http://schemas.openxmlformats.org/officeDocument/2006/relationships" xmlns:p="http://schemas.openxmlformats.org/presentationml/2006/main">
   <p:cSld>
     <p:spTree>
@@ -17462,7 +14358,7 @@
 </p:sld>
 </file>
 
-<file path=ppt/slides/slide45.xml><?xml version="1.0" encoding="utf-8"?>
+<file path=ppt/slides/slide47.xml><?xml version="1.0" encoding="utf-8"?>
 <p:sld xmlns:a="http://schemas.openxmlformats.org/drawingml/2006/main" xmlns:r="http://schemas.openxmlformats.org/officeDocument/2006/relationships" xmlns:p="http://schemas.openxmlformats.org/presentationml/2006/main">
   <p:cSld>
     <p:spTree>
@@ -17592,468 +14488,6 @@
     <p:extLst>
       <p:ext uri="{BB962C8B-B14F-4D97-AF65-F5344CB8AC3E}">
         <p14:creationId xmlns:p14="http://schemas.microsoft.com/office/powerpoint/2010/main" val="3443179150"/>
-      </p:ext>
-    </p:extLst>
-  </p:cSld>
-  <p:clrMapOvr>
-    <a:masterClrMapping/>
-  </p:clrMapOvr>
-</p:sld>
-</file>
-
-<file path=ppt/slides/slide46.xml><?xml version="1.0" encoding="utf-8"?>
-<p:sld xmlns:a="http://schemas.openxmlformats.org/drawingml/2006/main" xmlns:r="http://schemas.openxmlformats.org/officeDocument/2006/relationships" xmlns:p="http://schemas.openxmlformats.org/presentationml/2006/main">
-  <p:cSld>
-    <p:spTree>
-      <p:nvGrpSpPr>
-        <p:cNvPr id="1" name=""/>
-        <p:cNvGrpSpPr/>
-        <p:nvPr/>
-      </p:nvGrpSpPr>
-      <p:grpSpPr>
-        <a:xfrm>
-          <a:off x="0" y="0"/>
-          <a:ext cx="0" cy="0"/>
-          <a:chOff x="0" y="0"/>
-          <a:chExt cx="0" cy="0"/>
-        </a:xfrm>
-      </p:grpSpPr>
-      <p:sp>
-        <p:nvSpPr>
-          <p:cNvPr id="2" name="Title 1">
-            <a:extLst>
-              <a:ext uri="{FF2B5EF4-FFF2-40B4-BE49-F238E27FC236}">
-                <a16:creationId xmlns:a16="http://schemas.microsoft.com/office/drawing/2014/main" id="{11A08BA8-9DEC-4471-8590-434E8D8BB4A0}"/>
-              </a:ext>
-            </a:extLst>
-          </p:cNvPr>
-          <p:cNvSpPr>
-            <a:spLocks noGrp="1"/>
-          </p:cNvSpPr>
-          <p:nvPr>
-            <p:ph type="title"/>
-          </p:nvPr>
-        </p:nvSpPr>
-        <p:spPr/>
-        <p:txBody>
-          <a:bodyPr/>
-          <a:lstStyle/>
-          <a:p>
-            <a:r>
-              <a:rPr lang="en-US" dirty="0"/>
-              <a:t>Conclusion (</a:t>
-            </a:r>
-            <a:r>
-              <a:rPr lang="en-US"/>
-              <a:t>Week 5)</a:t>
-            </a:r>
-            <a:endParaRPr lang="en-GB" dirty="0"/>
-          </a:p>
-        </p:txBody>
-      </p:sp>
-      <p:sp>
-        <p:nvSpPr>
-          <p:cNvPr id="3" name="Content Placeholder 2">
-            <a:extLst>
-              <a:ext uri="{FF2B5EF4-FFF2-40B4-BE49-F238E27FC236}">
-                <a16:creationId xmlns:a16="http://schemas.microsoft.com/office/drawing/2014/main" id="{47E3549C-D723-41E6-8478-270ACE043694}"/>
-              </a:ext>
-            </a:extLst>
-          </p:cNvPr>
-          <p:cNvSpPr>
-            <a:spLocks noGrp="1"/>
-          </p:cNvSpPr>
-          <p:nvPr>
-            <p:ph sz="half" idx="1"/>
-          </p:nvPr>
-        </p:nvSpPr>
-        <p:spPr>
-          <a:xfrm>
-            <a:off x="838200" y="1825624"/>
-            <a:ext cx="5257800" cy="5032375"/>
-          </a:xfrm>
-        </p:spPr>
-        <p:txBody>
-          <a:bodyPr>
-            <a:normAutofit/>
-          </a:bodyPr>
-          <a:lstStyle/>
-          <a:p>
-            <a:r>
-              <a:rPr lang="en-US" dirty="0"/>
-              <a:t>Time series datasets</a:t>
-            </a:r>
-          </a:p>
-          <a:p>
-            <a:r>
-              <a:rPr lang="en-US" dirty="0"/>
-              <a:t>Deep learning models with history</a:t>
-            </a:r>
-          </a:p>
-          <a:p>
-            <a:r>
-              <a:rPr lang="en-US" dirty="0"/>
-              <a:t>History length tradeoffs</a:t>
-            </a:r>
-          </a:p>
-          <a:p>
-            <a:r>
-              <a:rPr lang="en-US" dirty="0"/>
-              <a:t>Implementing memory in Deep Learning models</a:t>
-            </a:r>
-          </a:p>
-          <a:p>
-            <a:r>
-              <a:rPr lang="en-US" dirty="0"/>
-              <a:t>Our first vanilla Recurrent Neural Network with memory</a:t>
-            </a:r>
-          </a:p>
-          <a:p>
-            <a:r>
-              <a:rPr lang="en-US" dirty="0"/>
-              <a:t>The vanishing gradient problem in RNNs</a:t>
-            </a:r>
-          </a:p>
-          <a:p>
-            <a:endParaRPr lang="en-GB" dirty="0"/>
-          </a:p>
-        </p:txBody>
-      </p:sp>
-      <p:sp>
-        <p:nvSpPr>
-          <p:cNvPr id="4" name="Content Placeholder 3">
-            <a:extLst>
-              <a:ext uri="{FF2B5EF4-FFF2-40B4-BE49-F238E27FC236}">
-                <a16:creationId xmlns:a16="http://schemas.microsoft.com/office/drawing/2014/main" id="{7E420A50-DCDA-4FEF-986F-775F53063E3A}"/>
-              </a:ext>
-            </a:extLst>
-          </p:cNvPr>
-          <p:cNvSpPr>
-            <a:spLocks noGrp="1"/>
-          </p:cNvSpPr>
-          <p:nvPr>
-            <p:ph sz="half" idx="2"/>
-          </p:nvPr>
-        </p:nvSpPr>
-        <p:spPr>
-          <a:xfrm>
-            <a:off x="6172200" y="1825624"/>
-            <a:ext cx="5181600" cy="5032375"/>
-          </a:xfrm>
-        </p:spPr>
-        <p:txBody>
-          <a:bodyPr>
-            <a:normAutofit/>
-          </a:bodyPr>
-          <a:lstStyle/>
-          <a:p>
-            <a:r>
-              <a:rPr lang="en-US" dirty="0"/>
-              <a:t>The LSTM model</a:t>
-            </a:r>
-          </a:p>
-          <a:p>
-            <a:r>
-              <a:rPr lang="en-US" dirty="0"/>
-              <a:t>The GRU model</a:t>
-            </a:r>
-            <a:endParaRPr lang="en-US" i="1" dirty="0"/>
-          </a:p>
-          <a:p>
-            <a:r>
-              <a:rPr lang="en-US" dirty="0"/>
-              <a:t>One/Many-to-one/many models</a:t>
-            </a:r>
-          </a:p>
-          <a:p>
-            <a:r>
-              <a:rPr lang="en-US" dirty="0"/>
-              <a:t>Seq2Seq models</a:t>
-            </a:r>
-          </a:p>
-          <a:p>
-            <a:r>
-              <a:rPr lang="en-US" dirty="0"/>
-              <a:t>Encoder and Decoder architectures</a:t>
-            </a:r>
-          </a:p>
-          <a:p>
-            <a:r>
-              <a:rPr lang="en-US" dirty="0"/>
-              <a:t>Autoregressive RNNs</a:t>
-            </a:r>
-          </a:p>
-          <a:p>
-            <a:r>
-              <a:rPr lang="en-US" dirty="0"/>
-              <a:t>(More on these during W8!)</a:t>
-            </a:r>
-            <a:endParaRPr lang="en-GB" dirty="0"/>
-          </a:p>
-        </p:txBody>
-      </p:sp>
-    </p:spTree>
-    <p:extLst>
-      <p:ext uri="{BB962C8B-B14F-4D97-AF65-F5344CB8AC3E}">
-        <p14:creationId xmlns:p14="http://schemas.microsoft.com/office/powerpoint/2010/main" val="1036081419"/>
-      </p:ext>
-    </p:extLst>
-  </p:cSld>
-  <p:clrMapOvr>
-    <a:masterClrMapping/>
-  </p:clrMapOvr>
-</p:sld>
-</file>
-
-<file path=ppt/slides/slide47.xml><?xml version="1.0" encoding="utf-8"?>
-<p:sld xmlns:a="http://schemas.openxmlformats.org/drawingml/2006/main" xmlns:r="http://schemas.openxmlformats.org/officeDocument/2006/relationships" xmlns:p="http://schemas.openxmlformats.org/presentationml/2006/main">
-  <p:cSld>
-    <p:spTree>
-      <p:nvGrpSpPr>
-        <p:cNvPr id="1" name=""/>
-        <p:cNvGrpSpPr/>
-        <p:nvPr/>
-      </p:nvGrpSpPr>
-      <p:grpSpPr>
-        <a:xfrm>
-          <a:off x="0" y="0"/>
-          <a:ext cx="0" cy="0"/>
-          <a:chOff x="0" y="0"/>
-          <a:chExt cx="0" cy="0"/>
-        </a:xfrm>
-      </p:grpSpPr>
-      <p:sp>
-        <p:nvSpPr>
-          <p:cNvPr id="2" name="Title 1">
-            <a:extLst>
-              <a:ext uri="{FF2B5EF4-FFF2-40B4-BE49-F238E27FC236}">
-                <a16:creationId xmlns:a16="http://schemas.microsoft.com/office/drawing/2014/main" id="{F6E33F64-ACBF-414C-8E71-06E4F9517B15}"/>
-              </a:ext>
-            </a:extLst>
-          </p:cNvPr>
-          <p:cNvSpPr>
-            <a:spLocks noGrp="1"/>
-          </p:cNvSpPr>
-          <p:nvPr>
-            <p:ph type="title"/>
-          </p:nvPr>
-        </p:nvSpPr>
-        <p:spPr/>
-        <p:txBody>
-          <a:bodyPr/>
-          <a:lstStyle/>
-          <a:p>
-            <a:r>
-              <a:rPr lang="en-US" dirty="0"/>
-              <a:t>Learn more about these topics</a:t>
-            </a:r>
-            <a:endParaRPr lang="en-GB" dirty="0"/>
-          </a:p>
-        </p:txBody>
-      </p:sp>
-      <p:sp>
-        <p:nvSpPr>
-          <p:cNvPr id="3" name="Content Placeholder 2">
-            <a:extLst>
-              <a:ext uri="{FF2B5EF4-FFF2-40B4-BE49-F238E27FC236}">
-                <a16:creationId xmlns:a16="http://schemas.microsoft.com/office/drawing/2014/main" id="{C71C8DD6-14D1-44DF-9843-EFEDF44E39A2}"/>
-              </a:ext>
-            </a:extLst>
-          </p:cNvPr>
-          <p:cNvSpPr>
-            <a:spLocks noGrp="1"/>
-          </p:cNvSpPr>
-          <p:nvPr>
-            <p:ph idx="1"/>
-          </p:nvPr>
-        </p:nvSpPr>
-        <p:spPr>
-          <a:xfrm>
-            <a:off x="838200" y="1825624"/>
-            <a:ext cx="10515600" cy="5032375"/>
-          </a:xfrm>
-        </p:spPr>
-        <p:txBody>
-          <a:bodyPr>
-            <a:normAutofit/>
-          </a:bodyPr>
-          <a:lstStyle/>
-          <a:p>
-            <a:pPr marL="0" indent="0">
-              <a:buNone/>
-            </a:pPr>
-            <a:r>
-              <a:rPr lang="en-US" dirty="0"/>
-              <a:t>Out of class, supporting papers, for those of you who are curious.</a:t>
-            </a:r>
-          </a:p>
-          <a:p>
-            <a:r>
-              <a:rPr lang="en-GB" dirty="0"/>
-              <a:t>[Hochreiter1997] S. </a:t>
-            </a:r>
-            <a:r>
-              <a:rPr lang="en-GB" b="1" dirty="0" err="1">
-                <a:solidFill>
-                  <a:schemeClr val="accent2">
-                    <a:lumMod val="50000"/>
-                  </a:schemeClr>
-                </a:solidFill>
-              </a:rPr>
-              <a:t>Hochreiter</a:t>
-            </a:r>
-            <a:r>
-              <a:rPr lang="en-GB" dirty="0"/>
-              <a:t> and J. </a:t>
-            </a:r>
-            <a:r>
-              <a:rPr lang="en-GB" b="1" dirty="0" err="1">
-                <a:solidFill>
-                  <a:schemeClr val="accent2">
-                    <a:lumMod val="50000"/>
-                  </a:schemeClr>
-                </a:solidFill>
-              </a:rPr>
-              <a:t>Schmidhuber</a:t>
-            </a:r>
-            <a:r>
-              <a:rPr lang="en-GB" dirty="0"/>
-              <a:t> “Long short-term memory”, 1997.</a:t>
-            </a:r>
-          </a:p>
-          <a:p>
-            <a:r>
-              <a:rPr lang="en-GB" dirty="0"/>
-              <a:t>[</a:t>
-            </a:r>
-            <a:r>
-              <a:rPr lang="en-SG" dirty="0"/>
-              <a:t>Gers2013</a:t>
-            </a:r>
-            <a:r>
-              <a:rPr lang="en-GB" dirty="0"/>
-              <a:t>]</a:t>
-            </a:r>
-            <a:r>
-              <a:rPr lang="en-SG" dirty="0"/>
-              <a:t> F. A. Gers, J. </a:t>
-            </a:r>
-            <a:r>
-              <a:rPr lang="en-SG" b="1" dirty="0" err="1">
-                <a:solidFill>
-                  <a:schemeClr val="accent2">
-                    <a:lumMod val="50000"/>
-                  </a:schemeClr>
-                </a:solidFill>
-              </a:rPr>
-              <a:t>Schmidhuber</a:t>
-            </a:r>
-            <a:r>
-              <a:rPr lang="en-SG" dirty="0"/>
-              <a:t>, F. </a:t>
-            </a:r>
-            <a:r>
-              <a:rPr lang="en-SG" dirty="0" err="1"/>
-              <a:t>Cummin</a:t>
-            </a:r>
-            <a:r>
-              <a:rPr lang="en-SG" dirty="0"/>
-              <a:t>, “</a:t>
-            </a:r>
-            <a:r>
-              <a:rPr lang="en-GB" dirty="0"/>
-              <a:t>Learning to forget: Continual prediction with LSTM”, 2013.</a:t>
-            </a:r>
-            <a:endParaRPr lang="en-US" dirty="0"/>
-          </a:p>
-          <a:p>
-            <a:r>
-              <a:rPr lang="en-US" dirty="0"/>
-              <a:t>[Cho2014] </a:t>
-            </a:r>
-            <a:r>
-              <a:rPr lang="en-SG" dirty="0"/>
-              <a:t>K. </a:t>
-            </a:r>
-            <a:r>
-              <a:rPr lang="en-SG" b="1" dirty="0">
-                <a:solidFill>
-                  <a:schemeClr val="accent2">
-                    <a:lumMod val="50000"/>
-                  </a:schemeClr>
-                </a:solidFill>
-              </a:rPr>
-              <a:t>Cho</a:t>
-            </a:r>
-            <a:r>
-              <a:rPr lang="en-SG" dirty="0"/>
-              <a:t>, B. van </a:t>
-            </a:r>
-            <a:r>
-              <a:rPr lang="en-SG" dirty="0" err="1"/>
-              <a:t>Merrienboer</a:t>
-            </a:r>
-            <a:r>
-              <a:rPr lang="en-SG" dirty="0"/>
-              <a:t>, C. </a:t>
-            </a:r>
-            <a:r>
-              <a:rPr lang="en-SG" dirty="0" err="1"/>
-              <a:t>Gulcehre</a:t>
-            </a:r>
-            <a:r>
-              <a:rPr lang="en-SG" dirty="0"/>
-              <a:t>, D. </a:t>
-            </a:r>
-            <a:r>
-              <a:rPr lang="en-SG" b="1" dirty="0" err="1">
-                <a:solidFill>
-                  <a:schemeClr val="accent2">
-                    <a:lumMod val="50000"/>
-                  </a:schemeClr>
-                </a:solidFill>
-              </a:rPr>
-              <a:t>Bahdanau</a:t>
-            </a:r>
-            <a:r>
-              <a:rPr lang="en-SG" dirty="0"/>
-              <a:t>, F. </a:t>
-            </a:r>
-            <a:r>
-              <a:rPr lang="en-SG" dirty="0" err="1"/>
-              <a:t>Bougares</a:t>
-            </a:r>
-            <a:r>
-              <a:rPr lang="en-SG" dirty="0"/>
-              <a:t>, H. </a:t>
-            </a:r>
-            <a:r>
-              <a:rPr lang="en-SG" dirty="0" err="1"/>
-              <a:t>Schwenk</a:t>
-            </a:r>
-            <a:r>
-              <a:rPr lang="en-SG" dirty="0"/>
-              <a:t>, and Y. </a:t>
-            </a:r>
-            <a:r>
-              <a:rPr lang="en-SG" dirty="0" err="1"/>
-              <a:t>Bengio</a:t>
-            </a:r>
-            <a:r>
-              <a:rPr lang="en-SG" dirty="0"/>
-              <a:t>, “Learning Phrase Representations using RNN Encoder-Decoder for Statistical Machine Translation”, 2014.</a:t>
-            </a:r>
-            <a:endParaRPr lang="en-US" dirty="0"/>
-          </a:p>
-          <a:p>
-            <a:endParaRPr lang="en-GB" dirty="0"/>
-          </a:p>
-        </p:txBody>
-      </p:sp>
-    </p:spTree>
-    <p:extLst>
-      <p:ext uri="{BB962C8B-B14F-4D97-AF65-F5344CB8AC3E}">
-        <p14:creationId xmlns:p14="http://schemas.microsoft.com/office/powerpoint/2010/main" val="3880949074"/>
       </p:ext>
     </p:extLst>
   </p:cSld>
@@ -18085,7 +14519,7 @@
           <p:cNvPr id="2" name="Title 1">
             <a:extLst>
               <a:ext uri="{FF2B5EF4-FFF2-40B4-BE49-F238E27FC236}">
-                <a16:creationId xmlns:a16="http://schemas.microsoft.com/office/drawing/2014/main" id="{01BA4A12-42C1-4189-603A-5E1F4771759C}"/>
+                <a16:creationId xmlns:a16="http://schemas.microsoft.com/office/drawing/2014/main" id="{11A08BA8-9DEC-4471-8590-434E8D8BB4A0}"/>
               </a:ext>
             </a:extLst>
           </p:cNvPr>
@@ -18102,10 +14536,14 @@
           <a:lstStyle/>
           <a:p>
             <a:r>
-              <a:rPr lang="en-GB" dirty="0"/>
-              <a:t>Learn more about these topics</a:t>
-            </a:r>
-            <a:endParaRPr lang="en-SG" dirty="0"/>
+              <a:rPr lang="en-US" dirty="0"/>
+              <a:t>Conclusion (</a:t>
+            </a:r>
+            <a:r>
+              <a:rPr lang="en-US"/>
+              <a:t>Week 5)</a:t>
+            </a:r>
+            <a:endParaRPr lang="en-GB" dirty="0"/>
           </a:p>
         </p:txBody>
       </p:sp>
@@ -18114,7 +14552,7 @@
           <p:cNvPr id="3" name="Content Placeholder 2">
             <a:extLst>
               <a:ext uri="{FF2B5EF4-FFF2-40B4-BE49-F238E27FC236}">
-                <a16:creationId xmlns:a16="http://schemas.microsoft.com/office/drawing/2014/main" id="{E475B357-0886-EDDA-5F55-77F580FB4D9B}"/>
+                <a16:creationId xmlns:a16="http://schemas.microsoft.com/office/drawing/2014/main" id="{47E3549C-D723-41E6-8478-270ACE043694}"/>
               </a:ext>
             </a:extLst>
           </p:cNvPr>
@@ -18122,13 +14560,13 @@
             <a:spLocks noGrp="1"/>
           </p:cNvSpPr>
           <p:nvPr>
-            <p:ph idx="1"/>
+            <p:ph sz="half" idx="1"/>
           </p:nvPr>
         </p:nvSpPr>
         <p:spPr>
           <a:xfrm>
             <a:off x="838200" y="1825624"/>
-            <a:ext cx="10515600" cy="5032375"/>
+            <a:ext cx="5257800" cy="5032375"/>
           </a:xfrm>
         </p:spPr>
         <p:txBody>
@@ -18137,205 +14575,123 @@
           </a:bodyPr>
           <a:lstStyle/>
           <a:p>
-            <a:pPr marL="0" indent="0">
-              <a:buNone/>
-            </a:pPr>
             <a:r>
               <a:rPr lang="en-US" dirty="0"/>
-              <a:t>Tracking important names (Track their works and follow them on Scholar, Twitter, or whatever works for you!)</a:t>
-            </a:r>
-          </a:p>
-          <a:p>
-            <a:r>
-              <a:rPr lang="en-SG" b="1" dirty="0" err="1"/>
-              <a:t>Kyunghyun</a:t>
-            </a:r>
-            <a:r>
-              <a:rPr lang="en-SG" b="1" dirty="0"/>
-              <a:t> </a:t>
-            </a:r>
-            <a:r>
-              <a:rPr lang="en-SG" b="1" dirty="0">
-                <a:solidFill>
-                  <a:schemeClr val="accent2">
-                    <a:lumMod val="50000"/>
-                  </a:schemeClr>
-                </a:solidFill>
-              </a:rPr>
-              <a:t>Cho</a:t>
-            </a:r>
-            <a:r>
-              <a:rPr lang="en-SG" b="1" dirty="0"/>
-              <a:t>: </a:t>
-            </a:r>
-            <a:r>
-              <a:rPr lang="en-GB" b="1" dirty="0"/>
-              <a:t>Professor</a:t>
-            </a:r>
-            <a:r>
-              <a:rPr lang="en-GB" dirty="0"/>
-              <a:t> at </a:t>
-            </a:r>
-            <a:r>
-              <a:rPr lang="en-GB" b="1" dirty="0"/>
-              <a:t>New</a:t>
-            </a:r>
-            <a:r>
-              <a:rPr lang="en-GB" dirty="0"/>
-              <a:t> </a:t>
-            </a:r>
-            <a:r>
-              <a:rPr lang="en-GB" b="1" dirty="0"/>
-              <a:t>York</a:t>
-            </a:r>
-            <a:r>
-              <a:rPr lang="en-GB" dirty="0"/>
-              <a:t> </a:t>
-            </a:r>
-            <a:r>
-              <a:rPr lang="en-GB" b="1" dirty="0"/>
-              <a:t>University</a:t>
-            </a:r>
-            <a:r>
-              <a:rPr lang="en-GB" dirty="0"/>
-              <a:t>.</a:t>
-            </a:r>
-            <a:br>
-              <a:rPr lang="en-GB" b="1" dirty="0"/>
-            </a:br>
-            <a:r>
-              <a:rPr lang="en-GB" dirty="0">
-                <a:hlinkClick r:id="rId2"/>
-              </a:rPr>
-              <a:t>https://scholar.google.co.uk/citations?user=0RAmmIAAAAAJ&amp;hl=en</a:t>
-            </a:r>
-            <a:br>
-              <a:rPr lang="en-GB" dirty="0"/>
-            </a:br>
-            <a:r>
-              <a:rPr lang="en-GB" dirty="0">
-                <a:hlinkClick r:id="rId3"/>
-              </a:rPr>
-              <a:t>https://kyunghyuncho.me/</a:t>
-            </a:r>
-            <a:endParaRPr lang="en-SG" b="1" dirty="0"/>
-          </a:p>
-          <a:p>
-            <a:r>
-              <a:rPr lang="en-SG" b="1" dirty="0" err="1"/>
-              <a:t>Dzmitry</a:t>
-            </a:r>
-            <a:r>
-              <a:rPr lang="en-SG" b="1" dirty="0"/>
-              <a:t> </a:t>
-            </a:r>
-            <a:r>
-              <a:rPr lang="en-SG" b="1" dirty="0" err="1">
-                <a:solidFill>
-                  <a:schemeClr val="accent2">
-                    <a:lumMod val="50000"/>
-                  </a:schemeClr>
-                </a:solidFill>
-              </a:rPr>
-              <a:t>Bahdanau</a:t>
-            </a:r>
-            <a:r>
-              <a:rPr lang="en-SG" b="1" dirty="0"/>
-              <a:t>: </a:t>
-            </a:r>
-            <a:r>
-              <a:rPr lang="en-GB" b="1" dirty="0"/>
-              <a:t>Research</a:t>
-            </a:r>
-            <a:r>
-              <a:rPr lang="en-GB" dirty="0"/>
-              <a:t> </a:t>
-            </a:r>
-            <a:r>
-              <a:rPr lang="en-GB" b="1" dirty="0"/>
-              <a:t>Scientist</a:t>
-            </a:r>
-            <a:r>
-              <a:rPr lang="en-GB" dirty="0"/>
-              <a:t> at </a:t>
-            </a:r>
-            <a:r>
-              <a:rPr lang="en-GB" b="1" dirty="0"/>
-              <a:t>Element</a:t>
-            </a:r>
-            <a:r>
-              <a:rPr lang="en-GB" dirty="0"/>
-              <a:t> </a:t>
-            </a:r>
-            <a:r>
-              <a:rPr lang="en-GB" b="1" dirty="0"/>
-              <a:t>AI</a:t>
-            </a:r>
-            <a:r>
-              <a:rPr lang="en-GB" dirty="0"/>
-              <a:t> and </a:t>
-            </a:r>
-            <a:r>
-              <a:rPr lang="en-GB" b="1" dirty="0"/>
-              <a:t>Adjunct</a:t>
-            </a:r>
-            <a:r>
-              <a:rPr lang="en-GB" dirty="0"/>
-              <a:t> </a:t>
-            </a:r>
-            <a:r>
-              <a:rPr lang="en-GB" b="1" dirty="0"/>
-              <a:t>Professor</a:t>
-            </a:r>
-            <a:r>
-              <a:rPr lang="en-GB" dirty="0"/>
-              <a:t> at </a:t>
-            </a:r>
-            <a:r>
-              <a:rPr lang="en-GB" b="1" dirty="0"/>
-              <a:t>McGill</a:t>
-            </a:r>
-            <a:r>
-              <a:rPr lang="en-GB" dirty="0"/>
-              <a:t> </a:t>
-            </a:r>
-            <a:r>
-              <a:rPr lang="en-GB" b="1" dirty="0"/>
-              <a:t>University</a:t>
-            </a:r>
-            <a:r>
-              <a:rPr lang="en-GB" dirty="0"/>
-              <a:t>.</a:t>
-            </a:r>
-            <a:br>
-              <a:rPr lang="en-GB" dirty="0"/>
-            </a:br>
-            <a:r>
-              <a:rPr lang="en-GB" dirty="0">
-                <a:hlinkClick r:id="rId4"/>
-              </a:rPr>
-              <a:t>https://scholar.google.de/citations?user=Nq0dVMcAAAAJ&amp;hl=en</a:t>
-            </a:r>
-            <a:br>
-              <a:rPr lang="en-GB" dirty="0"/>
-            </a:br>
-            <a:r>
-              <a:rPr lang="en-GB" dirty="0">
-                <a:hlinkClick r:id="rId5"/>
-              </a:rPr>
-              <a:t>https://rizar.github.io/</a:t>
-            </a:r>
+              <a:t>Time series datasets</a:t>
+            </a:r>
+          </a:p>
+          <a:p>
+            <a:r>
+              <a:rPr lang="en-US" dirty="0"/>
+              <a:t>Deep learning models with history</a:t>
+            </a:r>
+          </a:p>
+          <a:p>
+            <a:r>
+              <a:rPr lang="en-US" dirty="0"/>
+              <a:t>History length tradeoffs</a:t>
+            </a:r>
+          </a:p>
+          <a:p>
+            <a:r>
+              <a:rPr lang="en-US" dirty="0"/>
+              <a:t>Implementing memory in Deep Learning models</a:t>
+            </a:r>
+          </a:p>
+          <a:p>
+            <a:r>
+              <a:rPr lang="en-US" dirty="0"/>
+              <a:t>Our first vanilla Recurrent Neural Network with memory</a:t>
+            </a:r>
+          </a:p>
+          <a:p>
+            <a:r>
+              <a:rPr lang="en-US" dirty="0"/>
+              <a:t>The vanishing gradient problem in RNNs</a:t>
+            </a:r>
+          </a:p>
+          <a:p>
             <a:endParaRPr lang="en-GB" dirty="0"/>
           </a:p>
-          <a:p>
-            <a:endParaRPr lang="en-SG" dirty="0"/>
+        </p:txBody>
+      </p:sp>
+      <p:sp>
+        <p:nvSpPr>
+          <p:cNvPr id="4" name="Content Placeholder 3">
+            <a:extLst>
+              <a:ext uri="{FF2B5EF4-FFF2-40B4-BE49-F238E27FC236}">
+                <a16:creationId xmlns:a16="http://schemas.microsoft.com/office/drawing/2014/main" id="{7E420A50-DCDA-4FEF-986F-775F53063E3A}"/>
+              </a:ext>
+            </a:extLst>
+          </p:cNvPr>
+          <p:cNvSpPr>
+            <a:spLocks noGrp="1"/>
+          </p:cNvSpPr>
+          <p:nvPr>
+            <p:ph sz="half" idx="2"/>
+          </p:nvPr>
+        </p:nvSpPr>
+        <p:spPr>
+          <a:xfrm>
+            <a:off x="6172200" y="1825624"/>
+            <a:ext cx="5181600" cy="5032375"/>
+          </a:xfrm>
+        </p:spPr>
+        <p:txBody>
+          <a:bodyPr>
+            <a:normAutofit/>
+          </a:bodyPr>
+          <a:lstStyle/>
+          <a:p>
+            <a:r>
+              <a:rPr lang="en-US" dirty="0"/>
+              <a:t>The LSTM model</a:t>
+            </a:r>
+          </a:p>
+          <a:p>
+            <a:r>
+              <a:rPr lang="en-US" dirty="0"/>
+              <a:t>The GRU model</a:t>
+            </a:r>
+            <a:endParaRPr lang="en-US" i="1" dirty="0"/>
+          </a:p>
+          <a:p>
+            <a:r>
+              <a:rPr lang="en-US" dirty="0"/>
+              <a:t>One/Many-to-one/many models</a:t>
+            </a:r>
+          </a:p>
+          <a:p>
+            <a:r>
+              <a:rPr lang="en-US" dirty="0"/>
+              <a:t>Seq2Seq models</a:t>
+            </a:r>
+          </a:p>
+          <a:p>
+            <a:r>
+              <a:rPr lang="en-US" dirty="0"/>
+              <a:t>Encoder and Decoder architectures</a:t>
+            </a:r>
+          </a:p>
+          <a:p>
+            <a:r>
+              <a:rPr lang="en-US" dirty="0"/>
+              <a:t>Autoregressive RNNs</a:t>
+            </a:r>
+          </a:p>
+          <a:p>
+            <a:r>
+              <a:rPr lang="en-US" dirty="0"/>
+              <a:t>(More on these during W8!)</a:t>
+            </a:r>
+            <a:endParaRPr lang="en-GB" dirty="0"/>
           </a:p>
         </p:txBody>
       </p:sp>
     </p:spTree>
     <p:extLst>
       <p:ext uri="{BB962C8B-B14F-4D97-AF65-F5344CB8AC3E}">
-        <p14:creationId xmlns:p14="http://schemas.microsoft.com/office/powerpoint/2010/main" val="1165688587"/>
+        <p14:creationId xmlns:p14="http://schemas.microsoft.com/office/powerpoint/2010/main" val="1036081419"/>
       </p:ext>
     </p:extLst>
   </p:cSld>
@@ -18367,7 +14723,7 @@
           <p:cNvPr id="2" name="Title 1">
             <a:extLst>
               <a:ext uri="{FF2B5EF4-FFF2-40B4-BE49-F238E27FC236}">
-                <a16:creationId xmlns:a16="http://schemas.microsoft.com/office/drawing/2014/main" id="{01BA4A12-42C1-4189-603A-5E1F4771759C}"/>
+                <a16:creationId xmlns:a16="http://schemas.microsoft.com/office/drawing/2014/main" id="{F6E33F64-ACBF-414C-8E71-06E4F9517B15}"/>
               </a:ext>
             </a:extLst>
           </p:cNvPr>
@@ -18384,10 +14740,10 @@
           <a:lstStyle/>
           <a:p>
             <a:r>
-              <a:rPr lang="en-GB" dirty="0"/>
+              <a:rPr lang="en-US" dirty="0"/>
               <a:t>Learn more about these topics</a:t>
             </a:r>
-            <a:endParaRPr lang="en-SG" dirty="0"/>
+            <a:endParaRPr lang="en-GB" dirty="0"/>
           </a:p>
         </p:txBody>
       </p:sp>
@@ -18396,7 +14752,7 @@
           <p:cNvPr id="3" name="Content Placeholder 2">
             <a:extLst>
               <a:ext uri="{FF2B5EF4-FFF2-40B4-BE49-F238E27FC236}">
-                <a16:creationId xmlns:a16="http://schemas.microsoft.com/office/drawing/2014/main" id="{E475B357-0886-EDDA-5F55-77F580FB4D9B}"/>
+                <a16:creationId xmlns:a16="http://schemas.microsoft.com/office/drawing/2014/main" id="{C71C8DD6-14D1-44DF-9843-EFEDF44E39A2}"/>
               </a:ext>
             </a:extLst>
           </p:cNvPr>
@@ -18424,13 +14780,27 @@
             </a:pPr>
             <a:r>
               <a:rPr lang="en-US" dirty="0"/>
-              <a:t>Tracking important names (Track their works and follow them on Scholar, Twitter, or whatever works for you!)</a:t>
-            </a:r>
-          </a:p>
-          <a:p>
-            <a:r>
-              <a:rPr lang="en-GB" b="1" dirty="0"/>
-              <a:t>Jürgen </a:t>
+              <a:t>Out of class, supporting papers, for those of you who are curious.</a:t>
+            </a:r>
+          </a:p>
+          <a:p>
+            <a:r>
+              <a:rPr lang="en-GB" dirty="0"/>
+              <a:t>[Hochreiter1997] S. </a:t>
+            </a:r>
+            <a:r>
+              <a:rPr lang="en-GB" b="1" dirty="0" err="1">
+                <a:solidFill>
+                  <a:schemeClr val="accent2">
+                    <a:lumMod val="50000"/>
+                  </a:schemeClr>
+                </a:solidFill>
+              </a:rPr>
+              <a:t>Hochreiter</a:t>
+            </a:r>
+            <a:r>
+              <a:rPr lang="en-GB" dirty="0"/>
+              <a:t> and J. </a:t>
             </a:r>
             <a:r>
               <a:rPr lang="en-GB" b="1" dirty="0" err="1">
@@ -18443,124 +14813,143 @@
               <a:t>Schmidhuber</a:t>
             </a:r>
             <a:r>
-              <a:rPr lang="en-GB" b="1" dirty="0"/>
-              <a:t>: Professor</a:t>
-            </a:r>
-            <a:r>
-              <a:rPr lang="en-GB" dirty="0"/>
-              <a:t> at the </a:t>
-            </a:r>
-            <a:r>
-              <a:rPr lang="en-GB" b="1" dirty="0"/>
-              <a:t>University of Lugano in Switzerland</a:t>
-            </a:r>
-            <a:r>
-              <a:rPr lang="en-GB" dirty="0"/>
-              <a:t>.</a:t>
-            </a:r>
-            <a:br>
-              <a:rPr lang="en-GB" dirty="0"/>
-            </a:br>
-            <a:r>
-              <a:rPr lang="en-GB" dirty="0">
-                <a:hlinkClick r:id="rId2"/>
-              </a:rPr>
-              <a:t>https://scholar.google.com/citations?user=gLnCTgIAAAAJ&amp;hl=fr</a:t>
-            </a:r>
-            <a:r>
-              <a:rPr lang="en-GB" dirty="0"/>
-              <a:t> </a:t>
-            </a:r>
-            <a:r>
-              <a:rPr lang="en-GB" dirty="0">
-                <a:hlinkClick r:id="rId3"/>
-              </a:rPr>
-              <a:t>https://people.idsia.ch/~juergen/</a:t>
-            </a:r>
-            <a:r>
-              <a:rPr lang="en-GB" dirty="0"/>
-              <a:t> </a:t>
-            </a:r>
-          </a:p>
-          <a:p>
-            <a:r>
-              <a:rPr lang="en-GB" b="1" dirty="0"/>
-              <a:t>Sepp</a:t>
-            </a:r>
-            <a:r>
-              <a:rPr lang="en-GB" dirty="0"/>
-              <a:t> </a:t>
-            </a:r>
-            <a:r>
-              <a:rPr lang="en-GB" b="1" dirty="0" err="1">
+              <a:rPr lang="en-GB" dirty="0"/>
+              <a:t> “Long short-term memory”, 1997.</a:t>
+            </a:r>
+          </a:p>
+          <a:p>
+            <a:r>
+              <a:rPr lang="en-GB" dirty="0"/>
+              <a:t>[</a:t>
+            </a:r>
+            <a:r>
+              <a:rPr lang="en-SG" dirty="0"/>
+              <a:t>Gers2013</a:t>
+            </a:r>
+            <a:r>
+              <a:rPr lang="en-GB" dirty="0"/>
+              <a:t>]</a:t>
+            </a:r>
+            <a:r>
+              <a:rPr lang="en-SG" dirty="0"/>
+              <a:t> F. A. Gers, J. </a:t>
+            </a:r>
+            <a:r>
+              <a:rPr lang="en-SG" b="1" dirty="0" err="1">
                 <a:solidFill>
                   <a:schemeClr val="accent2">
                     <a:lumMod val="50000"/>
                   </a:schemeClr>
                 </a:solidFill>
               </a:rPr>
-              <a:t>Hochreiter</a:t>
-            </a:r>
-            <a:r>
-              <a:rPr lang="en-GB" b="1" dirty="0"/>
-              <a:t>:</a:t>
-            </a:r>
-            <a:r>
-              <a:rPr lang="en-GB" dirty="0"/>
-              <a:t> </a:t>
-            </a:r>
-            <a:r>
-              <a:rPr lang="en-GB" b="1" dirty="0"/>
-              <a:t>Professor</a:t>
-            </a:r>
-            <a:r>
-              <a:rPr lang="en-GB" dirty="0"/>
-              <a:t> at the </a:t>
-            </a:r>
-            <a:r>
-              <a:rPr lang="en-GB" b="1" dirty="0"/>
-              <a:t>Johannes Kepler University of Linz in Austria</a:t>
-            </a:r>
-            <a:r>
-              <a:rPr lang="en-GB" dirty="0"/>
-              <a:t>.</a:t>
-            </a:r>
-            <a:br>
-              <a:rPr lang="en-GB" dirty="0"/>
-            </a:br>
-            <a:r>
-              <a:rPr lang="en-GB" dirty="0">
-                <a:hlinkClick r:id="rId4"/>
+              <a:t>Schmidhuber</a:t>
+            </a:r>
+            <a:r>
+              <a:rPr lang="en-SG" dirty="0"/>
+              <a:t>, F. </a:t>
+            </a:r>
+            <a:r>
+              <a:rPr lang="en-SG" dirty="0" err="1"/>
+              <a:t>Cummin</a:t>
+            </a:r>
+            <a:r>
+              <a:rPr lang="en-SG" dirty="0"/>
+              <a:t>, “</a:t>
+            </a:r>
+            <a:r>
+              <a:rPr lang="en-GB" dirty="0"/>
+              <a:t>Learning to forget: Continual prediction with LSTM”, 2013.</a:t>
+            </a:r>
+            <a:endParaRPr lang="en-US" dirty="0"/>
+          </a:p>
+          <a:p>
+            <a:r>
+              <a:rPr lang="en-US" dirty="0"/>
+              <a:t>[Cho2014] </a:t>
+            </a:r>
+            <a:r>
+              <a:rPr lang="en-SG" dirty="0"/>
+              <a:t>K. </a:t>
+            </a:r>
+            <a:r>
+              <a:rPr lang="en-SG" b="1" dirty="0">
+                <a:solidFill>
+                  <a:schemeClr val="accent2">
+                    <a:lumMod val="50000"/>
+                  </a:schemeClr>
+                </a:solidFill>
               </a:rPr>
-              <a:t>https://scholar.google.at/citations?user=tvUH3WMAAAAJ&amp;hl=en</a:t>
-            </a:r>
-            <a:r>
-              <a:rPr lang="en-GB" dirty="0"/>
-              <a:t> </a:t>
-            </a:r>
-            <a:r>
-              <a:rPr lang="en-GB" dirty="0">
-                <a:hlinkClick r:id="rId5"/>
+              <a:t>Cho</a:t>
+            </a:r>
+            <a:r>
+              <a:rPr lang="en-SG" dirty="0"/>
+              <a:t>, B. van </a:t>
+            </a:r>
+            <a:r>
+              <a:rPr lang="en-SG" dirty="0" err="1"/>
+              <a:t>Merrienboer</a:t>
+            </a:r>
+            <a:r>
+              <a:rPr lang="en-SG" dirty="0"/>
+              <a:t>, C. </a:t>
+            </a:r>
+            <a:r>
+              <a:rPr lang="en-SG" dirty="0" err="1"/>
+              <a:t>Gulcehre</a:t>
+            </a:r>
+            <a:r>
+              <a:rPr lang="en-SG" dirty="0"/>
+              <a:t>, D. </a:t>
+            </a:r>
+            <a:r>
+              <a:rPr lang="en-SG" b="1" dirty="0" err="1">
+                <a:solidFill>
+                  <a:schemeClr val="accent2">
+                    <a:lumMod val="50000"/>
+                  </a:schemeClr>
+                </a:solidFill>
               </a:rPr>
-              <a:t>https://www.iarai.ac.at/people/sepphochreiter/</a:t>
-            </a:r>
-            <a:r>
-              <a:rPr lang="en-GB" dirty="0"/>
-              <a:t> </a:t>
-            </a:r>
+              <a:t>Bahdanau</a:t>
+            </a:r>
+            <a:r>
+              <a:rPr lang="en-SG" dirty="0"/>
+              <a:t>, F. </a:t>
+            </a:r>
+            <a:r>
+              <a:rPr lang="en-SG" dirty="0" err="1"/>
+              <a:t>Bougares</a:t>
+            </a:r>
+            <a:r>
+              <a:rPr lang="en-SG" dirty="0"/>
+              <a:t>, H. </a:t>
+            </a:r>
+            <a:r>
+              <a:rPr lang="en-SG" dirty="0" err="1"/>
+              <a:t>Schwenk</a:t>
+            </a:r>
+            <a:r>
+              <a:rPr lang="en-SG" dirty="0"/>
+              <a:t>, and Y. </a:t>
+            </a:r>
+            <a:r>
+              <a:rPr lang="en-SG" dirty="0" err="1"/>
+              <a:t>Bengio</a:t>
+            </a:r>
+            <a:r>
+              <a:rPr lang="en-SG" dirty="0"/>
+              <a:t>, “Learning Phrase Representations using RNN Encoder-Decoder for Statistical Machine Translation”, 2014.</a:t>
+            </a:r>
+            <a:endParaRPr lang="en-US" dirty="0"/>
           </a:p>
           <a:p>
             <a:endParaRPr lang="en-GB" dirty="0"/>
-          </a:p>
-          <a:p>
-            <a:endParaRPr lang="en-SG" dirty="0"/>
           </a:p>
         </p:txBody>
       </p:sp>
     </p:spTree>
     <p:extLst>
       <p:ext uri="{BB962C8B-B14F-4D97-AF65-F5344CB8AC3E}">
-        <p14:creationId xmlns:p14="http://schemas.microsoft.com/office/powerpoint/2010/main" val="1028237814"/>
+        <p14:creationId xmlns:p14="http://schemas.microsoft.com/office/powerpoint/2010/main" val="3880949074"/>
       </p:ext>
     </p:extLst>
   </p:cSld>
@@ -19004,6 +15393,513 @@
 </file>
 
 <file path=ppt/slides/slide50.xml><?xml version="1.0" encoding="utf-8"?>
+<p:sld xmlns:a="http://schemas.openxmlformats.org/drawingml/2006/main" xmlns:r="http://schemas.openxmlformats.org/officeDocument/2006/relationships" xmlns:p="http://schemas.openxmlformats.org/presentationml/2006/main">
+  <p:cSld>
+    <p:spTree>
+      <p:nvGrpSpPr>
+        <p:cNvPr id="1" name=""/>
+        <p:cNvGrpSpPr/>
+        <p:nvPr/>
+      </p:nvGrpSpPr>
+      <p:grpSpPr>
+        <a:xfrm>
+          <a:off x="0" y="0"/>
+          <a:ext cx="0" cy="0"/>
+          <a:chOff x="0" y="0"/>
+          <a:chExt cx="0" cy="0"/>
+        </a:xfrm>
+      </p:grpSpPr>
+      <p:sp>
+        <p:nvSpPr>
+          <p:cNvPr id="2" name="Title 1">
+            <a:extLst>
+              <a:ext uri="{FF2B5EF4-FFF2-40B4-BE49-F238E27FC236}">
+                <a16:creationId xmlns:a16="http://schemas.microsoft.com/office/drawing/2014/main" id="{01BA4A12-42C1-4189-603A-5E1F4771759C}"/>
+              </a:ext>
+            </a:extLst>
+          </p:cNvPr>
+          <p:cNvSpPr>
+            <a:spLocks noGrp="1"/>
+          </p:cNvSpPr>
+          <p:nvPr>
+            <p:ph type="title"/>
+          </p:nvPr>
+        </p:nvSpPr>
+        <p:spPr/>
+        <p:txBody>
+          <a:bodyPr/>
+          <a:lstStyle/>
+          <a:p>
+            <a:r>
+              <a:rPr lang="en-GB" dirty="0"/>
+              <a:t>Learn more about these topics</a:t>
+            </a:r>
+            <a:endParaRPr lang="en-SG" dirty="0"/>
+          </a:p>
+        </p:txBody>
+      </p:sp>
+      <p:sp>
+        <p:nvSpPr>
+          <p:cNvPr id="3" name="Content Placeholder 2">
+            <a:extLst>
+              <a:ext uri="{FF2B5EF4-FFF2-40B4-BE49-F238E27FC236}">
+                <a16:creationId xmlns:a16="http://schemas.microsoft.com/office/drawing/2014/main" id="{E475B357-0886-EDDA-5F55-77F580FB4D9B}"/>
+              </a:ext>
+            </a:extLst>
+          </p:cNvPr>
+          <p:cNvSpPr>
+            <a:spLocks noGrp="1"/>
+          </p:cNvSpPr>
+          <p:nvPr>
+            <p:ph idx="1"/>
+          </p:nvPr>
+        </p:nvSpPr>
+        <p:spPr>
+          <a:xfrm>
+            <a:off x="838200" y="1825624"/>
+            <a:ext cx="10515600" cy="5032375"/>
+          </a:xfrm>
+        </p:spPr>
+        <p:txBody>
+          <a:bodyPr>
+            <a:normAutofit/>
+          </a:bodyPr>
+          <a:lstStyle/>
+          <a:p>
+            <a:pPr marL="0" indent="0">
+              <a:buNone/>
+            </a:pPr>
+            <a:r>
+              <a:rPr lang="en-US" dirty="0"/>
+              <a:t>Tracking important names (Track their works and follow them on Scholar, Twitter, or whatever works for you!)</a:t>
+            </a:r>
+          </a:p>
+          <a:p>
+            <a:r>
+              <a:rPr lang="en-SG" b="1" dirty="0" err="1"/>
+              <a:t>Kyunghyun</a:t>
+            </a:r>
+            <a:r>
+              <a:rPr lang="en-SG" b="1" dirty="0"/>
+              <a:t> </a:t>
+            </a:r>
+            <a:r>
+              <a:rPr lang="en-SG" b="1" dirty="0">
+                <a:solidFill>
+                  <a:schemeClr val="accent2">
+                    <a:lumMod val="50000"/>
+                  </a:schemeClr>
+                </a:solidFill>
+              </a:rPr>
+              <a:t>Cho</a:t>
+            </a:r>
+            <a:r>
+              <a:rPr lang="en-SG" b="1" dirty="0"/>
+              <a:t>: </a:t>
+            </a:r>
+            <a:r>
+              <a:rPr lang="en-GB" b="1" dirty="0"/>
+              <a:t>Professor</a:t>
+            </a:r>
+            <a:r>
+              <a:rPr lang="en-GB" dirty="0"/>
+              <a:t> at </a:t>
+            </a:r>
+            <a:r>
+              <a:rPr lang="en-GB" b="1" dirty="0"/>
+              <a:t>New</a:t>
+            </a:r>
+            <a:r>
+              <a:rPr lang="en-GB" dirty="0"/>
+              <a:t> </a:t>
+            </a:r>
+            <a:r>
+              <a:rPr lang="en-GB" b="1" dirty="0"/>
+              <a:t>York</a:t>
+            </a:r>
+            <a:r>
+              <a:rPr lang="en-GB" dirty="0"/>
+              <a:t> </a:t>
+            </a:r>
+            <a:r>
+              <a:rPr lang="en-GB" b="1" dirty="0"/>
+              <a:t>University</a:t>
+            </a:r>
+            <a:r>
+              <a:rPr lang="en-GB" dirty="0"/>
+              <a:t>.</a:t>
+            </a:r>
+            <a:br>
+              <a:rPr lang="en-GB" b="1" dirty="0"/>
+            </a:br>
+            <a:r>
+              <a:rPr lang="en-GB" dirty="0">
+                <a:hlinkClick r:id="rId2"/>
+              </a:rPr>
+              <a:t>https://scholar.google.co.uk/citations?user=0RAmmIAAAAAJ&amp;hl=en</a:t>
+            </a:r>
+            <a:br>
+              <a:rPr lang="en-GB" dirty="0"/>
+            </a:br>
+            <a:r>
+              <a:rPr lang="en-GB" dirty="0">
+                <a:hlinkClick r:id="rId3"/>
+              </a:rPr>
+              <a:t>https://kyunghyuncho.me/</a:t>
+            </a:r>
+            <a:endParaRPr lang="en-SG" b="1" dirty="0"/>
+          </a:p>
+          <a:p>
+            <a:r>
+              <a:rPr lang="en-SG" b="1" dirty="0" err="1"/>
+              <a:t>Dzmitry</a:t>
+            </a:r>
+            <a:r>
+              <a:rPr lang="en-SG" b="1" dirty="0"/>
+              <a:t> </a:t>
+            </a:r>
+            <a:r>
+              <a:rPr lang="en-SG" b="1" dirty="0" err="1">
+                <a:solidFill>
+                  <a:schemeClr val="accent2">
+                    <a:lumMod val="50000"/>
+                  </a:schemeClr>
+                </a:solidFill>
+              </a:rPr>
+              <a:t>Bahdanau</a:t>
+            </a:r>
+            <a:r>
+              <a:rPr lang="en-SG" b="1" dirty="0"/>
+              <a:t>: </a:t>
+            </a:r>
+            <a:r>
+              <a:rPr lang="en-GB" b="1" dirty="0"/>
+              <a:t>Research</a:t>
+            </a:r>
+            <a:r>
+              <a:rPr lang="en-GB" dirty="0"/>
+              <a:t> </a:t>
+            </a:r>
+            <a:r>
+              <a:rPr lang="en-GB" b="1" dirty="0"/>
+              <a:t>Scientist</a:t>
+            </a:r>
+            <a:r>
+              <a:rPr lang="en-GB" dirty="0"/>
+              <a:t> at </a:t>
+            </a:r>
+            <a:r>
+              <a:rPr lang="en-GB" b="1" dirty="0"/>
+              <a:t>Element</a:t>
+            </a:r>
+            <a:r>
+              <a:rPr lang="en-GB" dirty="0"/>
+              <a:t> </a:t>
+            </a:r>
+            <a:r>
+              <a:rPr lang="en-GB" b="1" dirty="0"/>
+              <a:t>AI</a:t>
+            </a:r>
+            <a:r>
+              <a:rPr lang="en-GB" dirty="0"/>
+              <a:t> and </a:t>
+            </a:r>
+            <a:r>
+              <a:rPr lang="en-GB" b="1" dirty="0"/>
+              <a:t>Adjunct</a:t>
+            </a:r>
+            <a:r>
+              <a:rPr lang="en-GB" dirty="0"/>
+              <a:t> </a:t>
+            </a:r>
+            <a:r>
+              <a:rPr lang="en-GB" b="1" dirty="0"/>
+              <a:t>Professor</a:t>
+            </a:r>
+            <a:r>
+              <a:rPr lang="en-GB" dirty="0"/>
+              <a:t> at </a:t>
+            </a:r>
+            <a:r>
+              <a:rPr lang="en-GB" b="1" dirty="0"/>
+              <a:t>McGill</a:t>
+            </a:r>
+            <a:r>
+              <a:rPr lang="en-GB" dirty="0"/>
+              <a:t> </a:t>
+            </a:r>
+            <a:r>
+              <a:rPr lang="en-GB" b="1" dirty="0"/>
+              <a:t>University</a:t>
+            </a:r>
+            <a:r>
+              <a:rPr lang="en-GB" dirty="0"/>
+              <a:t>.</a:t>
+            </a:r>
+            <a:br>
+              <a:rPr lang="en-GB" dirty="0"/>
+            </a:br>
+            <a:r>
+              <a:rPr lang="en-GB" dirty="0">
+                <a:hlinkClick r:id="rId4"/>
+              </a:rPr>
+              <a:t>https://scholar.google.de/citations?user=Nq0dVMcAAAAJ&amp;hl=en</a:t>
+            </a:r>
+            <a:br>
+              <a:rPr lang="en-GB" dirty="0"/>
+            </a:br>
+            <a:r>
+              <a:rPr lang="en-GB" dirty="0">
+                <a:hlinkClick r:id="rId5"/>
+              </a:rPr>
+              <a:t>https://rizar.github.io/</a:t>
+            </a:r>
+            <a:endParaRPr lang="en-GB" dirty="0"/>
+          </a:p>
+          <a:p>
+            <a:endParaRPr lang="en-SG" dirty="0"/>
+          </a:p>
+        </p:txBody>
+      </p:sp>
+    </p:spTree>
+    <p:extLst>
+      <p:ext uri="{BB962C8B-B14F-4D97-AF65-F5344CB8AC3E}">
+        <p14:creationId xmlns:p14="http://schemas.microsoft.com/office/powerpoint/2010/main" val="1165688587"/>
+      </p:ext>
+    </p:extLst>
+  </p:cSld>
+  <p:clrMapOvr>
+    <a:masterClrMapping/>
+  </p:clrMapOvr>
+</p:sld>
+</file>
+
+<file path=ppt/slides/slide51.xml><?xml version="1.0" encoding="utf-8"?>
+<p:sld xmlns:a="http://schemas.openxmlformats.org/drawingml/2006/main" xmlns:r="http://schemas.openxmlformats.org/officeDocument/2006/relationships" xmlns:p="http://schemas.openxmlformats.org/presentationml/2006/main">
+  <p:cSld>
+    <p:spTree>
+      <p:nvGrpSpPr>
+        <p:cNvPr id="1" name=""/>
+        <p:cNvGrpSpPr/>
+        <p:nvPr/>
+      </p:nvGrpSpPr>
+      <p:grpSpPr>
+        <a:xfrm>
+          <a:off x="0" y="0"/>
+          <a:ext cx="0" cy="0"/>
+          <a:chOff x="0" y="0"/>
+          <a:chExt cx="0" cy="0"/>
+        </a:xfrm>
+      </p:grpSpPr>
+      <p:sp>
+        <p:nvSpPr>
+          <p:cNvPr id="2" name="Title 1">
+            <a:extLst>
+              <a:ext uri="{FF2B5EF4-FFF2-40B4-BE49-F238E27FC236}">
+                <a16:creationId xmlns:a16="http://schemas.microsoft.com/office/drawing/2014/main" id="{01BA4A12-42C1-4189-603A-5E1F4771759C}"/>
+              </a:ext>
+            </a:extLst>
+          </p:cNvPr>
+          <p:cNvSpPr>
+            <a:spLocks noGrp="1"/>
+          </p:cNvSpPr>
+          <p:nvPr>
+            <p:ph type="title"/>
+          </p:nvPr>
+        </p:nvSpPr>
+        <p:spPr/>
+        <p:txBody>
+          <a:bodyPr/>
+          <a:lstStyle/>
+          <a:p>
+            <a:r>
+              <a:rPr lang="en-GB" dirty="0"/>
+              <a:t>Learn more about these topics</a:t>
+            </a:r>
+            <a:endParaRPr lang="en-SG" dirty="0"/>
+          </a:p>
+        </p:txBody>
+      </p:sp>
+      <p:sp>
+        <p:nvSpPr>
+          <p:cNvPr id="3" name="Content Placeholder 2">
+            <a:extLst>
+              <a:ext uri="{FF2B5EF4-FFF2-40B4-BE49-F238E27FC236}">
+                <a16:creationId xmlns:a16="http://schemas.microsoft.com/office/drawing/2014/main" id="{E475B357-0886-EDDA-5F55-77F580FB4D9B}"/>
+              </a:ext>
+            </a:extLst>
+          </p:cNvPr>
+          <p:cNvSpPr>
+            <a:spLocks noGrp="1"/>
+          </p:cNvSpPr>
+          <p:nvPr>
+            <p:ph idx="1"/>
+          </p:nvPr>
+        </p:nvSpPr>
+        <p:spPr>
+          <a:xfrm>
+            <a:off x="838200" y="1825624"/>
+            <a:ext cx="10515600" cy="5032375"/>
+          </a:xfrm>
+        </p:spPr>
+        <p:txBody>
+          <a:bodyPr>
+            <a:normAutofit/>
+          </a:bodyPr>
+          <a:lstStyle/>
+          <a:p>
+            <a:pPr marL="0" indent="0">
+              <a:buNone/>
+            </a:pPr>
+            <a:r>
+              <a:rPr lang="en-US" dirty="0"/>
+              <a:t>Tracking important names (Track their works and follow them on Scholar, Twitter, or whatever works for you!)</a:t>
+            </a:r>
+          </a:p>
+          <a:p>
+            <a:r>
+              <a:rPr lang="en-GB" b="1" dirty="0"/>
+              <a:t>Jürgen </a:t>
+            </a:r>
+            <a:r>
+              <a:rPr lang="en-GB" b="1" dirty="0" err="1">
+                <a:solidFill>
+                  <a:schemeClr val="accent2">
+                    <a:lumMod val="50000"/>
+                  </a:schemeClr>
+                </a:solidFill>
+              </a:rPr>
+              <a:t>Schmidhuber</a:t>
+            </a:r>
+            <a:r>
+              <a:rPr lang="en-GB" b="1" dirty="0"/>
+              <a:t>: Professor</a:t>
+            </a:r>
+            <a:r>
+              <a:rPr lang="en-GB" dirty="0"/>
+              <a:t> at the </a:t>
+            </a:r>
+            <a:r>
+              <a:rPr lang="en-GB" b="1" dirty="0"/>
+              <a:t>University of Lugano in Switzerland</a:t>
+            </a:r>
+            <a:r>
+              <a:rPr lang="en-GB" dirty="0"/>
+              <a:t>.</a:t>
+            </a:r>
+            <a:br>
+              <a:rPr lang="en-GB" dirty="0"/>
+            </a:br>
+            <a:r>
+              <a:rPr lang="en-GB" dirty="0">
+                <a:hlinkClick r:id="rId2"/>
+              </a:rPr>
+              <a:t>https://scholar.google.com/citations?user=gLnCTgIAAAAJ&amp;hl=fr</a:t>
+            </a:r>
+            <a:r>
+              <a:rPr lang="en-GB" dirty="0"/>
+              <a:t> </a:t>
+            </a:r>
+            <a:r>
+              <a:rPr lang="en-GB" dirty="0">
+                <a:hlinkClick r:id="rId3"/>
+              </a:rPr>
+              <a:t>https://people.idsia.ch/~juergen/</a:t>
+            </a:r>
+            <a:r>
+              <a:rPr lang="en-GB" dirty="0"/>
+              <a:t> </a:t>
+            </a:r>
+          </a:p>
+          <a:p>
+            <a:r>
+              <a:rPr lang="en-GB" b="1" dirty="0"/>
+              <a:t>Sepp</a:t>
+            </a:r>
+            <a:r>
+              <a:rPr lang="en-GB" dirty="0"/>
+              <a:t> </a:t>
+            </a:r>
+            <a:r>
+              <a:rPr lang="en-GB" b="1" dirty="0" err="1">
+                <a:solidFill>
+                  <a:schemeClr val="accent2">
+                    <a:lumMod val="50000"/>
+                  </a:schemeClr>
+                </a:solidFill>
+              </a:rPr>
+              <a:t>Hochreiter</a:t>
+            </a:r>
+            <a:r>
+              <a:rPr lang="en-GB" b="1" dirty="0"/>
+              <a:t>:</a:t>
+            </a:r>
+            <a:r>
+              <a:rPr lang="en-GB" dirty="0"/>
+              <a:t> </a:t>
+            </a:r>
+            <a:r>
+              <a:rPr lang="en-GB" b="1" dirty="0"/>
+              <a:t>Professor</a:t>
+            </a:r>
+            <a:r>
+              <a:rPr lang="en-GB" dirty="0"/>
+              <a:t> at the </a:t>
+            </a:r>
+            <a:r>
+              <a:rPr lang="en-GB" b="1" dirty="0"/>
+              <a:t>Johannes Kepler University of Linz in Austria</a:t>
+            </a:r>
+            <a:r>
+              <a:rPr lang="en-GB" dirty="0"/>
+              <a:t>.</a:t>
+            </a:r>
+            <a:br>
+              <a:rPr lang="en-GB" dirty="0"/>
+            </a:br>
+            <a:r>
+              <a:rPr lang="en-GB" dirty="0">
+                <a:hlinkClick r:id="rId4"/>
+              </a:rPr>
+              <a:t>https://scholar.google.at/citations?user=tvUH3WMAAAAJ&amp;hl=en</a:t>
+            </a:r>
+            <a:r>
+              <a:rPr lang="en-GB" dirty="0"/>
+              <a:t> </a:t>
+            </a:r>
+            <a:r>
+              <a:rPr lang="en-GB" dirty="0">
+                <a:hlinkClick r:id="rId5"/>
+              </a:rPr>
+              <a:t>https://www.iarai.ac.at/people/sepphochreiter/</a:t>
+            </a:r>
+            <a:r>
+              <a:rPr lang="en-GB" dirty="0"/>
+              <a:t> </a:t>
+            </a:r>
+          </a:p>
+          <a:p>
+            <a:endParaRPr lang="en-GB" dirty="0"/>
+          </a:p>
+          <a:p>
+            <a:endParaRPr lang="en-SG" dirty="0"/>
+          </a:p>
+        </p:txBody>
+      </p:sp>
+    </p:spTree>
+    <p:extLst>
+      <p:ext uri="{BB962C8B-B14F-4D97-AF65-F5344CB8AC3E}">
+        <p14:creationId xmlns:p14="http://schemas.microsoft.com/office/powerpoint/2010/main" val="1028237814"/>
+      </p:ext>
+    </p:extLst>
+  </p:cSld>
+  <p:clrMapOvr>
+    <a:masterClrMapping/>
+  </p:clrMapOvr>
+</p:sld>
+</file>
+
+<file path=ppt/slides/slide52.xml><?xml version="1.0" encoding="utf-8"?>
 <p:sld xmlns:a="http://schemas.openxmlformats.org/drawingml/2006/main" xmlns:r="http://schemas.openxmlformats.org/officeDocument/2006/relationships" xmlns:p="http://schemas.openxmlformats.org/presentationml/2006/main">
   <p:cSld>
     <p:spTree>
